--- a/ASLIHANERARSLAN_23040101020_MUSTERISIKAYETLERISINIFLANDIRMA.pptx
+++ b/ASLIHANERARSLAN_23040101020_MUSTERISIKAYETLERISINIFLANDIRMA.pptx
@@ -5,10 +5,10 @@
     <p:sldMasterId id="2147483648" r:id="rId4"/>
   </p:sldMasterIdLst>
   <p:notesMasterIdLst>
-    <p:notesMasterId r:id="rId14"/>
+    <p:notesMasterId r:id="rId15"/>
   </p:notesMasterIdLst>
   <p:handoutMasterIdLst>
-    <p:handoutMasterId r:id="rId15"/>
+    <p:handoutMasterId r:id="rId16"/>
   </p:handoutMasterIdLst>
   <p:sldIdLst>
     <p:sldId id="256" r:id="rId5"/>
@@ -19,7 +19,8 @@
     <p:sldId id="281" r:id="rId10"/>
     <p:sldId id="282" r:id="rId11"/>
     <p:sldId id="283" r:id="rId12"/>
-    <p:sldId id="285" r:id="rId13"/>
+    <p:sldId id="286" r:id="rId13"/>
+    <p:sldId id="285" r:id="rId14"/>
   </p:sldIdLst>
   <p:sldSz cx="12192000" cy="6858000"/>
   <p:notesSz cx="6858000" cy="9144000"/>
@@ -213,7 +214,7 @@
             <a:pPr rtl="0"/>
             <a:fld id="{3AD0F65C-58C1-4A0C-9A70-9D6397237E0B}" type="datetime1">
               <a:rPr lang="tr-TR" smtClean="0"/>
-              <a:t>14.04.2026</a:t>
+              <a:t>22.06.2026</a:t>
             </a:fld>
             <a:endParaRPr lang="tr-TR" dirty="0"/>
           </a:p>
@@ -383,7 +384,7 @@
             <a:pPr rtl="0"/>
             <a:fld id="{45A1C90E-4B38-48D9-9ADB-1EEED4C580D5}" type="datetime1">
               <a:rPr lang="tr-TR" noProof="0" smtClean="0"/>
-              <a:t>14.04.2026</a:t>
+              <a:t>22.06.2026</a:t>
             </a:fld>
             <a:endParaRPr lang="tr-TR" noProof="0" dirty="0"/>
           </a:p>
@@ -882,6 +883,13 @@
             <a:schemeClr val="lt1"/>
           </a:fontRef>
         </p:style>
+        <p:txBody>
+          <a:bodyPr/>
+          <a:lstStyle/>
+          <a:p>
+            <a:endParaRPr lang="en-US"/>
+          </a:p>
+        </p:txBody>
       </p:sp>
       <p:sp>
         <p:nvSpPr>
@@ -9483,6 +9491,13 @@
             <a:schemeClr val="lt1"/>
           </a:fontRef>
         </p:style>
+        <p:txBody>
+          <a:bodyPr/>
+          <a:lstStyle/>
+          <a:p>
+            <a:endParaRPr lang="en-US"/>
+          </a:p>
+        </p:txBody>
       </p:sp>
       <p:sp>
         <p:nvSpPr>
@@ -9512,7 +9527,7 @@
           <a:p>
             <a:pPr rtl="0"/>
             <a:r>
-              <a:rPr lang="tr-TR" noProof="0" smtClean="0"/>
+              <a:rPr lang="tr-TR" noProof="0"/>
               <a:t>Asıl başlık stili için tıklatın</a:t>
             </a:r>
             <a:endParaRPr lang="tr-TR" noProof="0" dirty="0"/>
@@ -9593,7 +9608,7 @@
           <a:p>
             <a:pPr rtl="0"/>
             <a:r>
-              <a:rPr lang="tr-TR" noProof="0" smtClean="0"/>
+              <a:rPr lang="tr-TR" noProof="0"/>
               <a:t>Asıl alt başlık stilini düzenlemek için tıklayın</a:t>
             </a:r>
             <a:endParaRPr lang="tr-TR" noProof="0" dirty="0"/>
@@ -9622,7 +9637,7 @@
             <a:pPr rtl="0"/>
             <a:fld id="{98DA42E9-8AC5-494B-9B81-48B259A718E2}" type="datetime1">
               <a:rPr lang="tr-TR" noProof="0" smtClean="0"/>
-              <a:t>14.04.2026</a:t>
+              <a:t>22.06.2026</a:t>
             </a:fld>
             <a:endParaRPr lang="tr-TR" noProof="0" dirty="0"/>
           </a:p>
@@ -9751,7 +9766,7 @@
           <a:p>
             <a:pPr rtl="0"/>
             <a:r>
-              <a:rPr lang="tr-TR" noProof="0" smtClean="0"/>
+              <a:rPr lang="tr-TR" noProof="0"/>
               <a:t>Asıl başlık stili için tıklatın</a:t>
             </a:r>
             <a:endParaRPr lang="tr-TR" noProof="0" dirty="0"/>
@@ -9775,35 +9790,35 @@
           <a:p>
             <a:pPr lvl="0" rtl="0"/>
             <a:r>
-              <a:rPr lang="tr-TR" noProof="0" smtClean="0"/>
+              <a:rPr lang="tr-TR" noProof="0"/>
               <a:t>Asıl metin stillerini düzenle</a:t>
             </a:r>
           </a:p>
           <a:p>
             <a:pPr lvl="1" rtl="0"/>
             <a:r>
-              <a:rPr lang="tr-TR" noProof="0" smtClean="0"/>
+              <a:rPr lang="tr-TR" noProof="0"/>
               <a:t>İkinci düzey</a:t>
             </a:r>
           </a:p>
           <a:p>
             <a:pPr lvl="2" rtl="0"/>
             <a:r>
-              <a:rPr lang="tr-TR" noProof="0" smtClean="0"/>
+              <a:rPr lang="tr-TR" noProof="0"/>
               <a:t>Üçüncü düzey</a:t>
             </a:r>
           </a:p>
           <a:p>
             <a:pPr lvl="3" rtl="0"/>
             <a:r>
-              <a:rPr lang="tr-TR" noProof="0" smtClean="0"/>
+              <a:rPr lang="tr-TR" noProof="0"/>
               <a:t>Dördüncü düzey</a:t>
             </a:r>
           </a:p>
           <a:p>
             <a:pPr lvl="4" rtl="0"/>
             <a:r>
-              <a:rPr lang="tr-TR" noProof="0" smtClean="0"/>
+              <a:rPr lang="tr-TR" noProof="0"/>
               <a:t>Beşinci düzey</a:t>
             </a:r>
             <a:endParaRPr lang="tr-TR" noProof="0" dirty="0"/>
@@ -9828,7 +9843,7 @@
             <a:pPr rtl="0"/>
             <a:fld id="{358DD160-7AC4-4988-897E-E9C29ED6ADFC}" type="datetime1">
               <a:rPr lang="tr-TR" noProof="0" smtClean="0"/>
-              <a:t>14.04.2026</a:t>
+              <a:t>22.06.2026</a:t>
             </a:fld>
             <a:endParaRPr lang="tr-TR" noProof="0" dirty="0"/>
           </a:p>
@@ -9925,7 +9940,7 @@
           <a:p>
             <a:pPr rtl="0"/>
             <a:r>
-              <a:rPr lang="tr-TR" noProof="0" smtClean="0"/>
+              <a:rPr lang="tr-TR" noProof="0"/>
               <a:t>Asıl başlık stili için tıklatın</a:t>
             </a:r>
             <a:endParaRPr lang="tr-TR" noProof="0" dirty="0"/>
@@ -9954,35 +9969,35 @@
           <a:p>
             <a:pPr lvl="0" rtl="0"/>
             <a:r>
-              <a:rPr lang="tr-TR" noProof="0" smtClean="0"/>
+              <a:rPr lang="tr-TR" noProof="0"/>
               <a:t>Asıl metin stillerini düzenle</a:t>
             </a:r>
           </a:p>
           <a:p>
             <a:pPr lvl="1" rtl="0"/>
             <a:r>
-              <a:rPr lang="tr-TR" noProof="0" smtClean="0"/>
+              <a:rPr lang="tr-TR" noProof="0"/>
               <a:t>İkinci düzey</a:t>
             </a:r>
           </a:p>
           <a:p>
             <a:pPr lvl="2" rtl="0"/>
             <a:r>
-              <a:rPr lang="tr-TR" noProof="0" smtClean="0"/>
+              <a:rPr lang="tr-TR" noProof="0"/>
               <a:t>Üçüncü düzey</a:t>
             </a:r>
           </a:p>
           <a:p>
             <a:pPr lvl="3" rtl="0"/>
             <a:r>
-              <a:rPr lang="tr-TR" noProof="0" smtClean="0"/>
+              <a:rPr lang="tr-TR" noProof="0"/>
               <a:t>Dördüncü düzey</a:t>
             </a:r>
           </a:p>
           <a:p>
             <a:pPr lvl="4" rtl="0"/>
             <a:r>
-              <a:rPr lang="tr-TR" noProof="0" smtClean="0"/>
+              <a:rPr lang="tr-TR" noProof="0"/>
               <a:t>Beşinci düzey</a:t>
             </a:r>
             <a:endParaRPr lang="tr-TR" noProof="0" dirty="0"/>
@@ -10007,7 +10022,7 @@
             <a:pPr rtl="0"/>
             <a:fld id="{2DD9ED58-0017-4E56-AA8B-8FF1ED00E3D8}" type="datetime1">
               <a:rPr lang="tr-TR" noProof="0" smtClean="0"/>
-              <a:t>14.04.2026</a:t>
+              <a:t>22.06.2026</a:t>
             </a:fld>
             <a:endParaRPr lang="tr-TR" noProof="0" dirty="0"/>
           </a:p>
@@ -10134,7 +10149,7 @@
           <a:p>
             <a:pPr rtl="0"/>
             <a:r>
-              <a:rPr lang="tr-TR" noProof="0" smtClean="0"/>
+              <a:rPr lang="tr-TR" noProof="0"/>
               <a:t>Asıl başlık stili için tıklatın</a:t>
             </a:r>
             <a:endParaRPr lang="tr-TR" noProof="0" dirty="0"/>
@@ -10158,35 +10173,35 @@
           <a:p>
             <a:pPr lvl="0" rtl="0"/>
             <a:r>
-              <a:rPr lang="tr-TR" noProof="0" smtClean="0"/>
+              <a:rPr lang="tr-TR" noProof="0"/>
               <a:t>Asıl metin stillerini düzenle</a:t>
             </a:r>
           </a:p>
           <a:p>
             <a:pPr lvl="1" rtl="0"/>
             <a:r>
-              <a:rPr lang="tr-TR" noProof="0" smtClean="0"/>
+              <a:rPr lang="tr-TR" noProof="0"/>
               <a:t>İkinci düzey</a:t>
             </a:r>
           </a:p>
           <a:p>
             <a:pPr lvl="2" rtl="0"/>
             <a:r>
-              <a:rPr lang="tr-TR" noProof="0" smtClean="0"/>
+              <a:rPr lang="tr-TR" noProof="0"/>
               <a:t>Üçüncü düzey</a:t>
             </a:r>
           </a:p>
           <a:p>
             <a:pPr lvl="3" rtl="0"/>
             <a:r>
-              <a:rPr lang="tr-TR" noProof="0" smtClean="0"/>
+              <a:rPr lang="tr-TR" noProof="0"/>
               <a:t>Dördüncü düzey</a:t>
             </a:r>
           </a:p>
           <a:p>
             <a:pPr lvl="4" rtl="0"/>
             <a:r>
-              <a:rPr lang="tr-TR" noProof="0" smtClean="0"/>
+              <a:rPr lang="tr-TR" noProof="0"/>
               <a:t>Beşinci düzey</a:t>
             </a:r>
             <a:endParaRPr lang="tr-TR" noProof="0" dirty="0"/>
@@ -10211,7 +10226,7 @@
             <a:pPr rtl="0"/>
             <a:fld id="{F8E75D30-A2CB-4E9E-B8F1-7F7F646B827E}" type="datetime1">
               <a:rPr lang="tr-TR" noProof="0" smtClean="0"/>
-              <a:t>14.04.2026</a:t>
+              <a:t>22.06.2026</a:t>
             </a:fld>
             <a:endParaRPr lang="tr-TR" noProof="0" dirty="0"/>
           </a:p>
@@ -18955,7 +18970,7 @@
           <a:p>
             <a:pPr rtl="0"/>
             <a:r>
-              <a:rPr lang="tr-TR" noProof="0" smtClean="0"/>
+              <a:rPr lang="tr-TR" noProof="0"/>
               <a:t>Asıl başlık stili için tıklatın</a:t>
             </a:r>
             <a:endParaRPr lang="tr-TR" noProof="0" dirty="0"/>
@@ -19084,7 +19099,7 @@
           <a:p>
             <a:pPr lvl="0" rtl="0"/>
             <a:r>
-              <a:rPr lang="tr-TR" noProof="0" smtClean="0"/>
+              <a:rPr lang="tr-TR" noProof="0"/>
               <a:t>Asıl metin stillerini düzenle</a:t>
             </a:r>
           </a:p>
@@ -19108,7 +19123,7 @@
             <a:pPr rtl="0"/>
             <a:fld id="{9C8503C7-0366-4312-9865-F1F5C415C5D5}" type="datetime1">
               <a:rPr lang="tr-TR" noProof="0" smtClean="0"/>
-              <a:t>14.04.2026</a:t>
+              <a:t>22.06.2026</a:t>
             </a:fld>
             <a:endParaRPr lang="tr-TR" noProof="0" dirty="0"/>
           </a:p>
@@ -19242,7 +19257,7 @@
           <a:p>
             <a:pPr rtl="0"/>
             <a:r>
-              <a:rPr lang="tr-TR" noProof="0" smtClean="0"/>
+              <a:rPr lang="tr-TR" noProof="0"/>
               <a:t>Asıl başlık stili için tıklatın</a:t>
             </a:r>
             <a:endParaRPr lang="tr-TR" noProof="0" dirty="0"/>
@@ -19271,35 +19286,35 @@
           <a:p>
             <a:pPr lvl="0" rtl="0"/>
             <a:r>
-              <a:rPr lang="tr-TR" noProof="0" smtClean="0"/>
+              <a:rPr lang="tr-TR" noProof="0"/>
               <a:t>Asıl metin stillerini düzenle</a:t>
             </a:r>
           </a:p>
           <a:p>
             <a:pPr lvl="1" rtl="0"/>
             <a:r>
-              <a:rPr lang="tr-TR" noProof="0" smtClean="0"/>
+              <a:rPr lang="tr-TR" noProof="0"/>
               <a:t>İkinci düzey</a:t>
             </a:r>
           </a:p>
           <a:p>
             <a:pPr lvl="2" rtl="0"/>
             <a:r>
-              <a:rPr lang="tr-TR" noProof="0" smtClean="0"/>
+              <a:rPr lang="tr-TR" noProof="0"/>
               <a:t>Üçüncü düzey</a:t>
             </a:r>
           </a:p>
           <a:p>
             <a:pPr lvl="3" rtl="0"/>
             <a:r>
-              <a:rPr lang="tr-TR" noProof="0" smtClean="0"/>
+              <a:rPr lang="tr-TR" noProof="0"/>
               <a:t>Dördüncü düzey</a:t>
             </a:r>
           </a:p>
           <a:p>
             <a:pPr lvl="4" rtl="0"/>
             <a:r>
-              <a:rPr lang="tr-TR" noProof="0" smtClean="0"/>
+              <a:rPr lang="tr-TR" noProof="0"/>
               <a:t>Beşinci düzey</a:t>
             </a:r>
             <a:endParaRPr lang="tr-TR" noProof="0" dirty="0"/>
@@ -19328,35 +19343,35 @@
           <a:p>
             <a:pPr lvl="0" rtl="0"/>
             <a:r>
-              <a:rPr lang="tr-TR" noProof="0" smtClean="0"/>
+              <a:rPr lang="tr-TR" noProof="0"/>
               <a:t>Asıl metin stillerini düzenle</a:t>
             </a:r>
           </a:p>
           <a:p>
             <a:pPr lvl="1" rtl="0"/>
             <a:r>
-              <a:rPr lang="tr-TR" noProof="0" smtClean="0"/>
+              <a:rPr lang="tr-TR" noProof="0"/>
               <a:t>İkinci düzey</a:t>
             </a:r>
           </a:p>
           <a:p>
             <a:pPr lvl="2" rtl="0"/>
             <a:r>
-              <a:rPr lang="tr-TR" noProof="0" smtClean="0"/>
+              <a:rPr lang="tr-TR" noProof="0"/>
               <a:t>Üçüncü düzey</a:t>
             </a:r>
           </a:p>
           <a:p>
             <a:pPr lvl="3" rtl="0"/>
             <a:r>
-              <a:rPr lang="tr-TR" noProof="0" smtClean="0"/>
+              <a:rPr lang="tr-TR" noProof="0"/>
               <a:t>Dördüncü düzey</a:t>
             </a:r>
           </a:p>
           <a:p>
             <a:pPr lvl="4" rtl="0"/>
             <a:r>
-              <a:rPr lang="tr-TR" noProof="0" smtClean="0"/>
+              <a:rPr lang="tr-TR" noProof="0"/>
               <a:t>Beşinci düzey</a:t>
             </a:r>
             <a:endParaRPr lang="tr-TR" noProof="0" dirty="0"/>
@@ -19381,7 +19396,7 @@
             <a:pPr rtl="0"/>
             <a:fld id="{994E29BD-453F-4E5B-BD83-B3707D4BB540}" type="datetime1">
               <a:rPr lang="tr-TR" noProof="0" smtClean="0"/>
-              <a:t>14.04.2026</a:t>
+              <a:t>22.06.2026</a:t>
             </a:fld>
             <a:endParaRPr lang="tr-TR" noProof="0" dirty="0"/>
           </a:p>
@@ -19473,7 +19488,7 @@
           <a:p>
             <a:pPr rtl="0"/>
             <a:r>
-              <a:rPr lang="tr-TR" noProof="0" smtClean="0"/>
+              <a:rPr lang="tr-TR" noProof="0"/>
               <a:t>Asıl başlık stili için tıklatın</a:t>
             </a:r>
             <a:endParaRPr lang="tr-TR" noProof="0" dirty="0"/>
@@ -19552,7 +19567,7 @@
           <a:p>
             <a:pPr lvl="0" rtl="0"/>
             <a:r>
-              <a:rPr lang="tr-TR" noProof="0" smtClean="0"/>
+              <a:rPr lang="tr-TR" noProof="0"/>
               <a:t>Asıl metin stillerini düzenle</a:t>
             </a:r>
           </a:p>
@@ -19580,35 +19595,35 @@
           <a:p>
             <a:pPr lvl="0" rtl="0"/>
             <a:r>
-              <a:rPr lang="tr-TR" noProof="0" smtClean="0"/>
+              <a:rPr lang="tr-TR" noProof="0"/>
               <a:t>Asıl metin stillerini düzenle</a:t>
             </a:r>
           </a:p>
           <a:p>
             <a:pPr lvl="1" rtl="0"/>
             <a:r>
-              <a:rPr lang="tr-TR" noProof="0" smtClean="0"/>
+              <a:rPr lang="tr-TR" noProof="0"/>
               <a:t>İkinci düzey</a:t>
             </a:r>
           </a:p>
           <a:p>
             <a:pPr lvl="2" rtl="0"/>
             <a:r>
-              <a:rPr lang="tr-TR" noProof="0" smtClean="0"/>
+              <a:rPr lang="tr-TR" noProof="0"/>
               <a:t>Üçüncü düzey</a:t>
             </a:r>
           </a:p>
           <a:p>
             <a:pPr lvl="3" rtl="0"/>
             <a:r>
-              <a:rPr lang="tr-TR" noProof="0" smtClean="0"/>
+              <a:rPr lang="tr-TR" noProof="0"/>
               <a:t>Dördüncü düzey</a:t>
             </a:r>
           </a:p>
           <a:p>
             <a:pPr lvl="4" rtl="0"/>
             <a:r>
-              <a:rPr lang="tr-TR" noProof="0" smtClean="0"/>
+              <a:rPr lang="tr-TR" noProof="0"/>
               <a:t>Beşinci düzey</a:t>
             </a:r>
             <a:endParaRPr lang="tr-TR" noProof="0" dirty="0"/>
@@ -19697,7 +19712,7 @@
               <a:buNone/>
             </a:pPr>
             <a:r>
-              <a:rPr lang="tr-TR" noProof="0" smtClean="0"/>
+              <a:rPr lang="tr-TR" noProof="0"/>
               <a:t>Asıl metin stillerini düzenle</a:t>
             </a:r>
           </a:p>
@@ -19725,35 +19740,35 @@
           <a:p>
             <a:pPr lvl="0" rtl="0"/>
             <a:r>
-              <a:rPr lang="tr-TR" noProof="0" smtClean="0"/>
+              <a:rPr lang="tr-TR" noProof="0"/>
               <a:t>Asıl metin stillerini düzenle</a:t>
             </a:r>
           </a:p>
           <a:p>
             <a:pPr lvl="1" rtl="0"/>
             <a:r>
-              <a:rPr lang="tr-TR" noProof="0" smtClean="0"/>
+              <a:rPr lang="tr-TR" noProof="0"/>
               <a:t>İkinci düzey</a:t>
             </a:r>
           </a:p>
           <a:p>
             <a:pPr lvl="2" rtl="0"/>
             <a:r>
-              <a:rPr lang="tr-TR" noProof="0" smtClean="0"/>
+              <a:rPr lang="tr-TR" noProof="0"/>
               <a:t>Üçüncü düzey</a:t>
             </a:r>
           </a:p>
           <a:p>
             <a:pPr lvl="3" rtl="0"/>
             <a:r>
-              <a:rPr lang="tr-TR" noProof="0" smtClean="0"/>
+              <a:rPr lang="tr-TR" noProof="0"/>
               <a:t>Dördüncü düzey</a:t>
             </a:r>
           </a:p>
           <a:p>
             <a:pPr lvl="4" rtl="0"/>
             <a:r>
-              <a:rPr lang="tr-TR" noProof="0" smtClean="0"/>
+              <a:rPr lang="tr-TR" noProof="0"/>
               <a:t>Beşinci düzey</a:t>
             </a:r>
             <a:endParaRPr lang="tr-TR" noProof="0" dirty="0"/>
@@ -19778,7 +19793,7 @@
             <a:pPr rtl="0"/>
             <a:fld id="{70644985-CE54-4AF4-9C9C-801F0B8CD3E8}" type="datetime1">
               <a:rPr lang="tr-TR" noProof="0" smtClean="0"/>
-              <a:t>14.04.2026</a:t>
+              <a:t>22.06.2026</a:t>
             </a:fld>
             <a:endParaRPr lang="tr-TR" noProof="0" dirty="0"/>
           </a:p>
@@ -19870,7 +19885,7 @@
           <a:p>
             <a:pPr rtl="0"/>
             <a:r>
-              <a:rPr lang="tr-TR" noProof="0" smtClean="0"/>
+              <a:rPr lang="tr-TR" noProof="0"/>
               <a:t>Asıl başlık stili için tıklatın</a:t>
             </a:r>
             <a:endParaRPr lang="tr-TR" noProof="0" dirty="0"/>
@@ -19895,7 +19910,7 @@
             <a:pPr rtl="0"/>
             <a:fld id="{80D33A27-D69E-47F0-868D-6CB18AD33318}" type="datetime1">
               <a:rPr lang="tr-TR" noProof="0" smtClean="0"/>
-              <a:t>14.04.2026</a:t>
+              <a:t>22.06.2026</a:t>
             </a:fld>
             <a:endParaRPr lang="tr-TR" noProof="0" dirty="0"/>
           </a:p>
@@ -19988,7 +20003,7 @@
             <a:pPr rtl="0"/>
             <a:fld id="{351FBC9D-59D2-4339-976D-FD603253275B}" type="datetime1">
               <a:rPr lang="tr-TR" noProof="0" smtClean="0"/>
-              <a:t>14.04.2026</a:t>
+              <a:t>22.06.2026</a:t>
             </a:fld>
             <a:endParaRPr lang="tr-TR" noProof="0" dirty="0"/>
           </a:p>
@@ -20094,7 +20109,7 @@
           <a:p>
             <a:pPr rtl="0"/>
             <a:r>
-              <a:rPr lang="tr-TR" noProof="0" smtClean="0"/>
+              <a:rPr lang="tr-TR" noProof="0"/>
               <a:t>Asıl başlık stili için tıklatın</a:t>
             </a:r>
             <a:endParaRPr lang="tr-TR" noProof="0" dirty="0"/>
@@ -20151,35 +20166,35 @@
           <a:p>
             <a:pPr lvl="0" rtl="0"/>
             <a:r>
-              <a:rPr lang="tr-TR" noProof="0" smtClean="0"/>
+              <a:rPr lang="tr-TR" noProof="0"/>
               <a:t>Asıl metin stillerini düzenle</a:t>
             </a:r>
           </a:p>
           <a:p>
             <a:pPr lvl="1" rtl="0"/>
             <a:r>
-              <a:rPr lang="tr-TR" noProof="0" smtClean="0"/>
+              <a:rPr lang="tr-TR" noProof="0"/>
               <a:t>İkinci düzey</a:t>
             </a:r>
           </a:p>
           <a:p>
             <a:pPr lvl="2" rtl="0"/>
             <a:r>
-              <a:rPr lang="tr-TR" noProof="0" smtClean="0"/>
+              <a:rPr lang="tr-TR" noProof="0"/>
               <a:t>Üçüncü düzey</a:t>
             </a:r>
           </a:p>
           <a:p>
             <a:pPr lvl="3" rtl="0"/>
             <a:r>
-              <a:rPr lang="tr-TR" noProof="0" smtClean="0"/>
+              <a:rPr lang="tr-TR" noProof="0"/>
               <a:t>Dördüncü düzey</a:t>
             </a:r>
           </a:p>
           <a:p>
             <a:pPr lvl="4" rtl="0"/>
             <a:r>
-              <a:rPr lang="tr-TR" noProof="0" smtClean="0"/>
+              <a:rPr lang="tr-TR" noProof="0"/>
               <a:t>Beşinci düzey</a:t>
             </a:r>
             <a:endParaRPr lang="tr-TR" noProof="0" dirty="0"/>
@@ -20253,7 +20268,7 @@
           <a:p>
             <a:pPr lvl="0" rtl="0"/>
             <a:r>
-              <a:rPr lang="tr-TR" noProof="0" smtClean="0"/>
+              <a:rPr lang="tr-TR" noProof="0"/>
               <a:t>Asıl metin stillerini düzenle</a:t>
             </a:r>
           </a:p>
@@ -20277,7 +20292,7 @@
             <a:pPr rtl="0"/>
             <a:fld id="{41AA5F42-14ED-4A61-BB34-730D94D62CEE}" type="datetime1">
               <a:rPr lang="tr-TR" noProof="0" smtClean="0"/>
-              <a:t>14.04.2026</a:t>
+              <a:t>22.06.2026</a:t>
             </a:fld>
             <a:endParaRPr lang="tr-TR" noProof="0" dirty="0"/>
           </a:p>
@@ -20380,7 +20395,7 @@
           <a:p>
             <a:pPr rtl="0"/>
             <a:r>
-              <a:rPr lang="tr-TR" noProof="0" smtClean="0"/>
+              <a:rPr lang="tr-TR" noProof="0"/>
               <a:t>Asıl başlık stili için tıklatın</a:t>
             </a:r>
             <a:endParaRPr lang="tr-TR" noProof="0" dirty="0"/>
@@ -20452,7 +20467,7 @@
           <a:p>
             <a:pPr rtl="0"/>
             <a:r>
-              <a:rPr lang="tr-TR" noProof="0" smtClean="0"/>
+              <a:rPr lang="tr-TR" noProof="0"/>
               <a:t>Resim eklemek için simgeyi tıklatın</a:t>
             </a:r>
             <a:endParaRPr lang="tr-TR" noProof="0" dirty="0"/>
@@ -20533,7 +20548,7 @@
           <a:p>
             <a:pPr lvl="0" rtl="0"/>
             <a:r>
-              <a:rPr lang="tr-TR" noProof="0" smtClean="0"/>
+              <a:rPr lang="tr-TR" noProof="0"/>
               <a:t>Asıl metin stillerini düzenle</a:t>
             </a:r>
           </a:p>
@@ -20557,7 +20572,7 @@
             <a:pPr rtl="0"/>
             <a:fld id="{00EC1C2E-42BF-4A4A-AA0A-C5009833FAE9}" type="datetime1">
               <a:rPr lang="tr-TR" noProof="0" smtClean="0"/>
-              <a:t>14.04.2026</a:t>
+              <a:t>22.06.2026</a:t>
             </a:fld>
             <a:endParaRPr lang="tr-TR" noProof="0" dirty="0"/>
           </a:p>
@@ -20803,7 +20818,7 @@
           <a:p>
             <a:fld id="{E8E66F11-C330-4681-8E04-970B39CAB261}" type="datetime1">
               <a:rPr lang="tr-TR" noProof="0" smtClean="0"/>
-              <a:t>14.04.2026</a:t>
+              <a:t>22.06.2026</a:t>
             </a:fld>
             <a:endParaRPr lang="tr-TR" noProof="0" dirty="0"/>
           </a:p>
@@ -21318,7 +21333,7 @@
                 <a16:creationId xmlns:a16="http://schemas.microsoft.com/office/drawing/2014/main" id="{2FDF0794-1B86-42B2-B8C7-F60123E638ED}"/>
               </a:ext>
               <a:ext uri="{C183D7F6-B498-43B3-948B-1728B52AA6E4}">
-                <adec:decorative xmlns="" xmlns:adec="http://schemas.microsoft.com/office/drawing/2017/decorative" val="1"/>
+                <adec:decorative xmlns:adec="http://schemas.microsoft.com/office/drawing/2017/decorative" val="1"/>
               </a:ext>
             </a:extLst>
           </p:cNvPr>
@@ -21383,7 +21398,7 @@
                 <a16:creationId xmlns:a16="http://schemas.microsoft.com/office/drawing/2014/main" id="{230BD1B1-AA22-48F1-B3ED-579CD284605D}"/>
               </a:ext>
               <a:ext uri="{C183D7F6-B498-43B3-948B-1728B52AA6E4}">
-                <adec:decorative xmlns="" xmlns:adec="http://schemas.microsoft.com/office/drawing/2017/decorative" val="1"/>
+                <adec:decorative xmlns:adec="http://schemas.microsoft.com/office/drawing/2017/decorative" val="1"/>
               </a:ext>
             </a:extLst>
           </p:cNvPr>
@@ -21415,7 +21430,7 @@
                 <a16:creationId xmlns:a16="http://schemas.microsoft.com/office/drawing/2014/main" id="{EAA48FC5-3C83-4F1B-BC33-DF0B588F8317}"/>
               </a:ext>
               <a:ext uri="{C183D7F6-B498-43B3-948B-1728B52AA6E4}">
-                <adec:decorative xmlns="" xmlns:adec="http://schemas.microsoft.com/office/drawing/2017/decorative" val="1"/>
+                <adec:decorative xmlns:adec="http://schemas.microsoft.com/office/drawing/2017/decorative" val="1"/>
               </a:ext>
             </a:extLst>
           </p:cNvPr>
@@ -21502,7 +21517,7 @@
           <a:p>
             <a:pPr algn="l"/>
             <a:r>
-              <a:rPr lang="tr-TR" dirty="0" smtClean="0">
+              <a:rPr lang="tr-TR" dirty="0">
                 <a:solidFill>
                   <a:srgbClr val="FFFFFF"/>
                 </a:solidFill>
@@ -21511,13 +21526,6 @@
               </a:rPr>
               <a:t>MÜŞTERİ ŞİKAYETLERİ SINIFLANDIRMA</a:t>
             </a:r>
-            <a:endParaRPr lang="tr-TR" dirty="0">
-              <a:solidFill>
-                <a:srgbClr val="FFFFFF"/>
-              </a:solidFill>
-              <a:latin typeface="Cambria" panose="02040503050406030204" pitchFamily="18" charset="0"/>
-              <a:ea typeface="Cambria" panose="02040503050406030204" pitchFamily="18" charset="0"/>
-            </a:endParaRPr>
           </a:p>
         </p:txBody>
       </p:sp>
@@ -21551,7 +21559,7 @@
           <a:p>
             <a:pPr rtl="0"/>
             <a:r>
-              <a:rPr lang="tr-TR" sz="2000" dirty="0" smtClean="0">
+              <a:rPr lang="tr-TR" sz="2000" dirty="0">
                 <a:solidFill>
                   <a:srgbClr val="FFFFFF"/>
                 </a:solidFill>
@@ -21562,18 +21570,13 @@
           <a:p>
             <a:pPr rtl="0"/>
             <a:r>
-              <a:rPr lang="tr-TR" sz="2000" dirty="0" smtClean="0">
+              <a:rPr lang="tr-TR" sz="2000" dirty="0">
                 <a:solidFill>
                   <a:srgbClr val="FFFFFF"/>
                 </a:solidFill>
               </a:rPr>
               <a:t>Uygulamalı Yapay Sinir Ağları</a:t>
             </a:r>
-            <a:endParaRPr lang="tr-TR" sz="2000" dirty="0">
-              <a:solidFill>
-                <a:srgbClr val="FFFFFF"/>
-              </a:solidFill>
-            </a:endParaRPr>
           </a:p>
         </p:txBody>
       </p:sp>
@@ -21585,7 +21588,7 @@
                 <a16:creationId xmlns:a16="http://schemas.microsoft.com/office/drawing/2014/main" id="{62F01714-1A39-4194-BD47-8A9960C59985}"/>
               </a:ext>
               <a:ext uri="{C183D7F6-B498-43B3-948B-1728B52AA6E4}">
-                <adec:decorative xmlns="" xmlns:adec="http://schemas.microsoft.com/office/drawing/2017/decorative" val="1"/>
+                <adec:decorative xmlns:adec="http://schemas.microsoft.com/office/drawing/2017/decorative" val="1"/>
               </a:ext>
             </a:extLst>
           </p:cNvPr>
@@ -21633,6 +21636,88 @@
     <p:extLst>
       <p:ext uri="{BB962C8B-B14F-4D97-AF65-F5344CB8AC3E}">
         <p14:creationId xmlns:p14="http://schemas.microsoft.com/office/powerpoint/2010/main" val="2806257027"/>
+      </p:ext>
+    </p:extLst>
+  </p:cSld>
+  <p:clrMapOvr>
+    <a:masterClrMapping/>
+  </p:clrMapOvr>
+</p:sld>
+</file>
+
+<file path=ppt/slides/slide10.xml><?xml version="1.0" encoding="utf-8"?>
+<p:sld xmlns:a="http://schemas.openxmlformats.org/drawingml/2006/main" xmlns:r="http://schemas.openxmlformats.org/officeDocument/2006/relationships" xmlns:p="http://schemas.openxmlformats.org/presentationml/2006/main">
+  <p:cSld>
+    <p:spTree>
+      <p:nvGrpSpPr>
+        <p:cNvPr id="1" name=""/>
+        <p:cNvGrpSpPr/>
+        <p:nvPr/>
+      </p:nvGrpSpPr>
+      <p:grpSpPr>
+        <a:xfrm>
+          <a:off x="0" y="0"/>
+          <a:ext cx="0" cy="0"/>
+          <a:chOff x="0" y="0"/>
+          <a:chExt cx="0" cy="0"/>
+        </a:xfrm>
+      </p:grpSpPr>
+      <p:sp>
+        <p:nvSpPr>
+          <p:cNvPr id="2" name="Dikdörtgen 1"/>
+          <p:cNvSpPr/>
+          <p:nvPr/>
+        </p:nvSpPr>
+        <p:spPr>
+          <a:xfrm>
+            <a:off x="911117" y="2801081"/>
+            <a:ext cx="9305754" cy="923330"/>
+          </a:xfrm>
+          <a:prstGeom prst="rect">
+            <a:avLst/>
+          </a:prstGeom>
+          <a:noFill/>
+        </p:spPr>
+        <p:txBody>
+          <a:bodyPr wrap="none" lIns="91440" tIns="45720" rIns="91440" bIns="45720">
+            <a:spAutoFit/>
+          </a:bodyPr>
+          <a:lstStyle/>
+          <a:p>
+            <a:pPr algn="ctr"/>
+            <a:r>
+              <a:rPr lang="tr-TR" sz="5400" dirty="0">
+                <a:ln w="0"/>
+                <a:effectLst>
+                  <a:outerShdw blurRad="38100" dist="19050" dir="2700000" algn="tl" rotWithShape="0">
+                    <a:schemeClr val="dk1">
+                      <a:alpha val="40000"/>
+                    </a:schemeClr>
+                  </a:outerShdw>
+                </a:effectLst>
+              </a:rPr>
+              <a:t>DİNLEDİĞİNİZ İÇİN TEŞEKKÜRLER</a:t>
+            </a:r>
+            <a:endParaRPr lang="tr-TR" sz="5400" b="0" cap="none" spc="0" dirty="0">
+              <a:ln w="0"/>
+              <a:solidFill>
+                <a:schemeClr val="tx1"/>
+              </a:solidFill>
+              <a:effectLst>
+                <a:outerShdw blurRad="38100" dist="19050" dir="2700000" algn="tl" rotWithShape="0">
+                  <a:schemeClr val="dk1">
+                    <a:alpha val="40000"/>
+                  </a:schemeClr>
+                </a:outerShdw>
+              </a:effectLst>
+            </a:endParaRPr>
+          </a:p>
+        </p:txBody>
+      </p:sp>
+    </p:spTree>
+    <p:extLst>
+      <p:ext uri="{BB962C8B-B14F-4D97-AF65-F5344CB8AC3E}">
+        <p14:creationId xmlns:p14="http://schemas.microsoft.com/office/powerpoint/2010/main" val="3247067871"/>
       </p:ext>
     </p:extLst>
   </p:cSld>
@@ -21696,7 +21781,7 @@
           <a:lstStyle/>
           <a:p>
             <a:r>
-              <a:rPr lang="tr-TR" dirty="0" smtClean="0">
+              <a:rPr lang="tr-TR" dirty="0">
                 <a:solidFill>
                   <a:schemeClr val="accent2">
                     <a:lumMod val="50000"/>
@@ -21706,14 +21791,6 @@
               </a:rPr>
               <a:t>Problem tanımı</a:t>
             </a:r>
-            <a:endParaRPr lang="tr-TR" dirty="0">
-              <a:solidFill>
-                <a:schemeClr val="accent2">
-                  <a:lumMod val="50000"/>
-                </a:schemeClr>
-              </a:solidFill>
-              <a:latin typeface="Bookman Old Style" panose="02050604050505020204" pitchFamily="18" charset="0"/>
-            </a:endParaRPr>
           </a:p>
         </p:txBody>
       </p:sp>
@@ -21729,8 +21806,8 @@
         </p:nvSpPr>
         <p:spPr bwMode="auto">
           <a:xfrm>
-            <a:off x="1024128" y="2084832"/>
-            <a:ext cx="14724857" cy="3416320"/>
+            <a:off x="1024128" y="1900166"/>
+            <a:ext cx="14724857" cy="3785652"/>
           </a:xfrm>
           <a:prstGeom prst="rect">
             <a:avLst/>
@@ -21794,7 +21871,7 @@
               <a:buNone/>
               <a:tabLst/>
             </a:pPr>
-            <a:endParaRPr kumimoji="0" lang="en-US" altLang="en-US" sz="2400" b="0" i="0" u="none" strike="noStrike" cap="none" normalizeH="0" baseline="0" dirty="0" smtClean="0">
+            <a:endParaRPr kumimoji="0" lang="en-US" altLang="en-US" sz="2400" b="0" i="0" u="none" strike="noStrike" cap="none" normalizeH="0" baseline="0" dirty="0">
               <a:ln>
                 <a:noFill/>
               </a:ln>
@@ -21803,6 +21880,170 @@
               </a:solidFill>
               <a:effectLst/>
               <a:latin typeface="Bahnschrift Light SemiCondensed" panose="020B0502040204020203" pitchFamily="34" charset="0"/>
+            </a:endParaRPr>
+          </a:p>
+          <a:p>
+            <a:pPr marL="0" lvl="0" indent="0" eaLnBrk="0" fontAlgn="base" hangingPunct="0">
+              <a:lnSpc>
+                <a:spcPct val="100000"/>
+              </a:lnSpc>
+              <a:spcBef>
+                <a:spcPct val="0"/>
+              </a:spcBef>
+              <a:spcAft>
+                <a:spcPct val="0"/>
+              </a:spcAft>
+              <a:buClrTx/>
+              <a:buSzTx/>
+              <a:buFontTx/>
+              <a:buChar char="•"/>
+            </a:pPr>
+            <a:r>
+              <a:rPr lang="en-US" sz="2400" dirty="0" err="1">
+                <a:latin typeface="Bahnschrift Light" panose="020B0502040204020203" pitchFamily="34" charset="0"/>
+              </a:rPr>
+              <a:t>Vatandaşlardan</a:t>
+            </a:r>
+            <a:r>
+              <a:rPr lang="en-US" sz="2400" dirty="0">
+                <a:latin typeface="Bahnschrift Light" panose="020B0502040204020203" pitchFamily="34" charset="0"/>
+              </a:rPr>
+              <a:t> </a:t>
+            </a:r>
+            <a:r>
+              <a:rPr lang="en-US" sz="2400" dirty="0" err="1">
+                <a:latin typeface="Bahnschrift Light" panose="020B0502040204020203" pitchFamily="34" charset="0"/>
+              </a:rPr>
+              <a:t>belediyelere</a:t>
+            </a:r>
+            <a:r>
+              <a:rPr lang="en-US" sz="2400" dirty="0">
+                <a:latin typeface="Bahnschrift Light" panose="020B0502040204020203" pitchFamily="34" charset="0"/>
+              </a:rPr>
+              <a:t> </a:t>
+            </a:r>
+            <a:r>
+              <a:rPr lang="en-US" sz="2400" dirty="0" err="1">
+                <a:latin typeface="Bahnschrift Light" panose="020B0502040204020203" pitchFamily="34" charset="0"/>
+              </a:rPr>
+              <a:t>iletilen</a:t>
+            </a:r>
+            <a:r>
+              <a:rPr lang="en-US" sz="2400" dirty="0">
+                <a:latin typeface="Bahnschrift Light" panose="020B0502040204020203" pitchFamily="34" charset="0"/>
+              </a:rPr>
+              <a:t> </a:t>
+            </a:r>
+            <a:r>
+              <a:rPr lang="en-US" sz="2400" dirty="0" err="1">
+                <a:latin typeface="Bahnschrift Light" panose="020B0502040204020203" pitchFamily="34" charset="0"/>
+              </a:rPr>
+              <a:t>şikayetler</a:t>
+            </a:r>
+            <a:r>
+              <a:rPr lang="en-US" sz="2400" dirty="0">
+                <a:latin typeface="Bahnschrift Light" panose="020B0502040204020203" pitchFamily="34" charset="0"/>
+              </a:rPr>
+              <a:t> </a:t>
+            </a:r>
+            <a:r>
+              <a:rPr lang="en-US" sz="2400" dirty="0" err="1">
+                <a:latin typeface="Bahnschrift Light" panose="020B0502040204020203" pitchFamily="34" charset="0"/>
+              </a:rPr>
+              <a:t>dijital</a:t>
+            </a:r>
+            <a:r>
+              <a:rPr lang="en-US" sz="2400" dirty="0">
+                <a:latin typeface="Bahnschrift Light" panose="020B0502040204020203" pitchFamily="34" charset="0"/>
+              </a:rPr>
+              <a:t> </a:t>
+            </a:r>
+            <a:r>
+              <a:rPr lang="en-US" sz="2400" dirty="0" err="1">
+                <a:latin typeface="Bahnschrift Light" panose="020B0502040204020203" pitchFamily="34" charset="0"/>
+              </a:rPr>
+              <a:t>platformlar</a:t>
+            </a:r>
+            <a:r>
+              <a:rPr lang="en-US" sz="2400" dirty="0">
+                <a:latin typeface="Bahnschrift Light" panose="020B0502040204020203" pitchFamily="34" charset="0"/>
+              </a:rPr>
+              <a:t> </a:t>
+            </a:r>
+          </a:p>
+          <a:p>
+            <a:pPr marL="0" lvl="0" indent="0" eaLnBrk="0" fontAlgn="base" hangingPunct="0">
+              <a:lnSpc>
+                <a:spcPct val="100000"/>
+              </a:lnSpc>
+              <a:spcBef>
+                <a:spcPct val="0"/>
+              </a:spcBef>
+              <a:spcAft>
+                <a:spcPct val="0"/>
+              </a:spcAft>
+              <a:buClrTx/>
+              <a:buSzTx/>
+              <a:buNone/>
+            </a:pPr>
+            <a:r>
+              <a:rPr lang="en-US" sz="2400" dirty="0" err="1">
+                <a:latin typeface="Bahnschrift Light" panose="020B0502040204020203" pitchFamily="34" charset="0"/>
+              </a:rPr>
+              <a:t>üzerinden</a:t>
+            </a:r>
+            <a:r>
+              <a:rPr lang="en-US" sz="2400" dirty="0">
+                <a:latin typeface="Bahnschrift Light" panose="020B0502040204020203" pitchFamily="34" charset="0"/>
+              </a:rPr>
+              <a:t> </a:t>
+            </a:r>
+            <a:r>
+              <a:rPr lang="en-US" sz="2400" dirty="0" err="1">
+                <a:latin typeface="Bahnschrift Light" panose="020B0502040204020203" pitchFamily="34" charset="0"/>
+              </a:rPr>
+              <a:t>hızla</a:t>
+            </a:r>
+            <a:r>
+              <a:rPr lang="en-US" sz="2400" dirty="0">
+                <a:latin typeface="Bahnschrift Light" panose="020B0502040204020203" pitchFamily="34" charset="0"/>
+              </a:rPr>
+              <a:t> </a:t>
+            </a:r>
+            <a:r>
+              <a:rPr lang="en-US" sz="2400" dirty="0" err="1">
+                <a:latin typeface="Bahnschrift Light" panose="020B0502040204020203" pitchFamily="34" charset="0"/>
+              </a:rPr>
+              <a:t>artmaktadır</a:t>
+            </a:r>
+            <a:r>
+              <a:rPr lang="en-US" sz="2400" dirty="0">
+                <a:latin typeface="Bahnschrift Light" panose="020B0502040204020203" pitchFamily="34" charset="0"/>
+              </a:rPr>
+              <a:t>.</a:t>
+            </a:r>
+            <a:r>
+              <a:rPr kumimoji="0" lang="en-US" altLang="en-US" sz="2400" b="0" i="0" u="none" strike="noStrike" cap="none" normalizeH="0" baseline="0" dirty="0">
+                <a:ln>
+                  <a:noFill/>
+                </a:ln>
+                <a:solidFill>
+                  <a:schemeClr val="tx1"/>
+                </a:solidFill>
+                <a:effectLst/>
+                <a:latin typeface="Bahnschrift Light" panose="020B0502040204020203" pitchFamily="34" charset="0"/>
+              </a:rPr>
+              <a:t> </a:t>
+            </a:r>
+            <a:endParaRPr kumimoji="0" lang="tr-TR" altLang="en-US" sz="2400" b="0" i="0" u="none" strike="noStrike" cap="none" normalizeH="0" baseline="0" dirty="0">
+              <a:ln>
+                <a:noFill/>
+              </a:ln>
+              <a:solidFill>
+                <a:schemeClr val="tx1"/>
+              </a:solidFill>
+              <a:effectLst/>
+              <a:latin typeface="Bahnschrift Light" panose="020B0502040204020203" pitchFamily="34" charset="0"/>
             </a:endParaRPr>
           </a:p>
           <a:p>
@@ -21822,163 +22063,7 @@
               <a:buChar char="•"/>
               <a:tabLst/>
             </a:pPr>
-            <a:r>
-              <a:rPr kumimoji="0" lang="en-US" altLang="en-US" sz="2400" b="0" i="0" u="none" strike="noStrike" cap="none" normalizeH="0" baseline="0" dirty="0" err="1" smtClean="0">
-                <a:ln>
-                  <a:noFill/>
-                </a:ln>
-                <a:solidFill>
-                  <a:schemeClr val="tx1"/>
-                </a:solidFill>
-                <a:effectLst/>
-                <a:latin typeface="Bahnschrift Light SemiCondensed" panose="020B0502040204020203" pitchFamily="34" charset="0"/>
-              </a:rPr>
-              <a:t>Müşteri</a:t>
-            </a:r>
-            <a:r>
-              <a:rPr kumimoji="0" lang="en-US" altLang="en-US" sz="2400" b="0" i="0" u="none" strike="noStrike" cap="none" normalizeH="0" baseline="0" dirty="0" smtClean="0">
-                <a:ln>
-                  <a:noFill/>
-                </a:ln>
-                <a:solidFill>
-                  <a:schemeClr val="tx1"/>
-                </a:solidFill>
-                <a:effectLst/>
-                <a:latin typeface="Bahnschrift Light SemiCondensed" panose="020B0502040204020203" pitchFamily="34" charset="0"/>
-              </a:rPr>
-              <a:t> </a:t>
-            </a:r>
-            <a:r>
-              <a:rPr kumimoji="0" lang="en-US" altLang="en-US" sz="2400" b="0" i="0" u="none" strike="noStrike" cap="none" normalizeH="0" baseline="0" dirty="0" err="1" smtClean="0">
-                <a:ln>
-                  <a:noFill/>
-                </a:ln>
-                <a:solidFill>
-                  <a:schemeClr val="tx1"/>
-                </a:solidFill>
-                <a:effectLst/>
-                <a:latin typeface="Bahnschrift Light SemiCondensed" panose="020B0502040204020203" pitchFamily="34" charset="0"/>
-              </a:rPr>
-              <a:t>şikayetleri</a:t>
-            </a:r>
-            <a:r>
-              <a:rPr kumimoji="0" lang="en-US" altLang="en-US" sz="2400" b="0" i="0" u="none" strike="noStrike" cap="none" normalizeH="0" baseline="0" dirty="0" smtClean="0">
-                <a:ln>
-                  <a:noFill/>
-                </a:ln>
-                <a:solidFill>
-                  <a:schemeClr val="tx1"/>
-                </a:solidFill>
-                <a:effectLst/>
-                <a:latin typeface="Bahnschrift Light SemiCondensed" panose="020B0502040204020203" pitchFamily="34" charset="0"/>
-              </a:rPr>
-              <a:t> </a:t>
-            </a:r>
-            <a:r>
-              <a:rPr kumimoji="0" lang="en-US" altLang="en-US" sz="2400" b="0" i="0" u="none" strike="noStrike" cap="none" normalizeH="0" baseline="0" dirty="0" err="1" smtClean="0">
-                <a:ln>
-                  <a:noFill/>
-                </a:ln>
-                <a:solidFill>
-                  <a:schemeClr val="tx1"/>
-                </a:solidFill>
-                <a:effectLst/>
-                <a:latin typeface="Bahnschrift Light SemiCondensed" panose="020B0502040204020203" pitchFamily="34" charset="0"/>
-              </a:rPr>
-              <a:t>dijital</a:t>
-            </a:r>
-            <a:r>
-              <a:rPr kumimoji="0" lang="en-US" altLang="en-US" sz="2400" b="0" i="0" u="none" strike="noStrike" cap="none" normalizeH="0" baseline="0" dirty="0" smtClean="0">
-                <a:ln>
-                  <a:noFill/>
-                </a:ln>
-                <a:solidFill>
-                  <a:schemeClr val="tx1"/>
-                </a:solidFill>
-                <a:effectLst/>
-                <a:latin typeface="Bahnschrift Light SemiCondensed" panose="020B0502040204020203" pitchFamily="34" charset="0"/>
-              </a:rPr>
-              <a:t> </a:t>
-            </a:r>
-            <a:r>
-              <a:rPr kumimoji="0" lang="en-US" altLang="en-US" sz="2400" b="0" i="0" u="none" strike="noStrike" cap="none" normalizeH="0" baseline="0" dirty="0" err="1" smtClean="0">
-                <a:ln>
-                  <a:noFill/>
-                </a:ln>
-                <a:solidFill>
-                  <a:schemeClr val="tx1"/>
-                </a:solidFill>
-                <a:effectLst/>
-                <a:latin typeface="Bahnschrift Light SemiCondensed" panose="020B0502040204020203" pitchFamily="34" charset="0"/>
-              </a:rPr>
-              <a:t>platformlarda</a:t>
-            </a:r>
-            <a:r>
-              <a:rPr kumimoji="0" lang="en-US" altLang="en-US" sz="2400" b="0" i="0" u="none" strike="noStrike" cap="none" normalizeH="0" baseline="0" dirty="0" smtClean="0">
-                <a:ln>
-                  <a:noFill/>
-                </a:ln>
-                <a:solidFill>
-                  <a:schemeClr val="tx1"/>
-                </a:solidFill>
-                <a:effectLst/>
-                <a:latin typeface="Bahnschrift Light SemiCondensed" panose="020B0502040204020203" pitchFamily="34" charset="0"/>
-              </a:rPr>
-              <a:t> </a:t>
-            </a:r>
-            <a:r>
-              <a:rPr kumimoji="0" lang="en-US" altLang="en-US" sz="2400" b="0" i="0" u="none" strike="noStrike" cap="none" normalizeH="0" baseline="0" dirty="0" err="1" smtClean="0">
-                <a:ln>
-                  <a:noFill/>
-                </a:ln>
-                <a:solidFill>
-                  <a:schemeClr val="tx1"/>
-                </a:solidFill>
-                <a:effectLst/>
-                <a:latin typeface="Bahnschrift Light SemiCondensed" panose="020B0502040204020203" pitchFamily="34" charset="0"/>
-              </a:rPr>
-              <a:t>hızla</a:t>
-            </a:r>
-            <a:r>
-              <a:rPr kumimoji="0" lang="en-US" altLang="en-US" sz="2400" b="0" i="0" u="none" strike="noStrike" cap="none" normalizeH="0" baseline="0" dirty="0" smtClean="0">
-                <a:ln>
-                  <a:noFill/>
-                </a:ln>
-                <a:solidFill>
-                  <a:schemeClr val="tx1"/>
-                </a:solidFill>
-                <a:effectLst/>
-                <a:latin typeface="Bahnschrift Light SemiCondensed" panose="020B0502040204020203" pitchFamily="34" charset="0"/>
-              </a:rPr>
-              <a:t> </a:t>
-            </a:r>
-            <a:r>
-              <a:rPr kumimoji="0" lang="en-US" altLang="en-US" sz="2400" b="0" i="0" u="none" strike="noStrike" cap="none" normalizeH="0" baseline="0" dirty="0" err="1" smtClean="0">
-                <a:ln>
-                  <a:noFill/>
-                </a:ln>
-                <a:solidFill>
-                  <a:schemeClr val="tx1"/>
-                </a:solidFill>
-                <a:effectLst/>
-                <a:latin typeface="Bahnschrift Light SemiCondensed" panose="020B0502040204020203" pitchFamily="34" charset="0"/>
-              </a:rPr>
-              <a:t>artmaktadır</a:t>
-            </a:r>
-            <a:r>
-              <a:rPr kumimoji="0" lang="en-US" altLang="en-US" sz="2400" b="0" i="0" u="none" strike="noStrike" cap="none" normalizeH="0" baseline="0" dirty="0" smtClean="0">
-                <a:ln>
-                  <a:noFill/>
-                </a:ln>
-                <a:solidFill>
-                  <a:schemeClr val="tx1"/>
-                </a:solidFill>
-                <a:effectLst/>
-                <a:latin typeface="Bahnschrift Light SemiCondensed" panose="020B0502040204020203" pitchFamily="34" charset="0"/>
-              </a:rPr>
-              <a:t>. </a:t>
-            </a:r>
-            <a:endParaRPr kumimoji="0" lang="tr-TR" altLang="en-US" sz="2400" b="0" i="0" u="none" strike="noStrike" cap="none" normalizeH="0" baseline="0" dirty="0" smtClean="0">
+            <a:endParaRPr kumimoji="0" lang="en-US" altLang="en-US" sz="2400" b="0" i="0" u="none" strike="noStrike" cap="none" normalizeH="0" baseline="0" dirty="0">
               <a:ln>
                 <a:noFill/>
               </a:ln>
@@ -21986,7 +22071,7 @@
                 <a:schemeClr val="tx1"/>
               </a:solidFill>
               <a:effectLst/>
-              <a:latin typeface="Bahnschrift Light SemiCondensed" panose="020B0502040204020203" pitchFamily="34" charset="0"/>
+              <a:latin typeface="Bahnschrift Light" panose="020B0502040204020203" pitchFamily="34" charset="0"/>
             </a:endParaRPr>
           </a:p>
           <a:p>
@@ -22006,7 +22091,176 @@
               <a:buChar char="•"/>
               <a:tabLst/>
             </a:pPr>
-            <a:endParaRPr kumimoji="0" lang="en-US" altLang="en-US" sz="2400" b="0" i="0" u="none" strike="noStrike" cap="none" normalizeH="0" baseline="0" dirty="0" smtClean="0">
+            <a:r>
+              <a:rPr kumimoji="0" lang="en-US" altLang="en-US" sz="2400" b="0" i="0" u="none" strike="noStrike" cap="none" normalizeH="0" baseline="0" dirty="0">
+                <a:ln>
+                  <a:noFill/>
+                </a:ln>
+                <a:solidFill>
+                  <a:schemeClr val="tx1"/>
+                </a:solidFill>
+                <a:effectLst/>
+                <a:latin typeface="Bahnschrift Light" panose="020B0502040204020203" pitchFamily="34" charset="0"/>
+              </a:rPr>
+              <a:t>Bu </a:t>
+            </a:r>
+            <a:r>
+              <a:rPr kumimoji="0" lang="en-US" altLang="en-US" sz="2400" b="0" i="0" u="none" strike="noStrike" cap="none" normalizeH="0" baseline="0" dirty="0" err="1">
+                <a:ln>
+                  <a:noFill/>
+                </a:ln>
+                <a:solidFill>
+                  <a:schemeClr val="tx1"/>
+                </a:solidFill>
+                <a:effectLst/>
+                <a:latin typeface="Bahnschrift Light" panose="020B0502040204020203" pitchFamily="34" charset="0"/>
+              </a:rPr>
+              <a:t>verilerin</a:t>
+            </a:r>
+            <a:r>
+              <a:rPr kumimoji="0" lang="en-US" altLang="en-US" sz="2400" b="0" i="0" u="none" strike="noStrike" cap="none" normalizeH="0" baseline="0" dirty="0">
+                <a:ln>
+                  <a:noFill/>
+                </a:ln>
+                <a:solidFill>
+                  <a:schemeClr val="tx1"/>
+                </a:solidFill>
+                <a:effectLst/>
+                <a:latin typeface="Bahnschrift Light" panose="020B0502040204020203" pitchFamily="34" charset="0"/>
+              </a:rPr>
+              <a:t> </a:t>
+            </a:r>
+            <a:r>
+              <a:rPr kumimoji="0" lang="en-US" altLang="en-US" sz="2400" b="0" i="0" u="none" strike="noStrike" cap="none" normalizeH="0" baseline="0" dirty="0" err="1">
+                <a:ln>
+                  <a:noFill/>
+                </a:ln>
+                <a:solidFill>
+                  <a:schemeClr val="tx1"/>
+                </a:solidFill>
+                <a:effectLst/>
+                <a:latin typeface="Bahnschrift Light" panose="020B0502040204020203" pitchFamily="34" charset="0"/>
+              </a:rPr>
+              <a:t>manuel</a:t>
+            </a:r>
+            <a:r>
+              <a:rPr kumimoji="0" lang="en-US" altLang="en-US" sz="2400" b="0" i="0" u="none" strike="noStrike" cap="none" normalizeH="0" baseline="0" dirty="0">
+                <a:ln>
+                  <a:noFill/>
+                </a:ln>
+                <a:solidFill>
+                  <a:schemeClr val="tx1"/>
+                </a:solidFill>
+                <a:effectLst/>
+                <a:latin typeface="Bahnschrift Light" panose="020B0502040204020203" pitchFamily="34" charset="0"/>
+              </a:rPr>
+              <a:t> </a:t>
+            </a:r>
+            <a:r>
+              <a:rPr kumimoji="0" lang="en-US" altLang="en-US" sz="2400" b="0" i="0" u="none" strike="noStrike" cap="none" normalizeH="0" baseline="0" dirty="0" err="1">
+                <a:ln>
+                  <a:noFill/>
+                </a:ln>
+                <a:solidFill>
+                  <a:schemeClr val="tx1"/>
+                </a:solidFill>
+                <a:effectLst/>
+                <a:latin typeface="Bahnschrift Light" panose="020B0502040204020203" pitchFamily="34" charset="0"/>
+              </a:rPr>
+              <a:t>analizi</a:t>
+            </a:r>
+            <a:r>
+              <a:rPr kumimoji="0" lang="en-US" altLang="en-US" sz="2400" b="0" i="0" u="none" strike="noStrike" cap="none" normalizeH="0" baseline="0" dirty="0">
+                <a:ln>
+                  <a:noFill/>
+                </a:ln>
+                <a:solidFill>
+                  <a:schemeClr val="tx1"/>
+                </a:solidFill>
+                <a:effectLst/>
+                <a:latin typeface="Bahnschrift Light" panose="020B0502040204020203" pitchFamily="34" charset="0"/>
+              </a:rPr>
+              <a:t> </a:t>
+            </a:r>
+            <a:r>
+              <a:rPr kumimoji="0" lang="en-US" altLang="en-US" sz="2400" b="0" i="0" u="none" strike="noStrike" cap="none" normalizeH="0" baseline="0" dirty="0" err="1">
+                <a:ln>
+                  <a:noFill/>
+                </a:ln>
+                <a:solidFill>
+                  <a:schemeClr val="tx1"/>
+                </a:solidFill>
+                <a:effectLst/>
+                <a:latin typeface="Bahnschrift Light" panose="020B0502040204020203" pitchFamily="34" charset="0"/>
+              </a:rPr>
+              <a:t>zor</a:t>
+            </a:r>
+            <a:r>
+              <a:rPr kumimoji="0" lang="en-US" altLang="en-US" sz="2400" b="0" i="0" u="none" strike="noStrike" cap="none" normalizeH="0" baseline="0" dirty="0">
+                <a:ln>
+                  <a:noFill/>
+                </a:ln>
+                <a:solidFill>
+                  <a:schemeClr val="tx1"/>
+                </a:solidFill>
+                <a:effectLst/>
+                <a:latin typeface="Bahnschrift Light" panose="020B0502040204020203" pitchFamily="34" charset="0"/>
+              </a:rPr>
+              <a:t> </a:t>
+            </a:r>
+            <a:r>
+              <a:rPr kumimoji="0" lang="en-US" altLang="en-US" sz="2400" b="0" i="0" u="none" strike="noStrike" cap="none" normalizeH="0" baseline="0" dirty="0" err="1">
+                <a:ln>
+                  <a:noFill/>
+                </a:ln>
+                <a:solidFill>
+                  <a:schemeClr val="tx1"/>
+                </a:solidFill>
+                <a:effectLst/>
+                <a:latin typeface="Bahnschrift Light" panose="020B0502040204020203" pitchFamily="34" charset="0"/>
+              </a:rPr>
+              <a:t>ve</a:t>
+            </a:r>
+            <a:r>
+              <a:rPr kumimoji="0" lang="en-US" altLang="en-US" sz="2400" b="0" i="0" u="none" strike="noStrike" cap="none" normalizeH="0" baseline="0" dirty="0">
+                <a:ln>
+                  <a:noFill/>
+                </a:ln>
+                <a:solidFill>
+                  <a:schemeClr val="tx1"/>
+                </a:solidFill>
+                <a:effectLst/>
+                <a:latin typeface="Bahnschrift Light" panose="020B0502040204020203" pitchFamily="34" charset="0"/>
+              </a:rPr>
+              <a:t> zaman </a:t>
+            </a:r>
+            <a:r>
+              <a:rPr kumimoji="0" lang="en-US" altLang="en-US" sz="2400" b="0" i="0" u="none" strike="noStrike" cap="none" normalizeH="0" baseline="0" dirty="0" err="1">
+                <a:ln>
+                  <a:noFill/>
+                </a:ln>
+                <a:solidFill>
+                  <a:schemeClr val="tx1"/>
+                </a:solidFill>
+                <a:effectLst/>
+                <a:latin typeface="Bahnschrift Light" panose="020B0502040204020203" pitchFamily="34" charset="0"/>
+              </a:rPr>
+              <a:t>alıcıdır</a:t>
+            </a:r>
+            <a:r>
+              <a:rPr kumimoji="0" lang="en-US" altLang="en-US" sz="2400" b="0" i="0" u="none" strike="noStrike" cap="none" normalizeH="0" baseline="0" dirty="0">
+                <a:ln>
+                  <a:noFill/>
+                </a:ln>
+                <a:solidFill>
+                  <a:schemeClr val="tx1"/>
+                </a:solidFill>
+                <a:effectLst/>
+                <a:latin typeface="Bahnschrift Light" panose="020B0502040204020203" pitchFamily="34" charset="0"/>
+              </a:rPr>
+              <a:t>. </a:t>
+            </a:r>
+            <a:endParaRPr kumimoji="0" lang="tr-TR" altLang="en-US" sz="2400" b="0" i="0" u="none" strike="noStrike" cap="none" normalizeH="0" baseline="0" dirty="0">
               <a:ln>
                 <a:noFill/>
               </a:ln>
@@ -22014,7 +22268,7 @@
                 <a:schemeClr val="tx1"/>
               </a:solidFill>
               <a:effectLst/>
-              <a:latin typeface="Bahnschrift Light SemiCondensed" panose="020B0502040204020203" pitchFamily="34" charset="0"/>
+              <a:latin typeface="Bahnschrift Light" panose="020B0502040204020203" pitchFamily="34" charset="0"/>
             </a:endParaRPr>
           </a:p>
           <a:p>
@@ -22034,176 +22288,7 @@
               <a:buChar char="•"/>
               <a:tabLst/>
             </a:pPr>
-            <a:r>
-              <a:rPr kumimoji="0" lang="en-US" altLang="en-US" sz="2400" b="0" i="0" u="none" strike="noStrike" cap="none" normalizeH="0" baseline="0" dirty="0" smtClean="0">
-                <a:ln>
-                  <a:noFill/>
-                </a:ln>
-                <a:solidFill>
-                  <a:schemeClr val="tx1"/>
-                </a:solidFill>
-                <a:effectLst/>
-                <a:latin typeface="Bahnschrift Light SemiCondensed" panose="020B0502040204020203" pitchFamily="34" charset="0"/>
-              </a:rPr>
-              <a:t>Bu </a:t>
-            </a:r>
-            <a:r>
-              <a:rPr kumimoji="0" lang="en-US" altLang="en-US" sz="2400" b="0" i="0" u="none" strike="noStrike" cap="none" normalizeH="0" baseline="0" dirty="0" err="1" smtClean="0">
-                <a:ln>
-                  <a:noFill/>
-                </a:ln>
-                <a:solidFill>
-                  <a:schemeClr val="tx1"/>
-                </a:solidFill>
-                <a:effectLst/>
-                <a:latin typeface="Bahnschrift Light SemiCondensed" panose="020B0502040204020203" pitchFamily="34" charset="0"/>
-              </a:rPr>
-              <a:t>verilerin</a:t>
-            </a:r>
-            <a:r>
-              <a:rPr kumimoji="0" lang="en-US" altLang="en-US" sz="2400" b="0" i="0" u="none" strike="noStrike" cap="none" normalizeH="0" baseline="0" dirty="0" smtClean="0">
-                <a:ln>
-                  <a:noFill/>
-                </a:ln>
-                <a:solidFill>
-                  <a:schemeClr val="tx1"/>
-                </a:solidFill>
-                <a:effectLst/>
-                <a:latin typeface="Bahnschrift Light SemiCondensed" panose="020B0502040204020203" pitchFamily="34" charset="0"/>
-              </a:rPr>
-              <a:t> </a:t>
-            </a:r>
-            <a:r>
-              <a:rPr kumimoji="0" lang="en-US" altLang="en-US" sz="2400" b="0" i="0" u="none" strike="noStrike" cap="none" normalizeH="0" baseline="0" dirty="0" err="1" smtClean="0">
-                <a:ln>
-                  <a:noFill/>
-                </a:ln>
-                <a:solidFill>
-                  <a:schemeClr val="tx1"/>
-                </a:solidFill>
-                <a:effectLst/>
-                <a:latin typeface="Bahnschrift Light SemiCondensed" panose="020B0502040204020203" pitchFamily="34" charset="0"/>
-              </a:rPr>
-              <a:t>manuel</a:t>
-            </a:r>
-            <a:r>
-              <a:rPr kumimoji="0" lang="en-US" altLang="en-US" sz="2400" b="0" i="0" u="none" strike="noStrike" cap="none" normalizeH="0" baseline="0" dirty="0" smtClean="0">
-                <a:ln>
-                  <a:noFill/>
-                </a:ln>
-                <a:solidFill>
-                  <a:schemeClr val="tx1"/>
-                </a:solidFill>
-                <a:effectLst/>
-                <a:latin typeface="Bahnschrift Light SemiCondensed" panose="020B0502040204020203" pitchFamily="34" charset="0"/>
-              </a:rPr>
-              <a:t> </a:t>
-            </a:r>
-            <a:r>
-              <a:rPr kumimoji="0" lang="en-US" altLang="en-US" sz="2400" b="0" i="0" u="none" strike="noStrike" cap="none" normalizeH="0" baseline="0" dirty="0" err="1" smtClean="0">
-                <a:ln>
-                  <a:noFill/>
-                </a:ln>
-                <a:solidFill>
-                  <a:schemeClr val="tx1"/>
-                </a:solidFill>
-                <a:effectLst/>
-                <a:latin typeface="Bahnschrift Light SemiCondensed" panose="020B0502040204020203" pitchFamily="34" charset="0"/>
-              </a:rPr>
-              <a:t>analizi</a:t>
-            </a:r>
-            <a:r>
-              <a:rPr kumimoji="0" lang="en-US" altLang="en-US" sz="2400" b="0" i="0" u="none" strike="noStrike" cap="none" normalizeH="0" baseline="0" dirty="0" smtClean="0">
-                <a:ln>
-                  <a:noFill/>
-                </a:ln>
-                <a:solidFill>
-                  <a:schemeClr val="tx1"/>
-                </a:solidFill>
-                <a:effectLst/>
-                <a:latin typeface="Bahnschrift Light SemiCondensed" panose="020B0502040204020203" pitchFamily="34" charset="0"/>
-              </a:rPr>
-              <a:t> </a:t>
-            </a:r>
-            <a:r>
-              <a:rPr kumimoji="0" lang="en-US" altLang="en-US" sz="2400" b="0" i="0" u="none" strike="noStrike" cap="none" normalizeH="0" baseline="0" dirty="0" err="1" smtClean="0">
-                <a:ln>
-                  <a:noFill/>
-                </a:ln>
-                <a:solidFill>
-                  <a:schemeClr val="tx1"/>
-                </a:solidFill>
-                <a:effectLst/>
-                <a:latin typeface="Bahnschrift Light SemiCondensed" panose="020B0502040204020203" pitchFamily="34" charset="0"/>
-              </a:rPr>
-              <a:t>zor</a:t>
-            </a:r>
-            <a:r>
-              <a:rPr kumimoji="0" lang="en-US" altLang="en-US" sz="2400" b="0" i="0" u="none" strike="noStrike" cap="none" normalizeH="0" baseline="0" dirty="0" smtClean="0">
-                <a:ln>
-                  <a:noFill/>
-                </a:ln>
-                <a:solidFill>
-                  <a:schemeClr val="tx1"/>
-                </a:solidFill>
-                <a:effectLst/>
-                <a:latin typeface="Bahnschrift Light SemiCondensed" panose="020B0502040204020203" pitchFamily="34" charset="0"/>
-              </a:rPr>
-              <a:t> </a:t>
-            </a:r>
-            <a:r>
-              <a:rPr kumimoji="0" lang="en-US" altLang="en-US" sz="2400" b="0" i="0" u="none" strike="noStrike" cap="none" normalizeH="0" baseline="0" dirty="0" err="1" smtClean="0">
-                <a:ln>
-                  <a:noFill/>
-                </a:ln>
-                <a:solidFill>
-                  <a:schemeClr val="tx1"/>
-                </a:solidFill>
-                <a:effectLst/>
-                <a:latin typeface="Bahnschrift Light SemiCondensed" panose="020B0502040204020203" pitchFamily="34" charset="0"/>
-              </a:rPr>
-              <a:t>ve</a:t>
-            </a:r>
-            <a:r>
-              <a:rPr kumimoji="0" lang="en-US" altLang="en-US" sz="2400" b="0" i="0" u="none" strike="noStrike" cap="none" normalizeH="0" baseline="0" dirty="0" smtClean="0">
-                <a:ln>
-                  <a:noFill/>
-                </a:ln>
-                <a:solidFill>
-                  <a:schemeClr val="tx1"/>
-                </a:solidFill>
-                <a:effectLst/>
-                <a:latin typeface="Bahnschrift Light SemiCondensed" panose="020B0502040204020203" pitchFamily="34" charset="0"/>
-              </a:rPr>
-              <a:t> zaman </a:t>
-            </a:r>
-            <a:r>
-              <a:rPr kumimoji="0" lang="en-US" altLang="en-US" sz="2400" b="0" i="0" u="none" strike="noStrike" cap="none" normalizeH="0" baseline="0" dirty="0" err="1" smtClean="0">
-                <a:ln>
-                  <a:noFill/>
-                </a:ln>
-                <a:solidFill>
-                  <a:schemeClr val="tx1"/>
-                </a:solidFill>
-                <a:effectLst/>
-                <a:latin typeface="Bahnschrift Light SemiCondensed" panose="020B0502040204020203" pitchFamily="34" charset="0"/>
-              </a:rPr>
-              <a:t>alıcıdır</a:t>
-            </a:r>
-            <a:r>
-              <a:rPr kumimoji="0" lang="en-US" altLang="en-US" sz="2400" b="0" i="0" u="none" strike="noStrike" cap="none" normalizeH="0" baseline="0" dirty="0" smtClean="0">
-                <a:ln>
-                  <a:noFill/>
-                </a:ln>
-                <a:solidFill>
-                  <a:schemeClr val="tx1"/>
-                </a:solidFill>
-                <a:effectLst/>
-                <a:latin typeface="Bahnschrift Light SemiCondensed" panose="020B0502040204020203" pitchFamily="34" charset="0"/>
-              </a:rPr>
-              <a:t>. </a:t>
-            </a:r>
-            <a:endParaRPr kumimoji="0" lang="tr-TR" altLang="en-US" sz="2400" b="0" i="0" u="none" strike="noStrike" cap="none" normalizeH="0" baseline="0" dirty="0" smtClean="0">
+            <a:endParaRPr kumimoji="0" lang="en-US" altLang="en-US" sz="2400" b="0" i="0" u="none" strike="noStrike" cap="none" normalizeH="0" baseline="0" dirty="0">
               <a:ln>
                 <a:noFill/>
               </a:ln>
@@ -22211,7 +22296,7 @@
                 <a:schemeClr val="tx1"/>
               </a:solidFill>
               <a:effectLst/>
-              <a:latin typeface="Bahnschrift Light SemiCondensed" panose="020B0502040204020203" pitchFamily="34" charset="0"/>
+              <a:latin typeface="Bahnschrift Light" panose="020B0502040204020203" pitchFamily="34" charset="0"/>
             </a:endParaRPr>
           </a:p>
           <a:p>
@@ -22231,7 +22316,150 @@
               <a:buChar char="•"/>
               <a:tabLst/>
             </a:pPr>
-            <a:endParaRPr kumimoji="0" lang="en-US" altLang="en-US" sz="2400" b="0" i="0" u="none" strike="noStrike" cap="none" normalizeH="0" baseline="0" dirty="0" smtClean="0">
+            <a:r>
+              <a:rPr kumimoji="0" lang="en-US" altLang="en-US" sz="2400" b="0" i="0" u="none" strike="noStrike" cap="none" normalizeH="0" baseline="0" dirty="0" err="1">
+                <a:ln>
+                  <a:noFill/>
+                </a:ln>
+                <a:solidFill>
+                  <a:schemeClr val="tx1"/>
+                </a:solidFill>
+                <a:effectLst/>
+                <a:latin typeface="Bahnschrift Light" panose="020B0502040204020203" pitchFamily="34" charset="0"/>
+              </a:rPr>
+              <a:t>Yanlış</a:t>
+            </a:r>
+            <a:r>
+              <a:rPr kumimoji="0" lang="en-US" altLang="en-US" sz="2400" b="0" i="0" u="none" strike="noStrike" cap="none" normalizeH="0" baseline="0" dirty="0">
+                <a:ln>
+                  <a:noFill/>
+                </a:ln>
+                <a:solidFill>
+                  <a:schemeClr val="tx1"/>
+                </a:solidFill>
+                <a:effectLst/>
+                <a:latin typeface="Bahnschrift Light" panose="020B0502040204020203" pitchFamily="34" charset="0"/>
+              </a:rPr>
+              <a:t> </a:t>
+            </a:r>
+            <a:r>
+              <a:rPr kumimoji="0" lang="en-US" altLang="en-US" sz="2400" b="0" i="0" u="none" strike="noStrike" cap="none" normalizeH="0" baseline="0" dirty="0" err="1">
+                <a:ln>
+                  <a:noFill/>
+                </a:ln>
+                <a:solidFill>
+                  <a:schemeClr val="tx1"/>
+                </a:solidFill>
+                <a:effectLst/>
+                <a:latin typeface="Bahnschrift Light" panose="020B0502040204020203" pitchFamily="34" charset="0"/>
+              </a:rPr>
+              <a:t>veya</a:t>
+            </a:r>
+            <a:r>
+              <a:rPr kumimoji="0" lang="en-US" altLang="en-US" sz="2400" b="0" i="0" u="none" strike="noStrike" cap="none" normalizeH="0" baseline="0" dirty="0">
+                <a:ln>
+                  <a:noFill/>
+                </a:ln>
+                <a:solidFill>
+                  <a:schemeClr val="tx1"/>
+                </a:solidFill>
+                <a:effectLst/>
+                <a:latin typeface="Bahnschrift Light" panose="020B0502040204020203" pitchFamily="34" charset="0"/>
+              </a:rPr>
+              <a:t> </a:t>
+            </a:r>
+            <a:r>
+              <a:rPr kumimoji="0" lang="en-US" altLang="en-US" sz="2400" b="0" i="0" u="none" strike="noStrike" cap="none" normalizeH="0" baseline="0" dirty="0" err="1">
+                <a:ln>
+                  <a:noFill/>
+                </a:ln>
+                <a:solidFill>
+                  <a:schemeClr val="tx1"/>
+                </a:solidFill>
+                <a:effectLst/>
+                <a:latin typeface="Bahnschrift Light" panose="020B0502040204020203" pitchFamily="34" charset="0"/>
+              </a:rPr>
+              <a:t>gecikmiş</a:t>
+            </a:r>
+            <a:r>
+              <a:rPr kumimoji="0" lang="en-US" altLang="en-US" sz="2400" b="0" i="0" u="none" strike="noStrike" cap="none" normalizeH="0" baseline="0" dirty="0">
+                <a:ln>
+                  <a:noFill/>
+                </a:ln>
+                <a:solidFill>
+                  <a:schemeClr val="tx1"/>
+                </a:solidFill>
+                <a:effectLst/>
+                <a:latin typeface="Bahnschrift Light" panose="020B0502040204020203" pitchFamily="34" charset="0"/>
+              </a:rPr>
+              <a:t> </a:t>
+            </a:r>
+            <a:r>
+              <a:rPr kumimoji="0" lang="en-US" altLang="en-US" sz="2400" b="0" i="0" u="none" strike="noStrike" cap="none" normalizeH="0" baseline="0" dirty="0" err="1">
+                <a:ln>
+                  <a:noFill/>
+                </a:ln>
+                <a:solidFill>
+                  <a:schemeClr val="tx1"/>
+                </a:solidFill>
+                <a:effectLst/>
+                <a:latin typeface="Bahnschrift Light" panose="020B0502040204020203" pitchFamily="34" charset="0"/>
+              </a:rPr>
+              <a:t>yönlendirmeler</a:t>
+            </a:r>
+            <a:r>
+              <a:rPr kumimoji="0" lang="en-US" altLang="en-US" sz="2400" b="0" i="0" u="none" strike="noStrike" cap="none" normalizeH="0" baseline="0" dirty="0">
+                <a:ln>
+                  <a:noFill/>
+                </a:ln>
+                <a:solidFill>
+                  <a:schemeClr val="tx1"/>
+                </a:solidFill>
+                <a:effectLst/>
+                <a:latin typeface="Bahnschrift Light" panose="020B0502040204020203" pitchFamily="34" charset="0"/>
+              </a:rPr>
+              <a:t> </a:t>
+            </a:r>
+            <a:r>
+              <a:rPr kumimoji="0" lang="en-US" altLang="en-US" sz="2400" b="0" i="0" u="none" strike="noStrike" cap="none" normalizeH="0" baseline="0" dirty="0" err="1">
+                <a:ln>
+                  <a:noFill/>
+                </a:ln>
+                <a:solidFill>
+                  <a:schemeClr val="tx1"/>
+                </a:solidFill>
+                <a:effectLst/>
+                <a:latin typeface="Bahnschrift Light" panose="020B0502040204020203" pitchFamily="34" charset="0"/>
+              </a:rPr>
+              <a:t>vatandaşların</a:t>
+            </a:r>
+            <a:r>
+              <a:rPr kumimoji="0" lang="en-US" altLang="en-US" sz="2400" b="0" i="0" u="none" strike="noStrike" cap="none" normalizeH="0" baseline="0" dirty="0">
+                <a:ln>
+                  <a:noFill/>
+                </a:ln>
+                <a:solidFill>
+                  <a:schemeClr val="tx1"/>
+                </a:solidFill>
+                <a:effectLst/>
+                <a:latin typeface="Bahnschrift Light" panose="020B0502040204020203" pitchFamily="34" charset="0"/>
+              </a:rPr>
+              <a:t> </a:t>
+            </a:r>
+            <a:r>
+              <a:rPr kumimoji="0" lang="en-US" altLang="en-US" sz="2400" b="0" i="0" u="none" strike="noStrike" cap="none" normalizeH="0" baseline="0" dirty="0" err="1">
+                <a:ln>
+                  <a:noFill/>
+                </a:ln>
+                <a:solidFill>
+                  <a:schemeClr val="tx1"/>
+                </a:solidFill>
+                <a:effectLst/>
+                <a:latin typeface="Bahnschrift Light" panose="020B0502040204020203" pitchFamily="34" charset="0"/>
+              </a:rPr>
+              <a:t>memnuniyetini</a:t>
+            </a:r>
+            <a:endParaRPr kumimoji="0" lang="tr-TR" altLang="en-US" sz="2400" b="0" i="0" u="none" strike="noStrike" cap="none" normalizeH="0" baseline="0" dirty="0">
               <a:ln>
                 <a:noFill/>
               </a:ln>
@@ -22239,7 +22467,100 @@
                 <a:schemeClr val="tx1"/>
               </a:solidFill>
               <a:effectLst/>
-              <a:latin typeface="Bahnschrift Light SemiCondensed" panose="020B0502040204020203" pitchFamily="34" charset="0"/>
+              <a:latin typeface="Bahnschrift Light" panose="020B0502040204020203" pitchFamily="34" charset="0"/>
+            </a:endParaRPr>
+          </a:p>
+          <a:p>
+            <a:pPr marL="0" marR="0" lvl="0" indent="0" algn="l" defTabSz="914400" rtl="0" eaLnBrk="0" fontAlgn="base" latinLnBrk="0" hangingPunct="0">
+              <a:lnSpc>
+                <a:spcPct val="100000"/>
+              </a:lnSpc>
+              <a:spcBef>
+                <a:spcPct val="0"/>
+              </a:spcBef>
+              <a:spcAft>
+                <a:spcPct val="0"/>
+              </a:spcAft>
+              <a:buClrTx/>
+              <a:buSzTx/>
+              <a:buNone/>
+              <a:tabLst/>
+            </a:pPr>
+            <a:r>
+              <a:rPr kumimoji="0" lang="en-US" altLang="en-US" sz="2400" b="0" i="0" u="none" strike="noStrike" cap="none" normalizeH="0" baseline="0" dirty="0">
+                <a:ln>
+                  <a:noFill/>
+                </a:ln>
+                <a:solidFill>
+                  <a:schemeClr val="tx1"/>
+                </a:solidFill>
+                <a:effectLst/>
+                <a:latin typeface="Bahnschrift Light" panose="020B0502040204020203" pitchFamily="34" charset="0"/>
+              </a:rPr>
+              <a:t> </a:t>
+            </a:r>
+            <a:r>
+              <a:rPr kumimoji="0" lang="en-US" altLang="en-US" sz="2400" b="0" i="0" u="none" strike="noStrike" cap="none" normalizeH="0" baseline="0" dirty="0" err="1">
+                <a:ln>
+                  <a:noFill/>
+                </a:ln>
+                <a:solidFill>
+                  <a:schemeClr val="tx1"/>
+                </a:solidFill>
+                <a:effectLst/>
+                <a:latin typeface="Bahnschrift Light" panose="020B0502040204020203" pitchFamily="34" charset="0"/>
+              </a:rPr>
+              <a:t>düşürmektedir</a:t>
+            </a:r>
+            <a:r>
+              <a:rPr kumimoji="0" lang="en-US" altLang="en-US" sz="2400" b="0" i="0" u="none" strike="noStrike" cap="none" normalizeH="0" baseline="0" dirty="0">
+                <a:ln>
+                  <a:noFill/>
+                </a:ln>
+                <a:solidFill>
+                  <a:schemeClr val="tx1"/>
+                </a:solidFill>
+                <a:effectLst/>
+                <a:latin typeface="Bahnschrift Light" panose="020B0502040204020203" pitchFamily="34" charset="0"/>
+              </a:rPr>
+              <a:t>. </a:t>
+            </a:r>
+            <a:endParaRPr kumimoji="0" lang="tr-TR" altLang="en-US" sz="2400" b="0" i="0" u="none" strike="noStrike" cap="none" normalizeH="0" baseline="0" dirty="0">
+              <a:ln>
+                <a:noFill/>
+              </a:ln>
+              <a:solidFill>
+                <a:schemeClr val="tx1"/>
+              </a:solidFill>
+              <a:effectLst/>
+              <a:latin typeface="Bahnschrift Light" panose="020B0502040204020203" pitchFamily="34" charset="0"/>
+            </a:endParaRPr>
+          </a:p>
+          <a:p>
+            <a:pPr marL="0" marR="0" lvl="0" indent="0" algn="l" defTabSz="914400" rtl="0" eaLnBrk="0" fontAlgn="base" latinLnBrk="0" hangingPunct="0">
+              <a:lnSpc>
+                <a:spcPct val="100000"/>
+              </a:lnSpc>
+              <a:spcBef>
+                <a:spcPct val="0"/>
+              </a:spcBef>
+              <a:spcAft>
+                <a:spcPct val="0"/>
+              </a:spcAft>
+              <a:buClrTx/>
+              <a:buSzTx/>
+              <a:buNone/>
+              <a:tabLst/>
+            </a:pPr>
+            <a:endParaRPr kumimoji="0" lang="en-US" altLang="en-US" sz="2400" b="0" i="0" u="none" strike="noStrike" cap="none" normalizeH="0" baseline="0" dirty="0">
+              <a:ln>
+                <a:noFill/>
+              </a:ln>
+              <a:solidFill>
+                <a:schemeClr val="tx1"/>
+              </a:solidFill>
+              <a:effectLst/>
+              <a:latin typeface="Bahnschrift Light" panose="020B0502040204020203" pitchFamily="34" charset="0"/>
             </a:endParaRPr>
           </a:p>
           <a:p>
@@ -22260,7 +22581,7 @@
               <a:tabLst/>
             </a:pPr>
             <a:r>
-              <a:rPr kumimoji="0" lang="en-US" altLang="en-US" sz="2400" b="0" i="0" u="none" strike="noStrike" cap="none" normalizeH="0" baseline="0" dirty="0" err="1" smtClean="0">
+              <a:rPr kumimoji="0" lang="en-US" altLang="en-US" sz="2400" b="0" i="0" u="none" strike="noStrike" cap="none" normalizeH="0" baseline="0" dirty="0">
                 <a:ln>
                   <a:noFill/>
                 </a:ln>
@@ -22268,12 +22589,12 @@
                   <a:schemeClr val="tx1"/>
                 </a:solidFill>
                 <a:effectLst/>
-                <a:latin typeface="Bahnschrift Light SemiCondensed" panose="020B0502040204020203" pitchFamily="34" charset="0"/>
-              </a:rPr>
-              <a:t>Yanlış</a:t>
-            </a:r>
-            <a:r>
-              <a:rPr kumimoji="0" lang="en-US" altLang="en-US" sz="2400" b="0" i="0" u="none" strike="noStrike" cap="none" normalizeH="0" baseline="0" dirty="0" smtClean="0">
+                <a:latin typeface="Bahnschrift Light" panose="020B0502040204020203" pitchFamily="34" charset="0"/>
+              </a:rPr>
+              <a:t>Bu </a:t>
+            </a:r>
+            <a:r>
+              <a:rPr kumimoji="0" lang="en-US" altLang="en-US" sz="2400" b="0" i="0" u="none" strike="noStrike" cap="none" normalizeH="0" baseline="0" dirty="0" err="1">
                 <a:ln>
                   <a:noFill/>
                 </a:ln>
@@ -22281,12 +22602,12 @@
                   <a:schemeClr val="tx1"/>
                 </a:solidFill>
                 <a:effectLst/>
-                <a:latin typeface="Bahnschrift Light SemiCondensed" panose="020B0502040204020203" pitchFamily="34" charset="0"/>
-              </a:rPr>
-              <a:t> </a:t>
-            </a:r>
-            <a:r>
-              <a:rPr kumimoji="0" lang="en-US" altLang="en-US" sz="2400" b="0" i="0" u="none" strike="noStrike" cap="none" normalizeH="0" baseline="0" dirty="0" err="1" smtClean="0">
+                <a:latin typeface="Bahnschrift Light" panose="020B0502040204020203" pitchFamily="34" charset="0"/>
+              </a:rPr>
+              <a:t>nedenle</a:t>
+            </a:r>
+            <a:r>
+              <a:rPr kumimoji="0" lang="en-US" altLang="en-US" sz="2400" b="0" i="0" u="none" strike="noStrike" cap="none" normalizeH="0" baseline="0" dirty="0">
                 <a:ln>
                   <a:noFill/>
                 </a:ln>
@@ -22294,12 +22615,12 @@
                   <a:schemeClr val="tx1"/>
                 </a:solidFill>
                 <a:effectLst/>
-                <a:latin typeface="Bahnschrift Light SemiCondensed" panose="020B0502040204020203" pitchFamily="34" charset="0"/>
-              </a:rPr>
-              <a:t>veya</a:t>
-            </a:r>
-            <a:r>
-              <a:rPr kumimoji="0" lang="en-US" altLang="en-US" sz="2400" b="0" i="0" u="none" strike="noStrike" cap="none" normalizeH="0" baseline="0" dirty="0" smtClean="0">
+                <a:latin typeface="Bahnschrift Light" panose="020B0502040204020203" pitchFamily="34" charset="0"/>
+              </a:rPr>
+              <a:t> </a:t>
+            </a:r>
+            <a:r>
+              <a:rPr kumimoji="0" lang="en-US" altLang="en-US" sz="2400" b="0" i="0" u="none" strike="noStrike" cap="none" normalizeH="0" baseline="0" dirty="0" err="1">
                 <a:ln>
                   <a:noFill/>
                 </a:ln>
@@ -22307,12 +22628,12 @@
                   <a:schemeClr val="tx1"/>
                 </a:solidFill>
                 <a:effectLst/>
-                <a:latin typeface="Bahnschrift Light SemiCondensed" panose="020B0502040204020203" pitchFamily="34" charset="0"/>
-              </a:rPr>
-              <a:t> </a:t>
-            </a:r>
-            <a:r>
-              <a:rPr kumimoji="0" lang="en-US" altLang="en-US" sz="2400" b="0" i="0" u="none" strike="noStrike" cap="none" normalizeH="0" baseline="0" dirty="0" err="1" smtClean="0">
+                <a:latin typeface="Bahnschrift Light" panose="020B0502040204020203" pitchFamily="34" charset="0"/>
+              </a:rPr>
+              <a:t>otomatik</a:t>
+            </a:r>
+            <a:r>
+              <a:rPr kumimoji="0" lang="en-US" altLang="en-US" sz="2400" b="0" i="0" u="none" strike="noStrike" cap="none" normalizeH="0" baseline="0" dirty="0">
                 <a:ln>
                   <a:noFill/>
                 </a:ln>
@@ -22320,12 +22641,12 @@
                   <a:schemeClr val="tx1"/>
                 </a:solidFill>
                 <a:effectLst/>
-                <a:latin typeface="Bahnschrift Light SemiCondensed" panose="020B0502040204020203" pitchFamily="34" charset="0"/>
-              </a:rPr>
-              <a:t>gecikmiş</a:t>
-            </a:r>
-            <a:r>
-              <a:rPr kumimoji="0" lang="en-US" altLang="en-US" sz="2400" b="0" i="0" u="none" strike="noStrike" cap="none" normalizeH="0" baseline="0" dirty="0" smtClean="0">
+                <a:latin typeface="Bahnschrift Light" panose="020B0502040204020203" pitchFamily="34" charset="0"/>
+              </a:rPr>
+              <a:t> </a:t>
+            </a:r>
+            <a:r>
+              <a:rPr kumimoji="0" lang="en-US" altLang="en-US" sz="2400" b="0" i="0" u="none" strike="noStrike" cap="none" normalizeH="0" baseline="0" dirty="0" err="1">
                 <a:ln>
                   <a:noFill/>
                 </a:ln>
@@ -22333,12 +22654,12 @@
                   <a:schemeClr val="tx1"/>
                 </a:solidFill>
                 <a:effectLst/>
-                <a:latin typeface="Bahnschrift Light SemiCondensed" panose="020B0502040204020203" pitchFamily="34" charset="0"/>
-              </a:rPr>
-              <a:t> </a:t>
-            </a:r>
-            <a:r>
-              <a:rPr kumimoji="0" lang="en-US" altLang="en-US" sz="2400" b="0" i="0" u="none" strike="noStrike" cap="none" normalizeH="0" baseline="0" dirty="0" err="1" smtClean="0">
+                <a:latin typeface="Bahnschrift Light" panose="020B0502040204020203" pitchFamily="34" charset="0"/>
+              </a:rPr>
+              <a:t>sınıflandırma</a:t>
+            </a:r>
+            <a:r>
+              <a:rPr kumimoji="0" lang="en-US" altLang="en-US" sz="2400" b="0" i="0" u="none" strike="noStrike" cap="none" normalizeH="0" baseline="0" dirty="0">
                 <a:ln>
                   <a:noFill/>
                 </a:ln>
@@ -22346,12 +22667,12 @@
                   <a:schemeClr val="tx1"/>
                 </a:solidFill>
                 <a:effectLst/>
-                <a:latin typeface="Bahnschrift Light SemiCondensed" panose="020B0502040204020203" pitchFamily="34" charset="0"/>
-              </a:rPr>
-              <a:t>yönlendirmeler</a:t>
-            </a:r>
-            <a:r>
-              <a:rPr kumimoji="0" lang="en-US" altLang="en-US" sz="2400" b="0" i="0" u="none" strike="noStrike" cap="none" normalizeH="0" baseline="0" dirty="0" smtClean="0">
+                <a:latin typeface="Bahnschrift Light" panose="020B0502040204020203" pitchFamily="34" charset="0"/>
+              </a:rPr>
+              <a:t> </a:t>
+            </a:r>
+            <a:r>
+              <a:rPr kumimoji="0" lang="en-US" altLang="en-US" sz="2400" b="0" i="0" u="none" strike="noStrike" cap="none" normalizeH="0" baseline="0" dirty="0" err="1">
                 <a:ln>
                   <a:noFill/>
                 </a:ln>
@@ -22359,12 +22680,12 @@
                   <a:schemeClr val="tx1"/>
                 </a:solidFill>
                 <a:effectLst/>
-                <a:latin typeface="Bahnschrift Light SemiCondensed" panose="020B0502040204020203" pitchFamily="34" charset="0"/>
-              </a:rPr>
-              <a:t> </a:t>
-            </a:r>
-            <a:r>
-              <a:rPr kumimoji="0" lang="en-US" altLang="en-US" sz="2400" b="0" i="0" u="none" strike="noStrike" cap="none" normalizeH="0" baseline="0" dirty="0" err="1" smtClean="0">
+                <a:latin typeface="Bahnschrift Light" panose="020B0502040204020203" pitchFamily="34" charset="0"/>
+              </a:rPr>
+              <a:t>sistemlerine</a:t>
+            </a:r>
+            <a:r>
+              <a:rPr kumimoji="0" lang="en-US" altLang="en-US" sz="2400" b="0" i="0" u="none" strike="noStrike" cap="none" normalizeH="0" baseline="0" dirty="0">
                 <a:ln>
                   <a:noFill/>
                 </a:ln>
@@ -22372,12 +22693,12 @@
                   <a:schemeClr val="tx1"/>
                 </a:solidFill>
                 <a:effectLst/>
-                <a:latin typeface="Bahnschrift Light SemiCondensed" panose="020B0502040204020203" pitchFamily="34" charset="0"/>
-              </a:rPr>
-              <a:t>müşteri</a:t>
-            </a:r>
-            <a:r>
-              <a:rPr kumimoji="0" lang="en-US" altLang="en-US" sz="2400" b="0" i="0" u="none" strike="noStrike" cap="none" normalizeH="0" baseline="0" dirty="0" smtClean="0">
+                <a:latin typeface="Bahnschrift Light" panose="020B0502040204020203" pitchFamily="34" charset="0"/>
+              </a:rPr>
+              <a:t> </a:t>
+            </a:r>
+            <a:r>
+              <a:rPr kumimoji="0" lang="en-US" altLang="en-US" sz="2400" b="0" i="0" u="none" strike="noStrike" cap="none" normalizeH="0" baseline="0" dirty="0" err="1">
                 <a:ln>
                   <a:noFill/>
                 </a:ln>
@@ -22385,12 +22706,12 @@
                   <a:schemeClr val="tx1"/>
                 </a:solidFill>
                 <a:effectLst/>
-                <a:latin typeface="Bahnschrift Light SemiCondensed" panose="020B0502040204020203" pitchFamily="34" charset="0"/>
-              </a:rPr>
-              <a:t> </a:t>
-            </a:r>
-            <a:r>
-              <a:rPr kumimoji="0" lang="en-US" altLang="en-US" sz="2400" b="0" i="0" u="none" strike="noStrike" cap="none" normalizeH="0" baseline="0" dirty="0" err="1" smtClean="0">
+                <a:latin typeface="Bahnschrift Light" panose="020B0502040204020203" pitchFamily="34" charset="0"/>
+              </a:rPr>
+              <a:t>ihtiyaç</a:t>
+            </a:r>
+            <a:r>
+              <a:rPr kumimoji="0" lang="en-US" altLang="en-US" sz="2400" b="0" i="0" u="none" strike="noStrike" cap="none" normalizeH="0" baseline="0" dirty="0">
                 <a:ln>
                   <a:noFill/>
                 </a:ln>
@@ -22398,39 +22719,12 @@
                   <a:schemeClr val="tx1"/>
                 </a:solidFill>
                 <a:effectLst/>
-                <a:latin typeface="Bahnschrift Light SemiCondensed" panose="020B0502040204020203" pitchFamily="34" charset="0"/>
-              </a:rPr>
-              <a:t>memnuniyetini</a:t>
-            </a:r>
-            <a:endParaRPr kumimoji="0" lang="tr-TR" altLang="en-US" sz="2400" b="0" i="0" u="none" strike="noStrike" cap="none" normalizeH="0" baseline="0" dirty="0" smtClean="0">
-              <a:ln>
-                <a:noFill/>
-              </a:ln>
-              <a:solidFill>
-                <a:schemeClr val="tx1"/>
-              </a:solidFill>
-              <a:effectLst/>
-              <a:latin typeface="Bahnschrift Light SemiCondensed" panose="020B0502040204020203" pitchFamily="34" charset="0"/>
-            </a:endParaRPr>
-          </a:p>
-          <a:p>
-            <a:pPr marL="0" marR="0" lvl="0" indent="0" algn="l" defTabSz="914400" rtl="0" eaLnBrk="0" fontAlgn="base" latinLnBrk="0" hangingPunct="0">
-              <a:lnSpc>
-                <a:spcPct val="100000"/>
-              </a:lnSpc>
-              <a:spcBef>
-                <a:spcPct val="0"/>
-              </a:spcBef>
-              <a:spcAft>
-                <a:spcPct val="0"/>
-              </a:spcAft>
-              <a:buClrTx/>
-              <a:buSzTx/>
-              <a:buNone/>
-              <a:tabLst/>
-            </a:pPr>
-            <a:r>
-              <a:rPr kumimoji="0" lang="en-US" altLang="en-US" sz="2400" b="0" i="0" u="none" strike="noStrike" cap="none" normalizeH="0" baseline="0" dirty="0" smtClean="0">
+                <a:latin typeface="Bahnschrift Light" panose="020B0502040204020203" pitchFamily="34" charset="0"/>
+              </a:rPr>
+              <a:t> </a:t>
+            </a:r>
+            <a:r>
+              <a:rPr kumimoji="0" lang="en-US" altLang="en-US" sz="2400" b="0" i="0" u="none" strike="noStrike" cap="none" normalizeH="0" baseline="0" dirty="0" err="1">
                 <a:ln>
                   <a:noFill/>
                 </a:ln>
@@ -22438,12 +22732,12 @@
                   <a:schemeClr val="tx1"/>
                 </a:solidFill>
                 <a:effectLst/>
-                <a:latin typeface="Bahnschrift Light SemiCondensed" panose="020B0502040204020203" pitchFamily="34" charset="0"/>
-              </a:rPr>
-              <a:t> </a:t>
-            </a:r>
-            <a:r>
-              <a:rPr kumimoji="0" lang="en-US" altLang="en-US" sz="2400" b="0" i="0" u="none" strike="noStrike" cap="none" normalizeH="0" baseline="0" dirty="0" err="1" smtClean="0">
+                <a:latin typeface="Bahnschrift Light" panose="020B0502040204020203" pitchFamily="34" charset="0"/>
+              </a:rPr>
+              <a:t>vardır</a:t>
+            </a:r>
+            <a:r>
+              <a:rPr kumimoji="0" lang="en-US" altLang="en-US" sz="2400" b="0" i="0" u="none" strike="noStrike" cap="none" normalizeH="0" baseline="0" dirty="0">
                 <a:ln>
                   <a:noFill/>
                 </a:ln>
@@ -22451,244 +22745,7 @@
                   <a:schemeClr val="tx1"/>
                 </a:solidFill>
                 <a:effectLst/>
-                <a:latin typeface="Bahnschrift Light SemiCondensed" panose="020B0502040204020203" pitchFamily="34" charset="0"/>
-              </a:rPr>
-              <a:t>düşürmektedir</a:t>
-            </a:r>
-            <a:r>
-              <a:rPr kumimoji="0" lang="en-US" altLang="en-US" sz="2400" b="0" i="0" u="none" strike="noStrike" cap="none" normalizeH="0" baseline="0" dirty="0" smtClean="0">
-                <a:ln>
-                  <a:noFill/>
-                </a:ln>
-                <a:solidFill>
-                  <a:schemeClr val="tx1"/>
-                </a:solidFill>
-                <a:effectLst/>
-                <a:latin typeface="Bahnschrift Light SemiCondensed" panose="020B0502040204020203" pitchFamily="34" charset="0"/>
-              </a:rPr>
-              <a:t>. </a:t>
-            </a:r>
-            <a:endParaRPr kumimoji="0" lang="tr-TR" altLang="en-US" sz="2400" b="0" i="0" u="none" strike="noStrike" cap="none" normalizeH="0" baseline="0" dirty="0" smtClean="0">
-              <a:ln>
-                <a:noFill/>
-              </a:ln>
-              <a:solidFill>
-                <a:schemeClr val="tx1"/>
-              </a:solidFill>
-              <a:effectLst/>
-              <a:latin typeface="Bahnschrift Light SemiCondensed" panose="020B0502040204020203" pitchFamily="34" charset="0"/>
-            </a:endParaRPr>
-          </a:p>
-          <a:p>
-            <a:pPr marL="0" marR="0" lvl="0" indent="0" algn="l" defTabSz="914400" rtl="0" eaLnBrk="0" fontAlgn="base" latinLnBrk="0" hangingPunct="0">
-              <a:lnSpc>
-                <a:spcPct val="100000"/>
-              </a:lnSpc>
-              <a:spcBef>
-                <a:spcPct val="0"/>
-              </a:spcBef>
-              <a:spcAft>
-                <a:spcPct val="0"/>
-              </a:spcAft>
-              <a:buClrTx/>
-              <a:buSzTx/>
-              <a:buNone/>
-              <a:tabLst/>
-            </a:pPr>
-            <a:endParaRPr kumimoji="0" lang="en-US" altLang="en-US" sz="2400" b="0" i="0" u="none" strike="noStrike" cap="none" normalizeH="0" baseline="0" dirty="0" smtClean="0">
-              <a:ln>
-                <a:noFill/>
-              </a:ln>
-              <a:solidFill>
-                <a:schemeClr val="tx1"/>
-              </a:solidFill>
-              <a:effectLst/>
-              <a:latin typeface="Bahnschrift Light SemiCondensed" panose="020B0502040204020203" pitchFamily="34" charset="0"/>
-            </a:endParaRPr>
-          </a:p>
-          <a:p>
-            <a:pPr marL="0" marR="0" lvl="0" indent="0" algn="l" defTabSz="914400" rtl="0" eaLnBrk="0" fontAlgn="base" latinLnBrk="0" hangingPunct="0">
-              <a:lnSpc>
-                <a:spcPct val="100000"/>
-              </a:lnSpc>
-              <a:spcBef>
-                <a:spcPct val="0"/>
-              </a:spcBef>
-              <a:spcAft>
-                <a:spcPct val="0"/>
-              </a:spcAft>
-              <a:buClrTx/>
-              <a:buSzTx/>
-              <a:buFontTx/>
-              <a:buChar char="•"/>
-              <a:tabLst/>
-            </a:pPr>
-            <a:r>
-              <a:rPr kumimoji="0" lang="en-US" altLang="en-US" sz="2400" b="0" i="0" u="none" strike="noStrike" cap="none" normalizeH="0" baseline="0" dirty="0" smtClean="0">
-                <a:ln>
-                  <a:noFill/>
-                </a:ln>
-                <a:solidFill>
-                  <a:schemeClr val="tx1"/>
-                </a:solidFill>
-                <a:effectLst/>
-                <a:latin typeface="Bahnschrift Light SemiCondensed" panose="020B0502040204020203" pitchFamily="34" charset="0"/>
-              </a:rPr>
-              <a:t>Bu </a:t>
-            </a:r>
-            <a:r>
-              <a:rPr kumimoji="0" lang="en-US" altLang="en-US" sz="2400" b="0" i="0" u="none" strike="noStrike" cap="none" normalizeH="0" baseline="0" dirty="0" err="1" smtClean="0">
-                <a:ln>
-                  <a:noFill/>
-                </a:ln>
-                <a:solidFill>
-                  <a:schemeClr val="tx1"/>
-                </a:solidFill>
-                <a:effectLst/>
-                <a:latin typeface="Bahnschrift Light SemiCondensed" panose="020B0502040204020203" pitchFamily="34" charset="0"/>
-              </a:rPr>
-              <a:t>nedenle</a:t>
-            </a:r>
-            <a:r>
-              <a:rPr kumimoji="0" lang="en-US" altLang="en-US" sz="2400" b="0" i="0" u="none" strike="noStrike" cap="none" normalizeH="0" baseline="0" dirty="0" smtClean="0">
-                <a:ln>
-                  <a:noFill/>
-                </a:ln>
-                <a:solidFill>
-                  <a:schemeClr val="tx1"/>
-                </a:solidFill>
-                <a:effectLst/>
-                <a:latin typeface="Bahnschrift Light SemiCondensed" panose="020B0502040204020203" pitchFamily="34" charset="0"/>
-              </a:rPr>
-              <a:t> </a:t>
-            </a:r>
-            <a:r>
-              <a:rPr kumimoji="0" lang="en-US" altLang="en-US" sz="2400" b="0" i="0" u="none" strike="noStrike" cap="none" normalizeH="0" baseline="0" dirty="0" err="1" smtClean="0">
-                <a:ln>
-                  <a:noFill/>
-                </a:ln>
-                <a:solidFill>
-                  <a:schemeClr val="tx1"/>
-                </a:solidFill>
-                <a:effectLst/>
-                <a:latin typeface="Bahnschrift Light SemiCondensed" panose="020B0502040204020203" pitchFamily="34" charset="0"/>
-              </a:rPr>
-              <a:t>otomatik</a:t>
-            </a:r>
-            <a:r>
-              <a:rPr kumimoji="0" lang="en-US" altLang="en-US" sz="2400" b="0" i="0" u="none" strike="noStrike" cap="none" normalizeH="0" baseline="0" dirty="0" smtClean="0">
-                <a:ln>
-                  <a:noFill/>
-                </a:ln>
-                <a:solidFill>
-                  <a:schemeClr val="tx1"/>
-                </a:solidFill>
-                <a:effectLst/>
-                <a:latin typeface="Bahnschrift Light SemiCondensed" panose="020B0502040204020203" pitchFamily="34" charset="0"/>
-              </a:rPr>
-              <a:t> </a:t>
-            </a:r>
-            <a:r>
-              <a:rPr kumimoji="0" lang="en-US" altLang="en-US" sz="2400" b="0" i="0" u="none" strike="noStrike" cap="none" normalizeH="0" baseline="0" dirty="0" err="1" smtClean="0">
-                <a:ln>
-                  <a:noFill/>
-                </a:ln>
-                <a:solidFill>
-                  <a:schemeClr val="tx1"/>
-                </a:solidFill>
-                <a:effectLst/>
-                <a:latin typeface="Bahnschrift Light SemiCondensed" panose="020B0502040204020203" pitchFamily="34" charset="0"/>
-              </a:rPr>
-              <a:t>sınıflandırma</a:t>
-            </a:r>
-            <a:r>
-              <a:rPr kumimoji="0" lang="en-US" altLang="en-US" sz="2400" b="0" i="0" u="none" strike="noStrike" cap="none" normalizeH="0" baseline="0" dirty="0" smtClean="0">
-                <a:ln>
-                  <a:noFill/>
-                </a:ln>
-                <a:solidFill>
-                  <a:schemeClr val="tx1"/>
-                </a:solidFill>
-                <a:effectLst/>
-                <a:latin typeface="Bahnschrift Light SemiCondensed" panose="020B0502040204020203" pitchFamily="34" charset="0"/>
-              </a:rPr>
-              <a:t> </a:t>
-            </a:r>
-            <a:r>
-              <a:rPr kumimoji="0" lang="en-US" altLang="en-US" sz="2400" b="0" i="0" u="none" strike="noStrike" cap="none" normalizeH="0" baseline="0" dirty="0" err="1" smtClean="0">
-                <a:ln>
-                  <a:noFill/>
-                </a:ln>
-                <a:solidFill>
-                  <a:schemeClr val="tx1"/>
-                </a:solidFill>
-                <a:effectLst/>
-                <a:latin typeface="Bahnschrift Light SemiCondensed" panose="020B0502040204020203" pitchFamily="34" charset="0"/>
-              </a:rPr>
-              <a:t>sistemlerine</a:t>
-            </a:r>
-            <a:r>
-              <a:rPr kumimoji="0" lang="en-US" altLang="en-US" sz="2400" b="0" i="0" u="none" strike="noStrike" cap="none" normalizeH="0" baseline="0" dirty="0" smtClean="0">
-                <a:ln>
-                  <a:noFill/>
-                </a:ln>
-                <a:solidFill>
-                  <a:schemeClr val="tx1"/>
-                </a:solidFill>
-                <a:effectLst/>
-                <a:latin typeface="Bahnschrift Light SemiCondensed" panose="020B0502040204020203" pitchFamily="34" charset="0"/>
-              </a:rPr>
-              <a:t> </a:t>
-            </a:r>
-            <a:r>
-              <a:rPr kumimoji="0" lang="en-US" altLang="en-US" sz="2400" b="0" i="0" u="none" strike="noStrike" cap="none" normalizeH="0" baseline="0" dirty="0" err="1" smtClean="0">
-                <a:ln>
-                  <a:noFill/>
-                </a:ln>
-                <a:solidFill>
-                  <a:schemeClr val="tx1"/>
-                </a:solidFill>
-                <a:effectLst/>
-                <a:latin typeface="Bahnschrift Light SemiCondensed" panose="020B0502040204020203" pitchFamily="34" charset="0"/>
-              </a:rPr>
-              <a:t>ihtiyaç</a:t>
-            </a:r>
-            <a:r>
-              <a:rPr kumimoji="0" lang="en-US" altLang="en-US" sz="2400" b="0" i="0" u="none" strike="noStrike" cap="none" normalizeH="0" baseline="0" dirty="0" smtClean="0">
-                <a:ln>
-                  <a:noFill/>
-                </a:ln>
-                <a:solidFill>
-                  <a:schemeClr val="tx1"/>
-                </a:solidFill>
-                <a:effectLst/>
-                <a:latin typeface="Bahnschrift Light SemiCondensed" panose="020B0502040204020203" pitchFamily="34" charset="0"/>
-              </a:rPr>
-              <a:t> </a:t>
-            </a:r>
-            <a:r>
-              <a:rPr kumimoji="0" lang="en-US" altLang="en-US" sz="2400" b="0" i="0" u="none" strike="noStrike" cap="none" normalizeH="0" baseline="0" dirty="0" err="1" smtClean="0">
-                <a:ln>
-                  <a:noFill/>
-                </a:ln>
-                <a:solidFill>
-                  <a:schemeClr val="tx1"/>
-                </a:solidFill>
-                <a:effectLst/>
-                <a:latin typeface="Bahnschrift Light SemiCondensed" panose="020B0502040204020203" pitchFamily="34" charset="0"/>
-              </a:rPr>
-              <a:t>vardır</a:t>
-            </a:r>
-            <a:r>
-              <a:rPr kumimoji="0" lang="en-US" altLang="en-US" sz="2400" b="0" i="0" u="none" strike="noStrike" cap="none" normalizeH="0" baseline="0" dirty="0" smtClean="0">
-                <a:ln>
-                  <a:noFill/>
-                </a:ln>
-                <a:solidFill>
-                  <a:schemeClr val="tx1"/>
-                </a:solidFill>
-                <a:effectLst/>
-                <a:latin typeface="Bahnschrift Light SemiCondensed" panose="020B0502040204020203" pitchFamily="34" charset="0"/>
+                <a:latin typeface="Bahnschrift Light" panose="020B0502040204020203" pitchFamily="34" charset="0"/>
               </a:rPr>
               <a:t>. </a:t>
             </a:r>
@@ -22813,8 +22870,8 @@
               </a:rPr>
               <a:t> </a:t>
             </a:r>
-            <a:r>
-              <a:rPr lang="tr-TR" dirty="0" smtClean="0">
+            <a:br>
+              <a:rPr lang="tr-TR" dirty="0">
                 <a:solidFill>
                   <a:schemeClr val="accent2">
                     <a:lumMod val="50000"/>
@@ -22822,10 +22879,9 @@
                 </a:solidFill>
                 <a:latin typeface="Bookman Old Style" panose="02050604050505020204" pitchFamily="18" charset="0"/>
               </a:rPr>
-              <a:t/>
-            </a:r>
-            <a:br>
-              <a:rPr lang="tr-TR" dirty="0" smtClean="0">
+            </a:br>
+            <a:r>
+              <a:rPr lang="en-US" dirty="0" err="1">
                 <a:solidFill>
                   <a:schemeClr val="accent2">
                     <a:lumMod val="50000"/>
@@ -22833,21 +22889,7 @@
                 </a:solidFill>
                 <a:latin typeface="Bookman Old Style" panose="02050604050505020204" pitchFamily="18" charset="0"/>
               </a:rPr>
-            </a:br>
-            <a:r>
-              <a:rPr lang="en-US" dirty="0" err="1" smtClean="0">
-                <a:solidFill>
-                  <a:schemeClr val="accent2">
-                    <a:lumMod val="50000"/>
-                  </a:schemeClr>
-                </a:solidFill>
-                <a:latin typeface="Bookman Old Style" panose="02050604050505020204" pitchFamily="18" charset="0"/>
-              </a:rPr>
               <a:t>Teknolojiler</a:t>
-            </a:r>
-            <a:r>
-              <a:rPr lang="en-US" b="1" dirty="0"/>
-              <a:t/>
             </a:r>
             <a:br>
               <a:rPr lang="en-US" b="1" dirty="0"/>
@@ -22874,21 +22916,21 @@
           <a:lstStyle/>
           <a:p>
             <a:r>
-              <a:rPr lang="tr-TR" sz="2000" dirty="0" smtClean="0">
+              <a:rPr lang="tr-TR" sz="2000" dirty="0">
                 <a:latin typeface="Bahnschrift Light SemiCondensed" panose="020B0502040204020203" pitchFamily="34" charset="0"/>
                 <a:cs typeface="Arial" panose="020B0604020202020204" pitchFamily="34" charset="0"/>
               </a:rPr>
               <a:t>- </a:t>
             </a:r>
             <a:r>
-              <a:rPr lang="en-US" sz="2000" dirty="0" err="1" smtClean="0">
+              <a:rPr lang="en-US" sz="2000" dirty="0" err="1">
                 <a:latin typeface="Bahnschrift Light SemiCondensed" panose="020B0502040204020203" pitchFamily="34" charset="0"/>
                 <a:cs typeface="Arial" panose="020B0604020202020204" pitchFamily="34" charset="0"/>
               </a:rPr>
               <a:t>Müşteri</a:t>
             </a:r>
             <a:r>
-              <a:rPr lang="en-US" sz="2000" dirty="0" smtClean="0">
+              <a:rPr lang="en-US" sz="2000" dirty="0">
                 <a:latin typeface="Bahnschrift Light SemiCondensed" panose="020B0502040204020203" pitchFamily="34" charset="0"/>
                 <a:cs typeface="Arial" panose="020B0604020202020204" pitchFamily="34" charset="0"/>
               </a:rPr>
@@ -22939,21 +22981,21 @@
           </a:p>
           <a:p>
             <a:r>
-              <a:rPr lang="tr-TR" sz="2000" dirty="0" smtClean="0">
+              <a:rPr lang="tr-TR" sz="2000" dirty="0">
                 <a:latin typeface="Bahnschrift Light SemiCondensed" panose="020B0502040204020203" pitchFamily="34" charset="0"/>
                 <a:cs typeface="Arial" panose="020B0604020202020204" pitchFamily="34" charset="0"/>
               </a:rPr>
               <a:t>- </a:t>
             </a:r>
             <a:r>
-              <a:rPr lang="en-US" sz="2000" dirty="0" err="1" smtClean="0">
+              <a:rPr lang="en-US" sz="2000" dirty="0" err="1">
                 <a:latin typeface="Bahnschrift Light SemiCondensed" panose="020B0502040204020203" pitchFamily="34" charset="0"/>
                 <a:cs typeface="Arial" panose="020B0604020202020204" pitchFamily="34" charset="0"/>
               </a:rPr>
               <a:t>Doğru</a:t>
             </a:r>
             <a:r>
-              <a:rPr lang="en-US" sz="2000" dirty="0" smtClean="0">
+              <a:rPr lang="en-US" sz="2000" dirty="0">
                 <a:latin typeface="Bahnschrift Light SemiCondensed" panose="020B0502040204020203" pitchFamily="34" charset="0"/>
                 <a:cs typeface="Arial" panose="020B0604020202020204" pitchFamily="34" charset="0"/>
               </a:rPr>
@@ -22990,21 +23032,21 @@
           </a:p>
           <a:p>
             <a:r>
-              <a:rPr lang="tr-TR" sz="2000" dirty="0" smtClean="0">
+              <a:rPr lang="tr-TR" sz="2000" dirty="0">
                 <a:latin typeface="Bahnschrift Light SemiCondensed" panose="020B0502040204020203" pitchFamily="34" charset="0"/>
                 <a:cs typeface="Arial" panose="020B0604020202020204" pitchFamily="34" charset="0"/>
               </a:rPr>
               <a:t>- </a:t>
             </a:r>
             <a:r>
-              <a:rPr lang="en-US" sz="2000" dirty="0" err="1" smtClean="0">
+              <a:rPr lang="en-US" sz="2000" dirty="0" err="1">
                 <a:latin typeface="Bahnschrift Light SemiCondensed" panose="020B0502040204020203" pitchFamily="34" charset="0"/>
                 <a:cs typeface="Arial" panose="020B0604020202020204" pitchFamily="34" charset="0"/>
               </a:rPr>
               <a:t>Süreci</a:t>
             </a:r>
             <a:r>
-              <a:rPr lang="en-US" sz="2000" dirty="0" smtClean="0">
+              <a:rPr lang="en-US" sz="2000" dirty="0">
                 <a:latin typeface="Bahnschrift Light SemiCondensed" panose="020B0502040204020203" pitchFamily="34" charset="0"/>
                 <a:cs typeface="Arial" panose="020B0604020202020204" pitchFamily="34" charset="0"/>
               </a:rPr>
@@ -23287,7 +23329,7 @@
           <a:lstStyle/>
           <a:p>
             <a:r>
-              <a:rPr lang="tr-TR" dirty="0" smtClean="0">
+              <a:rPr lang="tr-TR" dirty="0">
                 <a:solidFill>
                   <a:schemeClr val="accent2">
                     <a:lumMod val="50000"/>
@@ -23325,392 +23367,397 @@
           <a:p>
             <a:pPr lvl="1"/>
             <a:r>
-              <a:rPr lang="en-US" dirty="0" smtClean="0">
-                <a:latin typeface="Bahnschrift Light SemiCondensed" panose="020B0502040204020203" pitchFamily="34" charset="0"/>
-                <a:cs typeface="Arial" panose="020B0604020202020204" pitchFamily="34" charset="0"/>
+              <a:rPr lang="en-US" dirty="0">
+                <a:latin typeface="Bahnschrift Light" panose="020B0502040204020203" pitchFamily="34" charset="0"/>
               </a:rPr>
               <a:t>Bu </a:t>
             </a:r>
             <a:r>
               <a:rPr lang="en-US" dirty="0" err="1">
-                <a:latin typeface="Bahnschrift Light SemiCondensed" panose="020B0502040204020203" pitchFamily="34" charset="0"/>
-                <a:cs typeface="Arial" panose="020B0604020202020204" pitchFamily="34" charset="0"/>
+                <a:latin typeface="Bahnschrift Light" panose="020B0502040204020203" pitchFamily="34" charset="0"/>
               </a:rPr>
               <a:t>çalışmada</a:t>
             </a:r>
             <a:r>
               <a:rPr lang="en-US" dirty="0">
-                <a:latin typeface="Bahnschrift Light SemiCondensed" panose="020B0502040204020203" pitchFamily="34" charset="0"/>
-                <a:cs typeface="Arial" panose="020B0604020202020204" pitchFamily="34" charset="0"/>
+                <a:latin typeface="Bahnschrift Light" panose="020B0502040204020203" pitchFamily="34" charset="0"/>
               </a:rPr>
               <a:t>, </a:t>
             </a:r>
             <a:r>
               <a:rPr lang="en-US" dirty="0" err="1">
-                <a:latin typeface="Bahnschrift Light SemiCondensed" panose="020B0502040204020203" pitchFamily="34" charset="0"/>
-                <a:cs typeface="Arial" panose="020B0604020202020204" pitchFamily="34" charset="0"/>
-              </a:rPr>
-              <a:t>müşteri</a:t>
+                <a:latin typeface="Bahnschrift Light" panose="020B0502040204020203" pitchFamily="34" charset="0"/>
+              </a:rPr>
+              <a:t>vatandaşlardan</a:t>
             </a:r>
             <a:r>
               <a:rPr lang="en-US" dirty="0">
-                <a:latin typeface="Bahnschrift Light SemiCondensed" panose="020B0502040204020203" pitchFamily="34" charset="0"/>
-                <a:cs typeface="Arial" panose="020B0604020202020204" pitchFamily="34" charset="0"/>
+                <a:latin typeface="Bahnschrift Light" panose="020B0502040204020203" pitchFamily="34" charset="0"/>
               </a:rPr>
               <a:t> </a:t>
             </a:r>
             <a:r>
               <a:rPr lang="en-US" dirty="0" err="1">
-                <a:latin typeface="Bahnschrift Light SemiCondensed" panose="020B0502040204020203" pitchFamily="34" charset="0"/>
-                <a:cs typeface="Arial" panose="020B0604020202020204" pitchFamily="34" charset="0"/>
-              </a:rPr>
-              <a:t>şikayetlerini</a:t>
+                <a:latin typeface="Bahnschrift Light" panose="020B0502040204020203" pitchFamily="34" charset="0"/>
+              </a:rPr>
+              <a:t>belediyelere</a:t>
             </a:r>
             <a:r>
               <a:rPr lang="en-US" dirty="0">
-                <a:latin typeface="Bahnschrift Light SemiCondensed" panose="020B0502040204020203" pitchFamily="34" charset="0"/>
-                <a:cs typeface="Arial" panose="020B0604020202020204" pitchFamily="34" charset="0"/>
+                <a:latin typeface="Bahnschrift Light" panose="020B0502040204020203" pitchFamily="34" charset="0"/>
               </a:rPr>
               <a:t> </a:t>
             </a:r>
             <a:r>
               <a:rPr lang="en-US" dirty="0" err="1">
-                <a:latin typeface="Bahnschrift Light SemiCondensed" panose="020B0502040204020203" pitchFamily="34" charset="0"/>
-                <a:cs typeface="Arial" panose="020B0604020202020204" pitchFamily="34" charset="0"/>
+                <a:latin typeface="Bahnschrift Light" panose="020B0502040204020203" pitchFamily="34" charset="0"/>
+              </a:rPr>
+              <a:t>iletilen</a:t>
+            </a:r>
+            <a:r>
+              <a:rPr lang="en-US" dirty="0">
+                <a:latin typeface="Bahnschrift Light" panose="020B0502040204020203" pitchFamily="34" charset="0"/>
+              </a:rPr>
+              <a:t> </a:t>
+            </a:r>
+            <a:r>
+              <a:rPr lang="en-US" dirty="0" err="1">
+                <a:latin typeface="Bahnschrift Light" panose="020B0502040204020203" pitchFamily="34" charset="0"/>
+              </a:rPr>
+              <a:t>şikayetleri</a:t>
+            </a:r>
+            <a:r>
+              <a:rPr lang="en-US" dirty="0">
+                <a:latin typeface="Bahnschrift Light" panose="020B0502040204020203" pitchFamily="34" charset="0"/>
+              </a:rPr>
+              <a:t> </a:t>
+            </a:r>
+            <a:r>
+              <a:rPr lang="en-US" dirty="0" err="1">
+                <a:latin typeface="Bahnschrift Light" panose="020B0502040204020203" pitchFamily="34" charset="0"/>
               </a:rPr>
               <a:t>içeren</a:t>
             </a:r>
             <a:r>
               <a:rPr lang="en-US" dirty="0">
-                <a:latin typeface="Bahnschrift Light SemiCondensed" panose="020B0502040204020203" pitchFamily="34" charset="0"/>
-                <a:cs typeface="Arial" panose="020B0604020202020204" pitchFamily="34" charset="0"/>
+                <a:latin typeface="Bahnschrift Light" panose="020B0502040204020203" pitchFamily="34" charset="0"/>
               </a:rPr>
               <a:t> </a:t>
             </a:r>
             <a:r>
               <a:rPr lang="en-US" dirty="0" err="1">
-                <a:latin typeface="Bahnschrift Light SemiCondensed" panose="020B0502040204020203" pitchFamily="34" charset="0"/>
-                <a:cs typeface="Arial" panose="020B0604020202020204" pitchFamily="34" charset="0"/>
+                <a:latin typeface="Bahnschrift Light" panose="020B0502040204020203" pitchFamily="34" charset="0"/>
               </a:rPr>
               <a:t>etiketli</a:t>
             </a:r>
             <a:r>
               <a:rPr lang="en-US" dirty="0">
-                <a:latin typeface="Bahnschrift Light SemiCondensed" panose="020B0502040204020203" pitchFamily="34" charset="0"/>
-                <a:cs typeface="Arial" panose="020B0604020202020204" pitchFamily="34" charset="0"/>
+                <a:latin typeface="Bahnschrift Light" panose="020B0502040204020203" pitchFamily="34" charset="0"/>
               </a:rPr>
               <a:t> </a:t>
             </a:r>
             <a:r>
               <a:rPr lang="en-US" dirty="0" err="1">
-                <a:latin typeface="Bahnschrift Light SemiCondensed" panose="020B0502040204020203" pitchFamily="34" charset="0"/>
-                <a:cs typeface="Arial" panose="020B0604020202020204" pitchFamily="34" charset="0"/>
+                <a:latin typeface="Bahnschrift Light" panose="020B0502040204020203" pitchFamily="34" charset="0"/>
               </a:rPr>
               <a:t>bir</a:t>
             </a:r>
             <a:r>
               <a:rPr lang="en-US" dirty="0">
-                <a:latin typeface="Bahnschrift Light SemiCondensed" panose="020B0502040204020203" pitchFamily="34" charset="0"/>
-                <a:cs typeface="Arial" panose="020B0604020202020204" pitchFamily="34" charset="0"/>
+                <a:latin typeface="Bahnschrift Light" panose="020B0502040204020203" pitchFamily="34" charset="0"/>
               </a:rPr>
               <a:t> </a:t>
             </a:r>
             <a:r>
               <a:rPr lang="en-US" dirty="0" err="1">
-                <a:latin typeface="Bahnschrift Light SemiCondensed" panose="020B0502040204020203" pitchFamily="34" charset="0"/>
-                <a:cs typeface="Arial" panose="020B0604020202020204" pitchFamily="34" charset="0"/>
+                <a:latin typeface="Bahnschrift Light" panose="020B0502040204020203" pitchFamily="34" charset="0"/>
               </a:rPr>
               <a:t>metin</a:t>
             </a:r>
             <a:r>
               <a:rPr lang="en-US" dirty="0">
-                <a:latin typeface="Bahnschrift Light SemiCondensed" panose="020B0502040204020203" pitchFamily="34" charset="0"/>
-                <a:cs typeface="Arial" panose="020B0604020202020204" pitchFamily="34" charset="0"/>
+                <a:latin typeface="Bahnschrift Light" panose="020B0502040204020203" pitchFamily="34" charset="0"/>
               </a:rPr>
               <a:t> </a:t>
             </a:r>
             <a:r>
               <a:rPr lang="en-US" dirty="0" err="1">
-                <a:latin typeface="Bahnschrift Light SemiCondensed" panose="020B0502040204020203" pitchFamily="34" charset="0"/>
-                <a:cs typeface="Arial" panose="020B0604020202020204" pitchFamily="34" charset="0"/>
+                <a:latin typeface="Bahnschrift Light" panose="020B0502040204020203" pitchFamily="34" charset="0"/>
               </a:rPr>
               <a:t>veri</a:t>
             </a:r>
             <a:r>
               <a:rPr lang="en-US" dirty="0">
-                <a:latin typeface="Bahnschrift Light SemiCondensed" panose="020B0502040204020203" pitchFamily="34" charset="0"/>
-                <a:cs typeface="Arial" panose="020B0604020202020204" pitchFamily="34" charset="0"/>
+                <a:latin typeface="Bahnschrift Light" panose="020B0502040204020203" pitchFamily="34" charset="0"/>
               </a:rPr>
               <a:t> </a:t>
             </a:r>
             <a:r>
               <a:rPr lang="en-US" dirty="0" err="1">
-                <a:latin typeface="Bahnschrift Light SemiCondensed" panose="020B0502040204020203" pitchFamily="34" charset="0"/>
-                <a:cs typeface="Arial" panose="020B0604020202020204" pitchFamily="34" charset="0"/>
+                <a:latin typeface="Bahnschrift Light" panose="020B0502040204020203" pitchFamily="34" charset="0"/>
               </a:rPr>
               <a:t>seti</a:t>
             </a:r>
             <a:r>
               <a:rPr lang="en-US" dirty="0">
-                <a:latin typeface="Bahnschrift Light SemiCondensed" panose="020B0502040204020203" pitchFamily="34" charset="0"/>
-                <a:cs typeface="Arial" panose="020B0604020202020204" pitchFamily="34" charset="0"/>
+                <a:latin typeface="Bahnschrift Light" panose="020B0502040204020203" pitchFamily="34" charset="0"/>
               </a:rPr>
               <a:t> </a:t>
             </a:r>
             <a:r>
               <a:rPr lang="en-US" dirty="0" err="1">
-                <a:latin typeface="Bahnschrift Light SemiCondensed" panose="020B0502040204020203" pitchFamily="34" charset="0"/>
-                <a:cs typeface="Arial" panose="020B0604020202020204" pitchFamily="34" charset="0"/>
+                <a:latin typeface="Bahnschrift Light" panose="020B0502040204020203" pitchFamily="34" charset="0"/>
               </a:rPr>
               <a:t>kullanılmıştır</a:t>
             </a:r>
             <a:r>
               <a:rPr lang="en-US" dirty="0">
-                <a:latin typeface="Bahnschrift Light SemiCondensed" panose="020B0502040204020203" pitchFamily="34" charset="0"/>
-                <a:cs typeface="Arial" panose="020B0604020202020204" pitchFamily="34" charset="0"/>
-              </a:rPr>
-              <a:t>. </a:t>
+                <a:latin typeface="Bahnschrift Light" panose="020B0502040204020203" pitchFamily="34" charset="0"/>
+              </a:rPr>
+              <a:t>. Veri </a:t>
             </a:r>
             <a:r>
               <a:rPr lang="en-US" dirty="0" err="1">
-                <a:latin typeface="Bahnschrift Light SemiCondensed" panose="020B0502040204020203" pitchFamily="34" charset="0"/>
-                <a:cs typeface="Arial" panose="020B0604020202020204" pitchFamily="34" charset="0"/>
-              </a:rPr>
-              <a:t>Veri</a:t>
+                <a:latin typeface="Bahnschrift Light" panose="020B0502040204020203" pitchFamily="34" charset="0"/>
+              </a:rPr>
+              <a:t>seti</a:t>
             </a:r>
             <a:r>
               <a:rPr lang="en-US" dirty="0">
-                <a:latin typeface="Bahnschrift Light SemiCondensed" panose="020B0502040204020203" pitchFamily="34" charset="0"/>
-                <a:cs typeface="Arial" panose="020B0604020202020204" pitchFamily="34" charset="0"/>
-              </a:rPr>
-              <a:t> </a:t>
+                <a:latin typeface="Bahnschrift Light" panose="020B0502040204020203" pitchFamily="34" charset="0"/>
+              </a:rPr>
+              <a:t>, </a:t>
             </a:r>
             <a:r>
               <a:rPr lang="en-US" dirty="0" err="1">
-                <a:latin typeface="Bahnschrift Light SemiCondensed" panose="020B0502040204020203" pitchFamily="34" charset="0"/>
-                <a:cs typeface="Arial" panose="020B0604020202020204" pitchFamily="34" charset="0"/>
-              </a:rPr>
-              <a:t>seti</a:t>
+                <a:latin typeface="Bahnschrift Light" panose="020B0502040204020203" pitchFamily="34" charset="0"/>
+              </a:rPr>
+              <a:t>farklı</a:t>
             </a:r>
             <a:r>
               <a:rPr lang="en-US" dirty="0">
-                <a:latin typeface="Bahnschrift Light SemiCondensed" panose="020B0502040204020203" pitchFamily="34" charset="0"/>
-                <a:cs typeface="Arial" panose="020B0604020202020204" pitchFamily="34" charset="0"/>
-              </a:rPr>
-              <a:t>, </a:t>
+                <a:latin typeface="Bahnschrift Light" panose="020B0502040204020203" pitchFamily="34" charset="0"/>
+              </a:rPr>
+              <a:t> </a:t>
             </a:r>
             <a:r>
               <a:rPr lang="en-US" dirty="0" err="1">
-                <a:latin typeface="Bahnschrift Light SemiCondensed" panose="020B0502040204020203" pitchFamily="34" charset="0"/>
-                <a:cs typeface="Arial" panose="020B0604020202020204" pitchFamily="34" charset="0"/>
-              </a:rPr>
-              <a:t>farklı</a:t>
+                <a:latin typeface="Bahnschrift Light" panose="020B0502040204020203" pitchFamily="34" charset="0"/>
+              </a:rPr>
+              <a:t>belediye</a:t>
             </a:r>
             <a:r>
               <a:rPr lang="en-US" dirty="0">
-                <a:latin typeface="Bahnschrift Light SemiCondensed" panose="020B0502040204020203" pitchFamily="34" charset="0"/>
-                <a:cs typeface="Arial" panose="020B0604020202020204" pitchFamily="34" charset="0"/>
+                <a:latin typeface="Bahnschrift Light" panose="020B0502040204020203" pitchFamily="34" charset="0"/>
               </a:rPr>
               <a:t> </a:t>
             </a:r>
             <a:r>
               <a:rPr lang="en-US" dirty="0" err="1">
-                <a:latin typeface="Bahnschrift Light SemiCondensed" panose="020B0502040204020203" pitchFamily="34" charset="0"/>
-                <a:cs typeface="Arial" panose="020B0604020202020204" pitchFamily="34" charset="0"/>
-              </a:rPr>
-              <a:t>sektörlerden</a:t>
+                <a:latin typeface="Bahnschrift Light" panose="020B0502040204020203" pitchFamily="34" charset="0"/>
+              </a:rPr>
+              <a:t>hizmet</a:t>
             </a:r>
             <a:r>
               <a:rPr lang="en-US" dirty="0">
-                <a:latin typeface="Bahnschrift Light SemiCondensed" panose="020B0502040204020203" pitchFamily="34" charset="0"/>
-                <a:cs typeface="Arial" panose="020B0604020202020204" pitchFamily="34" charset="0"/>
+                <a:latin typeface="Bahnschrift Light" panose="020B0502040204020203" pitchFamily="34" charset="0"/>
               </a:rPr>
               <a:t> </a:t>
             </a:r>
             <a:r>
               <a:rPr lang="en-US" dirty="0" err="1">
-                <a:latin typeface="Bahnschrift Light SemiCondensed" panose="020B0502040204020203" pitchFamily="34" charset="0"/>
-                <a:cs typeface="Arial" panose="020B0604020202020204" pitchFamily="34" charset="0"/>
+                <a:latin typeface="Bahnschrift Light" panose="020B0502040204020203" pitchFamily="34" charset="0"/>
+              </a:rPr>
+              <a:t>alanlarından</a:t>
+            </a:r>
+            <a:r>
+              <a:rPr lang="en-US" dirty="0">
+                <a:latin typeface="Bahnschrift Light" panose="020B0502040204020203" pitchFamily="34" charset="0"/>
+              </a:rPr>
+              <a:t> </a:t>
+            </a:r>
+            <a:r>
+              <a:rPr lang="en-US" dirty="0" err="1">
+                <a:latin typeface="Bahnschrift Light" panose="020B0502040204020203" pitchFamily="34" charset="0"/>
               </a:rPr>
               <a:t>gelen</a:t>
             </a:r>
             <a:r>
               <a:rPr lang="en-US" dirty="0">
-                <a:latin typeface="Bahnschrift Light SemiCondensed" panose="020B0502040204020203" pitchFamily="34" charset="0"/>
-                <a:cs typeface="Arial" panose="020B0604020202020204" pitchFamily="34" charset="0"/>
+                <a:latin typeface="Bahnschrift Light" panose="020B0502040204020203" pitchFamily="34" charset="0"/>
               </a:rPr>
               <a:t> </a:t>
             </a:r>
             <a:r>
               <a:rPr lang="en-US" dirty="0" err="1">
-                <a:latin typeface="Bahnschrift Light SemiCondensed" panose="020B0502040204020203" pitchFamily="34" charset="0"/>
-                <a:cs typeface="Arial" panose="020B0604020202020204" pitchFamily="34" charset="0"/>
-              </a:rPr>
-              <a:t>müşteri</a:t>
+                <a:latin typeface="Bahnschrift Light" panose="020B0502040204020203" pitchFamily="34" charset="0"/>
+              </a:rPr>
+              <a:t>vatandaş</a:t>
             </a:r>
             <a:r>
               <a:rPr lang="en-US" dirty="0">
-                <a:latin typeface="Bahnschrift Light SemiCondensed" panose="020B0502040204020203" pitchFamily="34" charset="0"/>
-                <a:cs typeface="Arial" panose="020B0604020202020204" pitchFamily="34" charset="0"/>
+                <a:latin typeface="Bahnschrift Light" panose="020B0502040204020203" pitchFamily="34" charset="0"/>
               </a:rPr>
               <a:t> </a:t>
             </a:r>
             <a:r>
               <a:rPr lang="en-US" dirty="0" err="1">
-                <a:latin typeface="Bahnschrift Light SemiCondensed" panose="020B0502040204020203" pitchFamily="34" charset="0"/>
-                <a:cs typeface="Arial" panose="020B0604020202020204" pitchFamily="34" charset="0"/>
+                <a:latin typeface="Bahnschrift Light" panose="020B0502040204020203" pitchFamily="34" charset="0"/>
               </a:rPr>
               <a:t>geri</a:t>
             </a:r>
             <a:r>
               <a:rPr lang="en-US" dirty="0">
-                <a:latin typeface="Bahnschrift Light SemiCondensed" panose="020B0502040204020203" pitchFamily="34" charset="0"/>
-                <a:cs typeface="Arial" panose="020B0604020202020204" pitchFamily="34" charset="0"/>
+                <a:latin typeface="Bahnschrift Light" panose="020B0502040204020203" pitchFamily="34" charset="0"/>
               </a:rPr>
               <a:t> </a:t>
             </a:r>
             <a:r>
               <a:rPr lang="en-US" dirty="0" err="1">
-                <a:latin typeface="Bahnschrift Light SemiCondensed" panose="020B0502040204020203" pitchFamily="34" charset="0"/>
-                <a:cs typeface="Arial" panose="020B0604020202020204" pitchFamily="34" charset="0"/>
+                <a:latin typeface="Bahnschrift Light" panose="020B0502040204020203" pitchFamily="34" charset="0"/>
               </a:rPr>
               <a:t>bildirimlerini</a:t>
             </a:r>
             <a:r>
               <a:rPr lang="en-US" dirty="0">
-                <a:latin typeface="Bahnschrift Light SemiCondensed" panose="020B0502040204020203" pitchFamily="34" charset="0"/>
-                <a:cs typeface="Arial" panose="020B0604020202020204" pitchFamily="34" charset="0"/>
+                <a:latin typeface="Bahnschrift Light" panose="020B0502040204020203" pitchFamily="34" charset="0"/>
               </a:rPr>
               <a:t> </a:t>
             </a:r>
             <a:r>
               <a:rPr lang="en-US" dirty="0" err="1">
-                <a:latin typeface="Bahnschrift Light SemiCondensed" panose="020B0502040204020203" pitchFamily="34" charset="0"/>
-                <a:cs typeface="Arial" panose="020B0604020202020204" pitchFamily="34" charset="0"/>
+                <a:latin typeface="Bahnschrift Light" panose="020B0502040204020203" pitchFamily="34" charset="0"/>
               </a:rPr>
               <a:t>kapsamakta</a:t>
             </a:r>
             <a:r>
               <a:rPr lang="en-US" dirty="0">
-                <a:latin typeface="Bahnschrift Light SemiCondensed" panose="020B0502040204020203" pitchFamily="34" charset="0"/>
-                <a:cs typeface="Arial" panose="020B0604020202020204" pitchFamily="34" charset="0"/>
+                <a:latin typeface="Bahnschrift Light" panose="020B0502040204020203" pitchFamily="34" charset="0"/>
               </a:rPr>
               <a:t> </a:t>
             </a:r>
             <a:r>
               <a:rPr lang="en-US" dirty="0" err="1">
-                <a:latin typeface="Bahnschrift Light SemiCondensed" panose="020B0502040204020203" pitchFamily="34" charset="0"/>
-                <a:cs typeface="Arial" panose="020B0604020202020204" pitchFamily="34" charset="0"/>
+                <a:latin typeface="Bahnschrift Light" panose="020B0502040204020203" pitchFamily="34" charset="0"/>
               </a:rPr>
               <a:t>olup</a:t>
             </a:r>
             <a:r>
               <a:rPr lang="en-US" dirty="0">
-                <a:latin typeface="Bahnschrift Light SemiCondensed" panose="020B0502040204020203" pitchFamily="34" charset="0"/>
-                <a:cs typeface="Arial" panose="020B0604020202020204" pitchFamily="34" charset="0"/>
+                <a:latin typeface="Bahnschrift Light" panose="020B0502040204020203" pitchFamily="34" charset="0"/>
               </a:rPr>
               <a:t> her </a:t>
             </a:r>
             <a:r>
               <a:rPr lang="en-US" dirty="0" err="1">
-                <a:latin typeface="Bahnschrift Light SemiCondensed" panose="020B0502040204020203" pitchFamily="34" charset="0"/>
-                <a:cs typeface="Arial" panose="020B0604020202020204" pitchFamily="34" charset="0"/>
+                <a:latin typeface="Bahnschrift Light" panose="020B0502040204020203" pitchFamily="34" charset="0"/>
               </a:rPr>
               <a:t>bir</a:t>
             </a:r>
             <a:r>
               <a:rPr lang="en-US" dirty="0">
-                <a:latin typeface="Bahnschrift Light SemiCondensed" panose="020B0502040204020203" pitchFamily="34" charset="0"/>
-                <a:cs typeface="Arial" panose="020B0604020202020204" pitchFamily="34" charset="0"/>
+                <a:latin typeface="Bahnschrift Light" panose="020B0502040204020203" pitchFamily="34" charset="0"/>
               </a:rPr>
               <a:t> </a:t>
             </a:r>
             <a:r>
               <a:rPr lang="en-US" dirty="0" err="1">
-                <a:latin typeface="Bahnschrift Light SemiCondensed" panose="020B0502040204020203" pitchFamily="34" charset="0"/>
-                <a:cs typeface="Arial" panose="020B0604020202020204" pitchFamily="34" charset="0"/>
+                <a:latin typeface="Bahnschrift Light" panose="020B0502040204020203" pitchFamily="34" charset="0"/>
               </a:rPr>
               <a:t>şikayet</a:t>
             </a:r>
             <a:r>
               <a:rPr lang="en-US" dirty="0">
-                <a:latin typeface="Bahnschrift Light SemiCondensed" panose="020B0502040204020203" pitchFamily="34" charset="0"/>
-                <a:cs typeface="Arial" panose="020B0604020202020204" pitchFamily="34" charset="0"/>
+                <a:latin typeface="Bahnschrift Light" panose="020B0502040204020203" pitchFamily="34" charset="0"/>
               </a:rPr>
               <a:t> </a:t>
             </a:r>
             <a:r>
               <a:rPr lang="en-US" dirty="0" err="1">
-                <a:latin typeface="Bahnschrift Light SemiCondensed" panose="020B0502040204020203" pitchFamily="34" charset="0"/>
-                <a:cs typeface="Arial" panose="020B0604020202020204" pitchFamily="34" charset="0"/>
+                <a:latin typeface="Bahnschrift Light" panose="020B0502040204020203" pitchFamily="34" charset="0"/>
               </a:rPr>
               <a:t>metni</a:t>
             </a:r>
             <a:r>
               <a:rPr lang="en-US" dirty="0">
-                <a:latin typeface="Bahnschrift Light SemiCondensed" panose="020B0502040204020203" pitchFamily="34" charset="0"/>
-                <a:cs typeface="Arial" panose="020B0604020202020204" pitchFamily="34" charset="0"/>
+                <a:latin typeface="Bahnschrift Light" panose="020B0502040204020203" pitchFamily="34" charset="0"/>
               </a:rPr>
               <a:t> </a:t>
             </a:r>
             <a:r>
               <a:rPr lang="en-US" dirty="0" err="1">
-                <a:latin typeface="Bahnschrift Light SemiCondensed" panose="020B0502040204020203" pitchFamily="34" charset="0"/>
-                <a:cs typeface="Arial" panose="020B0604020202020204" pitchFamily="34" charset="0"/>
+                <a:latin typeface="Bahnschrift Light" panose="020B0502040204020203" pitchFamily="34" charset="0"/>
               </a:rPr>
               <a:t>ilgili</a:t>
             </a:r>
             <a:r>
               <a:rPr lang="en-US" dirty="0">
-                <a:latin typeface="Bahnschrift Light SemiCondensed" panose="020B0502040204020203" pitchFamily="34" charset="0"/>
-                <a:cs typeface="Arial" panose="020B0604020202020204" pitchFamily="34" charset="0"/>
+                <a:latin typeface="Bahnschrift Light" panose="020B0502040204020203" pitchFamily="34" charset="0"/>
               </a:rPr>
               <a:t> </a:t>
             </a:r>
             <a:r>
               <a:rPr lang="en-US" dirty="0" err="1">
-                <a:latin typeface="Bahnschrift Light SemiCondensed" panose="020B0502040204020203" pitchFamily="34" charset="0"/>
-                <a:cs typeface="Arial" panose="020B0604020202020204" pitchFamily="34" charset="0"/>
-              </a:rPr>
-              <a:t>kategori</a:t>
+                <a:latin typeface="Bahnschrift Light" panose="020B0502040204020203" pitchFamily="34" charset="0"/>
+              </a:rPr>
+              <a:t>belediye</a:t>
             </a:r>
             <a:r>
               <a:rPr lang="en-US" dirty="0">
-                <a:latin typeface="Bahnschrift Light SemiCondensed" panose="020B0502040204020203" pitchFamily="34" charset="0"/>
-                <a:cs typeface="Arial" panose="020B0604020202020204" pitchFamily="34" charset="0"/>
+                <a:latin typeface="Bahnschrift Light" panose="020B0502040204020203" pitchFamily="34" charset="0"/>
               </a:rPr>
               <a:t> </a:t>
             </a:r>
             <a:r>
               <a:rPr lang="en-US" dirty="0" err="1">
-                <a:latin typeface="Bahnschrift Light SemiCondensed" panose="020B0502040204020203" pitchFamily="34" charset="0"/>
-                <a:cs typeface="Arial" panose="020B0604020202020204" pitchFamily="34" charset="0"/>
+                <a:latin typeface="Bahnschrift Light" panose="020B0502040204020203" pitchFamily="34" charset="0"/>
+              </a:rPr>
+              <a:t>hizmet</a:t>
+            </a:r>
+            <a:r>
+              <a:rPr lang="en-US" dirty="0">
+                <a:latin typeface="Bahnschrift Light" panose="020B0502040204020203" pitchFamily="34" charset="0"/>
+              </a:rPr>
+              <a:t> </a:t>
+            </a:r>
+            <a:r>
+              <a:rPr lang="en-US" dirty="0" err="1">
+                <a:latin typeface="Bahnschrift Light" panose="020B0502040204020203" pitchFamily="34" charset="0"/>
+              </a:rPr>
+              <a:t>kategorisi</a:t>
+            </a:r>
+            <a:r>
+              <a:rPr lang="en-US" dirty="0">
+                <a:latin typeface="Bahnschrift Light" panose="020B0502040204020203" pitchFamily="34" charset="0"/>
+              </a:rPr>
+              <a:t> </a:t>
+            </a:r>
+            <a:r>
+              <a:rPr lang="en-US" dirty="0" err="1">
+                <a:latin typeface="Bahnschrift Light" panose="020B0502040204020203" pitchFamily="34" charset="0"/>
               </a:rPr>
               <a:t>ile</a:t>
             </a:r>
             <a:r>
               <a:rPr lang="en-US" dirty="0">
-                <a:latin typeface="Bahnschrift Light SemiCondensed" panose="020B0502040204020203" pitchFamily="34" charset="0"/>
-                <a:cs typeface="Arial" panose="020B0604020202020204" pitchFamily="34" charset="0"/>
+                <a:latin typeface="Bahnschrift Light" panose="020B0502040204020203" pitchFamily="34" charset="0"/>
               </a:rPr>
               <a:t> </a:t>
             </a:r>
             <a:r>
               <a:rPr lang="en-US" dirty="0" err="1">
-                <a:latin typeface="Bahnschrift Light SemiCondensed" panose="020B0502040204020203" pitchFamily="34" charset="0"/>
-                <a:cs typeface="Arial" panose="020B0604020202020204" pitchFamily="34" charset="0"/>
+                <a:latin typeface="Bahnschrift Light" panose="020B0502040204020203" pitchFamily="34" charset="0"/>
               </a:rPr>
               <a:t>eşleştirilmiştir</a:t>
             </a:r>
             <a:r>
-              <a:rPr lang="en-US" dirty="0" smtClean="0">
-                <a:latin typeface="Bahnschrift Light SemiCondensed" panose="020B0502040204020203" pitchFamily="34" charset="0"/>
-                <a:cs typeface="Arial" panose="020B0604020202020204" pitchFamily="34" charset="0"/>
+              <a:rPr lang="en-US" dirty="0">
+                <a:latin typeface="Bahnschrift Light" panose="020B0502040204020203" pitchFamily="34" charset="0"/>
               </a:rPr>
               <a:t>.</a:t>
             </a:r>
-            <a:endParaRPr lang="tr-TR" dirty="0" smtClean="0">
-              <a:latin typeface="Bahnschrift Light SemiCondensed" panose="020B0502040204020203" pitchFamily="34" charset="0"/>
+            <a:endParaRPr lang="tr-TR" dirty="0">
+              <a:latin typeface="Bahnschrift Light" panose="020B0502040204020203" pitchFamily="34" charset="0"/>
               <a:cs typeface="Arial" panose="020B0604020202020204" pitchFamily="34" charset="0"/>
             </a:endParaRPr>
           </a:p>
@@ -23718,8 +23765,8 @@
             <a:pPr marL="128016" lvl="1" indent="0">
               <a:buNone/>
             </a:pPr>
-            <a:endParaRPr lang="tr-TR" dirty="0" smtClean="0">
-              <a:latin typeface="Bahnschrift Light SemiCondensed" panose="020B0502040204020203" pitchFamily="34" charset="0"/>
+            <a:endParaRPr lang="tr-TR" dirty="0">
+              <a:latin typeface="Bahnschrift Light" panose="020B0502040204020203" pitchFamily="34" charset="0"/>
               <a:cs typeface="Arial" panose="020B0604020202020204" pitchFamily="34" charset="0"/>
             </a:endParaRPr>
           </a:p>
@@ -23727,670 +23774,558 @@
             <a:pPr lvl="1"/>
             <a:r>
               <a:rPr lang="en-US" dirty="0" err="1">
-                <a:latin typeface="Bahnschrift Light SemiCondensed" panose="020B0502040204020203" pitchFamily="34" charset="0"/>
-                <a:cs typeface="Arial" panose="020B0604020202020204" pitchFamily="34" charset="0"/>
+                <a:latin typeface="Bahnschrift Light" panose="020B0502040204020203" pitchFamily="34" charset="0"/>
               </a:rPr>
               <a:t>Çalışma</a:t>
             </a:r>
             <a:r>
               <a:rPr lang="en-US" dirty="0">
-                <a:latin typeface="Bahnschrift Light SemiCondensed" panose="020B0502040204020203" pitchFamily="34" charset="0"/>
-                <a:cs typeface="Arial" panose="020B0604020202020204" pitchFamily="34" charset="0"/>
+                <a:latin typeface="Bahnschrift Light" panose="020B0502040204020203" pitchFamily="34" charset="0"/>
               </a:rPr>
               <a:t> </a:t>
             </a:r>
             <a:r>
               <a:rPr lang="en-US" dirty="0" err="1">
-                <a:latin typeface="Bahnschrift Light SemiCondensed" panose="020B0502040204020203" pitchFamily="34" charset="0"/>
-                <a:cs typeface="Arial" panose="020B0604020202020204" pitchFamily="34" charset="0"/>
+                <a:latin typeface="Bahnschrift Light" panose="020B0502040204020203" pitchFamily="34" charset="0"/>
               </a:rPr>
               <a:t>kapsamında</a:t>
             </a:r>
             <a:r>
               <a:rPr lang="en-US" dirty="0">
-                <a:latin typeface="Bahnschrift Light SemiCondensed" panose="020B0502040204020203" pitchFamily="34" charset="0"/>
-                <a:cs typeface="Arial" panose="020B0604020202020204" pitchFamily="34" charset="0"/>
+                <a:latin typeface="Bahnschrift Light" panose="020B0502040204020203" pitchFamily="34" charset="0"/>
               </a:rPr>
               <a:t> </a:t>
             </a:r>
             <a:r>
               <a:rPr lang="en-US" dirty="0" err="1">
-                <a:latin typeface="Bahnschrift Light SemiCondensed" panose="020B0502040204020203" pitchFamily="34" charset="0"/>
-                <a:cs typeface="Arial" panose="020B0604020202020204" pitchFamily="34" charset="0"/>
+                <a:latin typeface="Bahnschrift Light" panose="020B0502040204020203" pitchFamily="34" charset="0"/>
               </a:rPr>
               <a:t>veri</a:t>
             </a:r>
             <a:r>
               <a:rPr lang="en-US" dirty="0">
-                <a:latin typeface="Bahnschrift Light SemiCondensed" panose="020B0502040204020203" pitchFamily="34" charset="0"/>
-                <a:cs typeface="Arial" panose="020B0604020202020204" pitchFamily="34" charset="0"/>
+                <a:latin typeface="Bahnschrift Light" panose="020B0502040204020203" pitchFamily="34" charset="0"/>
               </a:rPr>
               <a:t> </a:t>
             </a:r>
             <a:r>
               <a:rPr lang="en-US" dirty="0" err="1">
-                <a:latin typeface="Bahnschrift Light SemiCondensed" panose="020B0502040204020203" pitchFamily="34" charset="0"/>
-                <a:cs typeface="Arial" panose="020B0604020202020204" pitchFamily="34" charset="0"/>
+                <a:latin typeface="Bahnschrift Light" panose="020B0502040204020203" pitchFamily="34" charset="0"/>
               </a:rPr>
               <a:t>seti</a:t>
             </a:r>
             <a:r>
               <a:rPr lang="en-US" dirty="0">
-                <a:latin typeface="Bahnschrift Light SemiCondensed" panose="020B0502040204020203" pitchFamily="34" charset="0"/>
-                <a:cs typeface="Arial" panose="020B0604020202020204" pitchFamily="34" charset="0"/>
-              </a:rPr>
-              <a:t> </a:t>
-            </a:r>
-            <a:r>
-              <a:rPr lang="en-US" b="1" dirty="0">
-                <a:latin typeface="Bahnschrift Light SemiCondensed" panose="020B0502040204020203" pitchFamily="34" charset="0"/>
-                <a:cs typeface="Arial" panose="020B0604020202020204" pitchFamily="34" charset="0"/>
-              </a:rPr>
-              <a:t>6 </a:t>
-            </a:r>
-            <a:r>
-              <a:rPr lang="en-US" b="1" dirty="0" err="1">
-                <a:latin typeface="Bahnschrift Light SemiCondensed" panose="020B0502040204020203" pitchFamily="34" charset="0"/>
-                <a:cs typeface="Arial" panose="020B0604020202020204" pitchFamily="34" charset="0"/>
+                <a:latin typeface="Bahnschrift Light" panose="020B0502040204020203" pitchFamily="34" charset="0"/>
+              </a:rPr>
+              <a:t> 6 </a:t>
+            </a:r>
+            <a:r>
+              <a:rPr lang="en-US" dirty="0" err="1">
+                <a:latin typeface="Bahnschrift Light" panose="020B0502040204020203" pitchFamily="34" charset="0"/>
               </a:rPr>
               <a:t>farklı</a:t>
             </a:r>
             <a:r>
-              <a:rPr lang="en-US" b="1" dirty="0">
-                <a:latin typeface="Bahnschrift Light SemiCondensed" panose="020B0502040204020203" pitchFamily="34" charset="0"/>
-                <a:cs typeface="Arial" panose="020B0604020202020204" pitchFamily="34" charset="0"/>
-              </a:rPr>
-              <a:t> </a:t>
-            </a:r>
-            <a:r>
-              <a:rPr lang="en-US" b="1" dirty="0" err="1">
-                <a:latin typeface="Bahnschrift Light SemiCondensed" panose="020B0502040204020203" pitchFamily="34" charset="0"/>
-                <a:cs typeface="Arial" panose="020B0604020202020204" pitchFamily="34" charset="0"/>
+              <a:rPr lang="en-US" dirty="0">
+                <a:latin typeface="Bahnschrift Light" panose="020B0502040204020203" pitchFamily="34" charset="0"/>
+              </a:rPr>
+              <a:t> </a:t>
+            </a:r>
+            <a:r>
+              <a:rPr lang="en-US" dirty="0" err="1">
+                <a:latin typeface="Bahnschrift Light" panose="020B0502040204020203" pitchFamily="34" charset="0"/>
               </a:rPr>
               <a:t>sınıftan</a:t>
             </a:r>
             <a:r>
               <a:rPr lang="en-US" dirty="0">
-                <a:latin typeface="Bahnschrift Light SemiCondensed" panose="020B0502040204020203" pitchFamily="34" charset="0"/>
-                <a:cs typeface="Arial" panose="020B0604020202020204" pitchFamily="34" charset="0"/>
+                <a:latin typeface="Bahnschrift Light" panose="020B0502040204020203" pitchFamily="34" charset="0"/>
               </a:rPr>
               <a:t> </a:t>
             </a:r>
             <a:r>
               <a:rPr lang="en-US" dirty="0" err="1">
-                <a:latin typeface="Bahnschrift Light SemiCondensed" panose="020B0502040204020203" pitchFamily="34" charset="0"/>
-                <a:cs typeface="Arial" panose="020B0604020202020204" pitchFamily="34" charset="0"/>
+                <a:latin typeface="Bahnschrift Light" panose="020B0502040204020203" pitchFamily="34" charset="0"/>
               </a:rPr>
               <a:t>oluşmaktadır</a:t>
             </a:r>
             <a:r>
               <a:rPr lang="en-US" dirty="0">
-                <a:latin typeface="Bahnschrift Light SemiCondensed" panose="020B0502040204020203" pitchFamily="34" charset="0"/>
-                <a:cs typeface="Arial" panose="020B0604020202020204" pitchFamily="34" charset="0"/>
+                <a:latin typeface="Bahnschrift Light" panose="020B0502040204020203" pitchFamily="34" charset="0"/>
               </a:rPr>
               <a:t>. Bu </a:t>
             </a:r>
             <a:r>
               <a:rPr lang="en-US" dirty="0" err="1">
-                <a:latin typeface="Bahnschrift Light SemiCondensed" panose="020B0502040204020203" pitchFamily="34" charset="0"/>
-                <a:cs typeface="Arial" panose="020B0604020202020204" pitchFamily="34" charset="0"/>
+                <a:latin typeface="Bahnschrift Light" panose="020B0502040204020203" pitchFamily="34" charset="0"/>
               </a:rPr>
               <a:t>sınıflar</a:t>
             </a:r>
             <a:r>
               <a:rPr lang="en-US" dirty="0">
-                <a:latin typeface="Bahnschrift Light SemiCondensed" panose="020B0502040204020203" pitchFamily="34" charset="0"/>
-                <a:cs typeface="Arial" panose="020B0604020202020204" pitchFamily="34" charset="0"/>
+                <a:latin typeface="Bahnschrift Light" panose="020B0502040204020203" pitchFamily="34" charset="0"/>
               </a:rPr>
               <a:t>; </a:t>
             </a:r>
             <a:r>
               <a:rPr lang="en-US" dirty="0" err="1">
-                <a:latin typeface="Bahnschrift Light SemiCondensed" panose="020B0502040204020203" pitchFamily="34" charset="0"/>
-                <a:cs typeface="Arial" panose="020B0604020202020204" pitchFamily="34" charset="0"/>
-              </a:rPr>
-              <a:t>kargo</a:t>
+                <a:latin typeface="Bahnschrift Light" panose="020B0502040204020203" pitchFamily="34" charset="0"/>
+              </a:rPr>
+              <a:t>çevre</a:t>
             </a:r>
             <a:r>
               <a:rPr lang="en-US" dirty="0">
-                <a:latin typeface="Bahnschrift Light SemiCondensed" panose="020B0502040204020203" pitchFamily="34" charset="0"/>
-                <a:cs typeface="Arial" panose="020B0604020202020204" pitchFamily="34" charset="0"/>
+                <a:latin typeface="Bahnschrift Light" panose="020B0502040204020203" pitchFamily="34" charset="0"/>
+              </a:rPr>
+              <a:t> </a:t>
+            </a:r>
+            <a:r>
+              <a:rPr lang="en-US" dirty="0" err="1">
+                <a:latin typeface="Bahnschrift Light" panose="020B0502040204020203" pitchFamily="34" charset="0"/>
+              </a:rPr>
+              <a:t>temizliği</a:t>
+            </a:r>
+            <a:r>
+              <a:rPr lang="en-US" dirty="0">
+                <a:latin typeface="Bahnschrift Light" panose="020B0502040204020203" pitchFamily="34" charset="0"/>
               </a:rPr>
               <a:t>, </a:t>
             </a:r>
             <a:r>
               <a:rPr lang="en-US" dirty="0" err="1">
-                <a:latin typeface="Bahnschrift Light SemiCondensed" panose="020B0502040204020203" pitchFamily="34" charset="0"/>
-                <a:cs typeface="Arial" panose="020B0604020202020204" pitchFamily="34" charset="0"/>
-              </a:rPr>
-              <a:t>ödeme</a:t>
+                <a:latin typeface="Bahnschrift Light" panose="020B0502040204020203" pitchFamily="34" charset="0"/>
+              </a:rPr>
+              <a:t>yol</a:t>
             </a:r>
             <a:r>
               <a:rPr lang="en-US" dirty="0">
-                <a:latin typeface="Bahnschrift Light SemiCondensed" panose="020B0502040204020203" pitchFamily="34" charset="0"/>
-                <a:cs typeface="Arial" panose="020B0604020202020204" pitchFamily="34" charset="0"/>
+                <a:latin typeface="Bahnschrift Light" panose="020B0502040204020203" pitchFamily="34" charset="0"/>
+              </a:rPr>
+              <a:t> </a:t>
+            </a:r>
+            <a:r>
+              <a:rPr lang="en-US" dirty="0" err="1">
+                <a:latin typeface="Bahnschrift Light" panose="020B0502040204020203" pitchFamily="34" charset="0"/>
+              </a:rPr>
+              <a:t>bakım</a:t>
+            </a:r>
+            <a:r>
+              <a:rPr lang="en-US" dirty="0">
+                <a:latin typeface="Bahnschrift Light" panose="020B0502040204020203" pitchFamily="34" charset="0"/>
               </a:rPr>
               <a:t>, </a:t>
             </a:r>
             <a:r>
               <a:rPr lang="en-US" dirty="0" err="1">
-                <a:latin typeface="Bahnschrift Light SemiCondensed" panose="020B0502040204020203" pitchFamily="34" charset="0"/>
-                <a:cs typeface="Arial" panose="020B0604020202020204" pitchFamily="34" charset="0"/>
-              </a:rPr>
-              <a:t>iade</a:t>
+                <a:latin typeface="Bahnschrift Light" panose="020B0502040204020203" pitchFamily="34" charset="0"/>
+              </a:rPr>
+              <a:t>altyapı</a:t>
             </a:r>
             <a:r>
               <a:rPr lang="en-US" dirty="0">
-                <a:latin typeface="Bahnschrift Light SemiCondensed" panose="020B0502040204020203" pitchFamily="34" charset="0"/>
-                <a:cs typeface="Arial" panose="020B0604020202020204" pitchFamily="34" charset="0"/>
+                <a:latin typeface="Bahnschrift Light" panose="020B0502040204020203" pitchFamily="34" charset="0"/>
               </a:rPr>
               <a:t>, </a:t>
             </a:r>
             <a:r>
               <a:rPr lang="en-US" dirty="0" err="1">
-                <a:latin typeface="Bahnschrift Light SemiCondensed" panose="020B0502040204020203" pitchFamily="34" charset="0"/>
-                <a:cs typeface="Arial" panose="020B0604020202020204" pitchFamily="34" charset="0"/>
-              </a:rPr>
-              <a:t>teknik</a:t>
+                <a:latin typeface="Bahnschrift Light" panose="020B0502040204020203" pitchFamily="34" charset="0"/>
+              </a:rPr>
+              <a:t>sokak</a:t>
             </a:r>
             <a:r>
               <a:rPr lang="en-US" dirty="0">
-                <a:latin typeface="Bahnschrift Light SemiCondensed" panose="020B0502040204020203" pitchFamily="34" charset="0"/>
-                <a:cs typeface="Arial" panose="020B0604020202020204" pitchFamily="34" charset="0"/>
+                <a:latin typeface="Bahnschrift Light" panose="020B0502040204020203" pitchFamily="34" charset="0"/>
               </a:rPr>
               <a:t> </a:t>
             </a:r>
             <a:r>
               <a:rPr lang="en-US" dirty="0" err="1">
-                <a:latin typeface="Bahnschrift Light SemiCondensed" panose="020B0502040204020203" pitchFamily="34" charset="0"/>
-                <a:cs typeface="Arial" panose="020B0604020202020204" pitchFamily="34" charset="0"/>
-              </a:rPr>
-              <a:t>sorun</a:t>
+                <a:latin typeface="Bahnschrift Light" panose="020B0502040204020203" pitchFamily="34" charset="0"/>
+              </a:rPr>
+              <a:t>aydınlatması</a:t>
             </a:r>
             <a:r>
               <a:rPr lang="en-US" dirty="0">
-                <a:latin typeface="Bahnschrift Light SemiCondensed" panose="020B0502040204020203" pitchFamily="34" charset="0"/>
-                <a:cs typeface="Arial" panose="020B0604020202020204" pitchFamily="34" charset="0"/>
+                <a:latin typeface="Bahnschrift Light" panose="020B0502040204020203" pitchFamily="34" charset="0"/>
+              </a:rPr>
+              <a:t>, park </a:t>
+            </a:r>
+            <a:r>
+              <a:rPr lang="en-US" dirty="0" err="1">
+                <a:latin typeface="Bahnschrift Light" panose="020B0502040204020203" pitchFamily="34" charset="0"/>
+              </a:rPr>
+              <a:t>ve</a:t>
+            </a:r>
+            <a:r>
+              <a:rPr lang="en-US" dirty="0">
+                <a:latin typeface="Bahnschrift Light" panose="020B0502040204020203" pitchFamily="34" charset="0"/>
+              </a:rPr>
+              <a:t> </a:t>
+            </a:r>
+            <a:r>
+              <a:rPr lang="en-US" dirty="0" err="1">
+                <a:latin typeface="Bahnschrift Light" panose="020B0502040204020203" pitchFamily="34" charset="0"/>
+              </a:rPr>
+              <a:t>bahçeler</a:t>
+            </a:r>
+            <a:r>
+              <a:rPr lang="en-US" dirty="0">
+                <a:latin typeface="Bahnschrift Light" panose="020B0502040204020203" pitchFamily="34" charset="0"/>
+              </a:rPr>
+              <a:t> </a:t>
+            </a:r>
+            <a:r>
+              <a:rPr lang="en-US" dirty="0" err="1">
+                <a:latin typeface="Bahnschrift Light" panose="020B0502040204020203" pitchFamily="34" charset="0"/>
+              </a:rPr>
+              <a:t>ve</a:t>
+            </a:r>
+            <a:r>
+              <a:rPr lang="en-US" dirty="0">
+                <a:latin typeface="Bahnschrift Light" panose="020B0502040204020203" pitchFamily="34" charset="0"/>
+              </a:rPr>
+              <a:t> </a:t>
+            </a:r>
+            <a:r>
+              <a:rPr lang="en-US" dirty="0" err="1">
+                <a:latin typeface="Bahnschrift Light" panose="020B0502040204020203" pitchFamily="34" charset="0"/>
+              </a:rPr>
+              <a:t>hayvan</a:t>
+            </a:r>
+            <a:r>
+              <a:rPr lang="en-US" dirty="0">
+                <a:latin typeface="Bahnschrift Light" panose="020B0502040204020203" pitchFamily="34" charset="0"/>
+              </a:rPr>
+              <a:t> </a:t>
+            </a:r>
+            <a:r>
+              <a:rPr lang="en-US" dirty="0" err="1">
+                <a:latin typeface="Bahnschrift Light" panose="020B0502040204020203" pitchFamily="34" charset="0"/>
+              </a:rPr>
+              <a:t>kontrolü</a:t>
+            </a:r>
+            <a:r>
+              <a:rPr lang="en-US" dirty="0">
+                <a:latin typeface="Bahnschrift Light" panose="020B0502040204020203" pitchFamily="34" charset="0"/>
+              </a:rPr>
+              <a:t> </a:t>
+            </a:r>
+            <a:r>
+              <a:rPr lang="en-US" dirty="0" err="1">
+                <a:latin typeface="Bahnschrift Light" panose="020B0502040204020203" pitchFamily="34" charset="0"/>
+              </a:rPr>
+              <a:t>şeklindedir</a:t>
+            </a:r>
+            <a:r>
+              <a:rPr lang="en-US" dirty="0">
+                <a:latin typeface="Bahnschrift Light" panose="020B0502040204020203" pitchFamily="34" charset="0"/>
+              </a:rPr>
+              <a:t>. Her </a:t>
+            </a:r>
+            <a:r>
+              <a:rPr lang="en-US" dirty="0" err="1">
+                <a:latin typeface="Bahnschrift Light" panose="020B0502040204020203" pitchFamily="34" charset="0"/>
+              </a:rPr>
+              <a:t>sınıf</a:t>
+            </a:r>
+            <a:r>
+              <a:rPr lang="en-US" dirty="0">
+                <a:latin typeface="Bahnschrift Light" panose="020B0502040204020203" pitchFamily="34" charset="0"/>
               </a:rPr>
               <a:t>, </a:t>
             </a:r>
             <a:r>
               <a:rPr lang="en-US" dirty="0" err="1">
-                <a:latin typeface="Bahnschrift Light SemiCondensed" panose="020B0502040204020203" pitchFamily="34" charset="0"/>
-                <a:cs typeface="Arial" panose="020B0604020202020204" pitchFamily="34" charset="0"/>
-              </a:rPr>
-              <a:t>hesap</a:t>
+                <a:latin typeface="Bahnschrift Light" panose="020B0502040204020203" pitchFamily="34" charset="0"/>
+              </a:rPr>
+              <a:t>modelin</a:t>
             </a:r>
             <a:r>
               <a:rPr lang="en-US" dirty="0">
-                <a:latin typeface="Bahnschrift Light SemiCondensed" panose="020B0502040204020203" pitchFamily="34" charset="0"/>
-                <a:cs typeface="Arial" panose="020B0604020202020204" pitchFamily="34" charset="0"/>
+                <a:latin typeface="Bahnschrift Light" panose="020B0502040204020203" pitchFamily="34" charset="0"/>
               </a:rPr>
               <a:t> </a:t>
             </a:r>
             <a:r>
               <a:rPr lang="en-US" dirty="0" err="1">
-                <a:latin typeface="Bahnschrift Light SemiCondensed" panose="020B0502040204020203" pitchFamily="34" charset="0"/>
-                <a:cs typeface="Arial" panose="020B0604020202020204" pitchFamily="34" charset="0"/>
-              </a:rPr>
-              <a:t>işlemleri</a:t>
+                <a:latin typeface="Bahnschrift Light" panose="020B0502040204020203" pitchFamily="34" charset="0"/>
+              </a:rPr>
+              <a:t>öğrenebilmesi</a:t>
             </a:r>
             <a:r>
               <a:rPr lang="en-US" dirty="0">
-                <a:latin typeface="Bahnschrift Light SemiCondensed" panose="020B0502040204020203" pitchFamily="34" charset="0"/>
-                <a:cs typeface="Arial" panose="020B0604020202020204" pitchFamily="34" charset="0"/>
+                <a:latin typeface="Bahnschrift Light" panose="020B0502040204020203" pitchFamily="34" charset="0"/>
               </a:rPr>
               <a:t> </a:t>
             </a:r>
             <a:r>
               <a:rPr lang="en-US" dirty="0" err="1">
-                <a:latin typeface="Bahnschrift Light SemiCondensed" panose="020B0502040204020203" pitchFamily="34" charset="0"/>
-                <a:cs typeface="Arial" panose="020B0604020202020204" pitchFamily="34" charset="0"/>
-              </a:rPr>
-              <a:t>ve</a:t>
+                <a:latin typeface="Bahnschrift Light" panose="020B0502040204020203" pitchFamily="34" charset="0"/>
+              </a:rPr>
+              <a:t>için</a:t>
             </a:r>
             <a:r>
               <a:rPr lang="en-US" dirty="0">
-                <a:latin typeface="Bahnschrift Light SemiCondensed" panose="020B0502040204020203" pitchFamily="34" charset="0"/>
-                <a:cs typeface="Arial" panose="020B0604020202020204" pitchFamily="34" charset="0"/>
+                <a:latin typeface="Bahnschrift Light" panose="020B0502040204020203" pitchFamily="34" charset="0"/>
               </a:rPr>
               <a:t> </a:t>
             </a:r>
             <a:r>
               <a:rPr lang="en-US" dirty="0" err="1">
-                <a:latin typeface="Bahnschrift Light SemiCondensed" panose="020B0502040204020203" pitchFamily="34" charset="0"/>
-                <a:cs typeface="Arial" panose="020B0604020202020204" pitchFamily="34" charset="0"/>
-              </a:rPr>
-              <a:t>genel</a:t>
+                <a:latin typeface="Bahnschrift Light" panose="020B0502040204020203" pitchFamily="34" charset="0"/>
+              </a:rPr>
+              <a:t>etiketlenmiş</a:t>
             </a:r>
             <a:r>
               <a:rPr lang="en-US" dirty="0">
-                <a:latin typeface="Bahnschrift Light SemiCondensed" panose="020B0502040204020203" pitchFamily="34" charset="0"/>
-                <a:cs typeface="Arial" panose="020B0604020202020204" pitchFamily="34" charset="0"/>
+                <a:latin typeface="Bahnschrift Light" panose="020B0502040204020203" pitchFamily="34" charset="0"/>
               </a:rPr>
               <a:t> </a:t>
             </a:r>
             <a:r>
               <a:rPr lang="en-US" dirty="0" err="1">
-                <a:latin typeface="Bahnschrift Light SemiCondensed" panose="020B0502040204020203" pitchFamily="34" charset="0"/>
-                <a:cs typeface="Arial" panose="020B0604020202020204" pitchFamily="34" charset="0"/>
-              </a:rPr>
-              <a:t>şikayetler</a:t>
+                <a:latin typeface="Bahnschrift Light" panose="020B0502040204020203" pitchFamily="34" charset="0"/>
+              </a:rPr>
+              <a:t>örneklerden</a:t>
             </a:r>
             <a:r>
               <a:rPr lang="en-US" dirty="0">
-                <a:latin typeface="Bahnschrift Light SemiCondensed" panose="020B0502040204020203" pitchFamily="34" charset="0"/>
-                <a:cs typeface="Arial" panose="020B0604020202020204" pitchFamily="34" charset="0"/>
+                <a:latin typeface="Bahnschrift Light" panose="020B0502040204020203" pitchFamily="34" charset="0"/>
               </a:rPr>
               <a:t> </a:t>
             </a:r>
             <a:r>
               <a:rPr lang="en-US" dirty="0" err="1">
-                <a:latin typeface="Bahnschrift Light SemiCondensed" panose="020B0502040204020203" pitchFamily="34" charset="0"/>
-                <a:cs typeface="Arial" panose="020B0604020202020204" pitchFamily="34" charset="0"/>
-              </a:rPr>
-              <a:t>şeklindedir</a:t>
+                <a:latin typeface="Bahnschrift Light" panose="020B0502040204020203" pitchFamily="34" charset="0"/>
+              </a:rPr>
+              <a:t>oluşmaktadır</a:t>
             </a:r>
             <a:r>
               <a:rPr lang="en-US" dirty="0">
-                <a:latin typeface="Bahnschrift Light SemiCondensed" panose="020B0502040204020203" pitchFamily="34" charset="0"/>
-                <a:cs typeface="Arial" panose="020B0604020202020204" pitchFamily="34" charset="0"/>
-              </a:rPr>
-              <a:t>. Her </a:t>
-            </a:r>
-            <a:r>
-              <a:rPr lang="en-US" dirty="0" err="1">
-                <a:latin typeface="Bahnschrift Light SemiCondensed" panose="020B0502040204020203" pitchFamily="34" charset="0"/>
-                <a:cs typeface="Arial" panose="020B0604020202020204" pitchFamily="34" charset="0"/>
-              </a:rPr>
-              <a:t>sınıf</a:t>
-            </a:r>
-            <a:r>
-              <a:rPr lang="en-US" dirty="0">
-                <a:latin typeface="Bahnschrift Light SemiCondensed" panose="020B0502040204020203" pitchFamily="34" charset="0"/>
-                <a:cs typeface="Arial" panose="020B0604020202020204" pitchFamily="34" charset="0"/>
-              </a:rPr>
-              <a:t>, </a:t>
-            </a:r>
-            <a:r>
-              <a:rPr lang="en-US" dirty="0" err="1">
-                <a:latin typeface="Bahnschrift Light SemiCondensed" panose="020B0502040204020203" pitchFamily="34" charset="0"/>
-                <a:cs typeface="Arial" panose="020B0604020202020204" pitchFamily="34" charset="0"/>
-              </a:rPr>
-              <a:t>modelin</a:t>
-            </a:r>
-            <a:r>
-              <a:rPr lang="en-US" dirty="0">
-                <a:latin typeface="Bahnschrift Light SemiCondensed" panose="020B0502040204020203" pitchFamily="34" charset="0"/>
-                <a:cs typeface="Arial" panose="020B0604020202020204" pitchFamily="34" charset="0"/>
-              </a:rPr>
-              <a:t> </a:t>
-            </a:r>
-            <a:r>
-              <a:rPr lang="en-US" dirty="0" err="1">
-                <a:latin typeface="Bahnschrift Light SemiCondensed" panose="020B0502040204020203" pitchFamily="34" charset="0"/>
-                <a:cs typeface="Arial" panose="020B0604020202020204" pitchFamily="34" charset="0"/>
-              </a:rPr>
-              <a:t>öğrenebilmesi</a:t>
-            </a:r>
-            <a:r>
-              <a:rPr lang="en-US" dirty="0">
-                <a:latin typeface="Bahnschrift Light SemiCondensed" panose="020B0502040204020203" pitchFamily="34" charset="0"/>
-                <a:cs typeface="Arial" panose="020B0604020202020204" pitchFamily="34" charset="0"/>
-              </a:rPr>
-              <a:t> </a:t>
-            </a:r>
-            <a:r>
-              <a:rPr lang="en-US" dirty="0" err="1">
-                <a:latin typeface="Bahnschrift Light SemiCondensed" panose="020B0502040204020203" pitchFamily="34" charset="0"/>
-                <a:cs typeface="Arial" panose="020B0604020202020204" pitchFamily="34" charset="0"/>
-              </a:rPr>
-              <a:t>için</a:t>
-            </a:r>
-            <a:r>
-              <a:rPr lang="en-US" dirty="0">
-                <a:latin typeface="Bahnschrift Light SemiCondensed" panose="020B0502040204020203" pitchFamily="34" charset="0"/>
-                <a:cs typeface="Arial" panose="020B0604020202020204" pitchFamily="34" charset="0"/>
-              </a:rPr>
-              <a:t> </a:t>
-            </a:r>
-            <a:r>
-              <a:rPr lang="en-US" dirty="0" err="1">
-                <a:latin typeface="Bahnschrift Light SemiCondensed" panose="020B0502040204020203" pitchFamily="34" charset="0"/>
-                <a:cs typeface="Arial" panose="020B0604020202020204" pitchFamily="34" charset="0"/>
-              </a:rPr>
-              <a:t>dengeli</a:t>
-            </a:r>
-            <a:r>
-              <a:rPr lang="en-US" dirty="0">
-                <a:latin typeface="Bahnschrift Light SemiCondensed" panose="020B0502040204020203" pitchFamily="34" charset="0"/>
-                <a:cs typeface="Arial" panose="020B0604020202020204" pitchFamily="34" charset="0"/>
-              </a:rPr>
-              <a:t> </a:t>
-            </a:r>
-            <a:r>
-              <a:rPr lang="en-US" dirty="0" err="1">
-                <a:latin typeface="Bahnschrift Light SemiCondensed" panose="020B0502040204020203" pitchFamily="34" charset="0"/>
-                <a:cs typeface="Arial" panose="020B0604020202020204" pitchFamily="34" charset="0"/>
-              </a:rPr>
-              <a:t>ve</a:t>
-            </a:r>
-            <a:r>
-              <a:rPr lang="en-US" dirty="0">
-                <a:latin typeface="Bahnschrift Light SemiCondensed" panose="020B0502040204020203" pitchFamily="34" charset="0"/>
-                <a:cs typeface="Arial" panose="020B0604020202020204" pitchFamily="34" charset="0"/>
-              </a:rPr>
-              <a:t> </a:t>
-            </a:r>
-            <a:r>
-              <a:rPr lang="en-US" dirty="0" err="1">
-                <a:latin typeface="Bahnschrift Light SemiCondensed" panose="020B0502040204020203" pitchFamily="34" charset="0"/>
-                <a:cs typeface="Arial" panose="020B0604020202020204" pitchFamily="34" charset="0"/>
-              </a:rPr>
-              <a:t>etiketli</a:t>
-            </a:r>
-            <a:r>
-              <a:rPr lang="en-US" dirty="0">
-                <a:latin typeface="Bahnschrift Light SemiCondensed" panose="020B0502040204020203" pitchFamily="34" charset="0"/>
-                <a:cs typeface="Arial" panose="020B0604020202020204" pitchFamily="34" charset="0"/>
-              </a:rPr>
-              <a:t> </a:t>
-            </a:r>
-            <a:r>
-              <a:rPr lang="en-US" dirty="0" err="1">
-                <a:latin typeface="Bahnschrift Light SemiCondensed" panose="020B0502040204020203" pitchFamily="34" charset="0"/>
-                <a:cs typeface="Arial" panose="020B0604020202020204" pitchFamily="34" charset="0"/>
-              </a:rPr>
-              <a:t>örnekler</a:t>
-            </a:r>
-            <a:r>
-              <a:rPr lang="en-US" dirty="0">
-                <a:latin typeface="Bahnschrift Light SemiCondensed" panose="020B0502040204020203" pitchFamily="34" charset="0"/>
-                <a:cs typeface="Arial" panose="020B0604020202020204" pitchFamily="34" charset="0"/>
-              </a:rPr>
-              <a:t> </a:t>
-            </a:r>
-            <a:r>
-              <a:rPr lang="en-US" dirty="0" err="1">
-                <a:latin typeface="Bahnschrift Light SemiCondensed" panose="020B0502040204020203" pitchFamily="34" charset="0"/>
-                <a:cs typeface="Arial" panose="020B0604020202020204" pitchFamily="34" charset="0"/>
-              </a:rPr>
-              <a:t>içermektedir</a:t>
-            </a:r>
-            <a:r>
-              <a:rPr lang="en-US" dirty="0" smtClean="0">
-                <a:latin typeface="Bahnschrift Light SemiCondensed" panose="020B0502040204020203" pitchFamily="34" charset="0"/>
-                <a:cs typeface="Arial" panose="020B0604020202020204" pitchFamily="34" charset="0"/>
+                <a:latin typeface="Bahnschrift Light" panose="020B0502040204020203" pitchFamily="34" charset="0"/>
               </a:rPr>
               <a:t>.</a:t>
             </a:r>
-            <a:endParaRPr lang="tr-TR" dirty="0" smtClean="0">
-              <a:latin typeface="Bahnschrift Light SemiCondensed" panose="020B0502040204020203" pitchFamily="34" charset="0"/>
+          </a:p>
+          <a:p>
+            <a:pPr lvl="1"/>
+            <a:endParaRPr lang="tr-TR" dirty="0">
+              <a:latin typeface="Bahnschrift Light" panose="020B0502040204020203" pitchFamily="34" charset="0"/>
               <a:cs typeface="Arial" panose="020B0604020202020204" pitchFamily="34" charset="0"/>
             </a:endParaRPr>
           </a:p>
           <a:p>
             <a:pPr lvl="1"/>
-            <a:endParaRPr lang="tr-TR" dirty="0" smtClean="0">
-              <a:latin typeface="Bahnschrift Light SemiCondensed" panose="020B0502040204020203" pitchFamily="34" charset="0"/>
+            <a:r>
+              <a:rPr lang="en-US" dirty="0">
+                <a:latin typeface="Bahnschrift Light" panose="020B0502040204020203" pitchFamily="34" charset="0"/>
+              </a:rPr>
+              <a:t>Veri </a:t>
+            </a:r>
+            <a:r>
+              <a:rPr lang="en-US" dirty="0" err="1">
+                <a:latin typeface="Bahnschrift Light" panose="020B0502040204020203" pitchFamily="34" charset="0"/>
+              </a:rPr>
+              <a:t>seti</a:t>
+            </a:r>
+            <a:r>
+              <a:rPr lang="en-US" dirty="0">
+                <a:latin typeface="Bahnschrift Light" panose="020B0502040204020203" pitchFamily="34" charset="0"/>
+              </a:rPr>
+              <a:t>, </a:t>
+            </a:r>
+            <a:r>
+              <a:rPr lang="en-US" dirty="0" err="1">
+                <a:latin typeface="Bahnschrift Light" panose="020B0502040204020203" pitchFamily="34" charset="0"/>
+              </a:rPr>
+              <a:t>modelin</a:t>
+            </a:r>
+            <a:r>
+              <a:rPr lang="en-US" dirty="0">
+                <a:latin typeface="Bahnschrift Light" panose="020B0502040204020203" pitchFamily="34" charset="0"/>
+              </a:rPr>
+              <a:t> hem </a:t>
+            </a:r>
+            <a:r>
+              <a:rPr lang="en-US" dirty="0" err="1">
+                <a:latin typeface="Bahnschrift Light" panose="020B0502040204020203" pitchFamily="34" charset="0"/>
+              </a:rPr>
+              <a:t>eğitim</a:t>
+            </a:r>
+            <a:r>
+              <a:rPr lang="en-US" dirty="0">
+                <a:latin typeface="Bahnschrift Light" panose="020B0502040204020203" pitchFamily="34" charset="0"/>
+              </a:rPr>
+              <a:t> hem de test </a:t>
+            </a:r>
+            <a:r>
+              <a:rPr lang="en-US" dirty="0" err="1">
+                <a:latin typeface="Bahnschrift Light" panose="020B0502040204020203" pitchFamily="34" charset="0"/>
+              </a:rPr>
+              <a:t>aşamalarında</a:t>
+            </a:r>
+            <a:r>
+              <a:rPr lang="en-US" dirty="0">
+                <a:latin typeface="Bahnschrift Light" panose="020B0502040204020203" pitchFamily="34" charset="0"/>
+              </a:rPr>
+              <a:t> </a:t>
+            </a:r>
+            <a:r>
+              <a:rPr lang="en-US" dirty="0" err="1">
+                <a:latin typeface="Bahnschrift Light" panose="020B0502040204020203" pitchFamily="34" charset="0"/>
+              </a:rPr>
+              <a:t>kullanılmış</a:t>
+            </a:r>
+            <a:r>
+              <a:rPr lang="en-US" dirty="0">
+                <a:latin typeface="Bahnschrift Light" panose="020B0502040204020203" pitchFamily="34" charset="0"/>
+              </a:rPr>
+              <a:t> </a:t>
+            </a:r>
+            <a:r>
+              <a:rPr lang="en-US" dirty="0" err="1">
+                <a:latin typeface="Bahnschrift Light" panose="020B0502040204020203" pitchFamily="34" charset="0"/>
+              </a:rPr>
+              <a:t>ve</a:t>
+            </a:r>
+            <a:r>
+              <a:rPr lang="en-US" dirty="0">
+                <a:latin typeface="Bahnschrift Light" panose="020B0502040204020203" pitchFamily="34" charset="0"/>
+              </a:rPr>
+              <a:t> </a:t>
+            </a:r>
+            <a:r>
+              <a:rPr lang="en-US" dirty="0" err="1">
+                <a:latin typeface="Bahnschrift Light" panose="020B0502040204020203" pitchFamily="34" charset="0"/>
+              </a:rPr>
+              <a:t>sistemin</a:t>
+            </a:r>
+            <a:r>
+              <a:rPr lang="en-US" dirty="0">
+                <a:latin typeface="Bahnschrift Light" panose="020B0502040204020203" pitchFamily="34" charset="0"/>
+              </a:rPr>
+              <a:t> </a:t>
+            </a:r>
+            <a:r>
+              <a:rPr lang="en-US" dirty="0" err="1">
+                <a:latin typeface="Bahnschrift Light" panose="020B0502040204020203" pitchFamily="34" charset="0"/>
+              </a:rPr>
+              <a:t>vatandaş</a:t>
+            </a:r>
+            <a:r>
+              <a:rPr lang="en-US" dirty="0">
+                <a:latin typeface="Bahnschrift Light" panose="020B0502040204020203" pitchFamily="34" charset="0"/>
+              </a:rPr>
+              <a:t> </a:t>
+            </a:r>
+            <a:r>
+              <a:rPr lang="en-US" dirty="0" err="1">
+                <a:latin typeface="Bahnschrift Light" panose="020B0502040204020203" pitchFamily="34" charset="0"/>
+              </a:rPr>
+              <a:t>şikayetlerini</a:t>
+            </a:r>
+            <a:r>
+              <a:rPr lang="en-US" dirty="0">
+                <a:latin typeface="Bahnschrift Light" panose="020B0502040204020203" pitchFamily="34" charset="0"/>
+              </a:rPr>
+              <a:t> </a:t>
+            </a:r>
+            <a:r>
+              <a:rPr lang="en-US" dirty="0" err="1">
+                <a:latin typeface="Bahnschrift Light" panose="020B0502040204020203" pitchFamily="34" charset="0"/>
+              </a:rPr>
+              <a:t>doğru</a:t>
+            </a:r>
+            <a:r>
+              <a:rPr lang="en-US" dirty="0">
+                <a:latin typeface="Bahnschrift Light" panose="020B0502040204020203" pitchFamily="34" charset="0"/>
+              </a:rPr>
+              <a:t> </a:t>
+            </a:r>
+            <a:r>
+              <a:rPr lang="en-US" dirty="0" err="1">
+                <a:latin typeface="Bahnschrift Light" panose="020B0502040204020203" pitchFamily="34" charset="0"/>
+              </a:rPr>
+              <a:t>şekilde</a:t>
+            </a:r>
+            <a:r>
+              <a:rPr lang="en-US" dirty="0">
+                <a:latin typeface="Bahnschrift Light" panose="020B0502040204020203" pitchFamily="34" charset="0"/>
+              </a:rPr>
+              <a:t> </a:t>
+            </a:r>
+            <a:r>
+              <a:rPr lang="en-US" dirty="0" err="1">
+                <a:latin typeface="Bahnschrift Light" panose="020B0502040204020203" pitchFamily="34" charset="0"/>
+              </a:rPr>
+              <a:t>ilgili</a:t>
+            </a:r>
+            <a:r>
+              <a:rPr lang="en-US" dirty="0">
+                <a:latin typeface="Bahnschrift Light" panose="020B0502040204020203" pitchFamily="34" charset="0"/>
+              </a:rPr>
+              <a:t> </a:t>
+            </a:r>
+            <a:r>
+              <a:rPr lang="en-US" dirty="0" err="1">
+                <a:latin typeface="Bahnschrift Light" panose="020B0502040204020203" pitchFamily="34" charset="0"/>
+              </a:rPr>
+              <a:t>belediye</a:t>
+            </a:r>
+            <a:r>
+              <a:rPr lang="en-US" dirty="0">
+                <a:latin typeface="Bahnschrift Light" panose="020B0502040204020203" pitchFamily="34" charset="0"/>
+              </a:rPr>
+              <a:t> </a:t>
+            </a:r>
+            <a:r>
+              <a:rPr lang="en-US" dirty="0" err="1">
+                <a:latin typeface="Bahnschrift Light" panose="020B0502040204020203" pitchFamily="34" charset="0"/>
+              </a:rPr>
+              <a:t>birimlerine</a:t>
+            </a:r>
+            <a:r>
+              <a:rPr lang="en-US" dirty="0">
+                <a:latin typeface="Bahnschrift Light" panose="020B0502040204020203" pitchFamily="34" charset="0"/>
+              </a:rPr>
+              <a:t> </a:t>
+            </a:r>
+            <a:r>
+              <a:rPr lang="en-US" dirty="0" err="1">
+                <a:latin typeface="Bahnschrift Light" panose="020B0502040204020203" pitchFamily="34" charset="0"/>
+              </a:rPr>
+              <a:t>sınıflandırabilmesi</a:t>
+            </a:r>
+            <a:r>
+              <a:rPr lang="en-US" dirty="0">
+                <a:latin typeface="Bahnschrift Light" panose="020B0502040204020203" pitchFamily="34" charset="0"/>
+              </a:rPr>
+              <a:t> </a:t>
+            </a:r>
+            <a:r>
+              <a:rPr lang="en-US" dirty="0" err="1">
+                <a:latin typeface="Bahnschrift Light" panose="020B0502040204020203" pitchFamily="34" charset="0"/>
+              </a:rPr>
+              <a:t>hedeflenmiştir</a:t>
+            </a:r>
+            <a:r>
+              <a:rPr lang="en-US" dirty="0">
+                <a:latin typeface="Bahnschrift Light" panose="020B0502040204020203" pitchFamily="34" charset="0"/>
+              </a:rPr>
+              <a:t>.</a:t>
+            </a:r>
+            <a:endParaRPr lang="tr-TR" dirty="0">
+              <a:latin typeface="Bahnschrift Light" panose="020B0502040204020203" pitchFamily="34" charset="0"/>
               <a:cs typeface="Arial" panose="020B0604020202020204" pitchFamily="34" charset="0"/>
             </a:endParaRPr>
           </a:p>
           <a:p>
-            <a:pPr lvl="1"/>
-            <a:r>
-              <a:rPr lang="en-US" dirty="0" err="1">
-                <a:latin typeface="Bahnschrift Light SemiCondensed" panose="020B0502040204020203" pitchFamily="34" charset="0"/>
-                <a:cs typeface="Arial" panose="020B0604020202020204" pitchFamily="34" charset="0"/>
-              </a:rPr>
-              <a:t>Veri</a:t>
-            </a:r>
-            <a:r>
-              <a:rPr lang="en-US" dirty="0">
-                <a:latin typeface="Bahnschrift Light SemiCondensed" panose="020B0502040204020203" pitchFamily="34" charset="0"/>
-                <a:cs typeface="Arial" panose="020B0604020202020204" pitchFamily="34" charset="0"/>
-              </a:rPr>
-              <a:t> </a:t>
-            </a:r>
-            <a:r>
-              <a:rPr lang="en-US" dirty="0" err="1">
-                <a:latin typeface="Bahnschrift Light SemiCondensed" panose="020B0502040204020203" pitchFamily="34" charset="0"/>
-                <a:cs typeface="Arial" panose="020B0604020202020204" pitchFamily="34" charset="0"/>
-              </a:rPr>
-              <a:t>seti</a:t>
-            </a:r>
-            <a:r>
-              <a:rPr lang="en-US" dirty="0">
-                <a:latin typeface="Bahnschrift Light SemiCondensed" panose="020B0502040204020203" pitchFamily="34" charset="0"/>
-                <a:cs typeface="Arial" panose="020B0604020202020204" pitchFamily="34" charset="0"/>
-              </a:rPr>
-              <a:t>, </a:t>
-            </a:r>
-            <a:r>
-              <a:rPr lang="en-US" dirty="0" err="1">
-                <a:latin typeface="Bahnschrift Light SemiCondensed" panose="020B0502040204020203" pitchFamily="34" charset="0"/>
-                <a:cs typeface="Arial" panose="020B0604020202020204" pitchFamily="34" charset="0"/>
-              </a:rPr>
-              <a:t>modelin</a:t>
-            </a:r>
-            <a:r>
-              <a:rPr lang="en-US" dirty="0">
-                <a:latin typeface="Bahnschrift Light SemiCondensed" panose="020B0502040204020203" pitchFamily="34" charset="0"/>
-                <a:cs typeface="Arial" panose="020B0604020202020204" pitchFamily="34" charset="0"/>
-              </a:rPr>
-              <a:t> hem </a:t>
-            </a:r>
-            <a:r>
-              <a:rPr lang="en-US" dirty="0" err="1">
-                <a:latin typeface="Bahnschrift Light SemiCondensed" panose="020B0502040204020203" pitchFamily="34" charset="0"/>
-                <a:cs typeface="Arial" panose="020B0604020202020204" pitchFamily="34" charset="0"/>
-              </a:rPr>
-              <a:t>eğitim</a:t>
-            </a:r>
-            <a:r>
-              <a:rPr lang="en-US" dirty="0">
-                <a:latin typeface="Bahnschrift Light SemiCondensed" panose="020B0502040204020203" pitchFamily="34" charset="0"/>
-                <a:cs typeface="Arial" panose="020B0604020202020204" pitchFamily="34" charset="0"/>
-              </a:rPr>
-              <a:t> hem de test </a:t>
-            </a:r>
-            <a:r>
-              <a:rPr lang="en-US" dirty="0" err="1">
-                <a:latin typeface="Bahnschrift Light SemiCondensed" panose="020B0502040204020203" pitchFamily="34" charset="0"/>
-                <a:cs typeface="Arial" panose="020B0604020202020204" pitchFamily="34" charset="0"/>
-              </a:rPr>
-              <a:t>aşamalarında</a:t>
-            </a:r>
-            <a:r>
-              <a:rPr lang="en-US" dirty="0">
-                <a:latin typeface="Bahnschrift Light SemiCondensed" panose="020B0502040204020203" pitchFamily="34" charset="0"/>
-                <a:cs typeface="Arial" panose="020B0604020202020204" pitchFamily="34" charset="0"/>
-              </a:rPr>
-              <a:t> </a:t>
-            </a:r>
-            <a:r>
-              <a:rPr lang="en-US" dirty="0" err="1">
-                <a:latin typeface="Bahnschrift Light SemiCondensed" panose="020B0502040204020203" pitchFamily="34" charset="0"/>
-                <a:cs typeface="Arial" panose="020B0604020202020204" pitchFamily="34" charset="0"/>
-              </a:rPr>
-              <a:t>kullanılmış</a:t>
-            </a:r>
-            <a:r>
-              <a:rPr lang="en-US" dirty="0">
-                <a:latin typeface="Bahnschrift Light SemiCondensed" panose="020B0502040204020203" pitchFamily="34" charset="0"/>
-                <a:cs typeface="Arial" panose="020B0604020202020204" pitchFamily="34" charset="0"/>
-              </a:rPr>
-              <a:t> </a:t>
-            </a:r>
-            <a:r>
-              <a:rPr lang="en-US" dirty="0" err="1">
-                <a:latin typeface="Bahnschrift Light SemiCondensed" panose="020B0502040204020203" pitchFamily="34" charset="0"/>
-                <a:cs typeface="Arial" panose="020B0604020202020204" pitchFamily="34" charset="0"/>
-              </a:rPr>
-              <a:t>ve</a:t>
-            </a:r>
-            <a:r>
-              <a:rPr lang="en-US" dirty="0">
-                <a:latin typeface="Bahnschrift Light SemiCondensed" panose="020B0502040204020203" pitchFamily="34" charset="0"/>
-                <a:cs typeface="Arial" panose="020B0604020202020204" pitchFamily="34" charset="0"/>
-              </a:rPr>
-              <a:t> </a:t>
-            </a:r>
-            <a:r>
-              <a:rPr lang="en-US" dirty="0" err="1">
-                <a:latin typeface="Bahnschrift Light SemiCondensed" panose="020B0502040204020203" pitchFamily="34" charset="0"/>
-                <a:cs typeface="Arial" panose="020B0604020202020204" pitchFamily="34" charset="0"/>
-              </a:rPr>
-              <a:t>sistemin</a:t>
-            </a:r>
-            <a:r>
-              <a:rPr lang="en-US" dirty="0">
-                <a:latin typeface="Bahnschrift Light SemiCondensed" panose="020B0502040204020203" pitchFamily="34" charset="0"/>
-                <a:cs typeface="Arial" panose="020B0604020202020204" pitchFamily="34" charset="0"/>
-              </a:rPr>
-              <a:t> </a:t>
-            </a:r>
-            <a:r>
-              <a:rPr lang="en-US" dirty="0" err="1">
-                <a:latin typeface="Bahnschrift Light SemiCondensed" panose="020B0502040204020203" pitchFamily="34" charset="0"/>
-                <a:cs typeface="Arial" panose="020B0604020202020204" pitchFamily="34" charset="0"/>
-              </a:rPr>
-              <a:t>gerçek</a:t>
-            </a:r>
-            <a:r>
-              <a:rPr lang="en-US" dirty="0">
-                <a:latin typeface="Bahnschrift Light SemiCondensed" panose="020B0502040204020203" pitchFamily="34" charset="0"/>
-                <a:cs typeface="Arial" panose="020B0604020202020204" pitchFamily="34" charset="0"/>
-              </a:rPr>
-              <a:t> </a:t>
-            </a:r>
-            <a:r>
-              <a:rPr lang="en-US" dirty="0" err="1">
-                <a:latin typeface="Bahnschrift Light SemiCondensed" panose="020B0502040204020203" pitchFamily="34" charset="0"/>
-                <a:cs typeface="Arial" panose="020B0604020202020204" pitchFamily="34" charset="0"/>
-              </a:rPr>
-              <a:t>dünya</a:t>
-            </a:r>
-            <a:r>
-              <a:rPr lang="en-US" dirty="0">
-                <a:latin typeface="Bahnschrift Light SemiCondensed" panose="020B0502040204020203" pitchFamily="34" charset="0"/>
-                <a:cs typeface="Arial" panose="020B0604020202020204" pitchFamily="34" charset="0"/>
-              </a:rPr>
-              <a:t> </a:t>
-            </a:r>
-            <a:r>
-              <a:rPr lang="en-US" dirty="0" err="1">
-                <a:latin typeface="Bahnschrift Light SemiCondensed" panose="020B0502040204020203" pitchFamily="34" charset="0"/>
-                <a:cs typeface="Arial" panose="020B0604020202020204" pitchFamily="34" charset="0"/>
-              </a:rPr>
-              <a:t>müşteri</a:t>
-            </a:r>
-            <a:r>
-              <a:rPr lang="en-US" dirty="0">
-                <a:latin typeface="Bahnschrift Light SemiCondensed" panose="020B0502040204020203" pitchFamily="34" charset="0"/>
-                <a:cs typeface="Arial" panose="020B0604020202020204" pitchFamily="34" charset="0"/>
-              </a:rPr>
-              <a:t> </a:t>
-            </a:r>
-            <a:r>
-              <a:rPr lang="en-US" dirty="0" err="1">
-                <a:latin typeface="Bahnschrift Light SemiCondensed" panose="020B0502040204020203" pitchFamily="34" charset="0"/>
-                <a:cs typeface="Arial" panose="020B0604020202020204" pitchFamily="34" charset="0"/>
-              </a:rPr>
-              <a:t>şikayetlerini</a:t>
-            </a:r>
-            <a:r>
-              <a:rPr lang="en-US" dirty="0">
-                <a:latin typeface="Bahnschrift Light SemiCondensed" panose="020B0502040204020203" pitchFamily="34" charset="0"/>
-                <a:cs typeface="Arial" panose="020B0604020202020204" pitchFamily="34" charset="0"/>
-              </a:rPr>
-              <a:t> </a:t>
-            </a:r>
-            <a:r>
-              <a:rPr lang="en-US" dirty="0" err="1">
-                <a:latin typeface="Bahnschrift Light SemiCondensed" panose="020B0502040204020203" pitchFamily="34" charset="0"/>
-                <a:cs typeface="Arial" panose="020B0604020202020204" pitchFamily="34" charset="0"/>
-              </a:rPr>
-              <a:t>doğru</a:t>
-            </a:r>
-            <a:r>
-              <a:rPr lang="en-US" dirty="0">
-                <a:latin typeface="Bahnschrift Light SemiCondensed" panose="020B0502040204020203" pitchFamily="34" charset="0"/>
-                <a:cs typeface="Arial" panose="020B0604020202020204" pitchFamily="34" charset="0"/>
-              </a:rPr>
-              <a:t> </a:t>
-            </a:r>
-            <a:r>
-              <a:rPr lang="en-US" dirty="0" err="1">
-                <a:latin typeface="Bahnschrift Light SemiCondensed" panose="020B0502040204020203" pitchFamily="34" charset="0"/>
-                <a:cs typeface="Arial" panose="020B0604020202020204" pitchFamily="34" charset="0"/>
-              </a:rPr>
-              <a:t>şekilde</a:t>
-            </a:r>
-            <a:r>
-              <a:rPr lang="en-US" dirty="0">
-                <a:latin typeface="Bahnschrift Light SemiCondensed" panose="020B0502040204020203" pitchFamily="34" charset="0"/>
-                <a:cs typeface="Arial" panose="020B0604020202020204" pitchFamily="34" charset="0"/>
-              </a:rPr>
-              <a:t> </a:t>
-            </a:r>
-            <a:r>
-              <a:rPr lang="en-US" dirty="0" err="1">
-                <a:latin typeface="Bahnschrift Light SemiCondensed" panose="020B0502040204020203" pitchFamily="34" charset="0"/>
-                <a:cs typeface="Arial" panose="020B0604020202020204" pitchFamily="34" charset="0"/>
-              </a:rPr>
-              <a:t>sınıflandırabilmesi</a:t>
-            </a:r>
-            <a:r>
-              <a:rPr lang="en-US" dirty="0">
-                <a:latin typeface="Bahnschrift Light SemiCondensed" panose="020B0502040204020203" pitchFamily="34" charset="0"/>
-                <a:cs typeface="Arial" panose="020B0604020202020204" pitchFamily="34" charset="0"/>
-              </a:rPr>
-              <a:t> </a:t>
-            </a:r>
-            <a:r>
-              <a:rPr lang="en-US" dirty="0" err="1">
-                <a:latin typeface="Bahnschrift Light SemiCondensed" panose="020B0502040204020203" pitchFamily="34" charset="0"/>
-                <a:cs typeface="Arial" panose="020B0604020202020204" pitchFamily="34" charset="0"/>
-              </a:rPr>
-              <a:t>hedeflenmiştir</a:t>
-            </a:r>
-            <a:r>
-              <a:rPr lang="en-US" dirty="0" smtClean="0">
-                <a:latin typeface="Bahnschrift Light SemiCondensed" panose="020B0502040204020203" pitchFamily="34" charset="0"/>
-                <a:cs typeface="Arial" panose="020B0604020202020204" pitchFamily="34" charset="0"/>
-              </a:rPr>
-              <a:t>.</a:t>
-            </a:r>
-            <a:endParaRPr lang="tr-TR" dirty="0" smtClean="0">
-              <a:latin typeface="Bahnschrift Light SemiCondensed" panose="020B0502040204020203" pitchFamily="34" charset="0"/>
-              <a:cs typeface="Arial" panose="020B0604020202020204" pitchFamily="34" charset="0"/>
-            </a:endParaRPr>
-          </a:p>
-          <a:p>
-            <a:pPr lvl="1"/>
-            <a:endParaRPr lang="tr-TR" dirty="0">
-              <a:latin typeface="Bahnschrift Light SemiCondensed" panose="020B0502040204020203" pitchFamily="34" charset="0"/>
-              <a:cs typeface="Arial" panose="020B0604020202020204" pitchFamily="34" charset="0"/>
-            </a:endParaRPr>
-          </a:p>
-          <a:p>
-            <a:pPr lvl="1"/>
-            <a:r>
-              <a:rPr lang="tr-TR" dirty="0" smtClean="0">
-                <a:latin typeface="Bahnschrift Light SemiCondensed" panose="020B0502040204020203" pitchFamily="34" charset="0"/>
-                <a:cs typeface="Arial" panose="020B0604020202020204" pitchFamily="34" charset="0"/>
-              </a:rPr>
-              <a:t>Veri </a:t>
-            </a:r>
-            <a:r>
-              <a:rPr lang="tr-TR" dirty="0">
-                <a:latin typeface="Bahnschrift Light SemiCondensed" panose="020B0502040204020203" pitchFamily="34" charset="0"/>
-                <a:cs typeface="Arial" panose="020B0604020202020204" pitchFamily="34" charset="0"/>
-              </a:rPr>
-              <a:t>seti linki : https://www.kaggle.com/datasets/selener/consumer-complaint-database</a:t>
-            </a:r>
-            <a:endParaRPr lang="en-US" dirty="0" smtClean="0">
+            <a:pPr marL="128016" lvl="1" indent="0">
+              <a:buNone/>
+            </a:pPr>
+            <a:endParaRPr lang="en-US" dirty="0">
               <a:latin typeface="Bahnschrift Light SemiCondensed" panose="020B0502040204020203" pitchFamily="34" charset="0"/>
               <a:cs typeface="Arial" panose="020B0604020202020204" pitchFamily="34" charset="0"/>
             </a:endParaRPr>
@@ -24635,7 +24570,7 @@
               <a:tabLst/>
             </a:pPr>
             <a:r>
-              <a:rPr kumimoji="0" lang="tr-TR" altLang="en-US" sz="1800" b="0" i="0" u="none" strike="noStrike" cap="none" normalizeH="0" baseline="0" dirty="0" smtClean="0">
+              <a:rPr kumimoji="0" lang="tr-TR" altLang="en-US" sz="1800" b="0" i="0" u="none" strike="noStrike" cap="none" normalizeH="0" baseline="0" dirty="0">
                 <a:ln>
                   <a:noFill/>
                 </a:ln>
@@ -24648,13 +24583,13 @@
               <a:t>  </a:t>
             </a:r>
             <a:r>
-              <a:rPr lang="tr-TR" altLang="en-US" sz="1800" dirty="0" smtClean="0">
+              <a:rPr lang="tr-TR" altLang="en-US" sz="1800" dirty="0">
                 <a:latin typeface="Bahnschrift Light SemiCondensed" panose="020B0502040204020203" pitchFamily="34" charset="0"/>
               </a:rPr>
               <a:t>- </a:t>
             </a:r>
             <a:r>
-              <a:rPr kumimoji="0" lang="en-US" altLang="en-US" sz="1800" b="0" i="0" u="none" strike="noStrike" cap="none" normalizeH="0" baseline="0" dirty="0" smtClean="0">
+              <a:rPr kumimoji="0" lang="en-US" altLang="en-US" sz="1800" b="0" i="0" u="none" strike="noStrike" cap="none" normalizeH="0" baseline="0" dirty="0">
                 <a:ln>
                   <a:noFill/>
                 </a:ln>
@@ -24667,7 +24602,7 @@
               <a:t>Bu </a:t>
             </a:r>
             <a:r>
-              <a:rPr kumimoji="0" lang="en-US" altLang="en-US" sz="1800" b="0" i="0" u="none" strike="noStrike" cap="none" normalizeH="0" baseline="0" dirty="0" err="1" smtClean="0">
+              <a:rPr kumimoji="0" lang="en-US" altLang="en-US" sz="1800" b="0" i="0" u="none" strike="noStrike" cap="none" normalizeH="0" baseline="0" dirty="0" err="1">
                 <a:ln>
                   <a:noFill/>
                 </a:ln>
@@ -24680,7 +24615,7 @@
               <a:t>çalışmada</a:t>
             </a:r>
             <a:r>
-              <a:rPr kumimoji="0" lang="en-US" altLang="en-US" sz="1800" b="0" i="0" u="none" strike="noStrike" cap="none" normalizeH="0" baseline="0" dirty="0" smtClean="0">
+              <a:rPr kumimoji="0" lang="en-US" altLang="en-US" sz="1800" b="0" i="0" u="none" strike="noStrike" cap="none" normalizeH="0" baseline="0" dirty="0">
                 <a:ln>
                   <a:noFill/>
                 </a:ln>
@@ -24693,7 +24628,7 @@
               <a:t> </a:t>
             </a:r>
             <a:r>
-              <a:rPr kumimoji="0" lang="en-US" altLang="en-US" sz="1800" b="0" i="0" u="none" strike="noStrike" cap="none" normalizeH="0" baseline="0" dirty="0" err="1" smtClean="0">
+              <a:rPr kumimoji="0" lang="en-US" altLang="en-US" sz="1800" b="0" i="0" u="none" strike="noStrike" cap="none" normalizeH="0" baseline="0" dirty="0" err="1">
                 <a:ln>
                   <a:noFill/>
                 </a:ln>
@@ -24706,7 +24641,7 @@
               <a:t>veri</a:t>
             </a:r>
             <a:r>
-              <a:rPr kumimoji="0" lang="en-US" altLang="en-US" sz="1800" b="0" i="0" u="none" strike="noStrike" cap="none" normalizeH="0" baseline="0" dirty="0" smtClean="0">
+              <a:rPr kumimoji="0" lang="en-US" altLang="en-US" sz="1800" b="0" i="0" u="none" strike="noStrike" cap="none" normalizeH="0" baseline="0" dirty="0">
                 <a:ln>
                   <a:noFill/>
                 </a:ln>
@@ -24719,7 +24654,7 @@
               <a:t> </a:t>
             </a:r>
             <a:r>
-              <a:rPr kumimoji="0" lang="en-US" altLang="en-US" sz="1800" b="0" i="0" u="none" strike="noStrike" cap="none" normalizeH="0" baseline="0" dirty="0" err="1" smtClean="0">
+              <a:rPr kumimoji="0" lang="en-US" altLang="en-US" sz="1800" b="0" i="0" u="none" strike="noStrike" cap="none" normalizeH="0" baseline="0" dirty="0" err="1">
                 <a:ln>
                   <a:noFill/>
                 </a:ln>
@@ -24732,7 +24667,7 @@
               <a:t>seti</a:t>
             </a:r>
             <a:r>
-              <a:rPr kumimoji="0" lang="en-US" altLang="en-US" sz="1800" b="0" i="0" u="none" strike="noStrike" cap="none" normalizeH="0" baseline="0" dirty="0" smtClean="0">
+              <a:rPr kumimoji="0" lang="en-US" altLang="en-US" sz="1800" b="0" i="0" u="none" strike="noStrike" cap="none" normalizeH="0" baseline="0" dirty="0">
                 <a:ln>
                   <a:noFill/>
                 </a:ln>
@@ -24745,7 +24680,7 @@
               <a:t>, BERT </a:t>
             </a:r>
             <a:r>
-              <a:rPr kumimoji="0" lang="en-US" altLang="en-US" sz="1800" b="0" i="0" u="none" strike="noStrike" cap="none" normalizeH="0" baseline="0" dirty="0" err="1" smtClean="0">
+              <a:rPr kumimoji="0" lang="en-US" altLang="en-US" sz="1800" b="0" i="0" u="none" strike="noStrike" cap="none" normalizeH="0" baseline="0" dirty="0" err="1">
                 <a:ln>
                   <a:noFill/>
                 </a:ln>
@@ -24758,7 +24693,7 @@
               <a:t>modeline</a:t>
             </a:r>
             <a:r>
-              <a:rPr kumimoji="0" lang="en-US" altLang="en-US" sz="1800" b="0" i="0" u="none" strike="noStrike" cap="none" normalizeH="0" baseline="0" dirty="0" smtClean="0">
+              <a:rPr kumimoji="0" lang="en-US" altLang="en-US" sz="1800" b="0" i="0" u="none" strike="noStrike" cap="none" normalizeH="0" baseline="0" dirty="0">
                 <a:ln>
                   <a:noFill/>
                 </a:ln>
@@ -24771,7 +24706,7 @@
               <a:t> </a:t>
             </a:r>
             <a:r>
-              <a:rPr kumimoji="0" lang="en-US" altLang="en-US" sz="1800" b="0" i="0" u="none" strike="noStrike" cap="none" normalizeH="0" baseline="0" dirty="0" err="1" smtClean="0">
+              <a:rPr kumimoji="0" lang="en-US" altLang="en-US" sz="1800" b="0" i="0" u="none" strike="noStrike" cap="none" normalizeH="0" baseline="0" dirty="0" err="1">
                 <a:ln>
                   <a:noFill/>
                 </a:ln>
@@ -24784,7 +24719,7 @@
               <a:t>uygun</a:t>
             </a:r>
             <a:r>
-              <a:rPr kumimoji="0" lang="en-US" altLang="en-US" sz="1800" b="0" i="0" u="none" strike="noStrike" cap="none" normalizeH="0" baseline="0" dirty="0" smtClean="0">
+              <a:rPr kumimoji="0" lang="en-US" altLang="en-US" sz="1800" b="0" i="0" u="none" strike="noStrike" cap="none" normalizeH="0" baseline="0" dirty="0">
                 <a:ln>
                   <a:noFill/>
                 </a:ln>
@@ -24797,7 +24732,7 @@
               <a:t> hale </a:t>
             </a:r>
             <a:r>
-              <a:rPr kumimoji="0" lang="en-US" altLang="en-US" sz="1800" b="0" i="0" u="none" strike="noStrike" cap="none" normalizeH="0" baseline="0" dirty="0" err="1" smtClean="0">
+              <a:rPr kumimoji="0" lang="en-US" altLang="en-US" sz="1800" b="0" i="0" u="none" strike="noStrike" cap="none" normalizeH="0" baseline="0" dirty="0" err="1">
                 <a:ln>
                   <a:noFill/>
                 </a:ln>
@@ -24809,7 +24744,7 @@
               </a:rPr>
               <a:t>getirilmeden</a:t>
             </a:r>
-            <a:endParaRPr kumimoji="0" lang="tr-TR" altLang="en-US" sz="1800" b="0" i="0" u="none" strike="noStrike" cap="none" normalizeH="0" baseline="0" dirty="0" smtClean="0">
+            <a:endParaRPr kumimoji="0" lang="tr-TR" altLang="en-US" sz="1800" b="0" i="0" u="none" strike="noStrike" cap="none" normalizeH="0" baseline="0" dirty="0">
               <a:ln>
                 <a:noFill/>
               </a:ln>
@@ -24838,7 +24773,7 @@
               <a:tabLst/>
             </a:pPr>
             <a:r>
-              <a:rPr kumimoji="0" lang="en-US" altLang="en-US" sz="1800" b="0" i="0" u="none" strike="noStrike" cap="none" normalizeH="0" baseline="0" dirty="0" err="1" smtClean="0">
+              <a:rPr kumimoji="0" lang="en-US" altLang="en-US" sz="1800" b="0" i="0" u="none" strike="noStrike" cap="none" normalizeH="0" baseline="0" dirty="0" err="1">
                 <a:ln>
                   <a:noFill/>
                 </a:ln>
@@ -24851,7 +24786,7 @@
               <a:t>önce</a:t>
             </a:r>
             <a:r>
-              <a:rPr kumimoji="0" lang="en-US" altLang="en-US" sz="1800" b="0" i="0" u="none" strike="noStrike" cap="none" normalizeH="0" baseline="0" dirty="0" smtClean="0">
+              <a:rPr kumimoji="0" lang="en-US" altLang="en-US" sz="1800" b="0" i="0" u="none" strike="noStrike" cap="none" normalizeH="0" baseline="0" dirty="0">
                 <a:ln>
                   <a:noFill/>
                 </a:ln>
@@ -24864,7 +24799,7 @@
               <a:t> </a:t>
             </a:r>
             <a:r>
-              <a:rPr kumimoji="0" lang="en-US" altLang="en-US" sz="1800" b="0" i="0" u="none" strike="noStrike" cap="none" normalizeH="0" baseline="0" dirty="0" err="1" smtClean="0">
+              <a:rPr kumimoji="0" lang="en-US" altLang="en-US" sz="1800" b="0" i="0" u="none" strike="noStrike" cap="none" normalizeH="0" baseline="0" dirty="0" err="1">
                 <a:ln>
                   <a:noFill/>
                 </a:ln>
@@ -24877,7 +24812,7 @@
               <a:t>ön</a:t>
             </a:r>
             <a:r>
-              <a:rPr kumimoji="0" lang="en-US" altLang="en-US" sz="1800" b="0" i="0" u="none" strike="noStrike" cap="none" normalizeH="0" baseline="0" dirty="0" smtClean="0">
+              <a:rPr kumimoji="0" lang="en-US" altLang="en-US" sz="1800" b="0" i="0" u="none" strike="noStrike" cap="none" normalizeH="0" baseline="0" dirty="0">
                 <a:ln>
                   <a:noFill/>
                 </a:ln>
@@ -24890,7 +24825,7 @@
               <a:t> </a:t>
             </a:r>
             <a:r>
-              <a:rPr kumimoji="0" lang="en-US" altLang="en-US" sz="1800" b="0" i="0" u="none" strike="noStrike" cap="none" normalizeH="0" baseline="0" dirty="0" err="1" smtClean="0">
+              <a:rPr kumimoji="0" lang="en-US" altLang="en-US" sz="1800" b="0" i="0" u="none" strike="noStrike" cap="none" normalizeH="0" baseline="0" dirty="0" err="1">
                 <a:ln>
                   <a:noFill/>
                 </a:ln>
@@ -24903,7 +24838,7 @@
               <a:t>işleme</a:t>
             </a:r>
             <a:r>
-              <a:rPr kumimoji="0" lang="en-US" altLang="en-US" sz="1800" b="0" i="0" u="none" strike="noStrike" cap="none" normalizeH="0" baseline="0" dirty="0" smtClean="0">
+              <a:rPr kumimoji="0" lang="en-US" altLang="en-US" sz="1800" b="0" i="0" u="none" strike="noStrike" cap="none" normalizeH="0" baseline="0" dirty="0">
                 <a:ln>
                   <a:noFill/>
                 </a:ln>
@@ -24916,7 +24851,7 @@
               <a:t> </a:t>
             </a:r>
             <a:r>
-              <a:rPr kumimoji="0" lang="en-US" altLang="en-US" sz="1800" b="0" i="0" u="none" strike="noStrike" cap="none" normalizeH="0" baseline="0" dirty="0" err="1" smtClean="0">
+              <a:rPr kumimoji="0" lang="en-US" altLang="en-US" sz="1800" b="0" i="0" u="none" strike="noStrike" cap="none" normalizeH="0" baseline="0" dirty="0" err="1">
                 <a:ln>
                   <a:noFill/>
                 </a:ln>
@@ -24929,7 +24864,7 @@
               <a:t>adımlarından</a:t>
             </a:r>
             <a:r>
-              <a:rPr kumimoji="0" lang="en-US" altLang="en-US" sz="1800" b="0" i="0" u="none" strike="noStrike" cap="none" normalizeH="0" baseline="0" dirty="0" smtClean="0">
+              <a:rPr kumimoji="0" lang="en-US" altLang="en-US" sz="1800" b="0" i="0" u="none" strike="noStrike" cap="none" normalizeH="0" baseline="0" dirty="0">
                 <a:ln>
                   <a:noFill/>
                 </a:ln>
@@ -24942,7 +24877,7 @@
               <a:t> </a:t>
             </a:r>
             <a:r>
-              <a:rPr kumimoji="0" lang="en-US" altLang="en-US" sz="1800" b="0" i="0" u="none" strike="noStrike" cap="none" normalizeH="0" baseline="0" dirty="0" err="1" smtClean="0">
+              <a:rPr kumimoji="0" lang="en-US" altLang="en-US" sz="1800" b="0" i="0" u="none" strike="noStrike" cap="none" normalizeH="0" baseline="0" dirty="0" err="1">
                 <a:ln>
                   <a:noFill/>
                 </a:ln>
@@ -24955,7 +24890,7 @@
               <a:t>geçirilmiştir</a:t>
             </a:r>
             <a:r>
-              <a:rPr kumimoji="0" lang="en-US" altLang="en-US" sz="1800" b="0" i="0" u="none" strike="noStrike" cap="none" normalizeH="0" baseline="0" dirty="0" smtClean="0">
+              <a:rPr kumimoji="0" lang="en-US" altLang="en-US" sz="1800" b="0" i="0" u="none" strike="noStrike" cap="none" normalizeH="0" baseline="0" dirty="0">
                 <a:ln>
                   <a:noFill/>
                 </a:ln>
@@ -24967,7 +24902,7 @@
               </a:rPr>
               <a:t>.</a:t>
             </a:r>
-            <a:endParaRPr kumimoji="0" lang="tr-TR" altLang="en-US" sz="1800" b="0" i="0" u="none" strike="noStrike" cap="none" normalizeH="0" baseline="0" dirty="0" smtClean="0">
+            <a:endParaRPr kumimoji="0" lang="tr-TR" altLang="en-US" sz="1800" b="0" i="0" u="none" strike="noStrike" cap="none" normalizeH="0" baseline="0" dirty="0">
               <a:ln>
                 <a:noFill/>
               </a:ln>
@@ -24995,7 +24930,7 @@
               <a:buNone/>
               <a:tabLst/>
             </a:pPr>
-            <a:endParaRPr kumimoji="0" lang="tr-TR" altLang="en-US" sz="1800" b="0" i="0" u="none" strike="noStrike" cap="none" normalizeH="0" baseline="0" dirty="0" smtClean="0">
+            <a:endParaRPr kumimoji="0" lang="tr-TR" altLang="en-US" sz="1800" b="0" i="0" u="none" strike="noStrike" cap="none" normalizeH="0" baseline="0" dirty="0">
               <a:ln>
                 <a:noFill/>
               </a:ln>
@@ -25024,7 +24959,7 @@
               <a:tabLst/>
             </a:pPr>
             <a:r>
-              <a:rPr kumimoji="0" lang="en-US" altLang="en-US" sz="1800" b="0" i="0" u="none" strike="noStrike" cap="none" normalizeH="0" baseline="0" dirty="0" smtClean="0">
+              <a:rPr kumimoji="0" lang="en-US" altLang="en-US" sz="1800" b="0" i="0" u="none" strike="noStrike" cap="none" normalizeH="0" baseline="0" dirty="0">
                 <a:ln>
                   <a:noFill/>
                 </a:ln>
@@ -25037,7 +24972,7 @@
               <a:t> </a:t>
             </a:r>
             <a:r>
-              <a:rPr kumimoji="0" lang="tr-TR" altLang="en-US" sz="1800" b="0" i="0" u="none" strike="noStrike" cap="none" normalizeH="0" baseline="0" dirty="0" smtClean="0">
+              <a:rPr kumimoji="0" lang="tr-TR" altLang="en-US" sz="1800" b="0" i="0" u="none" strike="noStrike" cap="none" normalizeH="0" baseline="0" dirty="0">
                 <a:ln>
                   <a:noFill/>
                 </a:ln>
@@ -25050,7 +24985,7 @@
               <a:t> -</a:t>
             </a:r>
             <a:r>
-              <a:rPr kumimoji="0" lang="tr-TR" altLang="en-US" sz="1800" b="0" i="0" u="none" strike="noStrike" cap="none" normalizeH="0" dirty="0" smtClean="0">
+              <a:rPr kumimoji="0" lang="tr-TR" altLang="en-US" sz="1800" b="0" i="0" u="none" strike="noStrike" cap="none" normalizeH="0" dirty="0">
                 <a:ln>
                   <a:noFill/>
                 </a:ln>
@@ -25063,7 +24998,7 @@
               <a:t> </a:t>
             </a:r>
             <a:r>
-              <a:rPr kumimoji="0" lang="en-US" altLang="en-US" sz="1800" b="0" i="0" u="none" strike="noStrike" cap="none" normalizeH="0" baseline="0" dirty="0" err="1" smtClean="0">
+              <a:rPr kumimoji="0" lang="en-US" altLang="en-US" sz="1800" b="0" i="0" u="none" strike="noStrike" cap="none" normalizeH="0" baseline="0" dirty="0" err="1">
                 <a:ln>
                   <a:noFill/>
                 </a:ln>
@@ -25076,7 +25011,7 @@
               <a:t>Metinler</a:t>
             </a:r>
             <a:r>
-              <a:rPr kumimoji="0" lang="en-US" altLang="en-US" sz="1800" b="0" i="0" u="none" strike="noStrike" cap="none" normalizeH="0" baseline="0" dirty="0" smtClean="0">
+              <a:rPr kumimoji="0" lang="en-US" altLang="en-US" sz="1800" b="0" i="0" u="none" strike="noStrike" cap="none" normalizeH="0" baseline="0" dirty="0">
                 <a:ln>
                   <a:noFill/>
                 </a:ln>
@@ -25089,7 +25024,7 @@
               <a:t> </a:t>
             </a:r>
             <a:r>
-              <a:rPr kumimoji="0" lang="en-US" altLang="en-US" sz="1800" b="0" i="0" u="none" strike="noStrike" cap="none" normalizeH="0" baseline="0" dirty="0" err="1" smtClean="0">
+              <a:rPr kumimoji="0" lang="en-US" altLang="en-US" sz="1800" b="0" i="0" u="none" strike="noStrike" cap="none" normalizeH="0" baseline="0" dirty="0" err="1">
                 <a:ln>
                   <a:noFill/>
                 </a:ln>
@@ -25102,7 +25037,7 @@
               <a:t>WordPiece</a:t>
             </a:r>
             <a:r>
-              <a:rPr kumimoji="0" lang="en-US" altLang="en-US" sz="1800" b="0" i="0" u="none" strike="noStrike" cap="none" normalizeH="0" baseline="0" dirty="0" smtClean="0">
+              <a:rPr kumimoji="0" lang="en-US" altLang="en-US" sz="1800" b="0" i="0" u="none" strike="noStrike" cap="none" normalizeH="0" baseline="0" dirty="0">
                 <a:ln>
                   <a:noFill/>
                 </a:ln>
@@ -25115,7 +25050,7 @@
               <a:t> tokenizer </a:t>
             </a:r>
             <a:r>
-              <a:rPr kumimoji="0" lang="en-US" altLang="en-US" sz="1800" b="0" i="0" u="none" strike="noStrike" cap="none" normalizeH="0" baseline="0" dirty="0" err="1" smtClean="0">
+              <a:rPr kumimoji="0" lang="en-US" altLang="en-US" sz="1800" b="0" i="0" u="none" strike="noStrike" cap="none" normalizeH="0" baseline="0" dirty="0" err="1">
                 <a:ln>
                   <a:noFill/>
                 </a:ln>
@@ -25128,7 +25063,7 @@
               <a:t>kullanılarak</a:t>
             </a:r>
             <a:r>
-              <a:rPr kumimoji="0" lang="en-US" altLang="en-US" sz="1800" b="0" i="0" u="none" strike="noStrike" cap="none" normalizeH="0" baseline="0" dirty="0" smtClean="0">
+              <a:rPr kumimoji="0" lang="en-US" altLang="en-US" sz="1800" b="0" i="0" u="none" strike="noStrike" cap="none" normalizeH="0" baseline="0" dirty="0">
                 <a:ln>
                   <a:noFill/>
                 </a:ln>
@@ -25141,7 +25076,7 @@
               <a:t> </a:t>
             </a:r>
             <a:r>
-              <a:rPr kumimoji="0" lang="en-US" altLang="en-US" sz="1800" b="0" i="0" u="none" strike="noStrike" cap="none" normalizeH="0" baseline="0" dirty="0" err="1" smtClean="0">
+              <a:rPr kumimoji="0" lang="en-US" altLang="en-US" sz="1800" b="0" i="0" u="none" strike="noStrike" cap="none" normalizeH="0" baseline="0" dirty="0" err="1">
                 <a:ln>
                   <a:noFill/>
                 </a:ln>
@@ -25154,7 +25089,7 @@
               <a:t>sayısal</a:t>
             </a:r>
             <a:r>
-              <a:rPr kumimoji="0" lang="en-US" altLang="en-US" sz="1800" b="0" i="0" u="none" strike="noStrike" cap="none" normalizeH="0" baseline="0" dirty="0" smtClean="0">
+              <a:rPr kumimoji="0" lang="en-US" altLang="en-US" sz="1800" b="0" i="0" u="none" strike="noStrike" cap="none" normalizeH="0" baseline="0" dirty="0">
                 <a:ln>
                   <a:noFill/>
                 </a:ln>
@@ -25167,7 +25102,7 @@
               <a:t> </a:t>
             </a:r>
             <a:r>
-              <a:rPr kumimoji="0" lang="en-US" altLang="en-US" sz="1800" b="0" i="0" u="none" strike="noStrike" cap="none" normalizeH="0" baseline="0" dirty="0" err="1" smtClean="0">
+              <a:rPr kumimoji="0" lang="en-US" altLang="en-US" sz="1800" b="0" i="0" u="none" strike="noStrike" cap="none" normalizeH="0" baseline="0" dirty="0" err="1">
                 <a:ln>
                   <a:noFill/>
                 </a:ln>
@@ -25180,7 +25115,7 @@
               <a:t>tokenlara</a:t>
             </a:r>
             <a:r>
-              <a:rPr kumimoji="0" lang="en-US" altLang="en-US" sz="1800" b="0" i="0" u="none" strike="noStrike" cap="none" normalizeH="0" baseline="0" dirty="0" smtClean="0">
+              <a:rPr kumimoji="0" lang="en-US" altLang="en-US" sz="1800" b="0" i="0" u="none" strike="noStrike" cap="none" normalizeH="0" baseline="0" dirty="0">
                 <a:ln>
                   <a:noFill/>
                 </a:ln>
@@ -25193,7 +25128,7 @@
               <a:t> </a:t>
             </a:r>
             <a:r>
-              <a:rPr kumimoji="0" lang="en-US" altLang="en-US" sz="1800" b="0" i="0" u="none" strike="noStrike" cap="none" normalizeH="0" baseline="0" dirty="0" err="1" smtClean="0">
+              <a:rPr kumimoji="0" lang="en-US" altLang="en-US" sz="1800" b="0" i="0" u="none" strike="noStrike" cap="none" normalizeH="0" baseline="0" dirty="0" err="1">
                 <a:ln>
                   <a:noFill/>
                 </a:ln>
@@ -25206,7 +25141,7 @@
               <a:t>dönüştürülmüş</a:t>
             </a:r>
             <a:r>
-              <a:rPr kumimoji="0" lang="tr-TR" altLang="en-US" sz="1800" b="0" i="0" u="none" strike="noStrike" cap="none" normalizeH="0" dirty="0" smtClean="0">
+              <a:rPr kumimoji="0" lang="tr-TR" altLang="en-US" sz="1800" b="0" i="0" u="none" strike="noStrike" cap="none" normalizeH="0" dirty="0">
                 <a:ln>
                   <a:noFill/>
                 </a:ln>
@@ -25237,13 +25172,13 @@
               <a:tabLst/>
             </a:pPr>
             <a:r>
-              <a:rPr lang="tr-TR" altLang="en-US" sz="1800" dirty="0" smtClean="0">
+              <a:rPr lang="tr-TR" altLang="en-US" sz="1800" dirty="0">
                 <a:latin typeface="Bahnschrift Light SemiCondensed" panose="020B0502040204020203" pitchFamily="34" charset="0"/>
               </a:rPr>
               <a:t>h</a:t>
             </a:r>
             <a:r>
-              <a:rPr kumimoji="0" lang="en-US" altLang="en-US" sz="1800" b="0" i="0" u="none" strike="noStrike" cap="none" normalizeH="0" baseline="0" dirty="0" err="1" smtClean="0">
+              <a:rPr kumimoji="0" lang="en-US" altLang="en-US" sz="1800" b="0" i="0" u="none" strike="noStrike" cap="none" normalizeH="0" baseline="0" dirty="0">
                 <a:ln>
                   <a:noFill/>
                 </a:ln>
@@ -25253,10 +25188,10 @@
                 <a:effectLst/>
                 <a:latin typeface="Bahnschrift Light SemiCondensed" panose="020B0502040204020203" pitchFamily="34" charset="0"/>
               </a:rPr>
-              <a:t>er</a:t>
-            </a:r>
-            <a:r>
-              <a:rPr kumimoji="0" lang="en-US" altLang="en-US" sz="1800" b="0" i="0" u="none" strike="noStrike" cap="none" normalizeH="0" baseline="0" dirty="0" smtClean="0">
+              <a:t>er </a:t>
+            </a:r>
+            <a:r>
+              <a:rPr kumimoji="0" lang="en-US" altLang="en-US" sz="1800" b="0" i="0" u="none" strike="noStrike" cap="none" normalizeH="0" baseline="0" dirty="0" err="1">
                 <a:ln>
                   <a:noFill/>
                 </a:ln>
@@ -25266,10 +25201,10 @@
                 <a:effectLst/>
                 <a:latin typeface="Bahnschrift Light SemiCondensed" panose="020B0502040204020203" pitchFamily="34" charset="0"/>
               </a:rPr>
-              <a:t> </a:t>
-            </a:r>
-            <a:r>
-              <a:rPr kumimoji="0" lang="en-US" altLang="en-US" sz="1800" b="0" i="0" u="none" strike="noStrike" cap="none" normalizeH="0" baseline="0" dirty="0" err="1" smtClean="0">
+              <a:t>bir</a:t>
+            </a:r>
+            <a:r>
+              <a:rPr kumimoji="0" lang="en-US" altLang="en-US" sz="1800" b="0" i="0" u="none" strike="noStrike" cap="none" normalizeH="0" baseline="0" dirty="0">
                 <a:ln>
                   <a:noFill/>
                 </a:ln>
@@ -25279,10 +25214,10 @@
                 <a:effectLst/>
                 <a:latin typeface="Bahnschrift Light SemiCondensed" panose="020B0502040204020203" pitchFamily="34" charset="0"/>
               </a:rPr>
-              <a:t>bir</a:t>
-            </a:r>
-            <a:r>
-              <a:rPr kumimoji="0" lang="en-US" altLang="en-US" sz="1800" b="0" i="0" u="none" strike="noStrike" cap="none" normalizeH="0" baseline="0" dirty="0" smtClean="0">
+              <a:t> </a:t>
+            </a:r>
+            <a:r>
+              <a:rPr kumimoji="0" lang="en-US" altLang="en-US" sz="1800" b="0" i="0" u="none" strike="noStrike" cap="none" normalizeH="0" baseline="0" dirty="0" err="1">
                 <a:ln>
                   <a:noFill/>
                 </a:ln>
@@ -25292,10 +25227,10 @@
                 <a:effectLst/>
                 <a:latin typeface="Bahnschrift Light SemiCondensed" panose="020B0502040204020203" pitchFamily="34" charset="0"/>
               </a:rPr>
-              <a:t> </a:t>
-            </a:r>
-            <a:r>
-              <a:rPr kumimoji="0" lang="en-US" altLang="en-US" sz="1800" b="0" i="0" u="none" strike="noStrike" cap="none" normalizeH="0" baseline="0" dirty="0" err="1" smtClean="0">
+              <a:t>şikayet</a:t>
+            </a:r>
+            <a:r>
+              <a:rPr kumimoji="0" lang="en-US" altLang="en-US" sz="1800" b="0" i="0" u="none" strike="noStrike" cap="none" normalizeH="0" baseline="0" dirty="0">
                 <a:ln>
                   <a:noFill/>
                 </a:ln>
@@ -25305,10 +25240,10 @@
                 <a:effectLst/>
                 <a:latin typeface="Bahnschrift Light SemiCondensed" panose="020B0502040204020203" pitchFamily="34" charset="0"/>
               </a:rPr>
-              <a:t>şikayet</a:t>
-            </a:r>
-            <a:r>
-              <a:rPr kumimoji="0" lang="en-US" altLang="en-US" sz="1800" b="0" i="0" u="none" strike="noStrike" cap="none" normalizeH="0" baseline="0" dirty="0" smtClean="0">
+              <a:t> </a:t>
+            </a:r>
+            <a:r>
+              <a:rPr kumimoji="0" lang="en-US" altLang="en-US" sz="1800" b="0" i="0" u="none" strike="noStrike" cap="none" normalizeH="0" baseline="0" dirty="0" err="1">
                 <a:ln>
                   <a:noFill/>
                 </a:ln>
@@ -25318,10 +25253,10 @@
                 <a:effectLst/>
                 <a:latin typeface="Bahnschrift Light SemiCondensed" panose="020B0502040204020203" pitchFamily="34" charset="0"/>
               </a:rPr>
-              <a:t> </a:t>
-            </a:r>
-            <a:r>
-              <a:rPr kumimoji="0" lang="en-US" altLang="en-US" sz="1800" b="0" i="0" u="none" strike="noStrike" cap="none" normalizeH="0" baseline="0" dirty="0" err="1" smtClean="0">
+              <a:t>metni</a:t>
+            </a:r>
+            <a:r>
+              <a:rPr kumimoji="0" lang="en-US" altLang="en-US" sz="1800" b="0" i="0" u="none" strike="noStrike" cap="none" normalizeH="0" baseline="0" dirty="0">
                 <a:ln>
                   <a:noFill/>
                 </a:ln>
@@ -25331,10 +25266,10 @@
                 <a:effectLst/>
                 <a:latin typeface="Bahnschrift Light SemiCondensed" panose="020B0502040204020203" pitchFamily="34" charset="0"/>
               </a:rPr>
-              <a:t>metni</a:t>
-            </a:r>
-            <a:r>
-              <a:rPr kumimoji="0" lang="en-US" altLang="en-US" sz="1800" b="0" i="0" u="none" strike="noStrike" cap="none" normalizeH="0" baseline="0" dirty="0" smtClean="0">
+              <a:t> </a:t>
+            </a:r>
+            <a:r>
+              <a:rPr kumimoji="0" lang="en-US" altLang="en-US" sz="1800" b="0" i="0" u="none" strike="noStrike" cap="none" normalizeH="0" baseline="0" dirty="0" err="1">
                 <a:ln>
                   <a:noFill/>
                 </a:ln>
@@ -25344,10 +25279,10 @@
                 <a:effectLst/>
                 <a:latin typeface="Bahnschrift Light SemiCondensed" panose="020B0502040204020203" pitchFamily="34" charset="0"/>
               </a:rPr>
-              <a:t> </a:t>
-            </a:r>
-            <a:r>
-              <a:rPr kumimoji="0" lang="en-US" altLang="en-US" sz="1800" b="0" i="0" u="none" strike="noStrike" cap="none" normalizeH="0" baseline="0" dirty="0" err="1" smtClean="0">
+              <a:t>input_ids</a:t>
+            </a:r>
+            <a:r>
+              <a:rPr kumimoji="0" lang="en-US" altLang="en-US" sz="1800" b="0" i="0" u="none" strike="noStrike" cap="none" normalizeH="0" baseline="0" dirty="0">
                 <a:ln>
                   <a:noFill/>
                 </a:ln>
@@ -25357,10 +25292,10 @@
                 <a:effectLst/>
                 <a:latin typeface="Bahnschrift Light SemiCondensed" panose="020B0502040204020203" pitchFamily="34" charset="0"/>
               </a:rPr>
-              <a:t>input_ids</a:t>
-            </a:r>
-            <a:r>
-              <a:rPr kumimoji="0" lang="en-US" altLang="en-US" sz="1800" b="0" i="0" u="none" strike="noStrike" cap="none" normalizeH="0" baseline="0" dirty="0" smtClean="0">
+              <a:t> </a:t>
+            </a:r>
+            <a:r>
+              <a:rPr kumimoji="0" lang="en-US" altLang="en-US" sz="1800" b="0" i="0" u="none" strike="noStrike" cap="none" normalizeH="0" baseline="0" dirty="0" err="1">
                 <a:ln>
                   <a:noFill/>
                 </a:ln>
@@ -25370,10 +25305,10 @@
                 <a:effectLst/>
                 <a:latin typeface="Bahnschrift Light SemiCondensed" panose="020B0502040204020203" pitchFamily="34" charset="0"/>
               </a:rPr>
-              <a:t> </a:t>
-            </a:r>
-            <a:r>
-              <a:rPr kumimoji="0" lang="en-US" altLang="en-US" sz="1800" b="0" i="0" u="none" strike="noStrike" cap="none" normalizeH="0" baseline="0" dirty="0" err="1" smtClean="0">
+              <a:t>ve</a:t>
+            </a:r>
+            <a:r>
+              <a:rPr kumimoji="0" lang="en-US" altLang="en-US" sz="1800" b="0" i="0" u="none" strike="noStrike" cap="none" normalizeH="0" baseline="0" dirty="0">
                 <a:ln>
                   <a:noFill/>
                 </a:ln>
@@ -25383,10 +25318,10 @@
                 <a:effectLst/>
                 <a:latin typeface="Bahnschrift Light SemiCondensed" panose="020B0502040204020203" pitchFamily="34" charset="0"/>
               </a:rPr>
-              <a:t>ve</a:t>
-            </a:r>
-            <a:r>
-              <a:rPr kumimoji="0" lang="en-US" altLang="en-US" sz="1800" b="0" i="0" u="none" strike="noStrike" cap="none" normalizeH="0" baseline="0" dirty="0" smtClean="0">
+              <a:t> </a:t>
+            </a:r>
+            <a:r>
+              <a:rPr kumimoji="0" lang="en-US" altLang="en-US" sz="1800" b="0" i="0" u="none" strike="noStrike" cap="none" normalizeH="0" baseline="0" dirty="0" err="1">
                 <a:ln>
                   <a:noFill/>
                 </a:ln>
@@ -25396,10 +25331,10 @@
                 <a:effectLst/>
                 <a:latin typeface="Bahnschrift Light SemiCondensed" panose="020B0502040204020203" pitchFamily="34" charset="0"/>
               </a:rPr>
-              <a:t> </a:t>
-            </a:r>
-            <a:r>
-              <a:rPr kumimoji="0" lang="en-US" altLang="en-US" sz="1800" b="0" i="0" u="none" strike="noStrike" cap="none" normalizeH="0" baseline="0" dirty="0" err="1" smtClean="0">
+              <a:t>attention_mask</a:t>
+            </a:r>
+            <a:r>
+              <a:rPr kumimoji="0" lang="en-US" altLang="en-US" sz="1800" b="0" i="0" u="none" strike="noStrike" cap="none" normalizeH="0" baseline="0" dirty="0">
                 <a:ln>
                   <a:noFill/>
                 </a:ln>
@@ -25409,10 +25344,10 @@
                 <a:effectLst/>
                 <a:latin typeface="Bahnschrift Light SemiCondensed" panose="020B0502040204020203" pitchFamily="34" charset="0"/>
               </a:rPr>
-              <a:t>attention_mask</a:t>
-            </a:r>
-            <a:r>
-              <a:rPr kumimoji="0" lang="en-US" altLang="en-US" sz="1800" b="0" i="0" u="none" strike="noStrike" cap="none" normalizeH="0" baseline="0" dirty="0" smtClean="0">
+              <a:t> </a:t>
+            </a:r>
+            <a:r>
+              <a:rPr kumimoji="0" lang="en-US" altLang="en-US" sz="1800" b="0" i="0" u="none" strike="noStrike" cap="none" normalizeH="0" baseline="0" dirty="0" err="1">
                 <a:ln>
                   <a:noFill/>
                 </a:ln>
@@ -25422,10 +25357,10 @@
                 <a:effectLst/>
                 <a:latin typeface="Bahnschrift Light SemiCondensed" panose="020B0502040204020203" pitchFamily="34" charset="0"/>
               </a:rPr>
-              <a:t> </a:t>
-            </a:r>
-            <a:r>
-              <a:rPr kumimoji="0" lang="en-US" altLang="en-US" sz="1800" b="0" i="0" u="none" strike="noStrike" cap="none" normalizeH="0" baseline="0" dirty="0" err="1" smtClean="0">
+              <a:t>yapıları</a:t>
+            </a:r>
+            <a:r>
+              <a:rPr kumimoji="0" lang="en-US" altLang="en-US" sz="1800" b="0" i="0" u="none" strike="noStrike" cap="none" normalizeH="0" baseline="0" dirty="0">
                 <a:ln>
                   <a:noFill/>
                 </a:ln>
@@ -25435,10 +25370,10 @@
                 <a:effectLst/>
                 <a:latin typeface="Bahnschrift Light SemiCondensed" panose="020B0502040204020203" pitchFamily="34" charset="0"/>
               </a:rPr>
-              <a:t>yapıları</a:t>
-            </a:r>
-            <a:r>
-              <a:rPr kumimoji="0" lang="en-US" altLang="en-US" sz="1800" b="0" i="0" u="none" strike="noStrike" cap="none" normalizeH="0" baseline="0" dirty="0" smtClean="0">
+              <a:t> </a:t>
+            </a:r>
+            <a:r>
+              <a:rPr kumimoji="0" lang="en-US" altLang="en-US" sz="1800" b="0" i="0" u="none" strike="noStrike" cap="none" normalizeH="0" baseline="0" dirty="0" err="1">
                 <a:ln>
                   <a:noFill/>
                 </a:ln>
@@ -25448,10 +25383,10 @@
                 <a:effectLst/>
                 <a:latin typeface="Bahnschrift Light SemiCondensed" panose="020B0502040204020203" pitchFamily="34" charset="0"/>
               </a:rPr>
-              <a:t> </a:t>
-            </a:r>
-            <a:r>
-              <a:rPr kumimoji="0" lang="en-US" altLang="en-US" sz="1800" b="0" i="0" u="none" strike="noStrike" cap="none" normalizeH="0" baseline="0" dirty="0" err="1" smtClean="0">
+              <a:t>ile</a:t>
+            </a:r>
+            <a:r>
+              <a:rPr kumimoji="0" lang="en-US" altLang="en-US" sz="1800" b="0" i="0" u="none" strike="noStrike" cap="none" normalizeH="0" baseline="0" dirty="0">
                 <a:ln>
                   <a:noFill/>
                 </a:ln>
@@ -25461,10 +25396,10 @@
                 <a:effectLst/>
                 <a:latin typeface="Bahnschrift Light SemiCondensed" panose="020B0502040204020203" pitchFamily="34" charset="0"/>
               </a:rPr>
-              <a:t>ile</a:t>
-            </a:r>
-            <a:r>
-              <a:rPr kumimoji="0" lang="en-US" altLang="en-US" sz="1800" b="0" i="0" u="none" strike="noStrike" cap="none" normalizeH="0" baseline="0" dirty="0" smtClean="0">
+              <a:t> </a:t>
+            </a:r>
+            <a:r>
+              <a:rPr kumimoji="0" lang="en-US" altLang="en-US" sz="1800" b="0" i="0" u="none" strike="noStrike" cap="none" normalizeH="0" baseline="0" dirty="0" err="1">
                 <a:ln>
                   <a:noFill/>
                 </a:ln>
@@ -25474,10 +25409,10 @@
                 <a:effectLst/>
                 <a:latin typeface="Bahnschrift Light SemiCondensed" panose="020B0502040204020203" pitchFamily="34" charset="0"/>
               </a:rPr>
-              <a:t> </a:t>
-            </a:r>
-            <a:r>
-              <a:rPr kumimoji="0" lang="en-US" altLang="en-US" sz="1800" b="0" i="0" u="none" strike="noStrike" cap="none" normalizeH="0" baseline="0" dirty="0" err="1" smtClean="0">
+              <a:t>modele</a:t>
+            </a:r>
+            <a:r>
+              <a:rPr kumimoji="0" lang="en-US" altLang="en-US" sz="1800" b="0" i="0" u="none" strike="noStrike" cap="none" normalizeH="0" baseline="0" dirty="0">
                 <a:ln>
                   <a:noFill/>
                 </a:ln>
@@ -25487,10 +25422,10 @@
                 <a:effectLst/>
                 <a:latin typeface="Bahnschrift Light SemiCondensed" panose="020B0502040204020203" pitchFamily="34" charset="0"/>
               </a:rPr>
-              <a:t>modele</a:t>
-            </a:r>
-            <a:r>
-              <a:rPr kumimoji="0" lang="en-US" altLang="en-US" sz="1800" b="0" i="0" u="none" strike="noStrike" cap="none" normalizeH="0" baseline="0" dirty="0" smtClean="0">
+              <a:t> </a:t>
+            </a:r>
+            <a:r>
+              <a:rPr kumimoji="0" lang="en-US" altLang="en-US" sz="1800" b="0" i="0" u="none" strike="noStrike" cap="none" normalizeH="0" baseline="0" dirty="0" err="1">
                 <a:ln>
                   <a:noFill/>
                 </a:ln>
@@ -25500,10 +25435,10 @@
                 <a:effectLst/>
                 <a:latin typeface="Bahnschrift Light SemiCondensed" panose="020B0502040204020203" pitchFamily="34" charset="0"/>
               </a:rPr>
-              <a:t> </a:t>
-            </a:r>
-            <a:r>
-              <a:rPr kumimoji="0" lang="en-US" altLang="en-US" sz="1800" b="0" i="0" u="none" strike="noStrike" cap="none" normalizeH="0" baseline="0" dirty="0" err="1" smtClean="0">
+              <a:t>uygun</a:t>
+            </a:r>
+            <a:r>
+              <a:rPr kumimoji="0" lang="en-US" altLang="en-US" sz="1800" b="0" i="0" u="none" strike="noStrike" cap="none" normalizeH="0" baseline="0" dirty="0">
                 <a:ln>
                   <a:noFill/>
                 </a:ln>
@@ -25513,10 +25448,10 @@
                 <a:effectLst/>
                 <a:latin typeface="Bahnschrift Light SemiCondensed" panose="020B0502040204020203" pitchFamily="34" charset="0"/>
               </a:rPr>
-              <a:t>uygun</a:t>
-            </a:r>
-            <a:r>
-              <a:rPr kumimoji="0" lang="en-US" altLang="en-US" sz="1800" b="0" i="0" u="none" strike="noStrike" cap="none" normalizeH="0" baseline="0" dirty="0" smtClean="0">
+              <a:t> </a:t>
+            </a:r>
+            <a:r>
+              <a:rPr kumimoji="0" lang="en-US" altLang="en-US" sz="1800" b="0" i="0" u="none" strike="noStrike" cap="none" normalizeH="0" baseline="0" dirty="0" err="1">
                 <a:ln>
                   <a:noFill/>
                 </a:ln>
@@ -25526,10 +25461,10 @@
                 <a:effectLst/>
                 <a:latin typeface="Bahnschrift Light SemiCondensed" panose="020B0502040204020203" pitchFamily="34" charset="0"/>
               </a:rPr>
-              <a:t> </a:t>
-            </a:r>
-            <a:r>
-              <a:rPr kumimoji="0" lang="en-US" altLang="en-US" sz="1800" b="0" i="0" u="none" strike="noStrike" cap="none" normalizeH="0" baseline="0" dirty="0" err="1" smtClean="0">
+              <a:t>formata</a:t>
+            </a:r>
+            <a:r>
+              <a:rPr kumimoji="0" lang="en-US" altLang="en-US" sz="1800" b="0" i="0" u="none" strike="noStrike" cap="none" normalizeH="0" baseline="0" dirty="0">
                 <a:ln>
                   <a:noFill/>
                 </a:ln>
@@ -25539,10 +25474,10 @@
                 <a:effectLst/>
                 <a:latin typeface="Bahnschrift Light SemiCondensed" panose="020B0502040204020203" pitchFamily="34" charset="0"/>
               </a:rPr>
-              <a:t>formata</a:t>
-            </a:r>
-            <a:r>
-              <a:rPr kumimoji="0" lang="en-US" altLang="en-US" sz="1800" b="0" i="0" u="none" strike="noStrike" cap="none" normalizeH="0" baseline="0" dirty="0" smtClean="0">
+              <a:t> </a:t>
+            </a:r>
+            <a:r>
+              <a:rPr kumimoji="0" lang="en-US" altLang="en-US" sz="1800" b="0" i="0" u="none" strike="noStrike" cap="none" normalizeH="0" baseline="0" dirty="0" err="1">
                 <a:ln>
                   <a:noFill/>
                 </a:ln>
@@ -25552,10 +25487,10 @@
                 <a:effectLst/>
                 <a:latin typeface="Bahnschrift Light SemiCondensed" panose="020B0502040204020203" pitchFamily="34" charset="0"/>
               </a:rPr>
-              <a:t> </a:t>
-            </a:r>
-            <a:r>
-              <a:rPr kumimoji="0" lang="en-US" altLang="en-US" sz="1800" b="0" i="0" u="none" strike="noStrike" cap="none" normalizeH="0" baseline="0" dirty="0" err="1" smtClean="0">
+              <a:t>getirilmiştir</a:t>
+            </a:r>
+            <a:r>
+              <a:rPr kumimoji="0" lang="en-US" altLang="en-US" sz="1800" b="0" i="0" u="none" strike="noStrike" cap="none" normalizeH="0" baseline="0" dirty="0">
                 <a:ln>
                   <a:noFill/>
                 </a:ln>
@@ -25565,22 +25500,9 @@
                 <a:effectLst/>
                 <a:latin typeface="Bahnschrift Light SemiCondensed" panose="020B0502040204020203" pitchFamily="34" charset="0"/>
               </a:rPr>
-              <a:t>getirilmiştir</a:t>
-            </a:r>
-            <a:r>
-              <a:rPr kumimoji="0" lang="en-US" altLang="en-US" sz="1800" b="0" i="0" u="none" strike="noStrike" cap="none" normalizeH="0" baseline="0" dirty="0" smtClean="0">
-                <a:ln>
-                  <a:noFill/>
-                </a:ln>
-                <a:solidFill>
-                  <a:schemeClr val="tx1"/>
-                </a:solidFill>
-                <a:effectLst/>
-                <a:latin typeface="Bahnschrift Light SemiCondensed" panose="020B0502040204020203" pitchFamily="34" charset="0"/>
-              </a:rPr>
               <a:t>.</a:t>
             </a:r>
-            <a:endParaRPr kumimoji="0" lang="tr-TR" altLang="en-US" sz="1800" b="0" i="0" u="none" strike="noStrike" cap="none" normalizeH="0" baseline="0" dirty="0" smtClean="0">
+            <a:endParaRPr kumimoji="0" lang="tr-TR" altLang="en-US" sz="1800" b="0" i="0" u="none" strike="noStrike" cap="none" normalizeH="0" baseline="0" dirty="0">
               <a:ln>
                 <a:noFill/>
               </a:ln>
@@ -25608,7 +25530,7 @@
               <a:buNone/>
               <a:tabLst/>
             </a:pPr>
-            <a:endParaRPr kumimoji="0" lang="tr-TR" altLang="en-US" sz="1800" b="0" i="0" u="none" strike="noStrike" cap="none" normalizeH="0" baseline="0" dirty="0" smtClean="0">
+            <a:endParaRPr kumimoji="0" lang="tr-TR" altLang="en-US" sz="1800" b="0" i="0" u="none" strike="noStrike" cap="none" normalizeH="0" baseline="0" dirty="0">
               <a:ln>
                 <a:noFill/>
               </a:ln>
@@ -25637,7 +25559,7 @@
               <a:tabLst/>
             </a:pPr>
             <a:r>
-              <a:rPr kumimoji="0" lang="en-US" altLang="en-US" sz="1800" b="0" i="0" u="none" strike="noStrike" cap="none" normalizeH="0" baseline="0" dirty="0" smtClean="0">
+              <a:rPr kumimoji="0" lang="en-US" altLang="en-US" sz="1800" b="0" i="0" u="none" strike="noStrike" cap="none" normalizeH="0" baseline="0" dirty="0">
                 <a:ln>
                   <a:noFill/>
                 </a:ln>
@@ -25650,7 +25572,7 @@
               <a:t> </a:t>
             </a:r>
             <a:r>
-              <a:rPr kumimoji="0" lang="tr-TR" altLang="en-US" sz="1800" b="0" i="0" u="none" strike="noStrike" cap="none" normalizeH="0" baseline="0" dirty="0" smtClean="0">
+              <a:rPr kumimoji="0" lang="tr-TR" altLang="en-US" sz="1800" b="0" i="0" u="none" strike="noStrike" cap="none" normalizeH="0" baseline="0" dirty="0">
                 <a:ln>
                   <a:noFill/>
                 </a:ln>
@@ -25663,13 +25585,13 @@
               <a:t> </a:t>
             </a:r>
             <a:r>
-              <a:rPr lang="tr-TR" altLang="en-US" sz="1800" dirty="0" smtClean="0">
+              <a:rPr lang="tr-TR" altLang="en-US" sz="1800" dirty="0">
                 <a:latin typeface="Bahnschrift Light SemiCondensed" panose="020B0502040204020203" pitchFamily="34" charset="0"/>
               </a:rPr>
               <a:t>- </a:t>
             </a:r>
             <a:r>
-              <a:rPr kumimoji="0" lang="en-US" altLang="en-US" sz="1800" b="0" i="0" u="none" strike="noStrike" cap="none" normalizeH="0" baseline="0" dirty="0" err="1" smtClean="0">
+              <a:rPr kumimoji="0" lang="en-US" altLang="en-US" sz="1800" b="0" i="0" u="none" strike="noStrike" cap="none" normalizeH="0" baseline="0" dirty="0" err="1">
                 <a:ln>
                   <a:noFill/>
                 </a:ln>
@@ -25682,7 +25604,7 @@
               <a:t>Tüm</a:t>
             </a:r>
             <a:r>
-              <a:rPr kumimoji="0" lang="en-US" altLang="en-US" sz="1800" b="0" i="0" u="none" strike="noStrike" cap="none" normalizeH="0" baseline="0" dirty="0" smtClean="0">
+              <a:rPr kumimoji="0" lang="en-US" altLang="en-US" sz="1800" b="0" i="0" u="none" strike="noStrike" cap="none" normalizeH="0" baseline="0" dirty="0">
                 <a:ln>
                   <a:noFill/>
                 </a:ln>
@@ -25695,7 +25617,7 @@
               <a:t> </a:t>
             </a:r>
             <a:r>
-              <a:rPr kumimoji="0" lang="en-US" altLang="en-US" sz="1800" b="0" i="0" u="none" strike="noStrike" cap="none" normalizeH="0" baseline="0" dirty="0" err="1" smtClean="0">
+              <a:rPr kumimoji="0" lang="en-US" altLang="en-US" sz="1800" b="0" i="0" u="none" strike="noStrike" cap="none" normalizeH="0" baseline="0" dirty="0" err="1">
                 <a:ln>
                   <a:noFill/>
                 </a:ln>
@@ -25708,7 +25630,7 @@
               <a:t>girdiler</a:t>
             </a:r>
             <a:r>
-              <a:rPr kumimoji="0" lang="en-US" altLang="en-US" sz="1800" b="0" i="0" u="none" strike="noStrike" cap="none" normalizeH="0" baseline="0" dirty="0" smtClean="0">
+              <a:rPr kumimoji="0" lang="en-US" altLang="en-US" sz="1800" b="0" i="0" u="none" strike="noStrike" cap="none" normalizeH="0" baseline="0" dirty="0">
                 <a:ln>
                   <a:noFill/>
                 </a:ln>
@@ -25721,7 +25643,7 @@
               <a:t> </a:t>
             </a:r>
             <a:r>
-              <a:rPr kumimoji="0" lang="en-US" altLang="en-US" sz="1800" b="0" i="0" u="none" strike="noStrike" cap="none" normalizeH="0" baseline="0" dirty="0" err="1" smtClean="0">
+              <a:rPr kumimoji="0" lang="en-US" altLang="en-US" sz="1800" b="0" i="0" u="none" strike="noStrike" cap="none" normalizeH="0" baseline="0" dirty="0" err="1">
                 <a:ln>
                   <a:noFill/>
                 </a:ln>
@@ -25734,7 +25656,7 @@
               <a:t>sabit</a:t>
             </a:r>
             <a:r>
-              <a:rPr kumimoji="0" lang="en-US" altLang="en-US" sz="1800" b="0" i="0" u="none" strike="noStrike" cap="none" normalizeH="0" baseline="0" dirty="0" smtClean="0">
+              <a:rPr kumimoji="0" lang="en-US" altLang="en-US" sz="1800" b="0" i="0" u="none" strike="noStrike" cap="none" normalizeH="0" baseline="0" dirty="0">
                 <a:ln>
                   <a:noFill/>
                 </a:ln>
@@ -25747,7 +25669,7 @@
               <a:t> </a:t>
             </a:r>
             <a:r>
-              <a:rPr kumimoji="0" lang="en-US" altLang="en-US" sz="1800" b="0" i="0" u="none" strike="noStrike" cap="none" normalizeH="0" baseline="0" dirty="0" err="1" smtClean="0">
+              <a:rPr kumimoji="0" lang="en-US" altLang="en-US" sz="1800" b="0" i="0" u="none" strike="noStrike" cap="none" normalizeH="0" baseline="0" dirty="0" err="1">
                 <a:ln>
                   <a:noFill/>
                 </a:ln>
@@ -25760,7 +25682,7 @@
               <a:t>uzunluğa</a:t>
             </a:r>
             <a:r>
-              <a:rPr kumimoji="0" lang="en-US" altLang="en-US" sz="1800" b="0" i="0" u="none" strike="noStrike" cap="none" normalizeH="0" baseline="0" dirty="0" smtClean="0">
+              <a:rPr kumimoji="0" lang="en-US" altLang="en-US" sz="1800" b="0" i="0" u="none" strike="noStrike" cap="none" normalizeH="0" baseline="0" dirty="0">
                 <a:ln>
                   <a:noFill/>
                 </a:ln>
@@ -25773,7 +25695,7 @@
               <a:t> </a:t>
             </a:r>
             <a:r>
-              <a:rPr kumimoji="0" lang="en-US" altLang="en-US" sz="1800" b="0" i="0" u="none" strike="noStrike" cap="none" normalizeH="0" baseline="0" dirty="0" err="1" smtClean="0">
+              <a:rPr kumimoji="0" lang="en-US" altLang="en-US" sz="1800" b="0" i="0" u="none" strike="noStrike" cap="none" normalizeH="0" baseline="0" dirty="0" err="1">
                 <a:ln>
                   <a:noFill/>
                 </a:ln>
@@ -25786,7 +25708,7 @@
               <a:t>getirilmiş</a:t>
             </a:r>
             <a:r>
-              <a:rPr kumimoji="0" lang="en-US" altLang="en-US" sz="1800" b="0" i="0" u="none" strike="noStrike" cap="none" normalizeH="0" baseline="0" dirty="0" smtClean="0">
+              <a:rPr kumimoji="0" lang="en-US" altLang="en-US" sz="1800" b="0" i="0" u="none" strike="noStrike" cap="none" normalizeH="0" baseline="0" dirty="0">
                 <a:ln>
                   <a:noFill/>
                 </a:ln>
@@ -25799,7 +25721,7 @@
               <a:t>, </a:t>
             </a:r>
             <a:r>
-              <a:rPr kumimoji="0" lang="en-US" altLang="en-US" sz="1800" b="0" i="0" u="none" strike="noStrike" cap="none" normalizeH="0" baseline="0" dirty="0" err="1" smtClean="0">
+              <a:rPr kumimoji="0" lang="en-US" altLang="en-US" sz="1800" b="0" i="0" u="none" strike="noStrike" cap="none" normalizeH="0" baseline="0" dirty="0" err="1">
                 <a:ln>
                   <a:noFill/>
                 </a:ln>
@@ -25812,7 +25734,7 @@
               <a:t>kısa</a:t>
             </a:r>
             <a:r>
-              <a:rPr kumimoji="0" lang="en-US" altLang="en-US" sz="1800" b="0" i="0" u="none" strike="noStrike" cap="none" normalizeH="0" baseline="0" dirty="0" smtClean="0">
+              <a:rPr kumimoji="0" lang="en-US" altLang="en-US" sz="1800" b="0" i="0" u="none" strike="noStrike" cap="none" normalizeH="0" baseline="0" dirty="0">
                 <a:ln>
                   <a:noFill/>
                 </a:ln>
@@ -25825,7 +25747,7 @@
               <a:t> </a:t>
             </a:r>
             <a:r>
-              <a:rPr kumimoji="0" lang="en-US" altLang="en-US" sz="1800" b="0" i="0" u="none" strike="noStrike" cap="none" normalizeH="0" baseline="0" dirty="0" err="1" smtClean="0">
+              <a:rPr kumimoji="0" lang="en-US" altLang="en-US" sz="1800" b="0" i="0" u="none" strike="noStrike" cap="none" normalizeH="0" baseline="0" dirty="0" err="1">
                 <a:ln>
                   <a:noFill/>
                 </a:ln>
@@ -25838,7 +25760,7 @@
               <a:t>metinler</a:t>
             </a:r>
             <a:r>
-              <a:rPr kumimoji="0" lang="en-US" altLang="en-US" sz="1800" b="0" i="0" u="none" strike="noStrike" cap="none" normalizeH="0" baseline="0" dirty="0" smtClean="0">
+              <a:rPr kumimoji="0" lang="en-US" altLang="en-US" sz="1800" b="0" i="0" u="none" strike="noStrike" cap="none" normalizeH="0" baseline="0" dirty="0">
                 <a:ln>
                   <a:noFill/>
                 </a:ln>
@@ -25851,7 +25773,7 @@
               <a:t> padding </a:t>
             </a:r>
             <a:r>
-              <a:rPr kumimoji="0" lang="en-US" altLang="en-US" sz="1800" b="0" i="0" u="none" strike="noStrike" cap="none" normalizeH="0" baseline="0" dirty="0" err="1" smtClean="0">
+              <a:rPr kumimoji="0" lang="en-US" altLang="en-US" sz="1800" b="0" i="0" u="none" strike="noStrike" cap="none" normalizeH="0" baseline="0" dirty="0" err="1">
                 <a:ln>
                   <a:noFill/>
                 </a:ln>
@@ -25864,7 +25786,7 @@
               <a:t>ile</a:t>
             </a:r>
             <a:r>
-              <a:rPr kumimoji="0" lang="en-US" altLang="en-US" sz="1800" b="0" i="0" u="none" strike="noStrike" cap="none" normalizeH="0" baseline="0" dirty="0" smtClean="0">
+              <a:rPr kumimoji="0" lang="en-US" altLang="en-US" sz="1800" b="0" i="0" u="none" strike="noStrike" cap="none" normalizeH="0" baseline="0" dirty="0">
                 <a:ln>
                   <a:noFill/>
                 </a:ln>
@@ -25877,7 +25799,7 @@
               <a:t> </a:t>
             </a:r>
             <a:r>
-              <a:rPr kumimoji="0" lang="en-US" altLang="en-US" sz="1800" b="0" i="0" u="none" strike="noStrike" cap="none" normalizeH="0" baseline="0" dirty="0" err="1" smtClean="0">
+              <a:rPr kumimoji="0" lang="en-US" altLang="en-US" sz="1800" b="0" i="0" u="none" strike="noStrike" cap="none" normalizeH="0" baseline="0" dirty="0" err="1">
                 <a:ln>
                   <a:noFill/>
                 </a:ln>
@@ -25890,7 +25812,7 @@
               <a:t>tamamlanmış</a:t>
             </a:r>
             <a:r>
-              <a:rPr kumimoji="0" lang="en-US" altLang="en-US" sz="1800" b="0" i="0" u="none" strike="noStrike" cap="none" normalizeH="0" baseline="0" dirty="0" smtClean="0">
+              <a:rPr kumimoji="0" lang="en-US" altLang="en-US" sz="1800" b="0" i="0" u="none" strike="noStrike" cap="none" normalizeH="0" baseline="0" dirty="0">
                 <a:ln>
                   <a:noFill/>
                 </a:ln>
@@ -25903,7 +25825,7 @@
               <a:t>, </a:t>
             </a:r>
             <a:r>
-              <a:rPr kumimoji="0" lang="en-US" altLang="en-US" sz="1800" b="0" i="0" u="none" strike="noStrike" cap="none" normalizeH="0" baseline="0" dirty="0" err="1" smtClean="0">
+              <a:rPr kumimoji="0" lang="en-US" altLang="en-US" sz="1800" b="0" i="0" u="none" strike="noStrike" cap="none" normalizeH="0" baseline="0" dirty="0" err="1">
                 <a:ln>
                   <a:noFill/>
                 </a:ln>
@@ -25916,7 +25838,7 @@
               <a:t>uzun</a:t>
             </a:r>
             <a:r>
-              <a:rPr kumimoji="0" lang="en-US" altLang="en-US" sz="1800" b="0" i="0" u="none" strike="noStrike" cap="none" normalizeH="0" baseline="0" dirty="0" smtClean="0">
+              <a:rPr kumimoji="0" lang="en-US" altLang="en-US" sz="1800" b="0" i="0" u="none" strike="noStrike" cap="none" normalizeH="0" baseline="0" dirty="0">
                 <a:ln>
                   <a:noFill/>
                 </a:ln>
@@ -25929,7 +25851,7 @@
               <a:t> </a:t>
             </a:r>
             <a:r>
-              <a:rPr kumimoji="0" lang="en-US" altLang="en-US" sz="1800" b="0" i="0" u="none" strike="noStrike" cap="none" normalizeH="0" baseline="0" dirty="0" err="1" smtClean="0">
+              <a:rPr kumimoji="0" lang="en-US" altLang="en-US" sz="1800" b="0" i="0" u="none" strike="noStrike" cap="none" normalizeH="0" baseline="0" dirty="0" err="1">
                 <a:ln>
                   <a:noFill/>
                 </a:ln>
@@ -25942,7 +25864,7 @@
               <a:t>metinler</a:t>
             </a:r>
             <a:r>
-              <a:rPr kumimoji="0" lang="en-US" altLang="en-US" sz="1800" b="0" i="0" u="none" strike="noStrike" cap="none" normalizeH="0" baseline="0" dirty="0" smtClean="0">
+              <a:rPr kumimoji="0" lang="en-US" altLang="en-US" sz="1800" b="0" i="0" u="none" strike="noStrike" cap="none" normalizeH="0" baseline="0" dirty="0">
                 <a:ln>
                   <a:noFill/>
                 </a:ln>
@@ -25955,7 +25877,7 @@
               <a:t> </a:t>
             </a:r>
             <a:r>
-              <a:rPr kumimoji="0" lang="en-US" altLang="en-US" sz="1800" b="0" i="0" u="none" strike="noStrike" cap="none" normalizeH="0" baseline="0" dirty="0" err="1" smtClean="0">
+              <a:rPr kumimoji="0" lang="en-US" altLang="en-US" sz="1800" b="0" i="0" u="none" strike="noStrike" cap="none" normalizeH="0" baseline="0" dirty="0" err="1">
                 <a:ln>
                   <a:noFill/>
                 </a:ln>
@@ -25968,7 +25890,7 @@
               <a:t>ise</a:t>
             </a:r>
             <a:r>
-              <a:rPr kumimoji="0" lang="en-US" altLang="en-US" sz="1800" b="0" i="0" u="none" strike="noStrike" cap="none" normalizeH="0" baseline="0" dirty="0" smtClean="0">
+              <a:rPr kumimoji="0" lang="en-US" altLang="en-US" sz="1800" b="0" i="0" u="none" strike="noStrike" cap="none" normalizeH="0" baseline="0" dirty="0">
                 <a:ln>
                   <a:noFill/>
                 </a:ln>
@@ -25981,7 +25903,7 @@
               <a:t> </a:t>
             </a:r>
             <a:r>
-              <a:rPr kumimoji="0" lang="en-US" altLang="en-US" sz="1800" b="0" i="0" u="none" strike="noStrike" cap="none" normalizeH="0" baseline="0" dirty="0" err="1" smtClean="0">
+              <a:rPr kumimoji="0" lang="en-US" altLang="en-US" sz="1800" b="0" i="0" u="none" strike="noStrike" cap="none" normalizeH="0" baseline="0" dirty="0" err="1">
                 <a:ln>
                   <a:noFill/>
                 </a:ln>
@@ -25994,7 +25916,7 @@
               <a:t>kesilmiştir</a:t>
             </a:r>
             <a:r>
-              <a:rPr kumimoji="0" lang="en-US" altLang="en-US" sz="1800" b="0" i="0" u="none" strike="noStrike" cap="none" normalizeH="0" baseline="0" dirty="0" smtClean="0">
+              <a:rPr kumimoji="0" lang="en-US" altLang="en-US" sz="1800" b="0" i="0" u="none" strike="noStrike" cap="none" normalizeH="0" baseline="0" dirty="0">
                 <a:ln>
                   <a:noFill/>
                 </a:ln>
@@ -26006,7 +25928,7 @@
               </a:rPr>
               <a:t>.</a:t>
             </a:r>
-            <a:endParaRPr kumimoji="0" lang="tr-TR" altLang="en-US" sz="1800" b="0" i="0" u="none" strike="noStrike" cap="none" normalizeH="0" baseline="0" dirty="0" smtClean="0">
+            <a:endParaRPr kumimoji="0" lang="tr-TR" altLang="en-US" sz="1800" b="0" i="0" u="none" strike="noStrike" cap="none" normalizeH="0" baseline="0" dirty="0">
               <a:ln>
                 <a:noFill/>
               </a:ln>
@@ -26034,7 +25956,7 @@
               <a:buNone/>
               <a:tabLst/>
             </a:pPr>
-            <a:endParaRPr kumimoji="0" lang="en-US" altLang="en-US" sz="1800" b="0" i="0" u="none" strike="noStrike" cap="none" normalizeH="0" baseline="0" dirty="0" smtClean="0">
+            <a:endParaRPr kumimoji="0" lang="en-US" altLang="en-US" sz="1800" b="0" i="0" u="none" strike="noStrike" cap="none" normalizeH="0" baseline="0" dirty="0">
               <a:ln>
                 <a:noFill/>
               </a:ln>
@@ -26063,7 +25985,7 @@
               <a:tabLst/>
             </a:pPr>
             <a:r>
-              <a:rPr kumimoji="0" lang="tr-TR" altLang="en-US" sz="1800" b="0" i="0" u="none" strike="noStrike" cap="none" normalizeH="0" baseline="0" dirty="0" smtClean="0">
+              <a:rPr kumimoji="0" lang="tr-TR" altLang="en-US" sz="1800" b="0" i="0" u="none" strike="noStrike" cap="none" normalizeH="0" baseline="0" dirty="0">
                 <a:ln>
                   <a:noFill/>
                 </a:ln>
@@ -26076,7 +25998,7 @@
               <a:t>  -</a:t>
             </a:r>
             <a:r>
-              <a:rPr kumimoji="0" lang="tr-TR" altLang="en-US" sz="1800" b="0" i="0" u="none" strike="noStrike" cap="none" normalizeH="0" dirty="0" smtClean="0">
+              <a:rPr kumimoji="0" lang="tr-TR" altLang="en-US" sz="1800" b="0" i="0" u="none" strike="noStrike" cap="none" normalizeH="0" dirty="0">
                 <a:ln>
                   <a:noFill/>
                 </a:ln>
@@ -26089,7 +26011,7 @@
               <a:t> </a:t>
             </a:r>
             <a:r>
-              <a:rPr kumimoji="0" lang="en-US" altLang="en-US" sz="1800" b="0" i="0" u="none" strike="noStrike" cap="none" normalizeH="0" baseline="0" dirty="0" smtClean="0">
+              <a:rPr kumimoji="0" lang="en-US" altLang="en-US" sz="1800" b="0" i="0" u="none" strike="noStrike" cap="none" normalizeH="0" baseline="0" dirty="0">
                 <a:ln>
                   <a:noFill/>
                 </a:ln>
@@ -26102,7 +26024,7 @@
               <a:t>Model </a:t>
             </a:r>
             <a:r>
-              <a:rPr kumimoji="0" lang="en-US" altLang="en-US" sz="1800" b="0" i="0" u="none" strike="noStrike" cap="none" normalizeH="0" baseline="0" dirty="0" err="1" smtClean="0">
+              <a:rPr kumimoji="0" lang="en-US" altLang="en-US" sz="1800" b="0" i="0" u="none" strike="noStrike" cap="none" normalizeH="0" baseline="0" dirty="0" err="1">
                 <a:ln>
                   <a:noFill/>
                 </a:ln>
@@ -26115,7 +26037,7 @@
               <a:t>olarak</a:t>
             </a:r>
             <a:r>
-              <a:rPr kumimoji="0" lang="en-US" altLang="en-US" sz="1800" b="0" i="0" u="none" strike="noStrike" cap="none" normalizeH="0" baseline="0" dirty="0" smtClean="0">
+              <a:rPr kumimoji="0" lang="en-US" altLang="en-US" sz="1800" b="0" i="0" u="none" strike="noStrike" cap="none" normalizeH="0" baseline="0" dirty="0">
                 <a:ln>
                   <a:noFill/>
                 </a:ln>
@@ -26128,7 +26050,7 @@
               <a:t> </a:t>
             </a:r>
             <a:r>
-              <a:rPr kumimoji="0" lang="en-US" altLang="en-US" sz="1800" b="0" i="0" u="none" strike="noStrike" cap="none" normalizeH="0" baseline="0" dirty="0" err="1" smtClean="0">
+              <a:rPr kumimoji="0" lang="en-US" altLang="en-US" sz="1800" b="0" i="0" u="none" strike="noStrike" cap="none" normalizeH="0" baseline="0" dirty="0" err="1">
                 <a:ln>
                   <a:noFill/>
                 </a:ln>
@@ -26141,7 +26063,7 @@
               <a:t>önceden</a:t>
             </a:r>
             <a:r>
-              <a:rPr kumimoji="0" lang="en-US" altLang="en-US" sz="1800" b="0" i="0" u="none" strike="noStrike" cap="none" normalizeH="0" baseline="0" dirty="0" smtClean="0">
+              <a:rPr kumimoji="0" lang="en-US" altLang="en-US" sz="1800" b="0" i="0" u="none" strike="noStrike" cap="none" normalizeH="0" baseline="0" dirty="0">
                 <a:ln>
                   <a:noFill/>
                 </a:ln>
@@ -26154,7 +26076,7 @@
               <a:t> </a:t>
             </a:r>
             <a:r>
-              <a:rPr kumimoji="0" lang="en-US" altLang="en-US" sz="1800" b="0" i="0" u="none" strike="noStrike" cap="none" normalizeH="0" baseline="0" dirty="0" err="1" smtClean="0">
+              <a:rPr kumimoji="0" lang="en-US" altLang="en-US" sz="1800" b="0" i="0" u="none" strike="noStrike" cap="none" normalizeH="0" baseline="0" dirty="0" err="1">
                 <a:ln>
                   <a:noFill/>
                 </a:ln>
@@ -26167,7 +26089,7 @@
               <a:t>eğitilmiş</a:t>
             </a:r>
             <a:r>
-              <a:rPr kumimoji="0" lang="en-US" altLang="en-US" sz="1800" b="0" i="0" u="none" strike="noStrike" cap="none" normalizeH="0" baseline="0" dirty="0" smtClean="0">
+              <a:rPr kumimoji="0" lang="en-US" altLang="en-US" sz="1800" b="0" i="0" u="none" strike="noStrike" cap="none" normalizeH="0" baseline="0" dirty="0">
                 <a:ln>
                   <a:noFill/>
                 </a:ln>
@@ -26180,7 +26102,7 @@
               <a:t> BERT (Transformer) </a:t>
             </a:r>
             <a:r>
-              <a:rPr kumimoji="0" lang="en-US" altLang="en-US" sz="1800" b="0" i="0" u="none" strike="noStrike" cap="none" normalizeH="0" baseline="0" dirty="0" err="1" smtClean="0">
+              <a:rPr kumimoji="0" lang="en-US" altLang="en-US" sz="1800" b="0" i="0" u="none" strike="noStrike" cap="none" normalizeH="0" baseline="0" dirty="0" err="1">
                 <a:ln>
                   <a:noFill/>
                 </a:ln>
@@ -26193,7 +26115,7 @@
               <a:t>mimarisi</a:t>
             </a:r>
             <a:r>
-              <a:rPr kumimoji="0" lang="en-US" altLang="en-US" sz="1800" b="0" i="0" u="none" strike="noStrike" cap="none" normalizeH="0" baseline="0" dirty="0" smtClean="0">
+              <a:rPr kumimoji="0" lang="en-US" altLang="en-US" sz="1800" b="0" i="0" u="none" strike="noStrike" cap="none" normalizeH="0" baseline="0" dirty="0">
                 <a:ln>
                   <a:noFill/>
                 </a:ln>
@@ -26206,7 +26128,7 @@
               <a:t> </a:t>
             </a:r>
             <a:r>
-              <a:rPr kumimoji="0" lang="en-US" altLang="en-US" sz="1800" b="0" i="0" u="none" strike="noStrike" cap="none" normalizeH="0" baseline="0" dirty="0" err="1" smtClean="0">
+              <a:rPr kumimoji="0" lang="en-US" altLang="en-US" sz="1800" b="0" i="0" u="none" strike="noStrike" cap="none" normalizeH="0" baseline="0" dirty="0" err="1">
                 <a:ln>
                   <a:noFill/>
                 </a:ln>
@@ -26219,7 +26141,7 @@
               <a:t>kullanılmıştır</a:t>
             </a:r>
             <a:r>
-              <a:rPr kumimoji="0" lang="en-US" altLang="en-US" sz="1800" b="0" i="0" u="none" strike="noStrike" cap="none" normalizeH="0" baseline="0" dirty="0" smtClean="0">
+              <a:rPr kumimoji="0" lang="en-US" altLang="en-US" sz="1800" b="0" i="0" u="none" strike="noStrike" cap="none" normalizeH="0" baseline="0" dirty="0">
                 <a:ln>
                   <a:noFill/>
                 </a:ln>
@@ -26253,7 +26175,7 @@
               <a:tabLst/>
             </a:pPr>
             <a:r>
-              <a:rPr kumimoji="0" lang="en-US" altLang="en-US" sz="1800" b="0" i="0" u="none" strike="noStrike" cap="none" normalizeH="0" baseline="0" dirty="0" smtClean="0">
+              <a:rPr kumimoji="0" lang="en-US" altLang="en-US" sz="1800" b="0" i="0" u="none" strike="noStrike" cap="none" normalizeH="0" baseline="0" dirty="0">
                 <a:ln>
                   <a:noFill/>
                 </a:ln>
@@ -26266,7 +26188,7 @@
               <a:t>BERT, </a:t>
             </a:r>
             <a:r>
-              <a:rPr kumimoji="0" lang="en-US" altLang="en-US" sz="1800" b="0" i="0" u="none" strike="noStrike" cap="none" normalizeH="0" baseline="0" dirty="0" err="1" smtClean="0">
+              <a:rPr kumimoji="0" lang="en-US" altLang="en-US" sz="1800" b="0" i="0" u="none" strike="noStrike" cap="none" normalizeH="0" baseline="0" dirty="0" err="1">
                 <a:ln>
                   <a:noFill/>
                 </a:ln>
@@ -26279,7 +26201,7 @@
               <a:t>metni</a:t>
             </a:r>
             <a:r>
-              <a:rPr kumimoji="0" lang="en-US" altLang="en-US" sz="1800" b="0" i="0" u="none" strike="noStrike" cap="none" normalizeH="0" baseline="0" dirty="0" smtClean="0">
+              <a:rPr kumimoji="0" lang="en-US" altLang="en-US" sz="1800" b="0" i="0" u="none" strike="noStrike" cap="none" normalizeH="0" baseline="0" dirty="0">
                 <a:ln>
                   <a:noFill/>
                 </a:ln>
@@ -26292,7 +26214,7 @@
               <a:t> </a:t>
             </a:r>
             <a:r>
-              <a:rPr kumimoji="0" lang="en-US" altLang="en-US" sz="1800" b="0" i="0" u="none" strike="noStrike" cap="none" normalizeH="0" baseline="0" dirty="0" err="1" smtClean="0">
+              <a:rPr kumimoji="0" lang="en-US" altLang="en-US" sz="1800" b="0" i="0" u="none" strike="noStrike" cap="none" normalizeH="0" baseline="0" dirty="0" err="1">
                 <a:ln>
                   <a:noFill/>
                 </a:ln>
@@ -26305,7 +26227,7 @@
               <a:t>çift</a:t>
             </a:r>
             <a:r>
-              <a:rPr kumimoji="0" lang="en-US" altLang="en-US" sz="1800" b="0" i="0" u="none" strike="noStrike" cap="none" normalizeH="0" baseline="0" dirty="0" smtClean="0">
+              <a:rPr kumimoji="0" lang="en-US" altLang="en-US" sz="1800" b="0" i="0" u="none" strike="noStrike" cap="none" normalizeH="0" baseline="0" dirty="0">
                 <a:ln>
                   <a:noFill/>
                 </a:ln>
@@ -26318,7 +26240,7 @@
               <a:t> </a:t>
             </a:r>
             <a:r>
-              <a:rPr kumimoji="0" lang="en-US" altLang="en-US" sz="1800" b="0" i="0" u="none" strike="noStrike" cap="none" normalizeH="0" baseline="0" dirty="0" err="1" smtClean="0">
+              <a:rPr kumimoji="0" lang="en-US" altLang="en-US" sz="1800" b="0" i="0" u="none" strike="noStrike" cap="none" normalizeH="0" baseline="0" dirty="0" err="1">
                 <a:ln>
                   <a:noFill/>
                 </a:ln>
@@ -26331,7 +26253,7 @@
               <a:t>yönlü</a:t>
             </a:r>
             <a:r>
-              <a:rPr kumimoji="0" lang="en-US" altLang="en-US" sz="1800" b="0" i="0" u="none" strike="noStrike" cap="none" normalizeH="0" baseline="0" dirty="0" smtClean="0">
+              <a:rPr kumimoji="0" lang="en-US" altLang="en-US" sz="1800" b="0" i="0" u="none" strike="noStrike" cap="none" normalizeH="0" baseline="0" dirty="0">
                 <a:ln>
                   <a:noFill/>
                 </a:ln>
@@ -26344,7 +26266,7 @@
               <a:t> </a:t>
             </a:r>
             <a:r>
-              <a:rPr kumimoji="0" lang="en-US" altLang="en-US" sz="1800" b="0" i="0" u="none" strike="noStrike" cap="none" normalizeH="0" baseline="0" dirty="0" err="1" smtClean="0">
+              <a:rPr kumimoji="0" lang="en-US" altLang="en-US" sz="1800" b="0" i="0" u="none" strike="noStrike" cap="none" normalizeH="0" baseline="0" dirty="0" err="1">
                 <a:ln>
                   <a:noFill/>
                 </a:ln>
@@ -26357,7 +26279,7 @@
               <a:t>bağlamda</a:t>
             </a:r>
             <a:r>
-              <a:rPr kumimoji="0" lang="en-US" altLang="en-US" sz="1800" b="0" i="0" u="none" strike="noStrike" cap="none" normalizeH="0" baseline="0" dirty="0" smtClean="0">
+              <a:rPr kumimoji="0" lang="en-US" altLang="en-US" sz="1800" b="0" i="0" u="none" strike="noStrike" cap="none" normalizeH="0" baseline="0" dirty="0">
                 <a:ln>
                   <a:noFill/>
                 </a:ln>
@@ -26370,7 +26292,7 @@
               <a:t> </a:t>
             </a:r>
             <a:r>
-              <a:rPr kumimoji="0" lang="en-US" altLang="en-US" sz="1800" b="0" i="0" u="none" strike="noStrike" cap="none" normalizeH="0" baseline="0" dirty="0" err="1" smtClean="0">
+              <a:rPr kumimoji="0" lang="en-US" altLang="en-US" sz="1800" b="0" i="0" u="none" strike="noStrike" cap="none" normalizeH="0" baseline="0" dirty="0" err="1">
                 <a:ln>
                   <a:noFill/>
                 </a:ln>
@@ -26383,7 +26305,7 @@
               <a:t>öğrenerek</a:t>
             </a:r>
             <a:r>
-              <a:rPr kumimoji="0" lang="en-US" altLang="en-US" sz="1800" b="0" i="0" u="none" strike="noStrike" cap="none" normalizeH="0" baseline="0" dirty="0" smtClean="0">
+              <a:rPr kumimoji="0" lang="en-US" altLang="en-US" sz="1800" b="0" i="0" u="none" strike="noStrike" cap="none" normalizeH="0" baseline="0" dirty="0">
                 <a:ln>
                   <a:noFill/>
                 </a:ln>
@@ -26396,7 +26318,7 @@
               <a:t> </a:t>
             </a:r>
             <a:r>
-              <a:rPr kumimoji="0" lang="en-US" altLang="en-US" sz="1800" b="0" i="0" u="none" strike="noStrike" cap="none" normalizeH="0" baseline="0" dirty="0" err="1" smtClean="0">
+              <a:rPr kumimoji="0" lang="en-US" altLang="en-US" sz="1800" b="0" i="0" u="none" strike="noStrike" cap="none" normalizeH="0" baseline="0" dirty="0" err="1">
                 <a:ln>
                   <a:noFill/>
                 </a:ln>
@@ -26409,7 +26331,7 @@
               <a:t>anlam</a:t>
             </a:r>
             <a:r>
-              <a:rPr kumimoji="0" lang="en-US" altLang="en-US" sz="1800" b="0" i="0" u="none" strike="noStrike" cap="none" normalizeH="0" baseline="0" dirty="0" smtClean="0">
+              <a:rPr kumimoji="0" lang="en-US" altLang="en-US" sz="1800" b="0" i="0" u="none" strike="noStrike" cap="none" normalizeH="0" baseline="0" dirty="0">
                 <a:ln>
                   <a:noFill/>
                 </a:ln>
@@ -26422,7 +26344,7 @@
               <a:t> </a:t>
             </a:r>
             <a:r>
-              <a:rPr kumimoji="0" lang="en-US" altLang="en-US" sz="1800" b="0" i="0" u="none" strike="noStrike" cap="none" normalizeH="0" baseline="0" dirty="0" err="1" smtClean="0">
+              <a:rPr kumimoji="0" lang="en-US" altLang="en-US" sz="1800" b="0" i="0" u="none" strike="noStrike" cap="none" normalizeH="0" baseline="0" dirty="0" err="1">
                 <a:ln>
                   <a:noFill/>
                 </a:ln>
@@ -26435,7 +26357,7 @@
               <a:t>temsili</a:t>
             </a:r>
             <a:r>
-              <a:rPr kumimoji="0" lang="en-US" altLang="en-US" sz="1800" b="0" i="0" u="none" strike="noStrike" cap="none" normalizeH="0" baseline="0" dirty="0" smtClean="0">
+              <a:rPr kumimoji="0" lang="en-US" altLang="en-US" sz="1800" b="0" i="0" u="none" strike="noStrike" cap="none" normalizeH="0" baseline="0" dirty="0">
                 <a:ln>
                   <a:noFill/>
                 </a:ln>
@@ -26448,7 +26370,7 @@
               <a:t> </a:t>
             </a:r>
             <a:r>
-              <a:rPr kumimoji="0" lang="en-US" altLang="en-US" sz="1800" b="0" i="0" u="none" strike="noStrike" cap="none" normalizeH="0" baseline="0" dirty="0" err="1" smtClean="0">
+              <a:rPr kumimoji="0" lang="en-US" altLang="en-US" sz="1800" b="0" i="0" u="none" strike="noStrike" cap="none" normalizeH="0" baseline="0" dirty="0" err="1">
                 <a:ln>
                   <a:noFill/>
                 </a:ln>
@@ -26461,7 +26383,7 @@
               <a:t>oluşturur</a:t>
             </a:r>
             <a:r>
-              <a:rPr kumimoji="0" lang="en-US" altLang="en-US" sz="1800" b="0" i="0" u="none" strike="noStrike" cap="none" normalizeH="0" baseline="0" dirty="0" smtClean="0">
+              <a:rPr kumimoji="0" lang="en-US" altLang="en-US" sz="1800" b="0" i="0" u="none" strike="noStrike" cap="none" normalizeH="0" baseline="0" dirty="0">
                 <a:ln>
                   <a:noFill/>
                 </a:ln>
@@ -26474,7 +26396,7 @@
               <a:t>.</a:t>
             </a:r>
             <a:r>
-              <a:rPr kumimoji="0" lang="tr-TR" altLang="en-US" sz="1800" b="0" i="0" u="none" strike="noStrike" cap="none" normalizeH="0" dirty="0" smtClean="0">
+              <a:rPr kumimoji="0" lang="tr-TR" altLang="en-US" sz="1800" b="0" i="0" u="none" strike="noStrike" cap="none" normalizeH="0" dirty="0">
                 <a:ln>
                   <a:noFill/>
                 </a:ln>
@@ -26487,7 +26409,7 @@
               <a:t> </a:t>
             </a:r>
             <a:r>
-              <a:rPr kumimoji="0" lang="en-US" altLang="en-US" sz="1800" b="0" i="0" u="none" strike="noStrike" cap="none" normalizeH="0" baseline="0" dirty="0" err="1" smtClean="0">
+              <a:rPr kumimoji="0" lang="en-US" altLang="en-US" sz="1800" b="0" i="0" u="none" strike="noStrike" cap="none" normalizeH="0" baseline="0" dirty="0" err="1">
                 <a:ln>
                   <a:noFill/>
                 </a:ln>
@@ -26500,7 +26422,7 @@
               <a:t>Modelin</a:t>
             </a:r>
             <a:r>
-              <a:rPr kumimoji="0" lang="en-US" altLang="en-US" sz="1800" b="0" i="0" u="none" strike="noStrike" cap="none" normalizeH="0" baseline="0" dirty="0" smtClean="0">
+              <a:rPr kumimoji="0" lang="en-US" altLang="en-US" sz="1800" b="0" i="0" u="none" strike="noStrike" cap="none" normalizeH="0" baseline="0" dirty="0">
                 <a:ln>
                   <a:noFill/>
                 </a:ln>
@@ -26513,7 +26435,7 @@
               <a:t> </a:t>
             </a:r>
             <a:r>
-              <a:rPr kumimoji="0" lang="en-US" altLang="en-US" sz="1800" b="0" i="0" u="none" strike="noStrike" cap="none" normalizeH="0" baseline="0" dirty="0" err="1" smtClean="0">
+              <a:rPr kumimoji="0" lang="en-US" altLang="en-US" sz="1800" b="0" i="0" u="none" strike="noStrike" cap="none" normalizeH="0" baseline="0" dirty="0" err="1">
                 <a:ln>
                   <a:noFill/>
                 </a:ln>
@@ -26526,7 +26448,7 @@
               <a:t>üzerine</a:t>
             </a:r>
             <a:r>
-              <a:rPr kumimoji="0" lang="en-US" altLang="en-US" sz="1800" b="0" i="0" u="none" strike="noStrike" cap="none" normalizeH="0" baseline="0" dirty="0" smtClean="0">
+              <a:rPr kumimoji="0" lang="en-US" altLang="en-US" sz="1800" b="0" i="0" u="none" strike="noStrike" cap="none" normalizeH="0" baseline="0" dirty="0">
                 <a:ln>
                   <a:noFill/>
                 </a:ln>
@@ -26539,7 +26461,7 @@
               <a:t> </a:t>
             </a:r>
             <a:r>
-              <a:rPr kumimoji="0" lang="en-US" altLang="en-US" sz="1800" b="0" i="0" u="none" strike="noStrike" cap="none" normalizeH="0" baseline="0" dirty="0" err="1" smtClean="0">
+              <a:rPr kumimoji="0" lang="en-US" altLang="en-US" sz="1800" b="0" i="0" u="none" strike="noStrike" cap="none" normalizeH="0" baseline="0" dirty="0" err="1">
                 <a:ln>
                   <a:noFill/>
                 </a:ln>
@@ -26552,7 +26474,7 @@
               <a:t>eklenen</a:t>
             </a:r>
             <a:r>
-              <a:rPr kumimoji="0" lang="en-US" altLang="en-US" sz="1800" b="0" i="0" u="none" strike="noStrike" cap="none" normalizeH="0" baseline="0" dirty="0" smtClean="0">
+              <a:rPr kumimoji="0" lang="en-US" altLang="en-US" sz="1800" b="0" i="0" u="none" strike="noStrike" cap="none" normalizeH="0" baseline="0" dirty="0">
                 <a:ln>
                   <a:noFill/>
                 </a:ln>
@@ -26565,7 +26487,7 @@
               <a:t> </a:t>
             </a:r>
             <a:r>
-              <a:rPr kumimoji="0" lang="en-US" altLang="en-US" sz="1800" b="0" i="0" u="none" strike="noStrike" cap="none" normalizeH="0" baseline="0" dirty="0" err="1" smtClean="0">
+              <a:rPr kumimoji="0" lang="en-US" altLang="en-US" sz="1800" b="0" i="0" u="none" strike="noStrike" cap="none" normalizeH="0" baseline="0" dirty="0" err="1">
                 <a:ln>
                   <a:noFill/>
                 </a:ln>
@@ -26578,7 +26500,7 @@
               <a:t>sınıflandırma</a:t>
             </a:r>
             <a:r>
-              <a:rPr kumimoji="0" lang="en-US" altLang="en-US" sz="1800" b="0" i="0" u="none" strike="noStrike" cap="none" normalizeH="0" baseline="0" dirty="0" smtClean="0">
+              <a:rPr kumimoji="0" lang="en-US" altLang="en-US" sz="1800" b="0" i="0" u="none" strike="noStrike" cap="none" normalizeH="0" baseline="0" dirty="0">
                 <a:ln>
                   <a:noFill/>
                 </a:ln>
@@ -26591,7 +26513,7 @@
               <a:t> </a:t>
             </a:r>
             <a:r>
-              <a:rPr kumimoji="0" lang="en-US" altLang="en-US" sz="1800" b="0" i="0" u="none" strike="noStrike" cap="none" normalizeH="0" baseline="0" dirty="0" err="1" smtClean="0">
+              <a:rPr kumimoji="0" lang="en-US" altLang="en-US" sz="1800" b="0" i="0" u="none" strike="noStrike" cap="none" normalizeH="0" baseline="0" dirty="0" err="1">
                 <a:ln>
                   <a:noFill/>
                 </a:ln>
@@ -26604,7 +26526,7 @@
               <a:t>katmanı</a:t>
             </a:r>
             <a:r>
-              <a:rPr kumimoji="0" lang="en-US" altLang="en-US" sz="1800" b="0" i="0" u="none" strike="noStrike" cap="none" normalizeH="0" baseline="0" dirty="0" smtClean="0">
+              <a:rPr kumimoji="0" lang="en-US" altLang="en-US" sz="1800" b="0" i="0" u="none" strike="noStrike" cap="none" normalizeH="0" baseline="0" dirty="0">
                 <a:ln>
                   <a:noFill/>
                 </a:ln>
@@ -26616,7 +26538,7 @@
               </a:rPr>
               <a:t>,</a:t>
             </a:r>
-            <a:endParaRPr kumimoji="0" lang="tr-TR" altLang="en-US" sz="1800" b="0" i="0" u="none" strike="noStrike" cap="none" normalizeH="0" baseline="0" dirty="0" smtClean="0">
+            <a:endParaRPr kumimoji="0" lang="tr-TR" altLang="en-US" sz="1800" b="0" i="0" u="none" strike="noStrike" cap="none" normalizeH="0" baseline="0" dirty="0">
               <a:ln>
                 <a:noFill/>
               </a:ln>
@@ -26645,7 +26567,7 @@
               <a:tabLst/>
             </a:pPr>
             <a:r>
-              <a:rPr kumimoji="0" lang="en-US" altLang="en-US" sz="1800" b="0" i="0" u="none" strike="noStrike" cap="none" normalizeH="0" baseline="0" dirty="0" smtClean="0">
+              <a:rPr kumimoji="0" lang="en-US" altLang="en-US" sz="1800" b="0" i="0" u="none" strike="noStrike" cap="none" normalizeH="0" baseline="0" dirty="0">
                 <a:ln>
                   <a:noFill/>
                 </a:ln>
@@ -26658,7 +26580,7 @@
               <a:t>[CLS] token </a:t>
             </a:r>
             <a:r>
-              <a:rPr kumimoji="0" lang="en-US" altLang="en-US" sz="1800" b="0" i="0" u="none" strike="noStrike" cap="none" normalizeH="0" baseline="0" dirty="0" err="1" smtClean="0">
+              <a:rPr kumimoji="0" lang="en-US" altLang="en-US" sz="1800" b="0" i="0" u="none" strike="noStrike" cap="none" normalizeH="0" baseline="0" dirty="0" err="1">
                 <a:ln>
                   <a:noFill/>
                 </a:ln>
@@ -26671,7 +26593,7 @@
               <a:t>çıktısını</a:t>
             </a:r>
             <a:r>
-              <a:rPr kumimoji="0" lang="en-US" altLang="en-US" sz="1800" b="0" i="0" u="none" strike="noStrike" cap="none" normalizeH="0" baseline="0" dirty="0" smtClean="0">
+              <a:rPr kumimoji="0" lang="en-US" altLang="en-US" sz="1800" b="0" i="0" u="none" strike="noStrike" cap="none" normalizeH="0" baseline="0" dirty="0">
                 <a:ln>
                   <a:noFill/>
                 </a:ln>
@@ -26684,7 +26606,7 @@
               <a:t> </a:t>
             </a:r>
             <a:r>
-              <a:rPr kumimoji="0" lang="en-US" altLang="en-US" sz="1800" b="0" i="0" u="none" strike="noStrike" cap="none" normalizeH="0" baseline="0" dirty="0" err="1" smtClean="0">
+              <a:rPr kumimoji="0" lang="en-US" altLang="en-US" sz="1800" b="0" i="0" u="none" strike="noStrike" cap="none" normalizeH="0" baseline="0" dirty="0" err="1">
                 <a:ln>
                   <a:noFill/>
                 </a:ln>
@@ -26697,7 +26619,7 @@
               <a:t>kullanarak</a:t>
             </a:r>
             <a:r>
-              <a:rPr kumimoji="0" lang="en-US" altLang="en-US" sz="1800" b="0" i="0" u="none" strike="noStrike" cap="none" normalizeH="0" baseline="0" dirty="0" smtClean="0">
+              <a:rPr kumimoji="0" lang="en-US" altLang="en-US" sz="1800" b="0" i="0" u="none" strike="noStrike" cap="none" normalizeH="0" baseline="0" dirty="0">
                 <a:ln>
                   <a:noFill/>
                 </a:ln>
@@ -26710,7 +26632,7 @@
               <a:t> </a:t>
             </a:r>
             <a:r>
-              <a:rPr kumimoji="0" lang="en-US" altLang="en-US" sz="1800" b="0" i="0" u="none" strike="noStrike" cap="none" normalizeH="0" baseline="0" dirty="0" err="1" smtClean="0">
+              <a:rPr kumimoji="0" lang="en-US" altLang="en-US" sz="1800" b="0" i="0" u="none" strike="noStrike" cap="none" normalizeH="0" baseline="0" dirty="0" err="1">
                 <a:ln>
                   <a:noFill/>
                 </a:ln>
@@ -26723,7 +26645,7 @@
               <a:t>metni</a:t>
             </a:r>
             <a:r>
-              <a:rPr kumimoji="0" lang="en-US" altLang="en-US" sz="1800" b="0" i="0" u="none" strike="noStrike" cap="none" normalizeH="0" baseline="0" dirty="0" smtClean="0">
+              <a:rPr kumimoji="0" lang="en-US" altLang="en-US" sz="1800" b="0" i="0" u="none" strike="noStrike" cap="none" normalizeH="0" baseline="0" dirty="0">
                 <a:ln>
                   <a:noFill/>
                 </a:ln>
@@ -26736,7 +26658,7 @@
               <a:t> </a:t>
             </a:r>
             <a:r>
-              <a:rPr kumimoji="0" lang="en-US" altLang="en-US" sz="1800" b="0" i="0" u="none" strike="noStrike" cap="none" normalizeH="0" baseline="0" dirty="0" err="1" smtClean="0">
+              <a:rPr kumimoji="0" lang="en-US" altLang="en-US" sz="1800" b="0" i="0" u="none" strike="noStrike" cap="none" normalizeH="0" baseline="0" dirty="0" err="1">
                 <a:ln>
                   <a:noFill/>
                 </a:ln>
@@ -26749,7 +26671,7 @@
               <a:t>ilgili</a:t>
             </a:r>
             <a:r>
-              <a:rPr kumimoji="0" lang="en-US" altLang="en-US" sz="1800" b="0" i="0" u="none" strike="noStrike" cap="none" normalizeH="0" baseline="0" dirty="0" smtClean="0">
+              <a:rPr kumimoji="0" lang="en-US" altLang="en-US" sz="1800" b="0" i="0" u="none" strike="noStrike" cap="none" normalizeH="0" baseline="0" dirty="0">
                 <a:ln>
                   <a:noFill/>
                 </a:ln>
@@ -26762,7 +26684,7 @@
               <a:t> </a:t>
             </a:r>
             <a:r>
-              <a:rPr kumimoji="0" lang="en-US" altLang="en-US" sz="1800" b="0" i="0" u="none" strike="noStrike" cap="none" normalizeH="0" baseline="0" dirty="0" err="1" smtClean="0">
+              <a:rPr kumimoji="0" lang="en-US" altLang="en-US" sz="1800" b="0" i="0" u="none" strike="noStrike" cap="none" normalizeH="0" baseline="0" dirty="0" err="1">
                 <a:ln>
                   <a:noFill/>
                 </a:ln>
@@ -26775,7 +26697,7 @@
               <a:t>şikayet</a:t>
             </a:r>
             <a:r>
-              <a:rPr kumimoji="0" lang="en-US" altLang="en-US" sz="1800" b="0" i="0" u="none" strike="noStrike" cap="none" normalizeH="0" baseline="0" dirty="0" smtClean="0">
+              <a:rPr kumimoji="0" lang="en-US" altLang="en-US" sz="1800" b="0" i="0" u="none" strike="noStrike" cap="none" normalizeH="0" baseline="0" dirty="0">
                 <a:ln>
                   <a:noFill/>
                 </a:ln>
@@ -26788,7 +26710,7 @@
               <a:t> </a:t>
             </a:r>
             <a:r>
-              <a:rPr kumimoji="0" lang="en-US" altLang="en-US" sz="1800" b="0" i="0" u="none" strike="noStrike" cap="none" normalizeH="0" baseline="0" dirty="0" err="1" smtClean="0">
+              <a:rPr kumimoji="0" lang="en-US" altLang="en-US" sz="1800" b="0" i="0" u="none" strike="noStrike" cap="none" normalizeH="0" baseline="0" dirty="0" err="1">
                 <a:ln>
                   <a:noFill/>
                 </a:ln>
@@ -26801,7 +26723,7 @@
               <a:t>sınıfına</a:t>
             </a:r>
             <a:r>
-              <a:rPr kumimoji="0" lang="en-US" altLang="en-US" sz="1800" b="0" i="0" u="none" strike="noStrike" cap="none" normalizeH="0" baseline="0" dirty="0" smtClean="0">
+              <a:rPr kumimoji="0" lang="en-US" altLang="en-US" sz="1800" b="0" i="0" u="none" strike="noStrike" cap="none" normalizeH="0" baseline="0" dirty="0">
                 <a:ln>
                   <a:noFill/>
                 </a:ln>
@@ -26814,7 +26736,7 @@
               <a:t> </a:t>
             </a:r>
             <a:r>
-              <a:rPr kumimoji="0" lang="en-US" altLang="en-US" sz="1800" b="0" i="0" u="none" strike="noStrike" cap="none" normalizeH="0" baseline="0" dirty="0" err="1" smtClean="0">
+              <a:rPr kumimoji="0" lang="en-US" altLang="en-US" sz="1800" b="0" i="0" u="none" strike="noStrike" cap="none" normalizeH="0" baseline="0" dirty="0" err="1">
                 <a:ln>
                   <a:noFill/>
                 </a:ln>
@@ -26827,7 +26749,7 @@
               <a:t>atamaktadır</a:t>
             </a:r>
             <a:r>
-              <a:rPr kumimoji="0" lang="en-US" altLang="en-US" sz="1800" b="0" i="0" u="none" strike="noStrike" cap="none" normalizeH="0" baseline="0" dirty="0" smtClean="0">
+              <a:rPr kumimoji="0" lang="en-US" altLang="en-US" sz="1800" b="0" i="0" u="none" strike="noStrike" cap="none" normalizeH="0" baseline="0" dirty="0">
                 <a:ln>
                   <a:noFill/>
                 </a:ln>
@@ -26846,7 +26768,7 @@
               <a:t> </a:t>
             </a:r>
             <a:r>
-              <a:rPr kumimoji="0" lang="en-US" altLang="en-US" sz="1800" b="0" i="0" u="none" strike="noStrike" cap="none" normalizeH="0" baseline="0" dirty="0" smtClean="0">
+              <a:rPr kumimoji="0" lang="en-US" altLang="en-US" sz="1800" b="0" i="0" u="none" strike="noStrike" cap="none" normalizeH="0" baseline="0" dirty="0">
                 <a:ln>
                   <a:noFill/>
                 </a:ln>
@@ -26859,7 +26781,7 @@
               <a:t>Bu </a:t>
             </a:r>
             <a:r>
-              <a:rPr kumimoji="0" lang="en-US" altLang="en-US" sz="1800" b="0" i="0" u="none" strike="noStrike" cap="none" normalizeH="0" baseline="0" dirty="0" err="1" smtClean="0">
+              <a:rPr kumimoji="0" lang="en-US" altLang="en-US" sz="1800" b="0" i="0" u="none" strike="noStrike" cap="none" normalizeH="0" baseline="0" dirty="0" err="1">
                 <a:ln>
                   <a:noFill/>
                 </a:ln>
@@ -26872,7 +26794,7 @@
               <a:t>yapı</a:t>
             </a:r>
             <a:r>
-              <a:rPr kumimoji="0" lang="en-US" altLang="en-US" sz="1800" b="0" i="0" u="none" strike="noStrike" cap="none" normalizeH="0" baseline="0" dirty="0" smtClean="0">
+              <a:rPr kumimoji="0" lang="en-US" altLang="en-US" sz="1800" b="0" i="0" u="none" strike="noStrike" cap="none" normalizeH="0" baseline="0" dirty="0">
                 <a:ln>
                   <a:noFill/>
                 </a:ln>
@@ -26885,7 +26807,7 @@
               <a:t> </a:t>
             </a:r>
             <a:r>
-              <a:rPr kumimoji="0" lang="en-US" altLang="en-US" sz="1800" b="0" i="0" u="none" strike="noStrike" cap="none" normalizeH="0" baseline="0" dirty="0" err="1" smtClean="0">
+              <a:rPr kumimoji="0" lang="en-US" altLang="en-US" sz="1800" b="0" i="0" u="none" strike="noStrike" cap="none" normalizeH="0" baseline="0" dirty="0" err="1">
                 <a:ln>
                   <a:noFill/>
                 </a:ln>
@@ -26898,7 +26820,7 @@
               <a:t>sayesinde</a:t>
             </a:r>
             <a:r>
-              <a:rPr kumimoji="0" lang="en-US" altLang="en-US" sz="1800" b="0" i="0" u="none" strike="noStrike" cap="none" normalizeH="0" baseline="0" dirty="0" smtClean="0">
+              <a:rPr kumimoji="0" lang="en-US" altLang="en-US" sz="1800" b="0" i="0" u="none" strike="noStrike" cap="none" normalizeH="0" baseline="0" dirty="0">
                 <a:ln>
                   <a:noFill/>
                 </a:ln>
@@ -26911,7 +26833,7 @@
               <a:t> </a:t>
             </a:r>
             <a:r>
-              <a:rPr kumimoji="0" lang="en-US" altLang="en-US" sz="1800" b="0" i="0" u="none" strike="noStrike" cap="none" normalizeH="0" baseline="0" dirty="0" err="1" smtClean="0">
+              <a:rPr kumimoji="0" lang="en-US" altLang="en-US" sz="1800" b="0" i="0" u="none" strike="noStrike" cap="none" normalizeH="0" baseline="0" dirty="0" err="1">
                 <a:ln>
                   <a:noFill/>
                 </a:ln>
@@ -26924,7 +26846,7 @@
               <a:t>bağlamsal</a:t>
             </a:r>
             <a:r>
-              <a:rPr kumimoji="0" lang="en-US" altLang="en-US" sz="1800" b="0" i="0" u="none" strike="noStrike" cap="none" normalizeH="0" baseline="0" dirty="0" smtClean="0">
+              <a:rPr kumimoji="0" lang="en-US" altLang="en-US" sz="1800" b="0" i="0" u="none" strike="noStrike" cap="none" normalizeH="0" baseline="0" dirty="0">
                 <a:ln>
                   <a:noFill/>
                 </a:ln>
@@ -26937,7 +26859,7 @@
               <a:t> </a:t>
             </a:r>
             <a:r>
-              <a:rPr kumimoji="0" lang="en-US" altLang="en-US" sz="1800" b="0" i="0" u="none" strike="noStrike" cap="none" normalizeH="0" baseline="0" dirty="0" err="1" smtClean="0">
+              <a:rPr kumimoji="0" lang="en-US" altLang="en-US" sz="1800" b="0" i="0" u="none" strike="noStrike" cap="none" normalizeH="0" baseline="0" dirty="0" err="1">
                 <a:ln>
                   <a:noFill/>
                 </a:ln>
@@ -26950,7 +26872,7 @@
               <a:t>ve</a:t>
             </a:r>
             <a:r>
-              <a:rPr kumimoji="0" lang="en-US" altLang="en-US" sz="1800" b="0" i="0" u="none" strike="noStrike" cap="none" normalizeH="0" baseline="0" dirty="0" smtClean="0">
+              <a:rPr kumimoji="0" lang="en-US" altLang="en-US" sz="1800" b="0" i="0" u="none" strike="noStrike" cap="none" normalizeH="0" baseline="0" dirty="0">
                 <a:ln>
                   <a:noFill/>
                 </a:ln>
@@ -26963,7 +26885,7 @@
               <a:t> </a:t>
             </a:r>
             <a:r>
-              <a:rPr kumimoji="0" lang="en-US" altLang="en-US" sz="1800" b="0" i="0" u="none" strike="noStrike" cap="none" normalizeH="0" baseline="0" dirty="0" err="1" smtClean="0">
+              <a:rPr kumimoji="0" lang="en-US" altLang="en-US" sz="1800" b="0" i="0" u="none" strike="noStrike" cap="none" normalizeH="0" baseline="0" dirty="0" err="1">
                 <a:ln>
                   <a:noFill/>
                 </a:ln>
@@ -26976,7 +26898,7 @@
               <a:t>daha</a:t>
             </a:r>
             <a:r>
-              <a:rPr kumimoji="0" lang="en-US" altLang="en-US" sz="1800" b="0" i="0" u="none" strike="noStrike" cap="none" normalizeH="0" baseline="0" dirty="0" smtClean="0">
+              <a:rPr kumimoji="0" lang="en-US" altLang="en-US" sz="1800" b="0" i="0" u="none" strike="noStrike" cap="none" normalizeH="0" baseline="0" dirty="0">
                 <a:ln>
                   <a:noFill/>
                 </a:ln>
@@ -26989,7 +26911,7 @@
               <a:t> </a:t>
             </a:r>
             <a:r>
-              <a:rPr kumimoji="0" lang="en-US" altLang="en-US" sz="1800" b="0" i="0" u="none" strike="noStrike" cap="none" normalizeH="0" baseline="0" dirty="0" err="1" smtClean="0">
+              <a:rPr kumimoji="0" lang="en-US" altLang="en-US" sz="1800" b="0" i="0" u="none" strike="noStrike" cap="none" normalizeH="0" baseline="0" dirty="0" err="1">
                 <a:ln>
                   <a:noFill/>
                 </a:ln>
@@ -27002,7 +26924,7 @@
               <a:t>doğru</a:t>
             </a:r>
             <a:r>
-              <a:rPr kumimoji="0" lang="en-US" altLang="en-US" sz="1800" b="0" i="0" u="none" strike="noStrike" cap="none" normalizeH="0" baseline="0" dirty="0" smtClean="0">
+              <a:rPr kumimoji="0" lang="en-US" altLang="en-US" sz="1800" b="0" i="0" u="none" strike="noStrike" cap="none" normalizeH="0" baseline="0" dirty="0">
                 <a:ln>
                   <a:noFill/>
                 </a:ln>
@@ -27014,7 +26936,7 @@
               </a:rPr>
               <a:t> </a:t>
             </a:r>
-            <a:endParaRPr kumimoji="0" lang="tr-TR" altLang="en-US" sz="1800" b="0" i="0" u="none" strike="noStrike" cap="none" normalizeH="0" baseline="0" dirty="0" smtClean="0">
+            <a:endParaRPr kumimoji="0" lang="tr-TR" altLang="en-US" sz="1800" b="0" i="0" u="none" strike="noStrike" cap="none" normalizeH="0" baseline="0" dirty="0">
               <a:ln>
                 <a:noFill/>
               </a:ln>
@@ -27043,7 +26965,7 @@
               <a:tabLst/>
             </a:pPr>
             <a:r>
-              <a:rPr kumimoji="0" lang="en-US" altLang="en-US" sz="1800" b="0" i="0" u="none" strike="noStrike" cap="none" normalizeH="0" baseline="0" dirty="0" err="1" smtClean="0">
+              <a:rPr kumimoji="0" lang="en-US" altLang="en-US" sz="1800" b="0" i="0" u="none" strike="noStrike" cap="none" normalizeH="0" baseline="0" dirty="0" err="1">
                 <a:ln>
                   <a:noFill/>
                 </a:ln>
@@ -27056,7 +26978,7 @@
               <a:t>sınıflandırma</a:t>
             </a:r>
             <a:r>
-              <a:rPr kumimoji="0" lang="en-US" altLang="en-US" sz="1800" b="0" i="0" u="none" strike="noStrike" cap="none" normalizeH="0" baseline="0" dirty="0" smtClean="0">
+              <a:rPr kumimoji="0" lang="en-US" altLang="en-US" sz="1800" b="0" i="0" u="none" strike="noStrike" cap="none" normalizeH="0" baseline="0" dirty="0">
                 <a:ln>
                   <a:noFill/>
                 </a:ln>
@@ -27069,7 +26991,7 @@
               <a:t> </a:t>
             </a:r>
             <a:r>
-              <a:rPr kumimoji="0" lang="en-US" altLang="en-US" sz="1800" b="0" i="0" u="none" strike="noStrike" cap="none" normalizeH="0" baseline="0" dirty="0" err="1" smtClean="0">
+              <a:rPr kumimoji="0" lang="en-US" altLang="en-US" sz="1800" b="0" i="0" u="none" strike="noStrike" cap="none" normalizeH="0" baseline="0" dirty="0" err="1">
                 <a:ln>
                   <a:noFill/>
                 </a:ln>
@@ -27082,7 +27004,7 @@
               <a:t>yapılabilmektedir</a:t>
             </a:r>
             <a:r>
-              <a:rPr kumimoji="0" lang="en-US" altLang="en-US" sz="1800" b="0" i="0" u="none" strike="noStrike" cap="none" normalizeH="0" baseline="0" dirty="0" smtClean="0">
+              <a:rPr kumimoji="0" lang="en-US" altLang="en-US" sz="1800" b="0" i="0" u="none" strike="noStrike" cap="none" normalizeH="0" baseline="0" dirty="0">
                 <a:ln>
                   <a:noFill/>
                 </a:ln>
@@ -27215,10 +27137,6 @@
               </a:rPr>
               <a:t>Süreci</a:t>
             </a:r>
-            <a:r>
-              <a:rPr lang="en-US" b="1" dirty="0"/>
-              <a:t/>
-            </a:r>
             <a:br>
               <a:rPr lang="en-US" b="1" dirty="0"/>
             </a:br>
@@ -27247,22 +27165,16 @@
           <a:lstStyle/>
           <a:p>
             <a:r>
-              <a:rPr lang="tr-TR" dirty="0" smtClean="0">
+              <a:rPr lang="tr-TR" dirty="0">
                 <a:latin typeface="Bahnschrift Light SemiCondensed" panose="020B0502040204020203" pitchFamily="34" charset="0"/>
               </a:rPr>
               <a:t>  </a:t>
             </a:r>
             <a:r>
-              <a:rPr lang="en-US" dirty="0" smtClean="0">
-                <a:latin typeface="Bahnschrift Light SemiCondensed" panose="020B0502040204020203" pitchFamily="34" charset="0"/>
-              </a:rPr>
-              <a:t>Model</a:t>
-            </a:r>
-            <a:r>
               <a:rPr lang="en-US" dirty="0">
                 <a:latin typeface="Bahnschrift Light SemiCondensed" panose="020B0502040204020203" pitchFamily="34" charset="0"/>
               </a:rPr>
-              <a:t>, </a:t>
+              <a:t>Model, </a:t>
             </a:r>
             <a:r>
               <a:rPr lang="en-US" dirty="0" err="1">
@@ -27337,25 +27249,25 @@
               <a:t> </a:t>
             </a:r>
             <a:r>
-              <a:rPr lang="en-US" dirty="0" err="1" smtClean="0">
+              <a:rPr lang="en-US" dirty="0" err="1">
                 <a:latin typeface="Bahnschrift Light SemiCondensed" panose="020B0502040204020203" pitchFamily="34" charset="0"/>
               </a:rPr>
               <a:t>müşteri</a:t>
             </a:r>
             <a:r>
-              <a:rPr lang="en-US" dirty="0" smtClean="0">
-                <a:latin typeface="Bahnschrift Light SemiCondensed" panose="020B0502040204020203" pitchFamily="34" charset="0"/>
-              </a:rPr>
-              <a:t> </a:t>
-            </a:r>
-            <a:r>
-              <a:rPr lang="en-US" dirty="0" err="1" smtClean="0">
+              <a:rPr lang="en-US" dirty="0">
+                <a:latin typeface="Bahnschrift Light SemiCondensed" panose="020B0502040204020203" pitchFamily="34" charset="0"/>
+              </a:rPr>
+              <a:t> </a:t>
+            </a:r>
+            <a:r>
+              <a:rPr lang="en-US" dirty="0" err="1">
                 <a:latin typeface="Bahnschrift Light SemiCondensed" panose="020B0502040204020203" pitchFamily="34" charset="0"/>
               </a:rPr>
               <a:t>şikayet</a:t>
             </a:r>
             <a:r>
-              <a:rPr lang="en-US" dirty="0" smtClean="0">
+              <a:rPr lang="en-US" dirty="0">
                 <a:latin typeface="Bahnschrift Light SemiCondensed" panose="020B0502040204020203" pitchFamily="34" charset="0"/>
               </a:rPr>
               <a:t> </a:t>
@@ -27507,19 +27419,19 @@
           </a:p>
           <a:p>
             <a:r>
-              <a:rPr lang="tr-TR" dirty="0" smtClean="0">
+              <a:rPr lang="tr-TR" dirty="0">
                 <a:latin typeface="Bahnschrift Light SemiCondensed" panose="020B0502040204020203" pitchFamily="34" charset="0"/>
               </a:rPr>
               <a:t>  </a:t>
             </a:r>
             <a:r>
-              <a:rPr lang="en-US" dirty="0" err="1" smtClean="0">
+              <a:rPr lang="en-US" dirty="0" err="1">
                 <a:latin typeface="Bahnschrift Light SemiCondensed" panose="020B0502040204020203" pitchFamily="34" charset="0"/>
               </a:rPr>
               <a:t>Eğitim</a:t>
             </a:r>
             <a:r>
-              <a:rPr lang="en-US" dirty="0" smtClean="0">
+              <a:rPr lang="en-US" dirty="0">
                 <a:latin typeface="Bahnschrift Light SemiCondensed" panose="020B0502040204020203" pitchFamily="34" charset="0"/>
               </a:rPr>
               <a:t> </a:t>
@@ -27779,19 +27691,19 @@
           </a:p>
           <a:p>
             <a:r>
-              <a:rPr lang="tr-TR" dirty="0" smtClean="0">
+              <a:rPr lang="tr-TR" dirty="0">
                 <a:latin typeface="Bahnschrift Light SemiCondensed" panose="020B0502040204020203" pitchFamily="34" charset="0"/>
               </a:rPr>
               <a:t>  </a:t>
             </a:r>
             <a:r>
-              <a:rPr lang="en-US" dirty="0" err="1" smtClean="0">
+              <a:rPr lang="en-US" dirty="0" err="1">
                 <a:latin typeface="Bahnschrift Light SemiCondensed" panose="020B0502040204020203" pitchFamily="34" charset="0"/>
               </a:rPr>
               <a:t>Ayrıca</a:t>
             </a:r>
             <a:r>
-              <a:rPr lang="en-US" dirty="0" smtClean="0">
+              <a:rPr lang="en-US" dirty="0">
                 <a:latin typeface="Bahnschrift Light SemiCondensed" panose="020B0502040204020203" pitchFamily="34" charset="0"/>
               </a:rPr>
               <a:t> </a:t>
@@ -28162,7 +28074,7 @@
           <a:lstStyle/>
           <a:p>
             <a:r>
-              <a:rPr lang="tr-TR" sz="4400" dirty="0" smtClean="0">
+              <a:rPr lang="tr-TR" sz="4400" dirty="0">
                 <a:solidFill>
                   <a:schemeClr val="accent2">
                     <a:lumMod val="50000"/>
@@ -28204,493 +28116,958 @@
           <a:lstStyle/>
           <a:p>
             <a:r>
-              <a:rPr lang="tr-TR" sz="1800" dirty="0" smtClean="0">
-                <a:latin typeface="Bahnschrift Light SemiCondensed" panose="020B0502040204020203" pitchFamily="34" charset="0"/>
+              <a:rPr lang="en-US" sz="1800" dirty="0">
+                <a:latin typeface="Bahnschrift Light" panose="020B0502040204020203" pitchFamily="34" charset="0"/>
               </a:rPr>
               <a:t>  </a:t>
             </a:r>
             <a:r>
-              <a:rPr lang="en-US" sz="1800" dirty="0" err="1" smtClean="0">
-                <a:latin typeface="Bahnschrift Light SemiCondensed" panose="020B0502040204020203" pitchFamily="34" charset="0"/>
+              <a:rPr lang="en-US" sz="1800" dirty="0" err="1">
+                <a:latin typeface="Bahnschrift Light" panose="020B0502040204020203" pitchFamily="34" charset="0"/>
               </a:rPr>
               <a:t>Modelin</a:t>
             </a:r>
             <a:r>
-              <a:rPr lang="en-US" sz="1800" dirty="0" smtClean="0">
-                <a:latin typeface="Bahnschrift Light SemiCondensed" panose="020B0502040204020203" pitchFamily="34" charset="0"/>
+              <a:rPr lang="en-US" sz="1800" dirty="0">
+                <a:latin typeface="Bahnschrift Light" panose="020B0502040204020203" pitchFamily="34" charset="0"/>
               </a:rPr>
               <a:t> </a:t>
             </a:r>
             <a:r>
               <a:rPr lang="en-US" sz="1800" dirty="0" err="1">
-                <a:latin typeface="Bahnschrift Light SemiCondensed" panose="020B0502040204020203" pitchFamily="34" charset="0"/>
+                <a:latin typeface="Bahnschrift Light" panose="020B0502040204020203" pitchFamily="34" charset="0"/>
               </a:rPr>
               <a:t>performansı</a:t>
             </a:r>
             <a:r>
               <a:rPr lang="en-US" sz="1800" dirty="0">
-                <a:latin typeface="Bahnschrift Light SemiCondensed" panose="020B0502040204020203" pitchFamily="34" charset="0"/>
+                <a:latin typeface="Bahnschrift Light" panose="020B0502040204020203" pitchFamily="34" charset="0"/>
               </a:rPr>
               <a:t> </a:t>
             </a:r>
             <a:r>
               <a:rPr lang="en-US" sz="1800" dirty="0" err="1">
-                <a:latin typeface="Bahnschrift Light SemiCondensed" panose="020B0502040204020203" pitchFamily="34" charset="0"/>
+                <a:latin typeface="Bahnschrift Light" panose="020B0502040204020203" pitchFamily="34" charset="0"/>
+              </a:rPr>
+              <a:t>doğruluk</a:t>
+            </a:r>
+            <a:r>
+              <a:rPr lang="en-US" sz="1800" dirty="0">
+                <a:latin typeface="Bahnschrift Light" panose="020B0502040204020203" pitchFamily="34" charset="0"/>
+              </a:rPr>
+              <a:t> (accuracy), precision, recall </a:t>
+            </a:r>
+            <a:r>
+              <a:rPr lang="en-US" sz="1800" dirty="0" err="1">
+                <a:latin typeface="Bahnschrift Light" panose="020B0502040204020203" pitchFamily="34" charset="0"/>
+              </a:rPr>
+              <a:t>ve</a:t>
+            </a:r>
+            <a:r>
+              <a:rPr lang="en-US" sz="1800" dirty="0">
+                <a:latin typeface="Bahnschrift Light" panose="020B0502040204020203" pitchFamily="34" charset="0"/>
+              </a:rPr>
+              <a:t> F1-score </a:t>
+            </a:r>
+            <a:r>
+              <a:rPr lang="en-US" sz="1800" dirty="0" err="1">
+                <a:latin typeface="Bahnschrift Light" panose="020B0502040204020203" pitchFamily="34" charset="0"/>
+              </a:rPr>
+              <a:t>gibi</a:t>
+            </a:r>
+            <a:r>
+              <a:rPr lang="en-US" sz="1800" dirty="0">
+                <a:latin typeface="Bahnschrift Light" panose="020B0502040204020203" pitchFamily="34" charset="0"/>
+              </a:rPr>
+              <a:t> </a:t>
+            </a:r>
+            <a:r>
+              <a:rPr lang="en-US" sz="1800" dirty="0" err="1">
+                <a:latin typeface="Bahnschrift Light" panose="020B0502040204020203" pitchFamily="34" charset="0"/>
               </a:rPr>
               <a:t>çeşitli</a:t>
             </a:r>
             <a:r>
               <a:rPr lang="en-US" sz="1800" dirty="0">
-                <a:latin typeface="Bahnschrift Light SemiCondensed" panose="020B0502040204020203" pitchFamily="34" charset="0"/>
+                <a:latin typeface="Bahnschrift Light" panose="020B0502040204020203" pitchFamily="34" charset="0"/>
               </a:rPr>
               <a:t> </a:t>
             </a:r>
             <a:r>
               <a:rPr lang="en-US" sz="1800" dirty="0" err="1">
-                <a:latin typeface="Bahnschrift Light SemiCondensed" panose="020B0502040204020203" pitchFamily="34" charset="0"/>
-              </a:rPr>
-              <a:t>metrikler</a:t>
+                <a:latin typeface="Bahnschrift Light" panose="020B0502040204020203" pitchFamily="34" charset="0"/>
+              </a:rPr>
+              <a:t>değerlendirme</a:t>
             </a:r>
             <a:r>
               <a:rPr lang="en-US" sz="1800" dirty="0">
-                <a:latin typeface="Bahnschrift Light SemiCondensed" panose="020B0502040204020203" pitchFamily="34" charset="0"/>
+                <a:latin typeface="Bahnschrift Light" panose="020B0502040204020203" pitchFamily="34" charset="0"/>
               </a:rPr>
               <a:t> </a:t>
             </a:r>
             <a:r>
               <a:rPr lang="en-US" sz="1800" dirty="0" err="1">
-                <a:latin typeface="Bahnschrift Light SemiCondensed" panose="020B0502040204020203" pitchFamily="34" charset="0"/>
-              </a:rPr>
-              <a:t>ile</a:t>
+                <a:latin typeface="Bahnschrift Light" panose="020B0502040204020203" pitchFamily="34" charset="0"/>
+              </a:rPr>
+              <a:t>metrikleri</a:t>
             </a:r>
             <a:r>
               <a:rPr lang="en-US" sz="1800" dirty="0">
-                <a:latin typeface="Bahnschrift Light SemiCondensed" panose="020B0502040204020203" pitchFamily="34" charset="0"/>
+                <a:latin typeface="Bahnschrift Light" panose="020B0502040204020203" pitchFamily="34" charset="0"/>
               </a:rPr>
               <a:t> </a:t>
             </a:r>
             <a:r>
               <a:rPr lang="en-US" sz="1800" dirty="0" err="1">
-                <a:latin typeface="Bahnschrift Light SemiCondensed" panose="020B0502040204020203" pitchFamily="34" charset="0"/>
-              </a:rPr>
-              <a:t>değerlendirilmiştir</a:t>
+                <a:latin typeface="Bahnschrift Light" panose="020B0502040204020203" pitchFamily="34" charset="0"/>
+              </a:rPr>
+              <a:t>kullanılarak</a:t>
             </a:r>
             <a:r>
               <a:rPr lang="en-US" sz="1800" dirty="0">
-                <a:latin typeface="Bahnschrift Light SemiCondensed" panose="020B0502040204020203" pitchFamily="34" charset="0"/>
-              </a:rPr>
-              <a:t>. </a:t>
-            </a:r>
-            <a:r>
-              <a:rPr lang="en-US" sz="1800" dirty="0" err="1" smtClean="0">
-                <a:latin typeface="Bahnschrift Light SemiCondensed" panose="020B0502040204020203" pitchFamily="34" charset="0"/>
-              </a:rPr>
-              <a:t>Elde</a:t>
-            </a:r>
-            <a:r>
-              <a:rPr lang="en-US" sz="1800" dirty="0" smtClean="0">
-                <a:latin typeface="Bahnschrift Light SemiCondensed" panose="020B0502040204020203" pitchFamily="34" charset="0"/>
+                <a:latin typeface="Bahnschrift Light" panose="020B0502040204020203" pitchFamily="34" charset="0"/>
               </a:rPr>
               <a:t> </a:t>
             </a:r>
             <a:r>
               <a:rPr lang="en-US" sz="1800" dirty="0" err="1">
-                <a:latin typeface="Bahnschrift Light SemiCondensed" panose="020B0502040204020203" pitchFamily="34" charset="0"/>
+                <a:latin typeface="Bahnschrift Light" panose="020B0502040204020203" pitchFamily="34" charset="0"/>
+              </a:rPr>
+              <a:t>analiz</a:t>
+            </a:r>
+            <a:r>
+              <a:rPr lang="en-US" sz="1800" dirty="0">
+                <a:latin typeface="Bahnschrift Light" panose="020B0502040204020203" pitchFamily="34" charset="0"/>
+              </a:rPr>
+              <a:t> </a:t>
+            </a:r>
+            <a:r>
+              <a:rPr lang="en-US" sz="1800" dirty="0" err="1">
+                <a:latin typeface="Bahnschrift Light" panose="020B0502040204020203" pitchFamily="34" charset="0"/>
+              </a:rPr>
+              <a:t>edilmiştir</a:t>
+            </a:r>
+            <a:r>
+              <a:rPr lang="en-US" sz="1800" dirty="0">
+                <a:latin typeface="Bahnschrift Light" panose="020B0502040204020203" pitchFamily="34" charset="0"/>
+              </a:rPr>
+              <a:t>. Elde </a:t>
+            </a:r>
+            <a:r>
+              <a:rPr lang="en-US" sz="1800" dirty="0" err="1">
+                <a:latin typeface="Bahnschrift Light" panose="020B0502040204020203" pitchFamily="34" charset="0"/>
               </a:rPr>
               <a:t>edilen</a:t>
             </a:r>
             <a:r>
               <a:rPr lang="en-US" sz="1800" dirty="0">
-                <a:latin typeface="Bahnschrift Light SemiCondensed" panose="020B0502040204020203" pitchFamily="34" charset="0"/>
+                <a:latin typeface="Bahnschrift Light" panose="020B0502040204020203" pitchFamily="34" charset="0"/>
               </a:rPr>
               <a:t> </a:t>
             </a:r>
             <a:r>
               <a:rPr lang="en-US" sz="1800" dirty="0" err="1">
-                <a:latin typeface="Bahnschrift Light SemiCondensed" panose="020B0502040204020203" pitchFamily="34" charset="0"/>
+                <a:latin typeface="Bahnschrift Light" panose="020B0502040204020203" pitchFamily="34" charset="0"/>
               </a:rPr>
               <a:t>sonuçlara</a:t>
             </a:r>
             <a:r>
               <a:rPr lang="en-US" sz="1800" dirty="0">
-                <a:latin typeface="Bahnschrift Light SemiCondensed" panose="020B0502040204020203" pitchFamily="34" charset="0"/>
+                <a:latin typeface="Bahnschrift Light" panose="020B0502040204020203" pitchFamily="34" charset="0"/>
               </a:rPr>
               <a:t> </a:t>
             </a:r>
             <a:r>
               <a:rPr lang="en-US" sz="1800" dirty="0" err="1">
-                <a:latin typeface="Bahnschrift Light SemiCondensed" panose="020B0502040204020203" pitchFamily="34" charset="0"/>
+                <a:latin typeface="Bahnschrift Light" panose="020B0502040204020203" pitchFamily="34" charset="0"/>
               </a:rPr>
               <a:t>göre</a:t>
             </a:r>
             <a:r>
               <a:rPr lang="en-US" sz="1800" dirty="0">
-                <a:latin typeface="Bahnschrift Light SemiCondensed" panose="020B0502040204020203" pitchFamily="34" charset="0"/>
-              </a:rPr>
-              <a:t> model</a:t>
-            </a:r>
-            <a:r>
-              <a:rPr lang="en-US" sz="1800" dirty="0" smtClean="0">
-                <a:latin typeface="Bahnschrift Light SemiCondensed" panose="020B0502040204020203" pitchFamily="34" charset="0"/>
-              </a:rPr>
-              <a:t>, </a:t>
+                <a:latin typeface="Bahnschrift Light" panose="020B0502040204020203" pitchFamily="34" charset="0"/>
+              </a:rPr>
+              <a:t> model, </a:t>
             </a:r>
             <a:r>
               <a:rPr lang="en-US" sz="1800" dirty="0" err="1">
-                <a:latin typeface="Bahnschrift Light SemiCondensed" panose="020B0502040204020203" pitchFamily="34" charset="0"/>
-              </a:rPr>
-              <a:t>müşteri</a:t>
+                <a:latin typeface="Bahnschrift Light" panose="020B0502040204020203" pitchFamily="34" charset="0"/>
+              </a:rPr>
+              <a:t>belediye</a:t>
             </a:r>
             <a:r>
               <a:rPr lang="en-US" sz="1800" dirty="0">
-                <a:latin typeface="Bahnschrift Light SemiCondensed" panose="020B0502040204020203" pitchFamily="34" charset="0"/>
+                <a:latin typeface="Bahnschrift Light" panose="020B0502040204020203" pitchFamily="34" charset="0"/>
               </a:rPr>
               <a:t> </a:t>
             </a:r>
             <a:r>
               <a:rPr lang="en-US" sz="1800" dirty="0" err="1">
-                <a:latin typeface="Bahnschrift Light SemiCondensed" panose="020B0502040204020203" pitchFamily="34" charset="0"/>
+                <a:latin typeface="Bahnschrift Light" panose="020B0502040204020203" pitchFamily="34" charset="0"/>
               </a:rPr>
               <a:t>şikayetlerini</a:t>
             </a:r>
             <a:r>
               <a:rPr lang="en-US" sz="1800" dirty="0">
-                <a:latin typeface="Bahnschrift Light SemiCondensed" panose="020B0502040204020203" pitchFamily="34" charset="0"/>
+                <a:latin typeface="Bahnschrift Light" panose="020B0502040204020203" pitchFamily="34" charset="0"/>
               </a:rPr>
               <a:t> </a:t>
             </a:r>
             <a:r>
               <a:rPr lang="en-US" sz="1800" dirty="0" err="1">
-                <a:latin typeface="Bahnschrift Light SemiCondensed" panose="020B0502040204020203" pitchFamily="34" charset="0"/>
+                <a:latin typeface="Bahnschrift Light" panose="020B0502040204020203" pitchFamily="34" charset="0"/>
               </a:rPr>
               <a:t>yüksek</a:t>
             </a:r>
             <a:r>
               <a:rPr lang="en-US" sz="1800" dirty="0">
-                <a:latin typeface="Bahnschrift Light SemiCondensed" panose="020B0502040204020203" pitchFamily="34" charset="0"/>
+                <a:latin typeface="Bahnschrift Light" panose="020B0502040204020203" pitchFamily="34" charset="0"/>
               </a:rPr>
               <a:t> </a:t>
             </a:r>
             <a:r>
               <a:rPr lang="en-US" sz="1800" dirty="0" err="1">
-                <a:latin typeface="Bahnschrift Light SemiCondensed" panose="020B0502040204020203" pitchFamily="34" charset="0"/>
+                <a:latin typeface="Bahnschrift Light" panose="020B0502040204020203" pitchFamily="34" charset="0"/>
               </a:rPr>
               <a:t>doğrulukla</a:t>
             </a:r>
             <a:r>
               <a:rPr lang="en-US" sz="1800" dirty="0">
-                <a:latin typeface="Bahnschrift Light SemiCondensed" panose="020B0502040204020203" pitchFamily="34" charset="0"/>
+                <a:latin typeface="Bahnschrift Light" panose="020B0502040204020203" pitchFamily="34" charset="0"/>
               </a:rPr>
               <a:t> </a:t>
             </a:r>
             <a:r>
               <a:rPr lang="en-US" sz="1800" dirty="0" err="1">
-                <a:latin typeface="Bahnschrift Light SemiCondensed" panose="020B0502040204020203" pitchFamily="34" charset="0"/>
+                <a:latin typeface="Bahnschrift Light" panose="020B0502040204020203" pitchFamily="34" charset="0"/>
+              </a:rPr>
+              <a:t>doğru</a:t>
+            </a:r>
+            <a:r>
+              <a:rPr lang="en-US" sz="1800" dirty="0">
+                <a:latin typeface="Bahnschrift Light" panose="020B0502040204020203" pitchFamily="34" charset="0"/>
+              </a:rPr>
+              <a:t> </a:t>
+            </a:r>
+            <a:r>
+              <a:rPr lang="en-US" sz="1800" dirty="0" err="1">
+                <a:latin typeface="Bahnschrift Light" panose="020B0502040204020203" pitchFamily="34" charset="0"/>
+              </a:rPr>
+              <a:t>hizmet</a:t>
+            </a:r>
+            <a:r>
+              <a:rPr lang="en-US" sz="1800" dirty="0">
+                <a:latin typeface="Bahnschrift Light" panose="020B0502040204020203" pitchFamily="34" charset="0"/>
+              </a:rPr>
+              <a:t> </a:t>
+            </a:r>
+            <a:r>
+              <a:rPr lang="en-US" sz="1800" dirty="0" err="1">
+                <a:latin typeface="Bahnschrift Light" panose="020B0502040204020203" pitchFamily="34" charset="0"/>
+              </a:rPr>
+              <a:t>kategorilerine</a:t>
+            </a:r>
+            <a:r>
+              <a:rPr lang="en-US" sz="1800" dirty="0">
+                <a:latin typeface="Bahnschrift Light" panose="020B0502040204020203" pitchFamily="34" charset="0"/>
+              </a:rPr>
+              <a:t> </a:t>
+            </a:r>
+            <a:r>
+              <a:rPr lang="en-US" sz="1800" dirty="0" err="1">
+                <a:latin typeface="Bahnschrift Light" panose="020B0502040204020203" pitchFamily="34" charset="0"/>
               </a:rPr>
               <a:t>sınıflandırabilmektedir</a:t>
             </a:r>
             <a:r>
-              <a:rPr lang="en-US" sz="1800" dirty="0" smtClean="0">
-                <a:latin typeface="Bahnschrift Light SemiCondensed" panose="020B0502040204020203" pitchFamily="34" charset="0"/>
+              <a:rPr lang="en-US" sz="1800" dirty="0">
+                <a:latin typeface="Bahnschrift Light" panose="020B0502040204020203" pitchFamily="34" charset="0"/>
               </a:rPr>
               <a:t>.</a:t>
             </a:r>
+          </a:p>
+          <a:p>
             <a:endParaRPr lang="en-US" sz="1800" dirty="0">
-              <a:latin typeface="Bahnschrift Light SemiCondensed" panose="020B0502040204020203" pitchFamily="34" charset="0"/>
+              <a:latin typeface="Bahnschrift Light" panose="020B0502040204020203" pitchFamily="34" charset="0"/>
             </a:endParaRPr>
           </a:p>
           <a:p>
             <a:r>
-              <a:rPr lang="tr-TR" sz="1800" dirty="0" smtClean="0">
-                <a:latin typeface="Bahnschrift Light SemiCondensed" panose="020B0502040204020203" pitchFamily="34" charset="0"/>
+              <a:rPr lang="en-US" sz="1800" dirty="0">
+                <a:latin typeface="Bahnschrift Light" panose="020B0502040204020203" pitchFamily="34" charset="0"/>
               </a:rPr>
               <a:t>  </a:t>
             </a:r>
             <a:r>
-              <a:rPr lang="en-US" sz="1800" dirty="0" err="1" smtClean="0">
-                <a:latin typeface="Bahnschrift Light SemiCondensed" panose="020B0502040204020203" pitchFamily="34" charset="0"/>
+              <a:rPr lang="en-US" sz="1800" dirty="0" err="1">
+                <a:latin typeface="Bahnschrift Light" panose="020B0502040204020203" pitchFamily="34" charset="0"/>
               </a:rPr>
               <a:t>Eğitim</a:t>
             </a:r>
             <a:r>
-              <a:rPr lang="en-US" sz="1800" dirty="0" smtClean="0">
-                <a:latin typeface="Bahnschrift Light SemiCondensed" panose="020B0502040204020203" pitchFamily="34" charset="0"/>
+              <a:rPr lang="en-US" sz="1800" dirty="0">
+                <a:latin typeface="Bahnschrift Light" panose="020B0502040204020203" pitchFamily="34" charset="0"/>
               </a:rPr>
               <a:t> </a:t>
             </a:r>
             <a:r>
               <a:rPr lang="en-US" sz="1800" dirty="0" err="1">
-                <a:latin typeface="Bahnschrift Light SemiCondensed" panose="020B0502040204020203" pitchFamily="34" charset="0"/>
-              </a:rPr>
-              <a:t>sürecinde</a:t>
+                <a:latin typeface="Bahnschrift Light" panose="020B0502040204020203" pitchFamily="34" charset="0"/>
+              </a:rPr>
+              <a:t>süreci</a:t>
             </a:r>
             <a:r>
               <a:rPr lang="en-US" sz="1800" dirty="0">
-                <a:latin typeface="Bahnschrift Light SemiCondensed" panose="020B0502040204020203" pitchFamily="34" charset="0"/>
+                <a:latin typeface="Bahnschrift Light" panose="020B0502040204020203" pitchFamily="34" charset="0"/>
+              </a:rPr>
+              <a:t> </a:t>
+            </a:r>
+            <a:r>
+              <a:rPr lang="en-US" sz="1800" dirty="0" err="1">
+                <a:latin typeface="Bahnschrift Light" panose="020B0502040204020203" pitchFamily="34" charset="0"/>
+              </a:rPr>
+              <a:t>boyunca</a:t>
+            </a:r>
+            <a:r>
+              <a:rPr lang="en-US" sz="1800" dirty="0">
+                <a:latin typeface="Bahnschrift Light" panose="020B0502040204020203" pitchFamily="34" charset="0"/>
               </a:rPr>
               <a:t> validation loss </a:t>
             </a:r>
             <a:r>
               <a:rPr lang="en-US" sz="1800" dirty="0" err="1">
-                <a:latin typeface="Bahnschrift Light SemiCondensed" panose="020B0502040204020203" pitchFamily="34" charset="0"/>
+                <a:latin typeface="Bahnschrift Light" panose="020B0502040204020203" pitchFamily="34" charset="0"/>
               </a:rPr>
               <a:t>değerinin</a:t>
             </a:r>
             <a:r>
               <a:rPr lang="en-US" sz="1800" dirty="0">
-                <a:latin typeface="Bahnschrift Light SemiCondensed" panose="020B0502040204020203" pitchFamily="34" charset="0"/>
+                <a:latin typeface="Bahnschrift Light" panose="020B0502040204020203" pitchFamily="34" charset="0"/>
               </a:rPr>
               <a:t> </a:t>
             </a:r>
             <a:r>
               <a:rPr lang="en-US" sz="1800" dirty="0" err="1">
-                <a:latin typeface="Bahnschrift Light SemiCondensed" panose="020B0502040204020203" pitchFamily="34" charset="0"/>
+                <a:latin typeface="Bahnschrift Light" panose="020B0502040204020203" pitchFamily="34" charset="0"/>
+              </a:rPr>
+              <a:t>düzenli</a:t>
+            </a:r>
+            <a:r>
+              <a:rPr lang="en-US" sz="1800" dirty="0">
+                <a:latin typeface="Bahnschrift Light" panose="020B0502040204020203" pitchFamily="34" charset="0"/>
+              </a:rPr>
+              <a:t> </a:t>
+            </a:r>
+            <a:r>
+              <a:rPr lang="en-US" sz="1800" dirty="0" err="1">
+                <a:latin typeface="Bahnschrift Light" panose="020B0502040204020203" pitchFamily="34" charset="0"/>
+              </a:rPr>
+              <a:t>olarak</a:t>
+            </a:r>
+            <a:r>
+              <a:rPr lang="en-US" sz="1800" dirty="0">
+                <a:latin typeface="Bahnschrift Light" panose="020B0502040204020203" pitchFamily="34" charset="0"/>
+              </a:rPr>
+              <a:t> </a:t>
+            </a:r>
+            <a:r>
+              <a:rPr lang="en-US" sz="1800" dirty="0" err="1">
+                <a:latin typeface="Bahnschrift Light" panose="020B0502040204020203" pitchFamily="34" charset="0"/>
               </a:rPr>
               <a:t>azaldığı</a:t>
             </a:r>
             <a:r>
               <a:rPr lang="en-US" sz="1800" dirty="0">
-                <a:latin typeface="Bahnschrift Light SemiCondensed" panose="020B0502040204020203" pitchFamily="34" charset="0"/>
+                <a:latin typeface="Bahnschrift Light" panose="020B0502040204020203" pitchFamily="34" charset="0"/>
               </a:rPr>
               <a:t> </a:t>
             </a:r>
             <a:r>
               <a:rPr lang="en-US" sz="1800" dirty="0" err="1">
-                <a:latin typeface="Bahnschrift Light SemiCondensed" panose="020B0502040204020203" pitchFamily="34" charset="0"/>
+                <a:latin typeface="Bahnschrift Light" panose="020B0502040204020203" pitchFamily="34" charset="0"/>
               </a:rPr>
               <a:t>ve</a:t>
             </a:r>
             <a:r>
               <a:rPr lang="en-US" sz="1800" dirty="0">
-                <a:latin typeface="Bahnschrift Light SemiCondensed" panose="020B0502040204020203" pitchFamily="34" charset="0"/>
+                <a:latin typeface="Bahnschrift Light" panose="020B0502040204020203" pitchFamily="34" charset="0"/>
+              </a:rPr>
+              <a:t> buna </a:t>
+            </a:r>
+            <a:r>
+              <a:rPr lang="en-US" sz="1800" dirty="0" err="1">
+                <a:latin typeface="Bahnschrift Light" panose="020B0502040204020203" pitchFamily="34" charset="0"/>
+              </a:rPr>
+              <a:t>paralel</a:t>
+            </a:r>
+            <a:r>
+              <a:rPr lang="en-US" sz="1800" dirty="0">
+                <a:latin typeface="Bahnschrift Light" panose="020B0502040204020203" pitchFamily="34" charset="0"/>
+              </a:rPr>
+              <a:t> </a:t>
+            </a:r>
+            <a:r>
+              <a:rPr lang="en-US" sz="1800" dirty="0" err="1">
+                <a:latin typeface="Bahnschrift Light" panose="020B0502040204020203" pitchFamily="34" charset="0"/>
+              </a:rPr>
+              <a:t>olarak</a:t>
+            </a:r>
+            <a:r>
+              <a:rPr lang="en-US" sz="1800" dirty="0">
+                <a:latin typeface="Bahnschrift Light" panose="020B0502040204020203" pitchFamily="34" charset="0"/>
               </a:rPr>
               <a:t> accuracy </a:t>
             </a:r>
             <a:r>
               <a:rPr lang="en-US" sz="1800" dirty="0" err="1">
-                <a:latin typeface="Bahnschrift Light SemiCondensed" panose="020B0502040204020203" pitchFamily="34" charset="0"/>
+                <a:latin typeface="Bahnschrift Light" panose="020B0502040204020203" pitchFamily="34" charset="0"/>
               </a:rPr>
               <a:t>değerinin</a:t>
             </a:r>
             <a:r>
               <a:rPr lang="en-US" sz="1800" dirty="0">
-                <a:latin typeface="Bahnschrift Light SemiCondensed" panose="020B0502040204020203" pitchFamily="34" charset="0"/>
+                <a:latin typeface="Bahnschrift Light" panose="020B0502040204020203" pitchFamily="34" charset="0"/>
               </a:rPr>
               <a:t> </a:t>
             </a:r>
             <a:r>
               <a:rPr lang="en-US" sz="1800" dirty="0" err="1">
-                <a:latin typeface="Bahnschrift Light SemiCondensed" panose="020B0502040204020203" pitchFamily="34" charset="0"/>
+                <a:latin typeface="Bahnschrift Light" panose="020B0502040204020203" pitchFamily="34" charset="0"/>
               </a:rPr>
               <a:t>arttığı</a:t>
             </a:r>
             <a:r>
               <a:rPr lang="en-US" sz="1800" dirty="0">
-                <a:latin typeface="Bahnschrift Light SemiCondensed" panose="020B0502040204020203" pitchFamily="34" charset="0"/>
+                <a:latin typeface="Bahnschrift Light" panose="020B0502040204020203" pitchFamily="34" charset="0"/>
               </a:rPr>
               <a:t> </a:t>
             </a:r>
             <a:r>
               <a:rPr lang="en-US" sz="1800" dirty="0" err="1">
-                <a:latin typeface="Bahnschrift Light SemiCondensed" panose="020B0502040204020203" pitchFamily="34" charset="0"/>
+                <a:latin typeface="Bahnschrift Light" panose="020B0502040204020203" pitchFamily="34" charset="0"/>
               </a:rPr>
               <a:t>gözlemlenmiştir</a:t>
             </a:r>
             <a:r>
               <a:rPr lang="en-US" sz="1800" dirty="0">
-                <a:latin typeface="Bahnschrift Light SemiCondensed" panose="020B0502040204020203" pitchFamily="34" charset="0"/>
-              </a:rPr>
-              <a:t>. Bu durum </a:t>
+                <a:latin typeface="Bahnschrift Light" panose="020B0502040204020203" pitchFamily="34" charset="0"/>
+              </a:rPr>
+              <a:t>. Bu durum, </a:t>
             </a:r>
             <a:r>
               <a:rPr lang="en-US" sz="1800" dirty="0" err="1">
-                <a:latin typeface="Bahnschrift Light SemiCondensed" panose="020B0502040204020203" pitchFamily="34" charset="0"/>
+                <a:latin typeface="Bahnschrift Light" panose="020B0502040204020203" pitchFamily="34" charset="0"/>
               </a:rPr>
               <a:t>modelin</a:t>
             </a:r>
             <a:r>
               <a:rPr lang="en-US" sz="1800" dirty="0">
-                <a:latin typeface="Bahnschrift Light SemiCondensed" panose="020B0502040204020203" pitchFamily="34" charset="0"/>
+                <a:latin typeface="Bahnschrift Light" panose="020B0502040204020203" pitchFamily="34" charset="0"/>
               </a:rPr>
               <a:t> </a:t>
             </a:r>
             <a:r>
               <a:rPr lang="en-US" sz="1800" dirty="0" err="1">
-                <a:latin typeface="Bahnschrift Light SemiCondensed" panose="020B0502040204020203" pitchFamily="34" charset="0"/>
+                <a:latin typeface="Bahnschrift Light" panose="020B0502040204020203" pitchFamily="34" charset="0"/>
+              </a:rPr>
+              <a:t>öğrenme</a:t>
+            </a:r>
+            <a:r>
+              <a:rPr lang="en-US" sz="1800" dirty="0">
+                <a:latin typeface="Bahnschrift Light" panose="020B0502040204020203" pitchFamily="34" charset="0"/>
+              </a:rPr>
+              <a:t> </a:t>
+            </a:r>
+            <a:r>
+              <a:rPr lang="en-US" sz="1800" dirty="0" err="1">
+                <a:latin typeface="Bahnschrift Light" panose="020B0502040204020203" pitchFamily="34" charset="0"/>
+              </a:rPr>
+              <a:t>sürecinin</a:t>
+            </a:r>
+            <a:r>
+              <a:rPr lang="en-US" sz="1800" dirty="0">
+                <a:latin typeface="Bahnschrift Light" panose="020B0502040204020203" pitchFamily="34" charset="0"/>
+              </a:rPr>
+              <a:t> </a:t>
+            </a:r>
+            <a:r>
+              <a:rPr lang="en-US" sz="1800" dirty="0" err="1">
+                <a:latin typeface="Bahnschrift Light" panose="020B0502040204020203" pitchFamily="34" charset="0"/>
+              </a:rPr>
+              <a:t>sağlıklı</a:t>
+            </a:r>
+            <a:r>
+              <a:rPr lang="en-US" sz="1800" dirty="0">
+                <a:latin typeface="Bahnschrift Light" panose="020B0502040204020203" pitchFamily="34" charset="0"/>
+              </a:rPr>
+              <a:t> </a:t>
+            </a:r>
+            <a:r>
+              <a:rPr lang="en-US" sz="1800" dirty="0" err="1">
+                <a:latin typeface="Bahnschrift Light" panose="020B0502040204020203" pitchFamily="34" charset="0"/>
+              </a:rPr>
+              <a:t>ilerlediğini</a:t>
+            </a:r>
+            <a:r>
+              <a:rPr lang="en-US" sz="1800" dirty="0">
+                <a:latin typeface="Bahnschrift Light" panose="020B0502040204020203" pitchFamily="34" charset="0"/>
+              </a:rPr>
+              <a:t> </a:t>
+            </a:r>
+            <a:r>
+              <a:rPr lang="en-US" sz="1800" dirty="0" err="1">
+                <a:latin typeface="Bahnschrift Light" panose="020B0502040204020203" pitchFamily="34" charset="0"/>
+              </a:rPr>
+              <a:t>ve</a:t>
+            </a:r>
+            <a:r>
+              <a:rPr lang="en-US" sz="1800" dirty="0">
+                <a:latin typeface="Bahnschrift Light" panose="020B0502040204020203" pitchFamily="34" charset="0"/>
+              </a:rPr>
+              <a:t> </a:t>
+            </a:r>
+            <a:r>
+              <a:rPr lang="en-US" sz="1800" dirty="0" err="1">
+                <a:latin typeface="Bahnschrift Light" panose="020B0502040204020203" pitchFamily="34" charset="0"/>
+              </a:rPr>
+              <a:t>veri</a:t>
+            </a:r>
+            <a:r>
+              <a:rPr lang="en-US" sz="1800" dirty="0">
+                <a:latin typeface="Bahnschrift Light" panose="020B0502040204020203" pitchFamily="34" charset="0"/>
+              </a:rPr>
+              <a:t> </a:t>
+            </a:r>
+            <a:r>
+              <a:rPr lang="en-US" sz="1800" dirty="0" err="1">
+                <a:latin typeface="Bahnschrift Light" panose="020B0502040204020203" pitchFamily="34" charset="0"/>
+              </a:rPr>
+              <a:t>seti</a:t>
+            </a:r>
+            <a:r>
+              <a:rPr lang="en-US" sz="1800" dirty="0">
+                <a:latin typeface="Bahnschrift Light" panose="020B0502040204020203" pitchFamily="34" charset="0"/>
+              </a:rPr>
+              <a:t> </a:t>
+            </a:r>
+            <a:r>
+              <a:rPr lang="en-US" sz="1800" dirty="0" err="1">
+                <a:latin typeface="Bahnschrift Light" panose="020B0502040204020203" pitchFamily="34" charset="0"/>
+              </a:rPr>
+              <a:t>üzerindeki</a:t>
+            </a:r>
+            <a:r>
+              <a:rPr lang="en-US" sz="1800" dirty="0">
+                <a:latin typeface="Bahnschrift Light" panose="020B0502040204020203" pitchFamily="34" charset="0"/>
+              </a:rPr>
+              <a:t> </a:t>
+            </a:r>
+            <a:r>
+              <a:rPr lang="en-US" sz="1800" dirty="0" err="1">
+                <a:latin typeface="Bahnschrift Light" panose="020B0502040204020203" pitchFamily="34" charset="0"/>
+              </a:rPr>
+              <a:t>örüntüleri</a:t>
+            </a:r>
+            <a:r>
+              <a:rPr lang="en-US" sz="1800" dirty="0">
+                <a:latin typeface="Bahnschrift Light" panose="020B0502040204020203" pitchFamily="34" charset="0"/>
+              </a:rPr>
+              <a:t> </a:t>
+            </a:r>
+            <a:r>
+              <a:rPr lang="en-US" sz="1800" dirty="0" err="1">
+                <a:latin typeface="Bahnschrift Light" panose="020B0502040204020203" pitchFamily="34" charset="0"/>
               </a:rPr>
               <a:t>başarılı</a:t>
             </a:r>
             <a:r>
               <a:rPr lang="en-US" sz="1800" dirty="0">
-                <a:latin typeface="Bahnschrift Light SemiCondensed" panose="020B0502040204020203" pitchFamily="34" charset="0"/>
+                <a:latin typeface="Bahnschrift Light" panose="020B0502040204020203" pitchFamily="34" charset="0"/>
               </a:rPr>
               <a:t> </a:t>
             </a:r>
             <a:r>
               <a:rPr lang="en-US" sz="1800" dirty="0" err="1">
-                <a:latin typeface="Bahnschrift Light SemiCondensed" panose="020B0502040204020203" pitchFamily="34" charset="0"/>
+                <a:latin typeface="Bahnschrift Light" panose="020B0502040204020203" pitchFamily="34" charset="0"/>
+              </a:rPr>
+              <a:t>bir</a:t>
+            </a:r>
+            <a:r>
+              <a:rPr lang="en-US" sz="1800" dirty="0">
+                <a:latin typeface="Bahnschrift Light" panose="020B0502040204020203" pitchFamily="34" charset="0"/>
+              </a:rPr>
+              <a:t> </a:t>
+            </a:r>
+            <a:r>
+              <a:rPr lang="en-US" sz="1800" dirty="0" err="1">
+                <a:latin typeface="Bahnschrift Light" panose="020B0502040204020203" pitchFamily="34" charset="0"/>
               </a:rPr>
               <a:t>şekilde</a:t>
             </a:r>
             <a:r>
               <a:rPr lang="en-US" sz="1800" dirty="0">
-                <a:latin typeface="Bahnschrift Light SemiCondensed" panose="020B0502040204020203" pitchFamily="34" charset="0"/>
+                <a:latin typeface="Bahnschrift Light" panose="020B0502040204020203" pitchFamily="34" charset="0"/>
               </a:rPr>
               <a:t> </a:t>
             </a:r>
             <a:r>
               <a:rPr lang="en-US" sz="1800" dirty="0" err="1">
-                <a:latin typeface="Bahnschrift Light SemiCondensed" panose="020B0502040204020203" pitchFamily="34" charset="0"/>
-              </a:rPr>
-              <a:t>öğrenme</a:t>
+                <a:latin typeface="Bahnschrift Light" panose="020B0502040204020203" pitchFamily="34" charset="0"/>
+              </a:rPr>
+              <a:t>öğrendiğini</a:t>
             </a:r>
             <a:r>
               <a:rPr lang="en-US" sz="1800" dirty="0">
-                <a:latin typeface="Bahnschrift Light SemiCondensed" panose="020B0502040204020203" pitchFamily="34" charset="0"/>
+                <a:latin typeface="Bahnschrift Light" panose="020B0502040204020203" pitchFamily="34" charset="0"/>
               </a:rPr>
               <a:t> </a:t>
             </a:r>
             <a:r>
               <a:rPr lang="en-US" sz="1800" dirty="0" err="1">
-                <a:latin typeface="Bahnschrift Light SemiCondensed" panose="020B0502040204020203" pitchFamily="34" charset="0"/>
-              </a:rPr>
-              <a:t>gerçekleştirdiğini</a:t>
+                <a:latin typeface="Bahnschrift Light" panose="020B0502040204020203" pitchFamily="34" charset="0"/>
+              </a:rPr>
+              <a:t>göstermektedir</a:t>
             </a:r>
             <a:r>
               <a:rPr lang="en-US" sz="1800" dirty="0">
-                <a:latin typeface="Bahnschrift Light SemiCondensed" panose="020B0502040204020203" pitchFamily="34" charset="0"/>
-              </a:rPr>
-              <a:t> </a:t>
-            </a:r>
-            <a:r>
-              <a:rPr lang="en-US" sz="1800" dirty="0" err="1">
-                <a:latin typeface="Bahnschrift Light SemiCondensed" panose="020B0502040204020203" pitchFamily="34" charset="0"/>
-              </a:rPr>
-              <a:t>göstermektedir</a:t>
-            </a:r>
-            <a:r>
-              <a:rPr lang="en-US" sz="1800" dirty="0" smtClean="0">
-                <a:latin typeface="Bahnschrift Light SemiCondensed" panose="020B0502040204020203" pitchFamily="34" charset="0"/>
+                <a:latin typeface="Bahnschrift Light" panose="020B0502040204020203" pitchFamily="34" charset="0"/>
               </a:rPr>
               <a:t>.</a:t>
             </a:r>
-            <a:endParaRPr lang="tr-TR" sz="1800" dirty="0" smtClean="0">
-              <a:latin typeface="Bahnschrift Light SemiCondensed" panose="020B0502040204020203" pitchFamily="34" charset="0"/>
+          </a:p>
+          <a:p>
+            <a:endParaRPr lang="en-US" sz="1800" dirty="0">
+              <a:latin typeface="Bahnschrift Light" panose="020B0502040204020203" pitchFamily="34" charset="0"/>
             </a:endParaRPr>
           </a:p>
           <a:p>
             <a:r>
-              <a:rPr lang="tr-TR" sz="1800" b="1" dirty="0" smtClean="0"/>
-              <a:t>                                          </a:t>
-            </a:r>
-            <a:r>
-              <a:rPr lang="en-US" sz="1800" b="1" dirty="0" smtClean="0">
-                <a:latin typeface="Bahnschrift Light SemiCondensed" panose="020B0502040204020203" pitchFamily="34" charset="0"/>
-              </a:rPr>
-              <a:t>Accuracy</a:t>
-            </a:r>
-            <a:r>
-              <a:rPr lang="en-US" sz="1800" b="1" dirty="0">
-                <a:latin typeface="Bahnschrift Light SemiCondensed" panose="020B0502040204020203" pitchFamily="34" charset="0"/>
-              </a:rPr>
-              <a:t>:</a:t>
-            </a:r>
-            <a:r>
               <a:rPr lang="en-US" sz="1800" dirty="0">
-                <a:latin typeface="Bahnschrift Light SemiCondensed" panose="020B0502040204020203" pitchFamily="34" charset="0"/>
-              </a:rPr>
-              <a:t> %</a:t>
-            </a:r>
-            <a:r>
-              <a:rPr lang="en-US" sz="1800" dirty="0" smtClean="0">
-                <a:latin typeface="Bahnschrift Light SemiCondensed" panose="020B0502040204020203" pitchFamily="34" charset="0"/>
-              </a:rPr>
-              <a:t>84.67</a:t>
-            </a:r>
-            <a:r>
-              <a:rPr lang="tr-TR" sz="1800" dirty="0" smtClean="0">
-                <a:latin typeface="Bahnschrift Light SemiCondensed" panose="020B0502040204020203" pitchFamily="34" charset="0"/>
-              </a:rPr>
-              <a:t>                  </a:t>
-            </a:r>
-            <a:r>
-              <a:rPr lang="en-US" sz="1800" b="1" dirty="0">
-                <a:latin typeface="Bahnschrift Light SemiCondensed" panose="020B0502040204020203" pitchFamily="34" charset="0"/>
-              </a:rPr>
-              <a:t>F1 Score:</a:t>
+                <a:latin typeface="Bahnschrift Light" panose="020B0502040204020203" pitchFamily="34" charset="0"/>
+              </a:rPr>
+              <a:t>  </a:t>
+            </a:r>
+            <a:r>
+              <a:rPr lang="en-US" sz="1800" dirty="0" err="1">
+                <a:latin typeface="Bahnschrift Light" panose="020B0502040204020203" pitchFamily="34" charset="0"/>
+              </a:rPr>
+              <a:t>Ayrıca</a:t>
             </a:r>
             <a:r>
               <a:rPr lang="en-US" sz="1800" dirty="0">
-                <a:latin typeface="Bahnschrift Light SemiCondensed" panose="020B0502040204020203" pitchFamily="34" charset="0"/>
-              </a:rPr>
-              <a:t> %84.82</a:t>
-            </a:r>
+                <a:latin typeface="Bahnschrift Light" panose="020B0502040204020203" pitchFamily="34" charset="0"/>
+              </a:rPr>
+              <a:t> </a:t>
+            </a:r>
+            <a:r>
+              <a:rPr lang="en-US" sz="1800" dirty="0" err="1">
+                <a:latin typeface="Bahnschrift Light" panose="020B0502040204020203" pitchFamily="34" charset="0"/>
+              </a:rPr>
+              <a:t>modelin</a:t>
+            </a:r>
+            <a:r>
+              <a:rPr lang="en-US" sz="1800" dirty="0">
+                <a:latin typeface="Bahnschrift Light" panose="020B0502040204020203" pitchFamily="34" charset="0"/>
+              </a:rPr>
+              <a:t> </a:t>
+            </a:r>
+            <a:r>
+              <a:rPr lang="en-US" sz="1800" dirty="0" err="1">
+                <a:latin typeface="Bahnschrift Light" panose="020B0502040204020203" pitchFamily="34" charset="0"/>
+              </a:rPr>
+              <a:t>eğitim</a:t>
+            </a:r>
+            <a:r>
+              <a:rPr lang="en-US" sz="1800" dirty="0">
+                <a:latin typeface="Bahnschrift Light" panose="020B0502040204020203" pitchFamily="34" charset="0"/>
+              </a:rPr>
+              <a:t> </a:t>
+            </a:r>
+            <a:r>
+              <a:rPr lang="en-US" sz="1800" dirty="0" err="1">
+                <a:latin typeface="Bahnschrift Light" panose="020B0502040204020203" pitchFamily="34" charset="0"/>
+              </a:rPr>
+              <a:t>ve</a:t>
+            </a:r>
+            <a:r>
+              <a:rPr lang="en-US" sz="1800" dirty="0">
+                <a:latin typeface="Bahnschrift Light" panose="020B0502040204020203" pitchFamily="34" charset="0"/>
+              </a:rPr>
+              <a:t> </a:t>
+            </a:r>
+            <a:r>
+              <a:rPr lang="en-US" sz="1800" dirty="0" err="1">
+                <a:latin typeface="Bahnschrift Light" panose="020B0502040204020203" pitchFamily="34" charset="0"/>
+              </a:rPr>
+              <a:t>doğrulama</a:t>
+            </a:r>
+            <a:r>
+              <a:rPr lang="en-US" sz="1800" dirty="0">
+                <a:latin typeface="Bahnschrift Light" panose="020B0502040204020203" pitchFamily="34" charset="0"/>
+              </a:rPr>
+              <a:t> </a:t>
+            </a:r>
+            <a:r>
+              <a:rPr lang="en-US" sz="1800" dirty="0" err="1">
+                <a:latin typeface="Bahnschrift Light" panose="020B0502040204020203" pitchFamily="34" charset="0"/>
+              </a:rPr>
+              <a:t>performansları</a:t>
+            </a:r>
+            <a:r>
+              <a:rPr lang="en-US" sz="1800" dirty="0">
+                <a:latin typeface="Bahnschrift Light" panose="020B0502040204020203" pitchFamily="34" charset="0"/>
+              </a:rPr>
+              <a:t> </a:t>
+            </a:r>
+            <a:r>
+              <a:rPr lang="en-US" sz="1800" dirty="0" err="1">
+                <a:latin typeface="Bahnschrift Light" panose="020B0502040204020203" pitchFamily="34" charset="0"/>
+              </a:rPr>
+              <a:t>arasındaki</a:t>
+            </a:r>
+            <a:r>
+              <a:rPr lang="en-US" sz="1800" dirty="0">
+                <a:latin typeface="Bahnschrift Light" panose="020B0502040204020203" pitchFamily="34" charset="0"/>
+              </a:rPr>
+              <a:t> </a:t>
+            </a:r>
+            <a:r>
+              <a:rPr lang="en-US" sz="1800" dirty="0" err="1">
+                <a:latin typeface="Bahnschrift Light" panose="020B0502040204020203" pitchFamily="34" charset="0"/>
+              </a:rPr>
+              <a:t>farkın</a:t>
+            </a:r>
+            <a:r>
+              <a:rPr lang="en-US" sz="1800" dirty="0">
+                <a:latin typeface="Bahnschrift Light" panose="020B0502040204020203" pitchFamily="34" charset="0"/>
+              </a:rPr>
+              <a:t> </a:t>
+            </a:r>
+            <a:r>
+              <a:rPr lang="en-US" sz="1800" dirty="0" err="1">
+                <a:latin typeface="Bahnschrift Light" panose="020B0502040204020203" pitchFamily="34" charset="0"/>
+              </a:rPr>
+              <a:t>düşük</a:t>
+            </a:r>
+            <a:r>
+              <a:rPr lang="en-US" sz="1800" dirty="0">
+                <a:latin typeface="Bahnschrift Light" panose="020B0502040204020203" pitchFamily="34" charset="0"/>
+              </a:rPr>
+              <a:t> </a:t>
+            </a:r>
+            <a:r>
+              <a:rPr lang="en-US" sz="1800" dirty="0" err="1">
+                <a:latin typeface="Bahnschrift Light" panose="020B0502040204020203" pitchFamily="34" charset="0"/>
+              </a:rPr>
+              <a:t>olması</a:t>
+            </a:r>
+            <a:r>
+              <a:rPr lang="en-US" sz="1800" dirty="0">
+                <a:latin typeface="Bahnschrift Light" panose="020B0502040204020203" pitchFamily="34" charset="0"/>
+              </a:rPr>
+              <a:t>, overfitting </a:t>
+            </a:r>
+            <a:r>
+              <a:rPr lang="en-US" sz="1800" dirty="0" err="1">
+                <a:latin typeface="Bahnschrift Light" panose="020B0502040204020203" pitchFamily="34" charset="0"/>
+              </a:rPr>
+              <a:t>probleminin</a:t>
+            </a:r>
+            <a:r>
+              <a:rPr lang="en-US" sz="1800" dirty="0">
+                <a:latin typeface="Bahnschrift Light" panose="020B0502040204020203" pitchFamily="34" charset="0"/>
+              </a:rPr>
+              <a:t> </a:t>
+            </a:r>
+            <a:r>
+              <a:rPr lang="en-US" sz="1800" dirty="0" err="1">
+                <a:latin typeface="Bahnschrift Light" panose="020B0502040204020203" pitchFamily="34" charset="0"/>
+              </a:rPr>
+              <a:t>önemli</a:t>
+            </a:r>
+            <a:r>
+              <a:rPr lang="en-US" sz="1800" dirty="0">
+                <a:latin typeface="Bahnschrift Light" panose="020B0502040204020203" pitchFamily="34" charset="0"/>
+              </a:rPr>
+              <a:t> </a:t>
+            </a:r>
+            <a:r>
+              <a:rPr lang="en-US" sz="1800" dirty="0" err="1">
+                <a:latin typeface="Bahnschrift Light" panose="020B0502040204020203" pitchFamily="34" charset="0"/>
+              </a:rPr>
+              <a:t>ölçüde</a:t>
+            </a:r>
+            <a:r>
+              <a:rPr lang="en-US" sz="1800" dirty="0">
+                <a:latin typeface="Bahnschrift Light" panose="020B0502040204020203" pitchFamily="34" charset="0"/>
+              </a:rPr>
+              <a:t> </a:t>
+            </a:r>
+            <a:r>
+              <a:rPr lang="en-US" sz="1800" dirty="0" err="1">
+                <a:latin typeface="Bahnschrift Light" panose="020B0502040204020203" pitchFamily="34" charset="0"/>
+              </a:rPr>
+              <a:t>kontrol</a:t>
+            </a:r>
+            <a:r>
+              <a:rPr lang="en-US" sz="1800" dirty="0">
+                <a:latin typeface="Bahnschrift Light" panose="020B0502040204020203" pitchFamily="34" charset="0"/>
+              </a:rPr>
+              <a:t> </a:t>
+            </a:r>
+            <a:r>
+              <a:rPr lang="en-US" sz="1800" dirty="0" err="1">
+                <a:latin typeface="Bahnschrift Light" panose="020B0502040204020203" pitchFamily="34" charset="0"/>
+              </a:rPr>
+              <a:t>altına</a:t>
+            </a:r>
+            <a:r>
+              <a:rPr lang="en-US" sz="1800" dirty="0">
+                <a:latin typeface="Bahnschrift Light" panose="020B0502040204020203" pitchFamily="34" charset="0"/>
+              </a:rPr>
+              <a:t> </a:t>
+            </a:r>
+            <a:r>
+              <a:rPr lang="en-US" sz="1800" dirty="0" err="1">
+                <a:latin typeface="Bahnschrift Light" panose="020B0502040204020203" pitchFamily="34" charset="0"/>
+              </a:rPr>
+              <a:t>alındığını</a:t>
+            </a:r>
+            <a:r>
+              <a:rPr lang="en-US" sz="1800" dirty="0">
+                <a:latin typeface="Bahnschrift Light" panose="020B0502040204020203" pitchFamily="34" charset="0"/>
+              </a:rPr>
+              <a:t> </a:t>
+            </a:r>
+            <a:r>
+              <a:rPr lang="en-US" sz="1800" dirty="0" err="1">
+                <a:latin typeface="Bahnschrift Light" panose="020B0502040204020203" pitchFamily="34" charset="0"/>
+              </a:rPr>
+              <a:t>ve</a:t>
+            </a:r>
+            <a:r>
+              <a:rPr lang="en-US" sz="1800" dirty="0">
+                <a:latin typeface="Bahnschrift Light" panose="020B0502040204020203" pitchFamily="34" charset="0"/>
+              </a:rPr>
+              <a:t> </a:t>
+            </a:r>
+            <a:r>
+              <a:rPr lang="en-US" sz="1800" dirty="0" err="1">
+                <a:latin typeface="Bahnschrift Light" panose="020B0502040204020203" pitchFamily="34" charset="0"/>
+              </a:rPr>
+              <a:t>modelin</a:t>
+            </a:r>
+            <a:r>
+              <a:rPr lang="en-US" sz="1800" dirty="0">
+                <a:latin typeface="Bahnschrift Light" panose="020B0502040204020203" pitchFamily="34" charset="0"/>
+              </a:rPr>
+              <a:t> </a:t>
+            </a:r>
+            <a:r>
+              <a:rPr lang="en-US" sz="1800" dirty="0" err="1">
+                <a:latin typeface="Bahnschrift Light" panose="020B0502040204020203" pitchFamily="34" charset="0"/>
+              </a:rPr>
+              <a:t>genelleme</a:t>
+            </a:r>
+            <a:r>
+              <a:rPr lang="en-US" sz="1800" dirty="0">
+                <a:latin typeface="Bahnschrift Light" panose="020B0502040204020203" pitchFamily="34" charset="0"/>
+              </a:rPr>
+              <a:t> </a:t>
+            </a:r>
+            <a:r>
+              <a:rPr lang="en-US" sz="1800" dirty="0" err="1">
+                <a:latin typeface="Bahnschrift Light" panose="020B0502040204020203" pitchFamily="34" charset="0"/>
+              </a:rPr>
+              <a:t>kabiliyetinin</a:t>
+            </a:r>
+            <a:r>
+              <a:rPr lang="en-US" sz="1800" dirty="0">
+                <a:latin typeface="Bahnschrift Light" panose="020B0502040204020203" pitchFamily="34" charset="0"/>
+              </a:rPr>
+              <a:t> </a:t>
+            </a:r>
+            <a:r>
+              <a:rPr lang="en-US" sz="1800" dirty="0" err="1">
+                <a:latin typeface="Bahnschrift Light" panose="020B0502040204020203" pitchFamily="34" charset="0"/>
+              </a:rPr>
+              <a:t>güçlü</a:t>
+            </a:r>
+            <a:r>
+              <a:rPr lang="en-US" sz="1800" dirty="0">
+                <a:latin typeface="Bahnschrift Light" panose="020B0502040204020203" pitchFamily="34" charset="0"/>
+              </a:rPr>
+              <a:t> </a:t>
+            </a:r>
+            <a:r>
+              <a:rPr lang="en-US" sz="1800" dirty="0" err="1">
+                <a:latin typeface="Bahnschrift Light" panose="020B0502040204020203" pitchFamily="34" charset="0"/>
+              </a:rPr>
+              <a:t>olduğunu</a:t>
+            </a:r>
+            <a:r>
+              <a:rPr lang="en-US" sz="1800" dirty="0">
+                <a:latin typeface="Bahnschrift Light" panose="020B0502040204020203" pitchFamily="34" charset="0"/>
+              </a:rPr>
+              <a:t> </a:t>
+            </a:r>
+            <a:r>
+              <a:rPr lang="en-US" sz="1800" dirty="0" err="1">
+                <a:latin typeface="Bahnschrift Light" panose="020B0502040204020203" pitchFamily="34" charset="0"/>
+              </a:rPr>
+              <a:t>ortaya</a:t>
+            </a:r>
+            <a:r>
+              <a:rPr lang="en-US" sz="1800" dirty="0">
+                <a:latin typeface="Bahnschrift Light" panose="020B0502040204020203" pitchFamily="34" charset="0"/>
+              </a:rPr>
+              <a:t> </a:t>
+            </a:r>
+            <a:r>
+              <a:rPr lang="en-US" sz="1800" dirty="0" err="1">
+                <a:latin typeface="Bahnschrift Light" panose="020B0502040204020203" pitchFamily="34" charset="0"/>
+              </a:rPr>
+              <a:t>koymaktadır</a:t>
+            </a:r>
+            <a:r>
+              <a:rPr lang="en-US" sz="1800" dirty="0">
+                <a:latin typeface="Bahnschrift Light" panose="020B0502040204020203" pitchFamily="34" charset="0"/>
+              </a:rPr>
+              <a:t>. </a:t>
+            </a:r>
+            <a:r>
+              <a:rPr lang="en-US" sz="1800" dirty="0" err="1">
+                <a:latin typeface="Bahnschrift Light SemiCondensed" panose="020B0502040204020203" pitchFamily="34" charset="0"/>
+              </a:rPr>
+              <a:t>gerçekleştirdiğini</a:t>
+            </a:r>
+            <a:r>
+              <a:rPr lang="en-US" sz="1800" dirty="0">
+                <a:latin typeface="Bahnschrift Light SemiCondensed" panose="020B0502040204020203" pitchFamily="34" charset="0"/>
+              </a:rPr>
+              <a:t> </a:t>
+            </a:r>
+            <a:r>
+              <a:rPr lang="en-US" sz="1800" dirty="0" err="1">
+                <a:latin typeface="Bahnschrift Light SemiCondensed" panose="020B0502040204020203" pitchFamily="34" charset="0"/>
+              </a:rPr>
+              <a:t>göstermektedir</a:t>
+            </a:r>
+            <a:r>
+              <a:rPr lang="en-US" sz="1800" dirty="0">
+                <a:latin typeface="Bahnschrift Light SemiCondensed" panose="020B0502040204020203" pitchFamily="34" charset="0"/>
+              </a:rPr>
+              <a:t>.</a:t>
+            </a:r>
+            <a:endParaRPr lang="tr-TR" sz="1800" dirty="0">
+              <a:latin typeface="Bahnschrift Light SemiCondensed" panose="020B0502040204020203" pitchFamily="34" charset="0"/>
+            </a:endParaRPr>
           </a:p>
           <a:p>
             <a:endParaRPr lang="en-US" dirty="0"/>
           </a:p>
         </p:txBody>
       </p:sp>
-      <p:pic>
-        <p:nvPicPr>
-          <p:cNvPr id="4" name="Resim 3"/>
-          <p:cNvPicPr>
-            <a:picLocks noChangeAspect="1"/>
-          </p:cNvPicPr>
-          <p:nvPr/>
-        </p:nvPicPr>
-        <p:blipFill>
-          <a:blip r:embed="rId2">
-            <a:extLst>
-              <a:ext uri="{28A0092B-C50C-407E-A947-70E740481C1C}">
-                <a14:useLocalDpi xmlns:a14="http://schemas.microsoft.com/office/drawing/2010/main" val="0"/>
-              </a:ext>
-            </a:extLst>
-          </a:blip>
-          <a:stretch>
-            <a:fillRect/>
-          </a:stretch>
-        </p:blipFill>
-        <p:spPr>
-          <a:xfrm>
-            <a:off x="1582190" y="4006734"/>
-            <a:ext cx="3319254" cy="2610455"/>
-          </a:xfrm>
-          <a:prstGeom prst="rect">
-            <a:avLst/>
-          </a:prstGeom>
-        </p:spPr>
-      </p:pic>
-      <p:pic>
-        <p:nvPicPr>
-          <p:cNvPr id="5" name="Resim 4"/>
-          <p:cNvPicPr>
-            <a:picLocks noChangeAspect="1"/>
-          </p:cNvPicPr>
-          <p:nvPr/>
-        </p:nvPicPr>
-        <p:blipFill>
-          <a:blip r:embed="rId3">
-            <a:extLst>
-              <a:ext uri="{28A0092B-C50C-407E-A947-70E740481C1C}">
-                <a14:useLocalDpi xmlns:a14="http://schemas.microsoft.com/office/drawing/2010/main" val="0"/>
-              </a:ext>
-            </a:extLst>
-          </a:blip>
-          <a:stretch>
-            <a:fillRect/>
-          </a:stretch>
-        </p:blipFill>
-        <p:spPr>
-          <a:xfrm>
-            <a:off x="5886520" y="4002974"/>
-            <a:ext cx="3240855" cy="2589255"/>
-          </a:xfrm>
-          <a:prstGeom prst="rect">
-            <a:avLst/>
-          </a:prstGeom>
-        </p:spPr>
-      </p:pic>
     </p:spTree>
     <p:extLst>
       <p:ext uri="{BB962C8B-B14F-4D97-AF65-F5344CB8AC3E}">
@@ -28739,7 +29116,7 @@
           <a:lstStyle/>
           <a:p>
             <a:r>
-              <a:rPr lang="tr-TR" sz="4000" dirty="0" smtClean="0">
+              <a:rPr lang="tr-TR" sz="4000" dirty="0">
                 <a:solidFill>
                   <a:schemeClr val="accent2">
                     <a:lumMod val="50000"/>
@@ -28781,13 +29158,13 @@
           <a:lstStyle/>
           <a:p>
             <a:r>
-              <a:rPr lang="tr-TR" dirty="0" smtClean="0">
+              <a:rPr lang="tr-TR" dirty="0">
                 <a:latin typeface="Bahnschrift Light SemiCondensed" panose="020B0502040204020203" pitchFamily="34" charset="0"/>
               </a:rPr>
               <a:t>  </a:t>
             </a:r>
             <a:r>
-              <a:rPr lang="en-US" dirty="0" smtClean="0">
+              <a:rPr lang="en-US" dirty="0">
                 <a:latin typeface="Bahnschrift Light SemiCondensed" panose="020B0502040204020203" pitchFamily="34" charset="0"/>
               </a:rPr>
               <a:t>Bu </a:t>
@@ -29095,19 +29472,19 @@
           </a:p>
           <a:p>
             <a:r>
-              <a:rPr lang="tr-TR" dirty="0" smtClean="0">
+              <a:rPr lang="tr-TR" dirty="0">
                 <a:latin typeface="Bahnschrift Light SemiCondensed" panose="020B0502040204020203" pitchFamily="34" charset="0"/>
               </a:rPr>
               <a:t>  </a:t>
             </a:r>
             <a:r>
-              <a:rPr lang="en-US" dirty="0" err="1" smtClean="0">
+              <a:rPr lang="en-US" dirty="0" err="1">
                 <a:latin typeface="Bahnschrift Light SemiCondensed" panose="020B0502040204020203" pitchFamily="34" charset="0"/>
               </a:rPr>
               <a:t>Geliştirilen</a:t>
             </a:r>
             <a:r>
-              <a:rPr lang="en-US" dirty="0" smtClean="0">
+              <a:rPr lang="en-US" dirty="0">
                 <a:latin typeface="Bahnschrift Light SemiCondensed" panose="020B0502040204020203" pitchFamily="34" charset="0"/>
               </a:rPr>
               <a:t> </a:t>
@@ -29439,19 +29816,19 @@
           </a:p>
           <a:p>
             <a:r>
-              <a:rPr lang="tr-TR" dirty="0" smtClean="0">
+              <a:rPr lang="tr-TR" dirty="0">
                 <a:latin typeface="Bahnschrift Light SemiCondensed" panose="020B0502040204020203" pitchFamily="34" charset="0"/>
               </a:rPr>
               <a:t>  </a:t>
             </a:r>
             <a:r>
-              <a:rPr lang="en-US" dirty="0" err="1" smtClean="0">
+              <a:rPr lang="en-US" dirty="0" err="1">
                 <a:latin typeface="Bahnschrift Light SemiCondensed" panose="020B0502040204020203" pitchFamily="34" charset="0"/>
               </a:rPr>
               <a:t>Genel</a:t>
             </a:r>
             <a:r>
-              <a:rPr lang="en-US" dirty="0" smtClean="0">
+              <a:rPr lang="en-US" dirty="0">
                 <a:latin typeface="Bahnschrift Light SemiCondensed" panose="020B0502040204020203" pitchFamily="34" charset="0"/>
               </a:rPr>
               <a:t> </a:t>
@@ -29636,6 +30013,21 @@
               </a:rPr>
               <a:t>.</a:t>
             </a:r>
+          </a:p>
+          <a:p>
+            <a:endParaRPr lang="en-US" dirty="0"/>
+          </a:p>
+          <a:p>
+            <a:endParaRPr lang="en-US" dirty="0"/>
+          </a:p>
+          <a:p>
+            <a:endParaRPr lang="en-US" dirty="0"/>
+          </a:p>
+          <a:p>
+            <a:endParaRPr lang="en-US" dirty="0"/>
+          </a:p>
+          <a:p>
+            <a:endParaRPr lang="en-US" dirty="0"/>
           </a:p>
           <a:p>
             <a:endParaRPr lang="en-US" dirty="0"/>
@@ -29674,60 +30066,494 @@
       </p:grpSpPr>
       <p:sp>
         <p:nvSpPr>
-          <p:cNvPr id="2" name="Dikdörtgen 1"/>
-          <p:cNvSpPr/>
+          <p:cNvPr id="2" name="Title 1">
+            <a:extLst>
+              <a:ext uri="{FF2B5EF4-FFF2-40B4-BE49-F238E27FC236}">
+                <a16:creationId xmlns:a16="http://schemas.microsoft.com/office/drawing/2014/main" id="{87A1C766-8A84-4A44-B3BF-7BFDD8CB398B}"/>
+              </a:ext>
+            </a:extLst>
+          </p:cNvPr>
+          <p:cNvSpPr>
+            <a:spLocks noGrp="1"/>
+          </p:cNvSpPr>
+          <p:nvPr>
+            <p:ph type="title"/>
+          </p:nvPr>
+        </p:nvSpPr>
+        <p:spPr/>
+        <p:txBody>
+          <a:bodyPr>
+            <a:normAutofit/>
+          </a:bodyPr>
+          <a:lstStyle/>
+          <a:p>
+            <a:r>
+              <a:rPr lang="en-US" sz="4400" dirty="0">
+                <a:solidFill>
+                  <a:schemeClr val="tx2">
+                    <a:lumMod val="75000"/>
+                  </a:schemeClr>
+                </a:solidFill>
+                <a:latin typeface="Bookman Old Style" panose="02050604050505020204" pitchFamily="18" charset="0"/>
+              </a:rPr>
+              <a:t>Model Test </a:t>
+            </a:r>
+            <a:r>
+              <a:rPr lang="en-US" sz="4400" dirty="0" err="1">
+                <a:solidFill>
+                  <a:schemeClr val="tx2">
+                    <a:lumMod val="75000"/>
+                  </a:schemeClr>
+                </a:solidFill>
+                <a:latin typeface="Bookman Old Style" panose="02050604050505020204" pitchFamily="18" charset="0"/>
+              </a:rPr>
+              <a:t>Arayüzü</a:t>
+            </a:r>
+            <a:endParaRPr lang="en-US" sz="4400" dirty="0">
+              <a:solidFill>
+                <a:schemeClr val="tx2">
+                  <a:lumMod val="75000"/>
+                </a:schemeClr>
+              </a:solidFill>
+              <a:latin typeface="Bookman Old Style" panose="02050604050505020204" pitchFamily="18" charset="0"/>
+            </a:endParaRPr>
+          </a:p>
+        </p:txBody>
+      </p:sp>
+      <p:sp>
+        <p:nvSpPr>
+          <p:cNvPr id="7" name="Content Placeholder 6">
+            <a:extLst>
+              <a:ext uri="{FF2B5EF4-FFF2-40B4-BE49-F238E27FC236}">
+                <a16:creationId xmlns:a16="http://schemas.microsoft.com/office/drawing/2014/main" id="{F270C963-2774-1A7E-5FFE-BACCFC034024}"/>
+              </a:ext>
+            </a:extLst>
+          </p:cNvPr>
+          <p:cNvSpPr>
+            <a:spLocks noGrp="1"/>
+          </p:cNvSpPr>
+          <p:nvPr>
+            <p:ph idx="1"/>
+          </p:nvPr>
+        </p:nvSpPr>
+        <p:spPr/>
+        <p:txBody>
+          <a:bodyPr/>
+          <a:lstStyle/>
+          <a:p>
+            <a:r>
+              <a:rPr lang="en-US" dirty="0">
+                <a:latin typeface="Bahnschrift SemiLight SemiConde" panose="020B0502040204020203" pitchFamily="34" charset="0"/>
+              </a:rPr>
+              <a:t>  </a:t>
+            </a:r>
+            <a:r>
+              <a:rPr lang="en-US" sz="2000" dirty="0" err="1">
+                <a:latin typeface="Bahnschrift SemiLight SemiConde" panose="020B0502040204020203" pitchFamily="34" charset="0"/>
+              </a:rPr>
+              <a:t>Gradio</a:t>
+            </a:r>
+            <a:r>
+              <a:rPr lang="en-US" sz="2000" dirty="0">
+                <a:latin typeface="Bahnschrift SemiLight SemiConde" panose="020B0502040204020203" pitchFamily="34" charset="0"/>
+              </a:rPr>
+              <a:t> </a:t>
+            </a:r>
+            <a:r>
+              <a:rPr lang="en-US" sz="2000" dirty="0" err="1">
+                <a:latin typeface="Bahnschrift SemiLight SemiConde" panose="020B0502040204020203" pitchFamily="34" charset="0"/>
+              </a:rPr>
+              <a:t>tabanlı</a:t>
+            </a:r>
+            <a:r>
+              <a:rPr lang="en-US" sz="2000" dirty="0">
+                <a:latin typeface="Bahnschrift SemiLight SemiConde" panose="020B0502040204020203" pitchFamily="34" charset="0"/>
+              </a:rPr>
+              <a:t> </a:t>
+            </a:r>
+            <a:r>
+              <a:rPr lang="en-US" sz="2000" dirty="0" err="1">
+                <a:latin typeface="Bahnschrift SemiLight SemiConde" panose="020B0502040204020203" pitchFamily="34" charset="0"/>
+              </a:rPr>
+              <a:t>bir</a:t>
+            </a:r>
+            <a:r>
+              <a:rPr lang="en-US" sz="2000" dirty="0">
+                <a:latin typeface="Bahnschrift SemiLight SemiConde" panose="020B0502040204020203" pitchFamily="34" charset="0"/>
+              </a:rPr>
+              <a:t> test </a:t>
+            </a:r>
+            <a:r>
+              <a:rPr lang="en-US" sz="2000" dirty="0" err="1">
+                <a:latin typeface="Bahnschrift SemiLight SemiConde" panose="020B0502040204020203" pitchFamily="34" charset="0"/>
+              </a:rPr>
+              <a:t>arayüzü</a:t>
+            </a:r>
+            <a:r>
+              <a:rPr lang="en-US" sz="2000" dirty="0">
+                <a:latin typeface="Bahnschrift SemiLight SemiConde" panose="020B0502040204020203" pitchFamily="34" charset="0"/>
+              </a:rPr>
+              <a:t> </a:t>
+            </a:r>
+            <a:r>
+              <a:rPr lang="en-US" sz="2000" dirty="0" err="1">
+                <a:latin typeface="Bahnschrift SemiLight SemiConde" panose="020B0502040204020203" pitchFamily="34" charset="0"/>
+              </a:rPr>
+              <a:t>geliştirilerek</a:t>
+            </a:r>
+            <a:r>
+              <a:rPr lang="en-US" sz="2000" dirty="0">
+                <a:latin typeface="Bahnschrift SemiLight SemiConde" panose="020B0502040204020203" pitchFamily="34" charset="0"/>
+              </a:rPr>
+              <a:t> </a:t>
+            </a:r>
+            <a:r>
+              <a:rPr lang="en-US" sz="2000" dirty="0" err="1">
+                <a:latin typeface="Bahnschrift SemiLight SemiConde" panose="020B0502040204020203" pitchFamily="34" charset="0"/>
+              </a:rPr>
+              <a:t>modelin</a:t>
+            </a:r>
+            <a:r>
+              <a:rPr lang="en-US" sz="2000" dirty="0">
+                <a:latin typeface="Bahnschrift SemiLight SemiConde" panose="020B0502040204020203" pitchFamily="34" charset="0"/>
+              </a:rPr>
+              <a:t> </a:t>
+            </a:r>
+            <a:r>
+              <a:rPr lang="en-US" sz="2000" dirty="0" err="1">
+                <a:latin typeface="Bahnschrift SemiLight SemiConde" panose="020B0502040204020203" pitchFamily="34" charset="0"/>
+              </a:rPr>
+              <a:t>gerçek</a:t>
+            </a:r>
+            <a:r>
+              <a:rPr lang="en-US" sz="2000" dirty="0">
+                <a:latin typeface="Bahnschrift SemiLight SemiConde" panose="020B0502040204020203" pitchFamily="34" charset="0"/>
+              </a:rPr>
+              <a:t> </a:t>
+            </a:r>
+            <a:r>
+              <a:rPr lang="en-US" sz="2000" dirty="0" err="1">
+                <a:latin typeface="Bahnschrift SemiLight SemiConde" panose="020B0502040204020203" pitchFamily="34" charset="0"/>
+              </a:rPr>
+              <a:t>zamanlı</a:t>
+            </a:r>
+            <a:r>
+              <a:rPr lang="en-US" sz="2000" dirty="0">
+                <a:latin typeface="Bahnschrift SemiLight SemiConde" panose="020B0502040204020203" pitchFamily="34" charset="0"/>
+              </a:rPr>
+              <a:t> </a:t>
+            </a:r>
+            <a:r>
+              <a:rPr lang="en-US" sz="2000" dirty="0" err="1">
+                <a:latin typeface="Bahnschrift SemiLight SemiConde" panose="020B0502040204020203" pitchFamily="34" charset="0"/>
+              </a:rPr>
+              <a:t>olarak</a:t>
+            </a:r>
+            <a:r>
+              <a:rPr lang="en-US" sz="2000" dirty="0">
+                <a:latin typeface="Bahnschrift SemiLight SemiConde" panose="020B0502040204020203" pitchFamily="34" charset="0"/>
+              </a:rPr>
+              <a:t> </a:t>
+            </a:r>
+            <a:r>
+              <a:rPr lang="en-US" sz="2000" dirty="0" err="1">
+                <a:latin typeface="Bahnschrift SemiLight SemiConde" panose="020B0502040204020203" pitchFamily="34" charset="0"/>
+              </a:rPr>
+              <a:t>denenmesi</a:t>
+            </a:r>
+            <a:r>
+              <a:rPr lang="en-US" sz="2000" dirty="0">
+                <a:latin typeface="Bahnschrift SemiLight SemiConde" panose="020B0502040204020203" pitchFamily="34" charset="0"/>
+              </a:rPr>
+              <a:t> </a:t>
+            </a:r>
+            <a:r>
+              <a:rPr lang="en-US" sz="2000" dirty="0" err="1">
+                <a:latin typeface="Bahnschrift SemiLight SemiConde" panose="020B0502040204020203" pitchFamily="34" charset="0"/>
+              </a:rPr>
+              <a:t>sağlanmıştır</a:t>
+            </a:r>
+            <a:r>
+              <a:rPr lang="en-US" sz="2000" dirty="0">
+                <a:latin typeface="Bahnschrift SemiLight SemiConde" panose="020B0502040204020203" pitchFamily="34" charset="0"/>
+              </a:rPr>
+              <a:t>. </a:t>
+            </a:r>
+            <a:r>
+              <a:rPr lang="en-US" sz="2000" dirty="0" err="1">
+                <a:latin typeface="Bahnschrift SemiLight SemiConde" panose="020B0502040204020203" pitchFamily="34" charset="0"/>
+              </a:rPr>
+              <a:t>Kullanıcılar</a:t>
+            </a:r>
+            <a:r>
+              <a:rPr lang="en-US" sz="2000" dirty="0">
+                <a:latin typeface="Bahnschrift SemiLight SemiConde" panose="020B0502040204020203" pitchFamily="34" charset="0"/>
+              </a:rPr>
+              <a:t>, </a:t>
+            </a:r>
+            <a:r>
+              <a:rPr lang="en-US" sz="2000" dirty="0" err="1">
+                <a:latin typeface="Bahnschrift SemiLight SemiConde" panose="020B0502040204020203" pitchFamily="34" charset="0"/>
+              </a:rPr>
+              <a:t>sisteme</a:t>
+            </a:r>
+            <a:r>
+              <a:rPr lang="en-US" sz="2000" dirty="0">
+                <a:latin typeface="Bahnschrift SemiLight SemiConde" panose="020B0502040204020203" pitchFamily="34" charset="0"/>
+              </a:rPr>
+              <a:t> </a:t>
+            </a:r>
+            <a:r>
+              <a:rPr lang="en-US" sz="2000" dirty="0" err="1">
+                <a:latin typeface="Bahnschrift SemiLight SemiConde" panose="020B0502040204020203" pitchFamily="34" charset="0"/>
+              </a:rPr>
+              <a:t>girdikleri</a:t>
+            </a:r>
+            <a:r>
+              <a:rPr lang="en-US" sz="2000" dirty="0">
+                <a:latin typeface="Bahnschrift SemiLight SemiConde" panose="020B0502040204020203" pitchFamily="34" charset="0"/>
+              </a:rPr>
+              <a:t> </a:t>
+            </a:r>
+            <a:r>
+              <a:rPr lang="en-US" sz="2000" dirty="0" err="1">
+                <a:latin typeface="Bahnschrift SemiLight SemiConde" panose="020B0502040204020203" pitchFamily="34" charset="0"/>
+              </a:rPr>
+              <a:t>belediye</a:t>
+            </a:r>
+            <a:r>
+              <a:rPr lang="en-US" sz="2000" dirty="0">
+                <a:latin typeface="Bahnschrift SemiLight SemiConde" panose="020B0502040204020203" pitchFamily="34" charset="0"/>
+              </a:rPr>
+              <a:t> </a:t>
+            </a:r>
+            <a:r>
+              <a:rPr lang="en-US" sz="2000" dirty="0" err="1">
+                <a:latin typeface="Bahnschrift SemiLight SemiConde" panose="020B0502040204020203" pitchFamily="34" charset="0"/>
+              </a:rPr>
+              <a:t>şikayet</a:t>
+            </a:r>
+            <a:r>
+              <a:rPr lang="en-US" sz="2000" dirty="0">
+                <a:latin typeface="Bahnschrift SemiLight SemiConde" panose="020B0502040204020203" pitchFamily="34" charset="0"/>
+              </a:rPr>
+              <a:t> </a:t>
+            </a:r>
+            <a:r>
+              <a:rPr lang="en-US" sz="2000" dirty="0" err="1">
+                <a:latin typeface="Bahnschrift SemiLight SemiConde" panose="020B0502040204020203" pitchFamily="34" charset="0"/>
+              </a:rPr>
+              <a:t>metinlerinin</a:t>
+            </a:r>
+            <a:r>
+              <a:rPr lang="en-US" sz="2000" dirty="0">
+                <a:latin typeface="Bahnschrift SemiLight SemiConde" panose="020B0502040204020203" pitchFamily="34" charset="0"/>
+              </a:rPr>
+              <a:t> hangi </a:t>
+            </a:r>
+            <a:r>
+              <a:rPr lang="en-US" sz="2000" dirty="0" err="1">
+                <a:latin typeface="Bahnschrift SemiLight SemiConde" panose="020B0502040204020203" pitchFamily="34" charset="0"/>
+              </a:rPr>
+              <a:t>kategoriye</a:t>
+            </a:r>
+            <a:r>
+              <a:rPr lang="en-US" sz="2000" dirty="0">
+                <a:latin typeface="Bahnschrift SemiLight SemiConde" panose="020B0502040204020203" pitchFamily="34" charset="0"/>
+              </a:rPr>
+              <a:t> </a:t>
+            </a:r>
+            <a:r>
+              <a:rPr lang="en-US" sz="2000" dirty="0" err="1">
+                <a:latin typeface="Bahnschrift SemiLight SemiConde" panose="020B0502040204020203" pitchFamily="34" charset="0"/>
+              </a:rPr>
+              <a:t>ait</a:t>
+            </a:r>
+            <a:r>
+              <a:rPr lang="en-US" sz="2000" dirty="0">
+                <a:latin typeface="Bahnschrift SemiLight SemiConde" panose="020B0502040204020203" pitchFamily="34" charset="0"/>
+              </a:rPr>
+              <a:t> </a:t>
+            </a:r>
+            <a:r>
+              <a:rPr lang="en-US" sz="2000" dirty="0" err="1">
+                <a:latin typeface="Bahnschrift SemiLight SemiConde" panose="020B0502040204020203" pitchFamily="34" charset="0"/>
+              </a:rPr>
+              <a:t>olduğunu</a:t>
+            </a:r>
+            <a:r>
+              <a:rPr lang="en-US" sz="2000" dirty="0">
+                <a:latin typeface="Bahnschrift SemiLight SemiConde" panose="020B0502040204020203" pitchFamily="34" charset="0"/>
+              </a:rPr>
+              <a:t> </a:t>
+            </a:r>
+            <a:r>
+              <a:rPr lang="en-US" sz="2000" dirty="0" err="1">
+                <a:latin typeface="Bahnschrift SemiLight SemiConde" panose="020B0502040204020203" pitchFamily="34" charset="0"/>
+              </a:rPr>
+              <a:t>anlık</a:t>
+            </a:r>
+            <a:r>
+              <a:rPr lang="en-US" sz="2000" dirty="0">
+                <a:latin typeface="Bahnschrift SemiLight SemiConde" panose="020B0502040204020203" pitchFamily="34" charset="0"/>
+              </a:rPr>
+              <a:t> </a:t>
+            </a:r>
+            <a:r>
+              <a:rPr lang="en-US" sz="2000" dirty="0" err="1">
+                <a:latin typeface="Bahnschrift SemiLight SemiConde" panose="020B0502040204020203" pitchFamily="34" charset="0"/>
+              </a:rPr>
+              <a:t>olarak</a:t>
+            </a:r>
+            <a:r>
+              <a:rPr lang="en-US" sz="2000" dirty="0">
+                <a:latin typeface="Bahnschrift SemiLight SemiConde" panose="020B0502040204020203" pitchFamily="34" charset="0"/>
+              </a:rPr>
+              <a:t> </a:t>
+            </a:r>
+            <a:r>
+              <a:rPr lang="en-US" sz="2000" dirty="0" err="1">
+                <a:latin typeface="Bahnschrift SemiLight SemiConde" panose="020B0502040204020203" pitchFamily="34" charset="0"/>
+              </a:rPr>
+              <a:t>görebilmektedir</a:t>
+            </a:r>
+            <a:r>
+              <a:rPr lang="en-US" sz="2000" dirty="0">
+                <a:latin typeface="Bahnschrift SemiLight SemiConde" panose="020B0502040204020203" pitchFamily="34" charset="0"/>
+              </a:rPr>
+              <a:t>. Bu </a:t>
+            </a:r>
+            <a:r>
+              <a:rPr lang="en-US" sz="2000" dirty="0" err="1">
+                <a:latin typeface="Bahnschrift SemiLight SemiConde" panose="020B0502040204020203" pitchFamily="34" charset="0"/>
+              </a:rPr>
+              <a:t>sayede</a:t>
+            </a:r>
+            <a:r>
+              <a:rPr lang="en-US" sz="2000" dirty="0">
+                <a:latin typeface="Bahnschrift SemiLight SemiConde" panose="020B0502040204020203" pitchFamily="34" charset="0"/>
+              </a:rPr>
+              <a:t> </a:t>
+            </a:r>
+            <a:r>
+              <a:rPr lang="en-US" sz="2000" dirty="0" err="1">
+                <a:latin typeface="Bahnschrift SemiLight SemiConde" panose="020B0502040204020203" pitchFamily="34" charset="0"/>
+              </a:rPr>
+              <a:t>modelin</a:t>
+            </a:r>
+            <a:r>
+              <a:rPr lang="en-US" sz="2000" dirty="0">
+                <a:latin typeface="Bahnschrift SemiLight SemiConde" panose="020B0502040204020203" pitchFamily="34" charset="0"/>
+              </a:rPr>
+              <a:t> </a:t>
+            </a:r>
+            <a:r>
+              <a:rPr lang="en-US" sz="2000" dirty="0" err="1">
+                <a:latin typeface="Bahnschrift SemiLight SemiConde" panose="020B0502040204020203" pitchFamily="34" charset="0"/>
+              </a:rPr>
+              <a:t>pratik</a:t>
+            </a:r>
+            <a:r>
+              <a:rPr lang="en-US" sz="2000" dirty="0">
+                <a:latin typeface="Bahnschrift SemiLight SemiConde" panose="020B0502040204020203" pitchFamily="34" charset="0"/>
+              </a:rPr>
+              <a:t> </a:t>
+            </a:r>
+            <a:r>
+              <a:rPr lang="en-US" sz="2000" dirty="0" err="1">
+                <a:latin typeface="Bahnschrift SemiLight SemiConde" panose="020B0502040204020203" pitchFamily="34" charset="0"/>
+              </a:rPr>
+              <a:t>kullanım</a:t>
+            </a:r>
+            <a:r>
+              <a:rPr lang="en-US" sz="2000" dirty="0">
+                <a:latin typeface="Bahnschrift SemiLight SemiConde" panose="020B0502040204020203" pitchFamily="34" charset="0"/>
+              </a:rPr>
+              <a:t> </a:t>
+            </a:r>
+            <a:r>
+              <a:rPr lang="en-US" sz="2000" dirty="0" err="1">
+                <a:latin typeface="Bahnschrift SemiLight SemiConde" panose="020B0502040204020203" pitchFamily="34" charset="0"/>
+              </a:rPr>
+              <a:t>senaryolarındaki</a:t>
+            </a:r>
+            <a:r>
+              <a:rPr lang="en-US" sz="2000" dirty="0">
+                <a:latin typeface="Bahnschrift SemiLight SemiConde" panose="020B0502040204020203" pitchFamily="34" charset="0"/>
+              </a:rPr>
+              <a:t> </a:t>
+            </a:r>
+            <a:r>
+              <a:rPr lang="en-US" sz="2000" dirty="0" err="1">
+                <a:latin typeface="Bahnschrift SemiLight SemiConde" panose="020B0502040204020203" pitchFamily="34" charset="0"/>
+              </a:rPr>
+              <a:t>performansı</a:t>
+            </a:r>
+            <a:r>
+              <a:rPr lang="en-US" sz="2000" dirty="0">
+                <a:latin typeface="Bahnschrift SemiLight SemiConde" panose="020B0502040204020203" pitchFamily="34" charset="0"/>
+              </a:rPr>
+              <a:t> test </a:t>
+            </a:r>
+            <a:r>
+              <a:rPr lang="en-US" sz="2000" dirty="0" err="1">
+                <a:latin typeface="Bahnschrift SemiLight SemiConde" panose="020B0502040204020203" pitchFamily="34" charset="0"/>
+              </a:rPr>
+              <a:t>edilmiştir</a:t>
+            </a:r>
+            <a:r>
+              <a:rPr lang="en-US" sz="2000" dirty="0">
+                <a:latin typeface="Bahnschrift SemiLight SemiConde" panose="020B0502040204020203" pitchFamily="34" charset="0"/>
+              </a:rPr>
+              <a:t>.</a:t>
+            </a:r>
+          </a:p>
+          <a:p>
+            <a:endParaRPr lang="en-US" sz="2000" dirty="0">
+              <a:latin typeface="Bahnschrift SemiLight SemiConde" panose="020B0502040204020203" pitchFamily="34" charset="0"/>
+            </a:endParaRPr>
+          </a:p>
+          <a:p>
+            <a:endParaRPr lang="en-US" sz="2000" dirty="0">
+              <a:latin typeface="Bahnschrift SemiLight SemiConde" panose="020B0502040204020203" pitchFamily="34" charset="0"/>
+            </a:endParaRPr>
+          </a:p>
+        </p:txBody>
+      </p:sp>
+      <p:pic>
+        <p:nvPicPr>
+          <p:cNvPr id="9" name="Picture 8">
+            <a:extLst>
+              <a:ext uri="{FF2B5EF4-FFF2-40B4-BE49-F238E27FC236}">
+                <a16:creationId xmlns:a16="http://schemas.microsoft.com/office/drawing/2014/main" id="{5775AB7A-4B72-29B9-1C1F-A58765D42B84}"/>
+              </a:ext>
+            </a:extLst>
+          </p:cNvPr>
+          <p:cNvPicPr>
+            <a:picLocks noChangeAspect="1"/>
+          </p:cNvPicPr>
           <p:nvPr/>
-        </p:nvSpPr>
+        </p:nvPicPr>
+        <p:blipFill>
+          <a:blip r:embed="rId2"/>
+          <a:stretch>
+            <a:fillRect/>
+          </a:stretch>
+        </p:blipFill>
         <p:spPr>
           <a:xfrm>
-            <a:off x="911117" y="2801081"/>
-            <a:ext cx="9305754" cy="923330"/>
+            <a:off x="1024128" y="3990974"/>
+            <a:ext cx="7633644" cy="2519553"/>
           </a:xfrm>
           <a:prstGeom prst="rect">
             <a:avLst/>
           </a:prstGeom>
-          <a:noFill/>
         </p:spPr>
-        <p:txBody>
-          <a:bodyPr wrap="none" lIns="91440" tIns="45720" rIns="91440" bIns="45720">
-            <a:spAutoFit/>
-          </a:bodyPr>
-          <a:lstStyle/>
-          <a:p>
-            <a:pPr algn="ctr"/>
-            <a:r>
-              <a:rPr lang="tr-TR" sz="5400" dirty="0" smtClean="0">
-                <a:ln w="0"/>
-                <a:effectLst>
-                  <a:outerShdw blurRad="38100" dist="19050" dir="2700000" algn="tl" rotWithShape="0">
-                    <a:schemeClr val="dk1">
-                      <a:alpha val="40000"/>
-                    </a:schemeClr>
-                  </a:outerShdw>
-                </a:effectLst>
-              </a:rPr>
-              <a:t>DİNLEDİĞİNİZ İÇİN TEŞEKKÜRLER</a:t>
-            </a:r>
-            <a:endParaRPr lang="tr-TR" sz="5400" b="0" cap="none" spc="0" dirty="0">
-              <a:ln w="0"/>
-              <a:solidFill>
-                <a:schemeClr val="tx1"/>
-              </a:solidFill>
-              <a:effectLst>
-                <a:outerShdw blurRad="38100" dist="19050" dir="2700000" algn="tl" rotWithShape="0">
-                  <a:schemeClr val="dk1">
-                    <a:alpha val="40000"/>
-                  </a:schemeClr>
-                </a:outerShdw>
-              </a:effectLst>
-            </a:endParaRPr>
-          </a:p>
-        </p:txBody>
-      </p:sp>
+      </p:pic>
     </p:spTree>
     <p:extLst>
       <p:ext uri="{BB962C8B-B14F-4D97-AF65-F5344CB8AC3E}">
-        <p14:creationId xmlns:p14="http://schemas.microsoft.com/office/powerpoint/2010/main" val="3247067871"/>
+        <p14:creationId xmlns:p14="http://schemas.microsoft.com/office/powerpoint/2010/main" val="126576636"/>
       </p:ext>
     </p:extLst>
   </p:cSld>
@@ -30562,20 +31388,20 @@
 </file>
 
 <file path=customXml/item1.xml><?xml version="1.0" encoding="utf-8"?>
-<p:properties xmlns:p="http://schemas.microsoft.com/office/2006/metadata/properties" xmlns:xsi="http://www.w3.org/2001/XMLSchema-instance" xmlns:pc="http://schemas.microsoft.com/office/infopath/2007/PartnerControls">
-  <documentManagement>
-    <MediaServiceKeyPoints xmlns="71af3243-3dd4-4a8d-8c0d-dd76da1f02a5" xsi:nil="true"/>
-  </documentManagement>
-</p:properties>
-</file>
-
-<file path=customXml/item2.xml><?xml version="1.0" encoding="utf-8"?>
 <?mso-contentType ?>
 <FormTemplates xmlns="http://schemas.microsoft.com/sharepoint/v3/contenttype/forms">
   <Display>DocumentLibraryForm</Display>
   <Edit>DocumentLibraryForm</Edit>
   <New>DocumentLibraryForm</New>
 </FormTemplates>
+</file>
+
+<file path=customXml/item2.xml><?xml version="1.0" encoding="utf-8"?>
+<p:properties xmlns:p="http://schemas.microsoft.com/office/2006/metadata/properties" xmlns:xsi="http://www.w3.org/2001/XMLSchema-instance" xmlns:pc="http://schemas.microsoft.com/office/infopath/2007/PartnerControls">
+  <documentManagement>
+    <MediaServiceKeyPoints xmlns="71af3243-3dd4-4a8d-8c0d-dd76da1f02a5" xsi:nil="true"/>
+  </documentManagement>
+</p:properties>
 </file>
 
 <file path=customXml/item3.xml><?xml version="1.0" encoding="utf-8"?>
@@ -30790,19 +31616,19 @@
 </file>
 
 <file path=customXml/itemProps1.xml><?xml version="1.0" encoding="utf-8"?>
+<ds:datastoreItem xmlns:ds="http://schemas.openxmlformats.org/officeDocument/2006/customXml" ds:itemID="{4F44C90D-2A62-4985-9618-3460247437B1}">
+  <ds:schemaRefs>
+    <ds:schemaRef ds:uri="http://schemas.microsoft.com/sharepoint/v3/contenttype/forms"/>
+  </ds:schemaRefs>
+</ds:datastoreItem>
+</file>
+
+<file path=customXml/itemProps2.xml><?xml version="1.0" encoding="utf-8"?>
 <ds:datastoreItem xmlns:ds="http://schemas.openxmlformats.org/officeDocument/2006/customXml" ds:itemID="{788A2F88-55C5-4ED1-9541-807C65424763}">
   <ds:schemaRefs>
     <ds:schemaRef ds:uri="http://schemas.microsoft.com/office/2006/metadata/properties"/>
     <ds:schemaRef ds:uri="http://schemas.microsoft.com/office/infopath/2007/PartnerControls"/>
     <ds:schemaRef ds:uri="71af3243-3dd4-4a8d-8c0d-dd76da1f02a5"/>
-  </ds:schemaRefs>
-</ds:datastoreItem>
-</file>
-
-<file path=customXml/itemProps2.xml><?xml version="1.0" encoding="utf-8"?>
-<ds:datastoreItem xmlns:ds="http://schemas.openxmlformats.org/officeDocument/2006/customXml" ds:itemID="{4F44C90D-2A62-4985-9618-3460247437B1}">
-  <ds:schemaRefs>
-    <ds:schemaRef ds:uri="http://schemas.microsoft.com/sharepoint/v3/contenttype/forms"/>
   </ds:schemaRefs>
 </ds:datastoreItem>
 </file>
